--- a/MobilityAPIV5.pptx
+++ b/MobilityAPIV5.pptx
@@ -31,6 +31,7 @@
     <p:sldId id="279" r:id="rId31"/>
     <p:sldId id="280" r:id="rId32"/>
     <p:sldId id="281" r:id="rId33"/>
+    <p:sldId id="282" r:id="rId34"/>
   </p:sldIdLst>
   <p:sldSz cx="12191695" cy="6858000" type="screen4x3"/>
   <p:notesSz cx="6858000" cy="9144000"/>
@@ -877,7 +878,7 @@
           <a:lstStyle/>
           <a:p>
             <a:r>
-              <a:t>Writes: POST creates, PUT replaces, DELETE removes, and POST tgsequence appends a temporally-disjoint sub-trajectory via merge (overlap returns 409). Derived-property writes and primitive deletes return 501 with the reason.</a:t>
+              <a:t>Writes: POST creates, DELETE removes, and POST tgsequence appends a temporally-disjoint sub-trajectory via merge (overlap returns 409). In-place replace (PUT) is an extension, shown on the Additional features slide. Derived-property writes and primitive deletes return 501 with the reason.</a:t>
             </a:r>
           </a:p>
         </p:txBody>
@@ -1157,7 +1158,7 @@
           <a:lstStyle/>
           <a:p>
             <a:r>
-              <a:t>Streaming responses keep memory bounded (a 393 MB NDJSON export held about 18 MB resident), keyset pagination pages through arbitrarily large collections, bbox and datetime use the index, and the export feeds the lakehouse as NDJSON or as Parquet with a WKB and bbox/time sidecar whose row group bounds memory.</a:t>
+              <a:t>Bounded by design on the standard items resource: a 393 MB response streamed at about 18 MB resident, keyset pagination pages through arbitrarily large collections, and bbox and datetime use the MobilityDB index.</a:t>
             </a:r>
           </a:p>
         </p:txBody>
@@ -1227,7 +1228,7 @@
           <a:lstStyle/>
           <a:p>
             <a:r>
-              <a:t>The thin-tier pattern generalises across the MEOS ecosystem: the tier speaks MF-JSON and WKB and keeps all temporal work in the engine, so the storage and compute engine becomes a configuration choice. MobilityDB is implemented today; MobilityDuck (embedded lakehouse), MobilitySpark (distributed batch) and MobilityFlink (streaming, real time) reuse the same surface.</a:t>
+              <a:t>Two features beyond OGC API – Moving Features, excluded from conformsTo: a bulk lakehouse export (NDJSON by default, or Parquet carrying trajectory WKB plus a bbox and time sidecar, with the row group bounding memory; advertised via the IANA enclosure link relation), and an in-place replace (PUT), since the standard allows only GET and DELETE on a feature.</a:t>
             </a:r>
           </a:p>
         </p:txBody>
@@ -1365,6 +1366,76 @@
         <p:txBody>
           <a:bodyPr/>
           <a:lstStyle/>
+          <a:p>
+            <a:r>
+              <a:t>The thin-tier pattern generalises across the MEOS ecosystem: the tier speaks MF-JSON and WKB and keeps all temporal work in the engine, so the storage and compute engine becomes a configuration choice. MobilityDB is implemented today; MobilityDuck (embedded lakehouse), MobilitySpark (distributed batch) and MobilityFlink (streaming, real time) reuse the same surface.</a:t>
+            </a:r>
+          </a:p>
+        </p:txBody>
+      </p:sp>
+      <p:sp>
+        <p:nvSpPr>
+          <p:cNvPr id="4" name="Slide Number Placeholder 3"/>
+          <p:cNvSpPr>
+            <a:spLocks noGrp="1"/>
+          </p:cNvSpPr>
+          <p:nvPr>
+            <p:ph type="sldNum" idx="5" sz="quarter"/>
+          </p:nvPr>
+        </p:nvSpPr>
+        <p:spPr/>
+      </p:sp>
+    </p:spTree>
+  </p:cSld>
+  <p:clrMapOvr>
+    <a:masterClrMapping/>
+  </p:clrMapOvr>
+</p:notes>
+</file>
+
+<file path=ppt/notesSlides/notesSlide21.xml><?xml version="1.0" encoding="utf-8"?>
+<p:notes xmlns:a="http://schemas.openxmlformats.org/drawingml/2006/main" xmlns:p="http://schemas.openxmlformats.org/presentationml/2006/main" xmlns:r="http://schemas.openxmlformats.org/officeDocument/2006/relationships">
+  <p:cSld>
+    <p:spTree>
+      <p:nvGrpSpPr>
+        <p:cNvPr id="1" name=""/>
+        <p:cNvGrpSpPr/>
+        <p:nvPr/>
+      </p:nvGrpSpPr>
+      <p:grpSpPr>
+        <a:xfrm>
+          <a:off x="0" y="0"/>
+          <a:ext cx="0" cy="0"/>
+          <a:chOff x="0" y="0"/>
+          <a:chExt cx="0" cy="0"/>
+        </a:xfrm>
+      </p:grpSpPr>
+      <p:sp>
+        <p:nvSpPr>
+          <p:cNvPr id="2" name="Slide Image Placeholder 1"/>
+          <p:cNvSpPr>
+            <a:spLocks noGrp="1"/>
+          </p:cNvSpPr>
+          <p:nvPr>
+            <p:ph type="sldImg" idx="2"/>
+          </p:nvPr>
+        </p:nvSpPr>
+        <p:spPr/>
+      </p:sp>
+      <p:sp>
+        <p:nvSpPr>
+          <p:cNvPr id="3" name="Notes Placeholder 2"/>
+          <p:cNvSpPr>
+            <a:spLocks noGrp="1"/>
+          </p:cNvSpPr>
+          <p:nvPr>
+            <p:ph type="body" idx="3" sz="quarter"/>
+          </p:nvPr>
+        </p:nvSpPr>
+        <p:spPr/>
+        <p:txBody>
+          <a:bodyPr/>
+          <a:lstStyle/>
           <a:p/>
         </p:txBody>
       </p:sp>
@@ -1853,7 +1924,7 @@
           <a:lstStyle/>
           <a:p>
             <a:r>
-              <a:t>Every implemented endpoint and method. The walkthrough demonstrates each group against the ships collection.</a:t>
+              <a:t>The standard endpoint surface, full paths. Beyond-standard features (the lakehouse export and in-place replace) are on the Additional features slide.</a:t>
             </a:r>
           </a:p>
         </p:txBody>
@@ -5320,7 +5391,7 @@
                 </a:solidFill>
                 <a:latin typeface="Calibri Light"/>
               </a:rPr>
-              <a:t>The Implemented Endpoint Surface</a:t>
+              <a:t>The OGC Endpoint Surface</a:t>
             </a:r>
           </a:p>
         </p:txBody>
@@ -5377,57 +5448,13 @@
         </p:nvSpPr>
         <p:spPr>
           <a:xfrm>
-            <a:off x="566928" y="1572768"/>
-            <a:ext cx="5440680" cy="1463040"/>
+            <a:off x="566928" y="1595628"/>
+            <a:ext cx="640080" cy="292608"/>
           </a:xfrm>
           <a:prstGeom prst="roundRect">
             <a:avLst>
-              <a:gd name="adj" fmla="val 5000"/>
+              <a:gd name="adj" fmla="val 40000"/>
             </a:avLst>
-          </a:prstGeom>
-          <a:solidFill>
-            <a:srgbClr val="F1F5F8"/>
-          </a:solidFill>
-          <a:ln>
-            <a:noFill/>
-          </a:ln>
-          <a:effectLst/>
-        </p:spPr>
-        <p:style>
-          <a:lnRef idx="1">
-            <a:schemeClr val="accent1"/>
-          </a:lnRef>
-          <a:fillRef idx="3">
-            <a:schemeClr val="accent1"/>
-          </a:fillRef>
-          <a:effectRef idx="2">
-            <a:schemeClr val="accent1"/>
-          </a:effectRef>
-          <a:fontRef idx="minor">
-            <a:schemeClr val="lt1"/>
-          </a:fontRef>
-        </p:style>
-        <p:txBody>
-          <a:bodyPr rtlCol="0" anchor="ctr"/>
-          <a:lstStyle/>
-          <a:p>
-            <a:pPr algn="ctr"/>
-          </a:p>
-        </p:txBody>
-      </p:sp>
-      <p:sp>
-        <p:nvSpPr>
-          <p:cNvPr id="6" name="Rectangle 5"/>
-          <p:cNvSpPr/>
-          <p:nvPr/>
-        </p:nvSpPr>
-        <p:spPr>
-          <a:xfrm>
-            <a:off x="566928" y="1572768"/>
-            <a:ext cx="82296" cy="1463040"/>
-          </a:xfrm>
-          <a:prstGeom prst="rect">
-            <a:avLst/>
           </a:prstGeom>
           <a:solidFill>
             <a:srgbClr val="156082"/>
@@ -5452,10 +5479,74 @@
           </a:fontRef>
         </p:style>
         <p:txBody>
-          <a:bodyPr rtlCol="0" anchor="ctr"/>
+          <a:bodyPr rtlCol="0" anchor="ctr" wrap="none" lIns="0" rIns="0" tIns="0" bIns="0"/>
           <a:lstStyle/>
           <a:p>
             <a:pPr algn="ctr"/>
+            <a:r>
+              <a:rPr sz="1200" b="1">
+                <a:solidFill>
+                  <a:srgbClr val="FFFFFF"/>
+                </a:solidFill>
+                <a:latin typeface="Calibri"/>
+              </a:rPr>
+              <a:t>GET</a:t>
+            </a:r>
+          </a:p>
+        </p:txBody>
+      </p:sp>
+      <p:sp>
+        <p:nvSpPr>
+          <p:cNvPr id="6" name="Rounded Rectangle 5"/>
+          <p:cNvSpPr/>
+          <p:nvPr/>
+        </p:nvSpPr>
+        <p:spPr>
+          <a:xfrm>
+            <a:off x="1280160" y="1595628"/>
+            <a:ext cx="713232" cy="292608"/>
+          </a:xfrm>
+          <a:prstGeom prst="roundRect">
+            <a:avLst>
+              <a:gd name="adj" fmla="val 40000"/>
+            </a:avLst>
+          </a:prstGeom>
+          <a:solidFill>
+            <a:srgbClr val="196B24"/>
+          </a:solidFill>
+          <a:ln>
+            <a:noFill/>
+          </a:ln>
+          <a:effectLst/>
+        </p:spPr>
+        <p:style>
+          <a:lnRef idx="1">
+            <a:schemeClr val="accent1"/>
+          </a:lnRef>
+          <a:fillRef idx="3">
+            <a:schemeClr val="accent1"/>
+          </a:fillRef>
+          <a:effectRef idx="2">
+            <a:schemeClr val="accent1"/>
+          </a:effectRef>
+          <a:fontRef idx="minor">
+            <a:schemeClr val="lt1"/>
+          </a:fontRef>
+        </p:style>
+        <p:txBody>
+          <a:bodyPr rtlCol="0" anchor="ctr" wrap="none" lIns="0" rIns="0" tIns="0" bIns="0"/>
+          <a:lstStyle/>
+          <a:p>
+            <a:pPr algn="ctr"/>
+            <a:r>
+              <a:rPr sz="1200" b="1">
+                <a:solidFill>
+                  <a:srgbClr val="FFFFFF"/>
+                </a:solidFill>
+                <a:latin typeface="Calibri"/>
+              </a:rPr>
+              <a:t>POST</a:t>
+            </a:r>
           </a:p>
         </p:txBody>
       </p:sp>
@@ -5467,8 +5558,8 @@
         </p:nvSpPr>
         <p:spPr>
           <a:xfrm>
-            <a:off x="822960" y="1700784"/>
-            <a:ext cx="5074920" cy="274320"/>
+            <a:off x="2139696" y="1591056"/>
+            <a:ext cx="9466783" cy="292608"/>
           </a:xfrm>
           <a:prstGeom prst="rect">
             <a:avLst/>
@@ -5476,7 +5567,7 @@
           <a:noFill/>
         </p:spPr>
         <p:txBody>
-          <a:bodyPr wrap="square" anchor="t" lIns="0" rIns="0" tIns="0" bIns="0">
+          <a:bodyPr wrap="square" anchor="ctr" lIns="0" rIns="0" tIns="0" bIns="0">
             <a:noAutofit/>
           </a:bodyPr>
           <a:lstStyle/>
@@ -5492,11 +5583,11 @@
             <a:r>
               <a:rPr sz="1200" b="1" i="0">
                 <a:solidFill>
-                  <a:srgbClr val="156082"/>
-                </a:solidFill>
-                <a:latin typeface="Calibri"/>
-              </a:rPr>
-              <a:t>COLLECTIONS</a:t>
+                  <a:srgbClr val="0E2841"/>
+                </a:solidFill>
+                <a:latin typeface="Consolas"/>
+              </a:rPr>
+              <a:t>/collections</a:t>
             </a:r>
           </a:p>
         </p:txBody>
@@ -5509,7 +5600,7 @@
         </p:nvSpPr>
         <p:spPr>
           <a:xfrm>
-            <a:off x="822960" y="2066543"/>
+            <a:off x="566928" y="2007107"/>
             <a:ext cx="640080" cy="292608"/>
           </a:xfrm>
           <a:prstGeom prst="roundRect">
@@ -5564,8 +5655,8 @@
         </p:nvSpPr>
         <p:spPr>
           <a:xfrm>
-            <a:off x="1581912" y="2057400"/>
-            <a:ext cx="4370832" cy="256032"/>
+            <a:off x="1353312" y="2002536"/>
+            <a:ext cx="10253167" cy="292608"/>
           </a:xfrm>
           <a:prstGeom prst="rect">
             <a:avLst/>
@@ -5587,13 +5678,13 @@
               </a:spcAft>
             </a:pPr>
             <a:r>
-              <a:rPr sz="1200" b="0" i="0">
+              <a:rPr sz="1200" b="1" i="0">
                 <a:solidFill>
                   <a:srgbClr val="0E2841"/>
                 </a:solidFill>
                 <a:latin typeface="Consolas"/>
               </a:rPr>
-              <a:t>/collections</a:t>
+              <a:t>/collections/{collectionId}</a:t>
             </a:r>
           </a:p>
         </p:txBody>
@@ -5606,7 +5697,7 @@
         </p:nvSpPr>
         <p:spPr>
           <a:xfrm>
-            <a:off x="822960" y="2523744"/>
+            <a:off x="566928" y="2418588"/>
             <a:ext cx="640080" cy="292608"/>
           </a:xfrm>
           <a:prstGeom prst="roundRect">
@@ -5655,64 +5746,22 @@
       </p:sp>
       <p:sp>
         <p:nvSpPr>
-          <p:cNvPr id="11" name="TextBox 10"/>
-          <p:cNvSpPr txBox="1"/>
-          <p:nvPr/>
-        </p:nvSpPr>
-        <p:spPr>
-          <a:xfrm>
-            <a:off x="1581912" y="2514600"/>
-            <a:ext cx="4370832" cy="256032"/>
-          </a:xfrm>
-          <a:prstGeom prst="rect">
-            <a:avLst/>
-          </a:prstGeom>
-          <a:noFill/>
-        </p:spPr>
-        <p:txBody>
-          <a:bodyPr wrap="square" anchor="ctr" lIns="0" rIns="0" tIns="0" bIns="0">
-            <a:noAutofit/>
-          </a:bodyPr>
-          <a:lstStyle/>
-          <a:p>
-            <a:pPr algn="l">
-              <a:spcBef>
-                <a:spcPts val="0"/>
-              </a:spcBef>
-              <a:spcAft>
-                <a:spcPts val="200"/>
-              </a:spcAft>
-            </a:pPr>
-            <a:r>
-              <a:rPr sz="1200" b="0" i="0">
-                <a:solidFill>
-                  <a:srgbClr val="0E2841"/>
-                </a:solidFill>
-                <a:latin typeface="Consolas"/>
-              </a:rPr>
-              <a:t>/collections/{id}</a:t>
-            </a:r>
-          </a:p>
-        </p:txBody>
-      </p:sp>
-      <p:sp>
-        <p:nvSpPr>
-          <p:cNvPr id="12" name="Rounded Rectangle 11"/>
+          <p:cNvPr id="11" name="Rounded Rectangle 10"/>
           <p:cNvSpPr/>
           <p:nvPr/>
         </p:nvSpPr>
         <p:spPr>
           <a:xfrm>
-            <a:off x="566928" y="3054096"/>
-            <a:ext cx="5440680" cy="1463040"/>
+            <a:off x="1280160" y="2418588"/>
+            <a:ext cx="713232" cy="292608"/>
           </a:xfrm>
           <a:prstGeom prst="roundRect">
             <a:avLst>
-              <a:gd name="adj" fmla="val 5000"/>
+              <a:gd name="adj" fmla="val 40000"/>
             </a:avLst>
           </a:prstGeom>
           <a:solidFill>
-            <a:srgbClr val="F1F5F8"/>
+            <a:srgbClr val="196B24"/>
           </a:solidFill>
           <a:ln>
             <a:noFill/>
@@ -5734,75 +5783,40 @@
           </a:fontRef>
         </p:style>
         <p:txBody>
-          <a:bodyPr rtlCol="0" anchor="ctr"/>
+          <a:bodyPr rtlCol="0" anchor="ctr" wrap="none" lIns="0" rIns="0" tIns="0" bIns="0"/>
           <a:lstStyle/>
           <a:p>
             <a:pPr algn="ctr"/>
-          </a:p>
-        </p:txBody>
-      </p:sp>
-      <p:sp>
-        <p:nvSpPr>
-          <p:cNvPr id="13" name="Rectangle 12"/>
-          <p:cNvSpPr/>
-          <p:nvPr/>
-        </p:nvSpPr>
-        <p:spPr>
-          <a:xfrm>
-            <a:off x="566928" y="3054096"/>
-            <a:ext cx="82296" cy="1463040"/>
+            <a:r>
+              <a:rPr sz="1200" b="1">
+                <a:solidFill>
+                  <a:srgbClr val="FFFFFF"/>
+                </a:solidFill>
+                <a:latin typeface="Calibri"/>
+              </a:rPr>
+              <a:t>POST</a:t>
+            </a:r>
+          </a:p>
+        </p:txBody>
+      </p:sp>
+      <p:sp>
+        <p:nvSpPr>
+          <p:cNvPr id="12" name="TextBox 11"/>
+          <p:cNvSpPr txBox="1"/>
+          <p:nvPr/>
+        </p:nvSpPr>
+        <p:spPr>
+          <a:xfrm>
+            <a:off x="2139696" y="2414016"/>
+            <a:ext cx="9466783" cy="292608"/>
           </a:xfrm>
           <a:prstGeom prst="rect">
             <a:avLst/>
           </a:prstGeom>
-          <a:solidFill>
-            <a:srgbClr val="E97132"/>
-          </a:solidFill>
-          <a:ln>
-            <a:noFill/>
-          </a:ln>
-          <a:effectLst/>
-        </p:spPr>
-        <p:style>
-          <a:lnRef idx="1">
-            <a:schemeClr val="accent1"/>
-          </a:lnRef>
-          <a:fillRef idx="3">
-            <a:schemeClr val="accent1"/>
-          </a:fillRef>
-          <a:effectRef idx="2">
-            <a:schemeClr val="accent1"/>
-          </a:effectRef>
-          <a:fontRef idx="minor">
-            <a:schemeClr val="lt1"/>
-          </a:fontRef>
-        </p:style>
-        <p:txBody>
-          <a:bodyPr rtlCol="0" anchor="ctr"/>
-          <a:lstStyle/>
-          <a:p>
-            <a:pPr algn="ctr"/>
-          </a:p>
-        </p:txBody>
-      </p:sp>
-      <p:sp>
-        <p:nvSpPr>
-          <p:cNvPr id="14" name="TextBox 13"/>
-          <p:cNvSpPr txBox="1"/>
-          <p:nvPr/>
-        </p:nvSpPr>
-        <p:spPr>
-          <a:xfrm>
-            <a:off x="822960" y="3182112"/>
-            <a:ext cx="5074920" cy="274320"/>
-          </a:xfrm>
-          <a:prstGeom prst="rect">
-            <a:avLst/>
-          </a:prstGeom>
           <a:noFill/>
         </p:spPr>
         <p:txBody>
-          <a:bodyPr wrap="square" anchor="t" lIns="0" rIns="0" tIns="0" bIns="0">
+          <a:bodyPr wrap="square" anchor="ctr" lIns="0" rIns="0" tIns="0" bIns="0">
             <a:noAutofit/>
           </a:bodyPr>
           <a:lstStyle/>
@@ -5818,24 +5832,24 @@
             <a:r>
               <a:rPr sz="1200" b="1" i="0">
                 <a:solidFill>
-                  <a:srgbClr val="E97132"/>
-                </a:solidFill>
-                <a:latin typeface="Calibri"/>
-              </a:rPr>
-              <a:t>MOVING FEATURES</a:t>
-            </a:r>
-          </a:p>
-        </p:txBody>
-      </p:sp>
-      <p:sp>
-        <p:nvSpPr>
-          <p:cNvPr id="15" name="Rounded Rectangle 14"/>
+                  <a:srgbClr val="0E2841"/>
+                </a:solidFill>
+                <a:latin typeface="Consolas"/>
+              </a:rPr>
+              <a:t>/collections/{collectionId}/items</a:t>
+            </a:r>
+          </a:p>
+        </p:txBody>
+      </p:sp>
+      <p:sp>
+        <p:nvSpPr>
+          <p:cNvPr id="13" name="Rounded Rectangle 12"/>
           <p:cNvSpPr/>
           <p:nvPr/>
         </p:nvSpPr>
         <p:spPr>
           <a:xfrm>
-            <a:off x="822960" y="3547872"/>
+            <a:off x="566928" y="2830068"/>
             <a:ext cx="640080" cy="292608"/>
           </a:xfrm>
           <a:prstGeom prst="roundRect">
@@ -5884,13 +5898,165 @@
       </p:sp>
       <p:sp>
         <p:nvSpPr>
+          <p:cNvPr id="14" name="Rounded Rectangle 13"/>
+          <p:cNvSpPr/>
+          <p:nvPr/>
+        </p:nvSpPr>
+        <p:spPr>
+          <a:xfrm>
+            <a:off x="1280160" y="2830068"/>
+            <a:ext cx="932688" cy="292608"/>
+          </a:xfrm>
+          <a:prstGeom prst="roundRect">
+            <a:avLst>
+              <a:gd name="adj" fmla="val 40000"/>
+            </a:avLst>
+          </a:prstGeom>
+          <a:solidFill>
+            <a:srgbClr val="C0392B"/>
+          </a:solidFill>
+          <a:ln>
+            <a:noFill/>
+          </a:ln>
+          <a:effectLst/>
+        </p:spPr>
+        <p:style>
+          <a:lnRef idx="1">
+            <a:schemeClr val="accent1"/>
+          </a:lnRef>
+          <a:fillRef idx="3">
+            <a:schemeClr val="accent1"/>
+          </a:fillRef>
+          <a:effectRef idx="2">
+            <a:schemeClr val="accent1"/>
+          </a:effectRef>
+          <a:fontRef idx="minor">
+            <a:schemeClr val="lt1"/>
+          </a:fontRef>
+        </p:style>
+        <p:txBody>
+          <a:bodyPr rtlCol="0" anchor="ctr" wrap="none" lIns="0" rIns="0" tIns="0" bIns="0"/>
+          <a:lstStyle/>
+          <a:p>
+            <a:pPr algn="ctr"/>
+            <a:r>
+              <a:rPr sz="1200" b="1">
+                <a:solidFill>
+                  <a:srgbClr val="FFFFFF"/>
+                </a:solidFill>
+                <a:latin typeface="Calibri"/>
+              </a:rPr>
+              <a:t>DELETE</a:t>
+            </a:r>
+          </a:p>
+        </p:txBody>
+      </p:sp>
+      <p:sp>
+        <p:nvSpPr>
+          <p:cNvPr id="15" name="TextBox 14"/>
+          <p:cNvSpPr txBox="1"/>
+          <p:nvPr/>
+        </p:nvSpPr>
+        <p:spPr>
+          <a:xfrm>
+            <a:off x="2359152" y="2825496"/>
+            <a:ext cx="9247327" cy="292608"/>
+          </a:xfrm>
+          <a:prstGeom prst="rect">
+            <a:avLst/>
+          </a:prstGeom>
+          <a:noFill/>
+        </p:spPr>
+        <p:txBody>
+          <a:bodyPr wrap="square" anchor="ctr" lIns="0" rIns="0" tIns="0" bIns="0">
+            <a:noAutofit/>
+          </a:bodyPr>
+          <a:lstStyle/>
+          <a:p>
+            <a:pPr algn="l">
+              <a:spcBef>
+                <a:spcPts val="0"/>
+              </a:spcBef>
+              <a:spcAft>
+                <a:spcPts val="200"/>
+              </a:spcAft>
+            </a:pPr>
+            <a:r>
+              <a:rPr sz="1200" b="1" i="0">
+                <a:solidFill>
+                  <a:srgbClr val="0E2841"/>
+                </a:solidFill>
+                <a:latin typeface="Consolas"/>
+              </a:rPr>
+              <a:t>/collections/{collectionId}/items/{mFeatureId}</a:t>
+            </a:r>
+          </a:p>
+        </p:txBody>
+      </p:sp>
+      <p:sp>
+        <p:nvSpPr>
           <p:cNvPr id="16" name="Rounded Rectangle 15"/>
           <p:cNvSpPr/>
           <p:nvPr/>
         </p:nvSpPr>
         <p:spPr>
           <a:xfrm>
-            <a:off x="1527048" y="3547872"/>
+            <a:off x="566928" y="3241548"/>
+            <a:ext cx="640080" cy="292608"/>
+          </a:xfrm>
+          <a:prstGeom prst="roundRect">
+            <a:avLst>
+              <a:gd name="adj" fmla="val 40000"/>
+            </a:avLst>
+          </a:prstGeom>
+          <a:solidFill>
+            <a:srgbClr val="156082"/>
+          </a:solidFill>
+          <a:ln>
+            <a:noFill/>
+          </a:ln>
+          <a:effectLst/>
+        </p:spPr>
+        <p:style>
+          <a:lnRef idx="1">
+            <a:schemeClr val="accent1"/>
+          </a:lnRef>
+          <a:fillRef idx="3">
+            <a:schemeClr val="accent1"/>
+          </a:fillRef>
+          <a:effectRef idx="2">
+            <a:schemeClr val="accent1"/>
+          </a:effectRef>
+          <a:fontRef idx="minor">
+            <a:schemeClr val="lt1"/>
+          </a:fontRef>
+        </p:style>
+        <p:txBody>
+          <a:bodyPr rtlCol="0" anchor="ctr" wrap="none" lIns="0" rIns="0" tIns="0" bIns="0"/>
+          <a:lstStyle/>
+          <a:p>
+            <a:pPr algn="ctr"/>
+            <a:r>
+              <a:rPr sz="1200" b="1">
+                <a:solidFill>
+                  <a:srgbClr val="FFFFFF"/>
+                </a:solidFill>
+                <a:latin typeface="Calibri"/>
+              </a:rPr>
+              <a:t>GET</a:t>
+            </a:r>
+          </a:p>
+        </p:txBody>
+      </p:sp>
+      <p:sp>
+        <p:nvSpPr>
+          <p:cNvPr id="17" name="Rounded Rectangle 16"/>
+          <p:cNvSpPr/>
+          <p:nvPr/>
+        </p:nvSpPr>
+        <p:spPr>
+          <a:xfrm>
+            <a:off x="1280160" y="3241548"/>
             <a:ext cx="713232" cy="292608"/>
           </a:xfrm>
           <a:prstGeom prst="roundRect">
@@ -5939,14 +6105,14 @@
       </p:sp>
       <p:sp>
         <p:nvSpPr>
-          <p:cNvPr id="17" name="TextBox 16"/>
+          <p:cNvPr id="18" name="TextBox 17"/>
           <p:cNvSpPr txBox="1"/>
           <p:nvPr/>
         </p:nvSpPr>
         <p:spPr>
           <a:xfrm>
-            <a:off x="2359152" y="3538728"/>
-            <a:ext cx="3593592" cy="256032"/>
+            <a:off x="2139696" y="3236976"/>
+            <a:ext cx="9466783" cy="292608"/>
           </a:xfrm>
           <a:prstGeom prst="rect">
             <a:avLst/>
@@ -5968,26 +6134,26 @@
               </a:spcAft>
             </a:pPr>
             <a:r>
-              <a:rPr sz="1200" b="0" i="0">
+              <a:rPr sz="1200" b="1" i="0">
                 <a:solidFill>
                   <a:srgbClr val="0E2841"/>
                 </a:solidFill>
                 <a:latin typeface="Consolas"/>
               </a:rPr>
-              <a:t>/collections/{id}/items</a:t>
-            </a:r>
-          </a:p>
-        </p:txBody>
-      </p:sp>
-      <p:sp>
-        <p:nvSpPr>
-          <p:cNvPr id="18" name="Rounded Rectangle 17"/>
+              <a:t>/collections/{collectionId}/items/{mFeatureId}/tgsequence</a:t>
+            </a:r>
+          </a:p>
+        </p:txBody>
+      </p:sp>
+      <p:sp>
+        <p:nvSpPr>
+          <p:cNvPr id="19" name="Rounded Rectangle 18"/>
           <p:cNvSpPr/>
           <p:nvPr/>
         </p:nvSpPr>
         <p:spPr>
           <a:xfrm>
-            <a:off x="822960" y="4005072"/>
+            <a:off x="566928" y="3653028"/>
             <a:ext cx="640080" cy="292608"/>
           </a:xfrm>
           <a:prstGeom prst="roundRect">
@@ -6036,124 +6202,14 @@
       </p:sp>
       <p:sp>
         <p:nvSpPr>
-          <p:cNvPr id="19" name="Rounded Rectangle 18"/>
-          <p:cNvSpPr/>
-          <p:nvPr/>
-        </p:nvSpPr>
-        <p:spPr>
-          <a:xfrm>
-            <a:off x="1527048" y="4005072"/>
-            <a:ext cx="603504" cy="292608"/>
-          </a:xfrm>
-          <a:prstGeom prst="roundRect">
-            <a:avLst>
-              <a:gd name="adj" fmla="val 40000"/>
-            </a:avLst>
-          </a:prstGeom>
-          <a:solidFill>
-            <a:srgbClr val="E97132"/>
-          </a:solidFill>
-          <a:ln>
-            <a:noFill/>
-          </a:ln>
-          <a:effectLst/>
-        </p:spPr>
-        <p:style>
-          <a:lnRef idx="1">
-            <a:schemeClr val="accent1"/>
-          </a:lnRef>
-          <a:fillRef idx="3">
-            <a:schemeClr val="accent1"/>
-          </a:fillRef>
-          <a:effectRef idx="2">
-            <a:schemeClr val="accent1"/>
-          </a:effectRef>
-          <a:fontRef idx="minor">
-            <a:schemeClr val="lt1"/>
-          </a:fontRef>
-        </p:style>
-        <p:txBody>
-          <a:bodyPr rtlCol="0" anchor="ctr" wrap="none" lIns="0" rIns="0" tIns="0" bIns="0"/>
-          <a:lstStyle/>
-          <a:p>
-            <a:pPr algn="ctr"/>
-            <a:r>
-              <a:rPr sz="1200" b="1">
-                <a:solidFill>
-                  <a:srgbClr val="FFFFFF"/>
-                </a:solidFill>
-                <a:latin typeface="Calibri"/>
-              </a:rPr>
-              <a:t>PUT</a:t>
-            </a:r>
-          </a:p>
-        </p:txBody>
-      </p:sp>
-      <p:sp>
-        <p:nvSpPr>
-          <p:cNvPr id="20" name="Rounded Rectangle 19"/>
-          <p:cNvSpPr/>
-          <p:nvPr/>
-        </p:nvSpPr>
-        <p:spPr>
-          <a:xfrm>
-            <a:off x="2194560" y="4005072"/>
-            <a:ext cx="932688" cy="292608"/>
-          </a:xfrm>
-          <a:prstGeom prst="roundRect">
-            <a:avLst>
-              <a:gd name="adj" fmla="val 40000"/>
-            </a:avLst>
-          </a:prstGeom>
-          <a:solidFill>
-            <a:srgbClr val="C0392B"/>
-          </a:solidFill>
-          <a:ln>
-            <a:noFill/>
-          </a:ln>
-          <a:effectLst/>
-        </p:spPr>
-        <p:style>
-          <a:lnRef idx="1">
-            <a:schemeClr val="accent1"/>
-          </a:lnRef>
-          <a:fillRef idx="3">
-            <a:schemeClr val="accent1"/>
-          </a:fillRef>
-          <a:effectRef idx="2">
-            <a:schemeClr val="accent1"/>
-          </a:effectRef>
-          <a:fontRef idx="minor">
-            <a:schemeClr val="lt1"/>
-          </a:fontRef>
-        </p:style>
-        <p:txBody>
-          <a:bodyPr rtlCol="0" anchor="ctr" wrap="none" lIns="0" rIns="0" tIns="0" bIns="0"/>
-          <a:lstStyle/>
-          <a:p>
-            <a:pPr algn="ctr"/>
-            <a:r>
-              <a:rPr sz="1200" b="1">
-                <a:solidFill>
-                  <a:srgbClr val="FFFFFF"/>
-                </a:solidFill>
-                <a:latin typeface="Calibri"/>
-              </a:rPr>
-              <a:t>DELETE</a:t>
-            </a:r>
-          </a:p>
-        </p:txBody>
-      </p:sp>
-      <p:sp>
-        <p:nvSpPr>
-          <p:cNvPr id="21" name="TextBox 20"/>
+          <p:cNvPr id="20" name="TextBox 19"/>
           <p:cNvSpPr txBox="1"/>
           <p:nvPr/>
         </p:nvSpPr>
         <p:spPr>
           <a:xfrm>
-            <a:off x="3246120" y="3995928"/>
-            <a:ext cx="2706624" cy="256032"/>
+            <a:off x="1353312" y="3648456"/>
+            <a:ext cx="10253167" cy="292608"/>
           </a:xfrm>
           <a:prstGeom prst="rect">
             <a:avLst/>
@@ -6175,158 +6231,26 @@
               </a:spcAft>
             </a:pPr>
             <a:r>
-              <a:rPr sz="1200" b="0" i="0">
+              <a:rPr sz="1200" b="1" i="0">
                 <a:solidFill>
                   <a:srgbClr val="0E2841"/>
                 </a:solidFill>
                 <a:latin typeface="Consolas"/>
               </a:rPr>
-              <a:t>…/items/{fid}</a:t>
-            </a:r>
-          </a:p>
-        </p:txBody>
-      </p:sp>
-      <p:sp>
-        <p:nvSpPr>
-          <p:cNvPr id="22" name="Rounded Rectangle 21"/>
+              <a:t>/collections/{collectionId}/items/{mFeatureId}/tgsequence/{tGeometryId}/distance</a:t>
+            </a:r>
+          </a:p>
+        </p:txBody>
+      </p:sp>
+      <p:sp>
+        <p:nvSpPr>
+          <p:cNvPr id="21" name="Rounded Rectangle 20"/>
           <p:cNvSpPr/>
           <p:nvPr/>
         </p:nvSpPr>
         <p:spPr>
           <a:xfrm>
-            <a:off x="566928" y="4681728"/>
-            <a:ext cx="5440680" cy="1463040"/>
-          </a:xfrm>
-          <a:prstGeom prst="roundRect">
-            <a:avLst>
-              <a:gd name="adj" fmla="val 5000"/>
-            </a:avLst>
-          </a:prstGeom>
-          <a:solidFill>
-            <a:srgbClr val="F1F5F8"/>
-          </a:solidFill>
-          <a:ln>
-            <a:noFill/>
-          </a:ln>
-          <a:effectLst/>
-        </p:spPr>
-        <p:style>
-          <a:lnRef idx="1">
-            <a:schemeClr val="accent1"/>
-          </a:lnRef>
-          <a:fillRef idx="3">
-            <a:schemeClr val="accent1"/>
-          </a:fillRef>
-          <a:effectRef idx="2">
-            <a:schemeClr val="accent1"/>
-          </a:effectRef>
-          <a:fontRef idx="minor">
-            <a:schemeClr val="lt1"/>
-          </a:fontRef>
-        </p:style>
-        <p:txBody>
-          <a:bodyPr rtlCol="0" anchor="ctr"/>
-          <a:lstStyle/>
-          <a:p>
-            <a:pPr algn="ctr"/>
-          </a:p>
-        </p:txBody>
-      </p:sp>
-      <p:sp>
-        <p:nvSpPr>
-          <p:cNvPr id="23" name="Rectangle 22"/>
-          <p:cNvSpPr/>
-          <p:nvPr/>
-        </p:nvSpPr>
-        <p:spPr>
-          <a:xfrm>
-            <a:off x="566928" y="4681728"/>
-            <a:ext cx="82296" cy="1463040"/>
-          </a:xfrm>
-          <a:prstGeom prst="rect">
-            <a:avLst/>
-          </a:prstGeom>
-          <a:solidFill>
-            <a:srgbClr val="196B24"/>
-          </a:solidFill>
-          <a:ln>
-            <a:noFill/>
-          </a:ln>
-          <a:effectLst/>
-        </p:spPr>
-        <p:style>
-          <a:lnRef idx="1">
-            <a:schemeClr val="accent1"/>
-          </a:lnRef>
-          <a:fillRef idx="3">
-            <a:schemeClr val="accent1"/>
-          </a:fillRef>
-          <a:effectRef idx="2">
-            <a:schemeClr val="accent1"/>
-          </a:effectRef>
-          <a:fontRef idx="minor">
-            <a:schemeClr val="lt1"/>
-          </a:fontRef>
-        </p:style>
-        <p:txBody>
-          <a:bodyPr rtlCol="0" anchor="ctr"/>
-          <a:lstStyle/>
-          <a:p>
-            <a:pPr algn="ctr"/>
-          </a:p>
-        </p:txBody>
-      </p:sp>
-      <p:sp>
-        <p:nvSpPr>
-          <p:cNvPr id="24" name="TextBox 23"/>
-          <p:cNvSpPr txBox="1"/>
-          <p:nvPr/>
-        </p:nvSpPr>
-        <p:spPr>
-          <a:xfrm>
-            <a:off x="822960" y="4809744"/>
-            <a:ext cx="5074920" cy="274320"/>
-          </a:xfrm>
-          <a:prstGeom prst="rect">
-            <a:avLst/>
-          </a:prstGeom>
-          <a:noFill/>
-        </p:spPr>
-        <p:txBody>
-          <a:bodyPr wrap="square" anchor="t" lIns="0" rIns="0" tIns="0" bIns="0">
-            <a:noAutofit/>
-          </a:bodyPr>
-          <a:lstStyle/>
-          <a:p>
-            <a:pPr algn="l">
-              <a:spcBef>
-                <a:spcPts val="0"/>
-              </a:spcBef>
-              <a:spcAft>
-                <a:spcPts val="200"/>
-              </a:spcAft>
-            </a:pPr>
-            <a:r>
-              <a:rPr sz="1200" b="1" i="0">
-                <a:solidFill>
-                  <a:srgbClr val="196B24"/>
-                </a:solidFill>
-                <a:latin typeface="Calibri"/>
-              </a:rPr>
-              <a:t>TEMPORAL GEOMETRY</a:t>
-            </a:r>
-          </a:p>
-        </p:txBody>
-      </p:sp>
-      <p:sp>
-        <p:nvSpPr>
-          <p:cNvPr id="25" name="Rounded Rectangle 24"/>
-          <p:cNvSpPr/>
-          <p:nvPr/>
-        </p:nvSpPr>
-        <p:spPr>
-          <a:xfrm>
-            <a:off x="822960" y="5175504"/>
+            <a:off x="566928" y="4064508"/>
             <a:ext cx="640080" cy="292608"/>
           </a:xfrm>
           <a:prstGeom prst="roundRect">
@@ -6375,69 +6299,14 @@
       </p:sp>
       <p:sp>
         <p:nvSpPr>
-          <p:cNvPr id="26" name="Rounded Rectangle 25"/>
-          <p:cNvSpPr/>
-          <p:nvPr/>
-        </p:nvSpPr>
-        <p:spPr>
-          <a:xfrm>
-            <a:off x="1527048" y="5175504"/>
-            <a:ext cx="713232" cy="292608"/>
-          </a:xfrm>
-          <a:prstGeom prst="roundRect">
-            <a:avLst>
-              <a:gd name="adj" fmla="val 40000"/>
-            </a:avLst>
-          </a:prstGeom>
-          <a:solidFill>
-            <a:srgbClr val="196B24"/>
-          </a:solidFill>
-          <a:ln>
-            <a:noFill/>
-          </a:ln>
-          <a:effectLst/>
-        </p:spPr>
-        <p:style>
-          <a:lnRef idx="1">
-            <a:schemeClr val="accent1"/>
-          </a:lnRef>
-          <a:fillRef idx="3">
-            <a:schemeClr val="accent1"/>
-          </a:fillRef>
-          <a:effectRef idx="2">
-            <a:schemeClr val="accent1"/>
-          </a:effectRef>
-          <a:fontRef idx="minor">
-            <a:schemeClr val="lt1"/>
-          </a:fontRef>
-        </p:style>
-        <p:txBody>
-          <a:bodyPr rtlCol="0" anchor="ctr" wrap="none" lIns="0" rIns="0" tIns="0" bIns="0"/>
-          <a:lstStyle/>
-          <a:p>
-            <a:pPr algn="ctr"/>
-            <a:r>
-              <a:rPr sz="1200" b="1">
-                <a:solidFill>
-                  <a:srgbClr val="FFFFFF"/>
-                </a:solidFill>
-                <a:latin typeface="Calibri"/>
-              </a:rPr>
-              <a:t>POST</a:t>
-            </a:r>
-          </a:p>
-        </p:txBody>
-      </p:sp>
-      <p:sp>
-        <p:nvSpPr>
-          <p:cNvPr id="27" name="TextBox 26"/>
+          <p:cNvPr id="22" name="TextBox 21"/>
           <p:cNvSpPr txBox="1"/>
           <p:nvPr/>
         </p:nvSpPr>
         <p:spPr>
           <a:xfrm>
-            <a:off x="2359152" y="5166360"/>
-            <a:ext cx="3593592" cy="256032"/>
+            <a:off x="1353312" y="4059936"/>
+            <a:ext cx="10253167" cy="292608"/>
           </a:xfrm>
           <a:prstGeom prst="rect">
             <a:avLst/>
@@ -6459,26 +6328,26 @@
               </a:spcAft>
             </a:pPr>
             <a:r>
-              <a:rPr sz="1200" b="0" i="0">
+              <a:rPr sz="1200" b="1" i="0">
                 <a:solidFill>
                   <a:srgbClr val="0E2841"/>
                 </a:solidFill>
                 <a:latin typeface="Consolas"/>
               </a:rPr>
-              <a:t>…/items/{fid}/tgsequence</a:t>
-            </a:r>
-          </a:p>
-        </p:txBody>
-      </p:sp>
-      <p:sp>
-        <p:nvSpPr>
-          <p:cNvPr id="28" name="Rounded Rectangle 27"/>
+              <a:t>/collections/{collectionId}/items/{mFeatureId}/tgsequence/{tGeometryId}/velocity</a:t>
+            </a:r>
+          </a:p>
+        </p:txBody>
+      </p:sp>
+      <p:sp>
+        <p:nvSpPr>
+          <p:cNvPr id="23" name="Rounded Rectangle 22"/>
           <p:cNvSpPr/>
           <p:nvPr/>
         </p:nvSpPr>
         <p:spPr>
           <a:xfrm>
-            <a:off x="822960" y="5632704"/>
+            <a:off x="566928" y="4475988"/>
             <a:ext cx="640080" cy="292608"/>
           </a:xfrm>
           <a:prstGeom prst="roundRect">
@@ -6527,14 +6396,14 @@
       </p:sp>
       <p:sp>
         <p:nvSpPr>
-          <p:cNvPr id="29" name="TextBox 28"/>
+          <p:cNvPr id="24" name="TextBox 23"/>
           <p:cNvSpPr txBox="1"/>
           <p:nvPr/>
         </p:nvSpPr>
         <p:spPr>
           <a:xfrm>
-            <a:off x="1581912" y="5623560"/>
-            <a:ext cx="4370832" cy="256032"/>
+            <a:off x="1353312" y="4471416"/>
+            <a:ext cx="10253167" cy="292608"/>
           </a:xfrm>
           <a:prstGeom prst="rect">
             <a:avLst/>
@@ -6556,158 +6425,26 @@
               </a:spcAft>
             </a:pPr>
             <a:r>
-              <a:rPr sz="1200" b="0" i="0">
+              <a:rPr sz="1200" b="1" i="0">
                 <a:solidFill>
                   <a:srgbClr val="0E2841"/>
                 </a:solidFill>
                 <a:latin typeface="Consolas"/>
               </a:rPr>
-              <a:t>…/tgsequence/{tgid}/distance · velocity</a:t>
-            </a:r>
-          </a:p>
-        </p:txBody>
-      </p:sp>
-      <p:sp>
-        <p:nvSpPr>
-          <p:cNvPr id="30" name="Rounded Rectangle 29"/>
+              <a:t>/collections/{collectionId}/items/{mFeatureId}/tproperties</a:t>
+            </a:r>
+          </a:p>
+        </p:txBody>
+      </p:sp>
+      <p:sp>
+        <p:nvSpPr>
+          <p:cNvPr id="25" name="Rounded Rectangle 24"/>
           <p:cNvSpPr/>
           <p:nvPr/>
         </p:nvSpPr>
         <p:spPr>
           <a:xfrm>
-            <a:off x="6190488" y="1572768"/>
-            <a:ext cx="5434279" cy="1463040"/>
-          </a:xfrm>
-          <a:prstGeom prst="roundRect">
-            <a:avLst>
-              <a:gd name="adj" fmla="val 5000"/>
-            </a:avLst>
-          </a:prstGeom>
-          <a:solidFill>
-            <a:srgbClr val="F1F5F8"/>
-          </a:solidFill>
-          <a:ln>
-            <a:noFill/>
-          </a:ln>
-          <a:effectLst/>
-        </p:spPr>
-        <p:style>
-          <a:lnRef idx="1">
-            <a:schemeClr val="accent1"/>
-          </a:lnRef>
-          <a:fillRef idx="3">
-            <a:schemeClr val="accent1"/>
-          </a:fillRef>
-          <a:effectRef idx="2">
-            <a:schemeClr val="accent1"/>
-          </a:effectRef>
-          <a:fontRef idx="minor">
-            <a:schemeClr val="lt1"/>
-          </a:fontRef>
-        </p:style>
-        <p:txBody>
-          <a:bodyPr rtlCol="0" anchor="ctr"/>
-          <a:lstStyle/>
-          <a:p>
-            <a:pPr algn="ctr"/>
-          </a:p>
-        </p:txBody>
-      </p:sp>
-      <p:sp>
-        <p:nvSpPr>
-          <p:cNvPr id="31" name="Rectangle 30"/>
-          <p:cNvSpPr/>
-          <p:nvPr/>
-        </p:nvSpPr>
-        <p:spPr>
-          <a:xfrm>
-            <a:off x="6190488" y="1572768"/>
-            <a:ext cx="82296" cy="1463040"/>
-          </a:xfrm>
-          <a:prstGeom prst="rect">
-            <a:avLst/>
-          </a:prstGeom>
-          <a:solidFill>
-            <a:srgbClr val="0E2841"/>
-          </a:solidFill>
-          <a:ln>
-            <a:noFill/>
-          </a:ln>
-          <a:effectLst/>
-        </p:spPr>
-        <p:style>
-          <a:lnRef idx="1">
-            <a:schemeClr val="accent1"/>
-          </a:lnRef>
-          <a:fillRef idx="3">
-            <a:schemeClr val="accent1"/>
-          </a:fillRef>
-          <a:effectRef idx="2">
-            <a:schemeClr val="accent1"/>
-          </a:effectRef>
-          <a:fontRef idx="minor">
-            <a:schemeClr val="lt1"/>
-          </a:fontRef>
-        </p:style>
-        <p:txBody>
-          <a:bodyPr rtlCol="0" anchor="ctr"/>
-          <a:lstStyle/>
-          <a:p>
-            <a:pPr algn="ctr"/>
-          </a:p>
-        </p:txBody>
-      </p:sp>
-      <p:sp>
-        <p:nvSpPr>
-          <p:cNvPr id="32" name="TextBox 31"/>
-          <p:cNvSpPr txBox="1"/>
-          <p:nvPr/>
-        </p:nvSpPr>
-        <p:spPr>
-          <a:xfrm>
-            <a:off x="6446520" y="1700784"/>
-            <a:ext cx="5068519" cy="274320"/>
-          </a:xfrm>
-          <a:prstGeom prst="rect">
-            <a:avLst/>
-          </a:prstGeom>
-          <a:noFill/>
-        </p:spPr>
-        <p:txBody>
-          <a:bodyPr wrap="square" anchor="t" lIns="0" rIns="0" tIns="0" bIns="0">
-            <a:noAutofit/>
-          </a:bodyPr>
-          <a:lstStyle/>
-          <a:p>
-            <a:pPr algn="l">
-              <a:spcBef>
-                <a:spcPts val="0"/>
-              </a:spcBef>
-              <a:spcAft>
-                <a:spcPts val="200"/>
-              </a:spcAft>
-            </a:pPr>
-            <a:r>
-              <a:rPr sz="1200" b="1" i="0">
-                <a:solidFill>
-                  <a:srgbClr val="0E2841"/>
-                </a:solidFill>
-                <a:latin typeface="Calibri"/>
-              </a:rPr>
-              <a:t>TEMPORAL PROPERTIES</a:t>
-            </a:r>
-          </a:p>
-        </p:txBody>
-      </p:sp>
-      <p:sp>
-        <p:nvSpPr>
-          <p:cNvPr id="33" name="Rounded Rectangle 32"/>
-          <p:cNvSpPr/>
-          <p:nvPr/>
-        </p:nvSpPr>
-        <p:spPr>
-          <a:xfrm>
-            <a:off x="6446520" y="2066543"/>
+            <a:off x="566928" y="4887468"/>
             <a:ext cx="640080" cy="292608"/>
           </a:xfrm>
           <a:prstGeom prst="roundRect">
@@ -6756,14 +6493,14 @@
       </p:sp>
       <p:sp>
         <p:nvSpPr>
-          <p:cNvPr id="34" name="TextBox 33"/>
+          <p:cNvPr id="26" name="TextBox 25"/>
           <p:cNvSpPr txBox="1"/>
           <p:nvPr/>
         </p:nvSpPr>
         <p:spPr>
           <a:xfrm>
-            <a:off x="7205472" y="2057400"/>
-            <a:ext cx="4364431" cy="256032"/>
+            <a:off x="1353312" y="4882896"/>
+            <a:ext cx="10253167" cy="292608"/>
           </a:xfrm>
           <a:prstGeom prst="rect">
             <a:avLst/>
@@ -6785,26 +6522,26 @@
               </a:spcAft>
             </a:pPr>
             <a:r>
-              <a:rPr sz="1200" b="0" i="0">
+              <a:rPr sz="1200" b="1" i="0">
                 <a:solidFill>
                   <a:srgbClr val="0E2841"/>
                 </a:solidFill>
                 <a:latin typeface="Consolas"/>
               </a:rPr>
-              <a:t>…/items/{fid}/tproperties</a:t>
-            </a:r>
-          </a:p>
-        </p:txBody>
-      </p:sp>
-      <p:sp>
-        <p:nvSpPr>
-          <p:cNvPr id="35" name="Rounded Rectangle 34"/>
+              <a:t>/collections/{collectionId}/items/{mFeatureId}/tproperties/{tPropertyName}</a:t>
+            </a:r>
+          </a:p>
+        </p:txBody>
+      </p:sp>
+      <p:sp>
+        <p:nvSpPr>
+          <p:cNvPr id="27" name="Rounded Rectangle 26"/>
           <p:cNvSpPr/>
           <p:nvPr/>
         </p:nvSpPr>
         <p:spPr>
           <a:xfrm>
-            <a:off x="6446520" y="2523744"/>
+            <a:off x="566928" y="5298948"/>
             <a:ext cx="640080" cy="292608"/>
           </a:xfrm>
           <a:prstGeom prst="roundRect">
@@ -6853,14 +6590,14 @@
       </p:sp>
       <p:sp>
         <p:nvSpPr>
-          <p:cNvPr id="36" name="TextBox 35"/>
+          <p:cNvPr id="28" name="TextBox 27"/>
           <p:cNvSpPr txBox="1"/>
           <p:nvPr/>
         </p:nvSpPr>
         <p:spPr>
           <a:xfrm>
-            <a:off x="7205472" y="2514600"/>
-            <a:ext cx="4364431" cy="256032"/>
+            <a:off x="1353312" y="5294376"/>
+            <a:ext cx="10253167" cy="292608"/>
           </a:xfrm>
           <a:prstGeom prst="rect">
             <a:avLst/>
@@ -6882,117 +6619,27 @@
               </a:spcAft>
             </a:pPr>
             <a:r>
-              <a:rPr sz="1200" b="0" i="0">
+              <a:rPr sz="1200" b="1" i="0">
                 <a:solidFill>
                   <a:srgbClr val="0E2841"/>
                 </a:solidFill>
                 <a:latin typeface="Consolas"/>
               </a:rPr>
-              <a:t>…/tproperties/{name}</a:t>
-            </a:r>
-          </a:p>
-        </p:txBody>
-      </p:sp>
-      <p:sp>
-        <p:nvSpPr>
-          <p:cNvPr id="37" name="Rounded Rectangle 36"/>
-          <p:cNvSpPr/>
-          <p:nvPr/>
-        </p:nvSpPr>
-        <p:spPr>
-          <a:xfrm>
-            <a:off x="6190488" y="3054096"/>
-            <a:ext cx="5434279" cy="1463040"/>
-          </a:xfrm>
-          <a:prstGeom prst="roundRect">
-            <a:avLst>
-              <a:gd name="adj" fmla="val 5000"/>
-            </a:avLst>
-          </a:prstGeom>
-          <a:solidFill>
-            <a:srgbClr val="F1F5F8"/>
-          </a:solidFill>
-          <a:ln>
-            <a:noFill/>
-          </a:ln>
-          <a:effectLst/>
-        </p:spPr>
-        <p:style>
-          <a:lnRef idx="1">
-            <a:schemeClr val="accent1"/>
-          </a:lnRef>
-          <a:fillRef idx="3">
-            <a:schemeClr val="accent1"/>
-          </a:fillRef>
-          <a:effectRef idx="2">
-            <a:schemeClr val="accent1"/>
-          </a:effectRef>
-          <a:fontRef idx="minor">
-            <a:schemeClr val="lt1"/>
-          </a:fontRef>
-        </p:style>
-        <p:txBody>
-          <a:bodyPr rtlCol="0" anchor="ctr"/>
-          <a:lstStyle/>
-          <a:p>
-            <a:pPr algn="ctr"/>
-          </a:p>
-        </p:txBody>
-      </p:sp>
-      <p:sp>
-        <p:nvSpPr>
-          <p:cNvPr id="38" name="Rectangle 37"/>
-          <p:cNvSpPr/>
-          <p:nvPr/>
-        </p:nvSpPr>
-        <p:spPr>
-          <a:xfrm>
-            <a:off x="6190488" y="3054096"/>
-            <a:ext cx="82296" cy="1463040"/>
-          </a:xfrm>
-          <a:prstGeom prst="rect">
-            <a:avLst/>
-          </a:prstGeom>
-          <a:solidFill>
-            <a:srgbClr val="A02B93"/>
-          </a:solidFill>
-          <a:ln>
-            <a:noFill/>
-          </a:ln>
-          <a:effectLst/>
-        </p:spPr>
-        <p:style>
-          <a:lnRef idx="1">
-            <a:schemeClr val="accent1"/>
-          </a:lnRef>
-          <a:fillRef idx="3">
-            <a:schemeClr val="accent1"/>
-          </a:fillRef>
-          <a:effectRef idx="2">
-            <a:schemeClr val="accent1"/>
-          </a:effectRef>
-          <a:fontRef idx="minor">
-            <a:schemeClr val="lt1"/>
-          </a:fontRef>
-        </p:style>
-        <p:txBody>
-          <a:bodyPr rtlCol="0" anchor="ctr"/>
-          <a:lstStyle/>
-          <a:p>
-            <a:pPr algn="ctr"/>
-          </a:p>
-        </p:txBody>
-      </p:sp>
-      <p:sp>
-        <p:nvSpPr>
-          <p:cNvPr id="39" name="TextBox 38"/>
+              <a:t>/   ·   /api   ·   /conformance</a:t>
+            </a:r>
+          </a:p>
+        </p:txBody>
+      </p:sp>
+      <p:sp>
+        <p:nvSpPr>
+          <p:cNvPr id="29" name="TextBox 28"/>
           <p:cNvSpPr txBox="1"/>
           <p:nvPr/>
         </p:nvSpPr>
         <p:spPr>
           <a:xfrm>
-            <a:off x="6446520" y="3182112"/>
-            <a:ext cx="5068519" cy="274320"/>
+            <a:off x="566928" y="5833872"/>
+            <a:ext cx="11057839" cy="640080"/>
           </a:xfrm>
           <a:prstGeom prst="rect">
             <a:avLst/>
@@ -7014,256 +6661,20 @@
               </a:spcAft>
             </a:pPr>
             <a:r>
-              <a:rPr sz="1200" b="1" i="0">
-                <a:solidFill>
-                  <a:srgbClr val="A02B93"/>
-                </a:solidFill>
-                <a:latin typeface="Calibri"/>
-              </a:rPr>
-              <a:t>SERVICE</a:t>
-            </a:r>
-          </a:p>
-        </p:txBody>
-      </p:sp>
-      <p:sp>
-        <p:nvSpPr>
-          <p:cNvPr id="40" name="Rounded Rectangle 39"/>
-          <p:cNvSpPr/>
-          <p:nvPr/>
-        </p:nvSpPr>
-        <p:spPr>
-          <a:xfrm>
-            <a:off x="6446520" y="3547872"/>
-            <a:ext cx="640080" cy="292608"/>
-          </a:xfrm>
-          <a:prstGeom prst="roundRect">
-            <a:avLst>
-              <a:gd name="adj" fmla="val 40000"/>
-            </a:avLst>
-          </a:prstGeom>
-          <a:solidFill>
-            <a:srgbClr val="156082"/>
-          </a:solidFill>
-          <a:ln>
-            <a:noFill/>
-          </a:ln>
-          <a:effectLst/>
-        </p:spPr>
-        <p:style>
-          <a:lnRef idx="1">
-            <a:schemeClr val="accent1"/>
-          </a:lnRef>
-          <a:fillRef idx="3">
-            <a:schemeClr val="accent1"/>
-          </a:fillRef>
-          <a:effectRef idx="2">
-            <a:schemeClr val="accent1"/>
-          </a:effectRef>
-          <a:fontRef idx="minor">
-            <a:schemeClr val="lt1"/>
-          </a:fontRef>
-        </p:style>
-        <p:txBody>
-          <a:bodyPr rtlCol="0" anchor="ctr" wrap="none" lIns="0" rIns="0" tIns="0" bIns="0"/>
-          <a:lstStyle/>
-          <a:p>
-            <a:pPr algn="ctr"/>
-            <a:r>
-              <a:rPr sz="1200" b="1">
-                <a:solidFill>
-                  <a:srgbClr val="FFFFFF"/>
-                </a:solidFill>
-                <a:latin typeface="Calibri"/>
-              </a:rPr>
-              <a:t>GET</a:t>
-            </a:r>
-          </a:p>
-        </p:txBody>
-      </p:sp>
-      <p:sp>
-        <p:nvSpPr>
-          <p:cNvPr id="41" name="TextBox 40"/>
-          <p:cNvSpPr txBox="1"/>
-          <p:nvPr/>
-        </p:nvSpPr>
-        <p:spPr>
-          <a:xfrm>
-            <a:off x="7205472" y="3538728"/>
-            <a:ext cx="4364431" cy="256032"/>
-          </a:xfrm>
-          <a:prstGeom prst="rect">
-            <a:avLst/>
-          </a:prstGeom>
-          <a:noFill/>
-        </p:spPr>
-        <p:txBody>
-          <a:bodyPr wrap="square" anchor="ctr" lIns="0" rIns="0" tIns="0" bIns="0">
-            <a:noAutofit/>
-          </a:bodyPr>
-          <a:lstStyle/>
-          <a:p>
-            <a:pPr algn="l">
-              <a:spcBef>
-                <a:spcPts val="0"/>
-              </a:spcBef>
-              <a:spcAft>
-                <a:spcPts val="200"/>
-              </a:spcAft>
-            </a:pPr>
-            <a:r>
-              <a:rPr sz="1200" b="0" i="0">
-                <a:solidFill>
-                  <a:srgbClr val="0E2841"/>
-                </a:solidFill>
-                <a:latin typeface="Consolas"/>
-              </a:rPr>
-              <a:t>/conformance · /api</a:t>
-            </a:r>
-          </a:p>
-        </p:txBody>
-      </p:sp>
-      <p:sp>
-        <p:nvSpPr>
-          <p:cNvPr id="42" name="Rounded Rectangle 41"/>
-          <p:cNvSpPr/>
-          <p:nvPr/>
-        </p:nvSpPr>
-        <p:spPr>
-          <a:xfrm>
-            <a:off x="6446520" y="4005072"/>
-            <a:ext cx="640080" cy="292608"/>
-          </a:xfrm>
-          <a:prstGeom prst="roundRect">
-            <a:avLst>
-              <a:gd name="adj" fmla="val 40000"/>
-            </a:avLst>
-          </a:prstGeom>
-          <a:solidFill>
-            <a:srgbClr val="156082"/>
-          </a:solidFill>
-          <a:ln>
-            <a:noFill/>
-          </a:ln>
-          <a:effectLst/>
-        </p:spPr>
-        <p:style>
-          <a:lnRef idx="1">
-            <a:schemeClr val="accent1"/>
-          </a:lnRef>
-          <a:fillRef idx="3">
-            <a:schemeClr val="accent1"/>
-          </a:fillRef>
-          <a:effectRef idx="2">
-            <a:schemeClr val="accent1"/>
-          </a:effectRef>
-          <a:fontRef idx="minor">
-            <a:schemeClr val="lt1"/>
-          </a:fontRef>
-        </p:style>
-        <p:txBody>
-          <a:bodyPr rtlCol="0" anchor="ctr" wrap="none" lIns="0" rIns="0" tIns="0" bIns="0"/>
-          <a:lstStyle/>
-          <a:p>
-            <a:pPr algn="ctr"/>
-            <a:r>
-              <a:rPr sz="1200" b="1">
-                <a:solidFill>
-                  <a:srgbClr val="FFFFFF"/>
-                </a:solidFill>
-                <a:latin typeface="Calibri"/>
-              </a:rPr>
-              <a:t>GET</a:t>
-            </a:r>
-          </a:p>
-        </p:txBody>
-      </p:sp>
-      <p:sp>
-        <p:nvSpPr>
-          <p:cNvPr id="43" name="TextBox 42"/>
-          <p:cNvSpPr txBox="1"/>
-          <p:nvPr/>
-        </p:nvSpPr>
-        <p:spPr>
-          <a:xfrm>
-            <a:off x="7205472" y="3995928"/>
-            <a:ext cx="4364431" cy="256032"/>
-          </a:xfrm>
-          <a:prstGeom prst="rect">
-            <a:avLst/>
-          </a:prstGeom>
-          <a:noFill/>
-        </p:spPr>
-        <p:txBody>
-          <a:bodyPr wrap="square" anchor="ctr" lIns="0" rIns="0" tIns="0" bIns="0">
-            <a:noAutofit/>
-          </a:bodyPr>
-          <a:lstStyle/>
-          <a:p>
-            <a:pPr algn="l">
-              <a:spcBef>
-                <a:spcPts val="0"/>
-              </a:spcBef>
-              <a:spcAft>
-                <a:spcPts val="200"/>
-              </a:spcAft>
-            </a:pPr>
-            <a:r>
-              <a:rPr sz="1200" b="0" i="0">
-                <a:solidFill>
-                  <a:srgbClr val="0E2841"/>
-                </a:solidFill>
-                <a:latin typeface="Consolas"/>
-              </a:rPr>
-              <a:t>…/export  (NDJSON · Parquet)</a:t>
-            </a:r>
-          </a:p>
-        </p:txBody>
-      </p:sp>
-      <p:sp>
-        <p:nvSpPr>
-          <p:cNvPr id="44" name="TextBox 43"/>
-          <p:cNvSpPr txBox="1"/>
-          <p:nvPr/>
-        </p:nvSpPr>
-        <p:spPr>
-          <a:xfrm>
-            <a:off x="6190488" y="4754880"/>
-            <a:ext cx="5434279" cy="822960"/>
-          </a:xfrm>
-          <a:prstGeom prst="rect">
-            <a:avLst/>
-          </a:prstGeom>
-          <a:noFill/>
-        </p:spPr>
-        <p:txBody>
-          <a:bodyPr wrap="square" anchor="t" lIns="0" rIns="0" tIns="0" bIns="0">
-            <a:noAutofit/>
-          </a:bodyPr>
-          <a:lstStyle/>
-          <a:p>
-            <a:pPr algn="l">
-              <a:spcBef>
-                <a:spcPts val="0"/>
-              </a:spcBef>
-              <a:spcAft>
-                <a:spcPts val="200"/>
-              </a:spcAft>
-            </a:pPr>
-            <a:r>
               <a:rPr sz="1200" b="0" i="1">
                 <a:solidFill>
                   <a:srgbClr val="5B6B78"/>
                 </a:solidFill>
                 <a:latin typeface="Calibri"/>
               </a:rPr>
-              <a:t>Filters on the items resource: bbox, datetime, subtrajectory, leaf, limit, after (keyset).</a:t>
-            </a:r>
-          </a:p>
-        </p:txBody>
-      </p:sp>
-      <p:sp>
-        <p:nvSpPr>
-          <p:cNvPr id="45" name="Rectangle 44"/>
+              <a:t>Every path above is OGC API – Moving Features – Part 1: Core. acceleration is offered at the same path but returns 501 (not derivable for this motion model). Items query parameters: bbox, datetime, subtrajectory, leaf, limit, page cursor.</a:t>
+            </a:r>
+          </a:p>
+        </p:txBody>
+      </p:sp>
+      <p:sp>
+        <p:nvSpPr>
+          <p:cNvPr id="30" name="Rectangle 29"/>
           <p:cNvSpPr/>
           <p:nvPr/>
         </p:nvSpPr>
@@ -7307,7 +6718,7 @@
       </p:sp>
       <p:sp>
         <p:nvSpPr>
-          <p:cNvPr id="46" name="TextBox 45"/>
+          <p:cNvPr id="31" name="TextBox 30"/>
           <p:cNvSpPr txBox="1"/>
           <p:nvPr/>
         </p:nvSpPr>
@@ -7349,7 +6760,7 @@
       </p:sp>
       <p:sp>
         <p:nvSpPr>
-          <p:cNvPr id="47" name="TextBox 46"/>
+          <p:cNvPr id="32" name="TextBox 31"/>
           <p:cNvSpPr txBox="1"/>
           <p:nvPr/>
         </p:nvSpPr>
@@ -12539,7 +11950,7 @@
                 </a:solidFill>
                 <a:latin typeface="Calibri"/>
               </a:rPr>
-              <a:t>Linear: the vessel moves continuously between fixes</a:t>
+              <a:t>Linear, so the vessel moves continuously between fixes</a:t>
             </a:r>
           </a:p>
           <a:p>
@@ -12958,7 +12369,7 @@
                 </a:solidFill>
                 <a:latin typeface="Consolas"/>
               </a:rPr>
-              <a:t>/collections/ships/items?bbox=…</a:t>
+              <a:t>/collections/ships/items?bbox=720000,6160000,738000,6178000</a:t>
             </a:r>
           </a:p>
         </p:txBody>
@@ -13454,8 +12865,8 @@
         </p:blipFill>
         <p:spPr>
           <a:xfrm>
-            <a:off x="6995160" y="1627632"/>
-            <a:ext cx="4297680" cy="4297680"/>
+            <a:off x="6998486" y="1627632"/>
+            <a:ext cx="4291027" cy="4297680"/>
           </a:xfrm>
           <a:prstGeom prst="rect">
             <a:avLst/>
@@ -13470,8 +12881,8 @@
         </p:nvSpPr>
         <p:spPr>
           <a:xfrm>
-            <a:off x="6629400" y="6016752"/>
-            <a:ext cx="5029200" cy="274320"/>
+            <a:off x="6632726" y="6016752"/>
+            <a:ext cx="5022547" cy="274320"/>
           </a:xfrm>
           <a:prstGeom prst="rect">
             <a:avLst/>
@@ -13878,7 +13289,7 @@
                 </a:solidFill>
                 <a:latin typeface="Consolas"/>
               </a:rPr>
-              <a:t>…/items?subtrajectory=true</a:t>
+              <a:t>/collections/ships/items?subtrajectory=true</a:t>
             </a:r>
           </a:p>
         </p:txBody>
@@ -14531,8 +13942,8 @@
         </p:blipFill>
         <p:spPr>
           <a:xfrm>
-            <a:off x="7040879" y="1664208"/>
-            <a:ext cx="4206240" cy="4206240"/>
+            <a:off x="7044135" y="1664208"/>
+            <a:ext cx="4199728" cy="4206240"/>
           </a:xfrm>
           <a:prstGeom prst="rect">
             <a:avLst/>
@@ -14547,8 +13958,8 @@
         </p:nvSpPr>
         <p:spPr>
           <a:xfrm>
-            <a:off x="6675119" y="5961888"/>
-            <a:ext cx="4937759" cy="274320"/>
+            <a:off x="6678375" y="5961888"/>
+            <a:ext cx="4931248" cy="274320"/>
           </a:xfrm>
           <a:prstGeom prst="rect">
             <a:avLst/>
@@ -14814,7 +14225,7 @@
                 </a:solidFill>
                 <a:latin typeface="Calibri Light"/>
               </a:rPr>
-              <a:t>Create · Replace · Append · Delete</a:t>
+              <a:t>Create · Append · Delete</a:t>
             </a:r>
           </a:p>
         </p:txBody>
@@ -15681,7 +15092,7 @@
                 </a:solidFill>
                 <a:latin typeface="Consolas"/>
               </a:rPr>
-              <a:t>…/items/900001/tgsequence</a:t>
+              <a:t>/collections/ships/items/900001/tgsequence</a:t>
             </a:r>
           </a:p>
         </p:txBody>
@@ -16059,145 +15470,6 @@
         <p:spPr>
           <a:xfrm>
             <a:off x="6281928" y="1801368"/>
-            <a:ext cx="603504" cy="292608"/>
-          </a:xfrm>
-          <a:prstGeom prst="roundRect">
-            <a:avLst>
-              <a:gd name="adj" fmla="val 40000"/>
-            </a:avLst>
-          </a:prstGeom>
-          <a:solidFill>
-            <a:srgbClr val="E97132"/>
-          </a:solidFill>
-          <a:ln>
-            <a:noFill/>
-          </a:ln>
-          <a:effectLst/>
-        </p:spPr>
-        <p:style>
-          <a:lnRef idx="1">
-            <a:schemeClr val="accent1"/>
-          </a:lnRef>
-          <a:fillRef idx="3">
-            <a:schemeClr val="accent1"/>
-          </a:fillRef>
-          <a:effectRef idx="2">
-            <a:schemeClr val="accent1"/>
-          </a:effectRef>
-          <a:fontRef idx="minor">
-            <a:schemeClr val="lt1"/>
-          </a:fontRef>
-        </p:style>
-        <p:txBody>
-          <a:bodyPr rtlCol="0" anchor="ctr" wrap="none" lIns="0" rIns="0" tIns="0" bIns="0"/>
-          <a:lstStyle/>
-          <a:p>
-            <a:pPr algn="ctr"/>
-            <a:r>
-              <a:rPr sz="1200" b="1">
-                <a:solidFill>
-                  <a:srgbClr val="FFFFFF"/>
-                </a:solidFill>
-                <a:latin typeface="Calibri"/>
-              </a:rPr>
-              <a:t>PUT</a:t>
-            </a:r>
-          </a:p>
-        </p:txBody>
-      </p:sp>
-      <p:sp>
-        <p:nvSpPr>
-          <p:cNvPr id="14" name="TextBox 13"/>
-          <p:cNvSpPr txBox="1"/>
-          <p:nvPr/>
-        </p:nvSpPr>
-        <p:spPr>
-          <a:xfrm>
-            <a:off x="6976872" y="1783080"/>
-            <a:ext cx="4647895" cy="274320"/>
-          </a:xfrm>
-          <a:prstGeom prst="rect">
-            <a:avLst/>
-          </a:prstGeom>
-          <a:noFill/>
-        </p:spPr>
-        <p:txBody>
-          <a:bodyPr wrap="square" anchor="ctr" lIns="0" rIns="0" tIns="0" bIns="0">
-            <a:noAutofit/>
-          </a:bodyPr>
-          <a:lstStyle/>
-          <a:p>
-            <a:pPr algn="l">
-              <a:spcBef>
-                <a:spcPts val="0"/>
-              </a:spcBef>
-              <a:spcAft>
-                <a:spcPts val="200"/>
-              </a:spcAft>
-            </a:pPr>
-            <a:r>
-              <a:rPr sz="1200" b="1" i="0">
-                <a:solidFill>
-                  <a:srgbClr val="0E2841"/>
-                </a:solidFill>
-                <a:latin typeface="Consolas"/>
-              </a:rPr>
-              <a:t>…/items/900001</a:t>
-            </a:r>
-          </a:p>
-        </p:txBody>
-      </p:sp>
-      <p:sp>
-        <p:nvSpPr>
-          <p:cNvPr id="15" name="TextBox 14"/>
-          <p:cNvSpPr txBox="1"/>
-          <p:nvPr/>
-        </p:nvSpPr>
-        <p:spPr>
-          <a:xfrm>
-            <a:off x="6281928" y="2075688"/>
-            <a:ext cx="5342839" cy="274320"/>
-          </a:xfrm>
-          <a:prstGeom prst="rect">
-            <a:avLst/>
-          </a:prstGeom>
-          <a:noFill/>
-        </p:spPr>
-        <p:txBody>
-          <a:bodyPr wrap="square" anchor="t" lIns="0" rIns="0" tIns="0" bIns="0">
-            <a:noAutofit/>
-          </a:bodyPr>
-          <a:lstStyle/>
-          <a:p>
-            <a:pPr algn="l">
-              <a:spcBef>
-                <a:spcPts val="0"/>
-              </a:spcBef>
-              <a:spcAft>
-                <a:spcPts val="200"/>
-              </a:spcAft>
-            </a:pPr>
-            <a:r>
-              <a:rPr sz="1200" b="0" i="0">
-                <a:solidFill>
-                  <a:srgbClr val="5B6B78"/>
-                </a:solidFill>
-                <a:latin typeface="Calibri"/>
-              </a:rPr>
-              <a:t>200 replace the feature</a:t>
-            </a:r>
-          </a:p>
-        </p:txBody>
-      </p:sp>
-      <p:sp>
-        <p:nvSpPr>
-          <p:cNvPr id="16" name="Rounded Rectangle 15"/>
-          <p:cNvSpPr/>
-          <p:nvPr/>
-        </p:nvSpPr>
-        <p:spPr>
-          <a:xfrm>
-            <a:off x="6281928" y="2514600"/>
             <a:ext cx="932688" cy="292608"/>
           </a:xfrm>
           <a:prstGeom prst="roundRect">
@@ -16246,13 +15518,13 @@
       </p:sp>
       <p:sp>
         <p:nvSpPr>
-          <p:cNvPr id="17" name="TextBox 16"/>
+          <p:cNvPr id="14" name="TextBox 13"/>
           <p:cNvSpPr txBox="1"/>
           <p:nvPr/>
         </p:nvSpPr>
         <p:spPr>
           <a:xfrm>
-            <a:off x="7306056" y="2496312"/>
+            <a:off x="7306056" y="1783080"/>
             <a:ext cx="4318711" cy="274320"/>
           </a:xfrm>
           <a:prstGeom prst="rect">
@@ -16281,20 +15553,20 @@
                 </a:solidFill>
                 <a:latin typeface="Consolas"/>
               </a:rPr>
-              <a:t>…/items/900001</a:t>
-            </a:r>
-          </a:p>
-        </p:txBody>
-      </p:sp>
-      <p:sp>
-        <p:nvSpPr>
-          <p:cNvPr id="18" name="TextBox 17"/>
+              <a:t>/collections/ships/items/900001</a:t>
+            </a:r>
+          </a:p>
+        </p:txBody>
+      </p:sp>
+      <p:sp>
+        <p:nvSpPr>
+          <p:cNvPr id="15" name="TextBox 14"/>
           <p:cNvSpPr txBox="1"/>
           <p:nvPr/>
         </p:nvSpPr>
         <p:spPr>
           <a:xfrm>
-            <a:off x="6281928" y="2788920"/>
+            <a:off x="6281928" y="2075688"/>
             <a:ext cx="5342839" cy="274320"/>
           </a:xfrm>
           <a:prstGeom prst="rect">
@@ -16330,7 +15602,7 @@
       </p:sp>
       <p:sp>
         <p:nvSpPr>
-          <p:cNvPr id="19" name="TextBox 18"/>
+          <p:cNvPr id="16" name="TextBox 15"/>
           <p:cNvSpPr txBox="1"/>
           <p:nvPr/>
         </p:nvSpPr>
@@ -16473,7 +15745,7 @@
       </p:sp>
       <p:sp>
         <p:nvSpPr>
-          <p:cNvPr id="20" name="Rectangle 19"/>
+          <p:cNvPr id="17" name="Rectangle 16"/>
           <p:cNvSpPr/>
           <p:nvPr/>
         </p:nvSpPr>
@@ -16517,7 +15789,7 @@
       </p:sp>
       <p:sp>
         <p:nvSpPr>
-          <p:cNvPr id="21" name="TextBox 20"/>
+          <p:cNvPr id="18" name="TextBox 17"/>
           <p:cNvSpPr txBox="1"/>
           <p:nvPr/>
         </p:nvSpPr>
@@ -16559,7 +15831,7 @@
       </p:sp>
       <p:sp>
         <p:nvSpPr>
-          <p:cNvPr id="22" name="TextBox 21"/>
+          <p:cNvPr id="19" name="TextBox 18"/>
           <p:cNvSpPr txBox="1"/>
           <p:nvPr/>
         </p:nvSpPr>
@@ -16845,7 +16117,7 @@
                 </a:solidFill>
                 <a:latin typeface="Consolas"/>
               </a:rPr>
-              <a:t>…/items/1/tgsequence</a:t>
+              <a:t>/collections/ships/items/1/tgsequence</a:t>
             </a:r>
           </a:p>
         </p:txBody>
@@ -18144,7 +17416,7 @@
                 </a:solidFill>
                 <a:latin typeface="Consolas"/>
               </a:rPr>
-              <a:t>…/tgsequence/0/velocity</a:t>
+              <a:t>/collections/ships/items/1/tgsequence/0/velocity</a:t>
             </a:r>
           </a:p>
         </p:txBody>
@@ -19235,7 +18507,7 @@
                 </a:solidFill>
                 <a:latin typeface="Calibri"/>
               </a:rPr>
-              <a:t>not fabricated: with linear position the speed is a step function, so its derivative is not a finite function</a:t>
+              <a:t>not fabricated, because with linear position the speed is a step function whose derivative is not a finite function</a:t>
             </a:r>
           </a:p>
           <a:p>
@@ -19620,7 +18892,7 @@
                 </a:solidFill>
                 <a:latin typeface="Calibri"/>
               </a:rPr>
-              <a:t>implements OGC API – Moving Features – Part 1: Core: collections, items, temporal geometry, derived queries, temporal properties</a:t>
+              <a:t>implements OGC API – Moving Features – Part 1: Core (collections, items, temporal geometry, derived queries, temporal properties)</a:t>
             </a:r>
           </a:p>
           <a:p>
@@ -19793,8 +19065,8 @@
         </p:nvSpPr>
         <p:spPr>
           <a:xfrm>
-            <a:off x="7589520" y="1783080"/>
-            <a:ext cx="4023360" cy="3977639"/>
+            <a:off x="7589520" y="1627632"/>
+            <a:ext cx="4069080" cy="4224528"/>
           </a:xfrm>
           <a:prstGeom prst="roundRect">
             <a:avLst>
@@ -19839,8 +19111,8 @@
         </p:nvSpPr>
         <p:spPr>
           <a:xfrm>
-            <a:off x="7863840" y="1984248"/>
-            <a:ext cx="3474720" cy="274320"/>
+            <a:off x="7863840" y="1773936"/>
+            <a:ext cx="3520440" cy="274320"/>
           </a:xfrm>
           <a:prstGeom prst="rect">
             <a:avLst/>
@@ -19881,18 +19153,18 @@
         </p:nvSpPr>
         <p:spPr>
           <a:xfrm>
-            <a:off x="7909560" y="2560320"/>
-            <a:ext cx="3383280" cy="676656"/>
+            <a:off x="7909560" y="2121408"/>
+            <a:ext cx="1057655" cy="457200"/>
           </a:xfrm>
           <a:prstGeom prst="roundRect">
             <a:avLst>
-              <a:gd name="adj" fmla="val 12000"/>
+              <a:gd name="adj" fmla="val 16000"/>
             </a:avLst>
           </a:prstGeom>
           <a:solidFill>
             <a:srgbClr val="FFFFFF"/>
           </a:solidFill>
-          <a:ln w="19050">
+          <a:ln w="16510">
             <a:solidFill>
               <a:srgbClr val="0E2841"/>
             </a:solidFill>
@@ -19929,8 +19201,8 @@
         </p:nvSpPr>
         <p:spPr>
           <a:xfrm>
-            <a:off x="8092440" y="2660903"/>
-            <a:ext cx="3017520" cy="274320"/>
+            <a:off x="7909560" y="2231136"/>
+            <a:ext cx="1057655" cy="274320"/>
           </a:xfrm>
           <a:prstGeom prst="rect">
             <a:avLst/>
@@ -19943,7 +19215,7 @@
           </a:bodyPr>
           <a:lstStyle/>
           <a:p>
-            <a:pPr algn="l">
+            <a:pPr algn="ctr">
               <a:spcBef>
                 <a:spcPts val="0"/>
               </a:spcBef>
@@ -19952,27 +19224,75 @@
               </a:spcAft>
             </a:pPr>
             <a:r>
-              <a:rPr sz="1400" b="1" i="0">
+              <a:rPr sz="1200" b="1" i="0">
                 <a:solidFill>
                   <a:srgbClr val="0E2841"/>
                 </a:solidFill>
                 <a:latin typeface="Calibri"/>
               </a:rPr>
-              <a:t>HTTP client</a:t>
-            </a:r>
-          </a:p>
-        </p:txBody>
-      </p:sp>
-      <p:sp>
-        <p:nvSpPr>
-          <p:cNvPr id="10" name="TextBox 9"/>
+              <a:t>Browser</a:t>
+            </a:r>
+          </a:p>
+        </p:txBody>
+      </p:sp>
+      <p:sp>
+        <p:nvSpPr>
+          <p:cNvPr id="10" name="Rounded Rectangle 9"/>
+          <p:cNvSpPr/>
+          <p:nvPr/>
+        </p:nvSpPr>
+        <p:spPr>
+          <a:xfrm>
+            <a:off x="9095232" y="2121408"/>
+            <a:ext cx="1057655" cy="457200"/>
+          </a:xfrm>
+          <a:prstGeom prst="roundRect">
+            <a:avLst>
+              <a:gd name="adj" fmla="val 16000"/>
+            </a:avLst>
+          </a:prstGeom>
+          <a:solidFill>
+            <a:srgbClr val="FFFFFF"/>
+          </a:solidFill>
+          <a:ln w="16510">
+            <a:solidFill>
+              <a:srgbClr val="0E2841"/>
+            </a:solidFill>
+          </a:ln>
+          <a:effectLst/>
+        </p:spPr>
+        <p:style>
+          <a:lnRef idx="1">
+            <a:schemeClr val="accent1"/>
+          </a:lnRef>
+          <a:fillRef idx="3">
+            <a:schemeClr val="accent1"/>
+          </a:fillRef>
+          <a:effectRef idx="2">
+            <a:schemeClr val="accent1"/>
+          </a:effectRef>
+          <a:fontRef idx="minor">
+            <a:schemeClr val="lt1"/>
+          </a:fontRef>
+        </p:style>
+        <p:txBody>
+          <a:bodyPr rtlCol="0" anchor="ctr"/>
+          <a:lstStyle/>
+          <a:p>
+            <a:pPr algn="ctr"/>
+          </a:p>
+        </p:txBody>
+      </p:sp>
+      <p:sp>
+        <p:nvSpPr>
+          <p:cNvPr id="11" name="TextBox 10"/>
           <p:cNvSpPr txBox="1"/>
           <p:nvPr/>
         </p:nvSpPr>
         <p:spPr>
           <a:xfrm>
-            <a:off x="8092440" y="2944368"/>
-            <a:ext cx="3017520" cy="228600"/>
+            <a:off x="9095232" y="2231136"/>
+            <a:ext cx="1057655" cy="274320"/>
           </a:xfrm>
           <a:prstGeom prst="rect">
             <a:avLst/>
@@ -19985,7 +19305,7 @@
           </a:bodyPr>
           <a:lstStyle/>
           <a:p>
-            <a:pPr algn="l">
+            <a:pPr algn="ctr">
               <a:spcBef>
                 <a:spcPts val="0"/>
               </a:spcBef>
@@ -19994,27 +19314,75 @@
               </a:spcAft>
             </a:pPr>
             <a:r>
-              <a:rPr sz="1200" b="0" i="0">
-                <a:solidFill>
-                  <a:srgbClr val="5B6B78"/>
-                </a:solidFill>
-                <a:latin typeface="Consolas"/>
-              </a:rPr>
-              <a:t>browser · mobile · ETL</a:t>
-            </a:r>
-          </a:p>
-        </p:txBody>
-      </p:sp>
-      <p:sp>
-        <p:nvSpPr>
-          <p:cNvPr id="11" name="TextBox 10"/>
+              <a:rPr sz="1200" b="1" i="0">
+                <a:solidFill>
+                  <a:srgbClr val="0E2841"/>
+                </a:solidFill>
+                <a:latin typeface="Calibri"/>
+              </a:rPr>
+              <a:t>Mobile</a:t>
+            </a:r>
+          </a:p>
+        </p:txBody>
+      </p:sp>
+      <p:sp>
+        <p:nvSpPr>
+          <p:cNvPr id="12" name="Rounded Rectangle 11"/>
+          <p:cNvSpPr/>
+          <p:nvPr/>
+        </p:nvSpPr>
+        <p:spPr>
+          <a:xfrm>
+            <a:off x="10280903" y="2121408"/>
+            <a:ext cx="1057655" cy="457200"/>
+          </a:xfrm>
+          <a:prstGeom prst="roundRect">
+            <a:avLst>
+              <a:gd name="adj" fmla="val 16000"/>
+            </a:avLst>
+          </a:prstGeom>
+          <a:solidFill>
+            <a:srgbClr val="FFFFFF"/>
+          </a:solidFill>
+          <a:ln w="16510">
+            <a:solidFill>
+              <a:srgbClr val="0E2841"/>
+            </a:solidFill>
+          </a:ln>
+          <a:effectLst/>
+        </p:spPr>
+        <p:style>
+          <a:lnRef idx="1">
+            <a:schemeClr val="accent1"/>
+          </a:lnRef>
+          <a:fillRef idx="3">
+            <a:schemeClr val="accent1"/>
+          </a:fillRef>
+          <a:effectRef idx="2">
+            <a:schemeClr val="accent1"/>
+          </a:effectRef>
+          <a:fontRef idx="minor">
+            <a:schemeClr val="lt1"/>
+          </a:fontRef>
+        </p:style>
+        <p:txBody>
+          <a:bodyPr rtlCol="0" anchor="ctr"/>
+          <a:lstStyle/>
+          <a:p>
+            <a:pPr algn="ctr"/>
+          </a:p>
+        </p:txBody>
+      </p:sp>
+      <p:sp>
+        <p:nvSpPr>
+          <p:cNvPr id="13" name="TextBox 12"/>
           <p:cNvSpPr txBox="1"/>
           <p:nvPr/>
         </p:nvSpPr>
         <p:spPr>
           <a:xfrm>
-            <a:off x="7909560" y="3236976"/>
-            <a:ext cx="3383280" cy="237744"/>
+            <a:off x="10280903" y="2231136"/>
+            <a:ext cx="1057655" cy="274320"/>
           </a:xfrm>
           <a:prstGeom prst="rect">
             <a:avLst/>
@@ -20036,37 +19404,121 @@
               </a:spcAft>
             </a:pPr>
             <a:r>
+              <a:rPr sz="1200" b="1" i="0">
+                <a:solidFill>
+                  <a:srgbClr val="0E2841"/>
+                </a:solidFill>
+                <a:latin typeface="Calibri"/>
+              </a:rPr>
+              <a:t>ETL / lake</a:t>
+            </a:r>
+          </a:p>
+        </p:txBody>
+      </p:sp>
+      <p:sp>
+        <p:nvSpPr>
+          <p:cNvPr id="14" name="TextBox 13"/>
+          <p:cNvSpPr txBox="1"/>
+          <p:nvPr/>
+        </p:nvSpPr>
+        <p:spPr>
+          <a:xfrm>
+            <a:off x="7909560" y="2615184"/>
+            <a:ext cx="3429000" cy="219456"/>
+          </a:xfrm>
+          <a:prstGeom prst="rect">
+            <a:avLst/>
+          </a:prstGeom>
+          <a:noFill/>
+        </p:spPr>
+        <p:txBody>
+          <a:bodyPr wrap="square" anchor="t" lIns="0" rIns="0" tIns="0" bIns="0">
+            <a:noAutofit/>
+          </a:bodyPr>
+          <a:lstStyle/>
+          <a:p>
+            <a:pPr algn="ctr">
+              <a:spcBef>
+                <a:spcPts val="0"/>
+              </a:spcBef>
+              <a:spcAft>
+                <a:spcPts val="200"/>
+              </a:spcAft>
+            </a:pPr>
+            <a:r>
+              <a:rPr sz="1200" b="1" i="0">
+                <a:solidFill>
+                  <a:srgbClr val="156082"/>
+                </a:solidFill>
+                <a:latin typeface="Calibri"/>
+              </a:rPr>
+              <a:t>▼  HTTP</a:t>
+            </a:r>
+          </a:p>
+        </p:txBody>
+      </p:sp>
+      <p:sp>
+        <p:nvSpPr>
+          <p:cNvPr id="15" name="TextBox 14"/>
+          <p:cNvSpPr txBox="1"/>
+          <p:nvPr/>
+        </p:nvSpPr>
+        <p:spPr>
+          <a:xfrm>
+            <a:off x="7909560" y="2825496"/>
+            <a:ext cx="3429000" cy="201168"/>
+          </a:xfrm>
+          <a:prstGeom prst="rect">
+            <a:avLst/>
+          </a:prstGeom>
+          <a:noFill/>
+        </p:spPr>
+        <p:txBody>
+          <a:bodyPr wrap="square" anchor="t" lIns="0" rIns="0" tIns="0" bIns="0">
+            <a:noAutofit/>
+          </a:bodyPr>
+          <a:lstStyle/>
+          <a:p>
+            <a:pPr algn="ctr">
+              <a:spcBef>
+                <a:spcPts val="0"/>
+              </a:spcBef>
+              <a:spcAft>
+                <a:spcPts val="200"/>
+              </a:spcAft>
+            </a:pPr>
+            <a:r>
               <a:rPr sz="1200" b="0" i="0">
                 <a:solidFill>
                   <a:srgbClr val="5B6B78"/>
                 </a:solidFill>
-                <a:latin typeface="Calibri"/>
-              </a:rPr>
-              <a:t>▼</a:t>
-            </a:r>
-          </a:p>
-        </p:txBody>
-      </p:sp>
-      <p:sp>
-        <p:nvSpPr>
-          <p:cNvPr id="12" name="Rounded Rectangle 11"/>
+                <a:latin typeface="Consolas"/>
+              </a:rPr>
+              <a:t>OGC API – Moving Features · MF-JSON</a:t>
+            </a:r>
+          </a:p>
+        </p:txBody>
+      </p:sp>
+      <p:sp>
+        <p:nvSpPr>
+          <p:cNvPr id="16" name="Rounded Rectangle 15"/>
           <p:cNvSpPr/>
           <p:nvPr/>
         </p:nvSpPr>
         <p:spPr>
           <a:xfrm>
-            <a:off x="7909560" y="3547872"/>
-            <a:ext cx="3383280" cy="676656"/>
+            <a:off x="7909560" y="3108960"/>
+            <a:ext cx="3429000" cy="603504"/>
           </a:xfrm>
           <a:prstGeom prst="roundRect">
             <a:avLst>
-              <a:gd name="adj" fmla="val 12000"/>
+              <a:gd name="adj" fmla="val 10000"/>
             </a:avLst>
           </a:prstGeom>
           <a:solidFill>
             <a:srgbClr val="FFFFFF"/>
           </a:solidFill>
-          <a:ln w="19050">
+          <a:ln w="21590">
             <a:solidFill>
               <a:srgbClr val="156082"/>
             </a:solidFill>
@@ -20097,14 +19549,14 @@
       </p:sp>
       <p:sp>
         <p:nvSpPr>
-          <p:cNvPr id="13" name="TextBox 12"/>
+          <p:cNvPr id="17" name="TextBox 16"/>
           <p:cNvSpPr txBox="1"/>
           <p:nvPr/>
         </p:nvSpPr>
         <p:spPr>
           <a:xfrm>
-            <a:off x="8092440" y="3648456"/>
-            <a:ext cx="3017520" cy="274320"/>
+            <a:off x="8092440" y="3191256"/>
+            <a:ext cx="3063240" cy="274320"/>
           </a:xfrm>
           <a:prstGeom prst="rect">
             <a:avLst/>
@@ -20132,21 +19584,21 @@
                 </a:solidFill>
                 <a:latin typeface="Calibri"/>
               </a:rPr>
-              <a:t>MobilityAPI</a:t>
-            </a:r>
-          </a:p>
-        </p:txBody>
-      </p:sp>
-      <p:sp>
-        <p:nvSpPr>
-          <p:cNvPr id="14" name="TextBox 13"/>
+              <a:t>MobilityAPI (Go)</a:t>
+            </a:r>
+          </a:p>
+        </p:txBody>
+      </p:sp>
+      <p:sp>
+        <p:nvSpPr>
+          <p:cNvPr id="18" name="TextBox 17"/>
           <p:cNvSpPr txBox="1"/>
           <p:nvPr/>
         </p:nvSpPr>
         <p:spPr>
           <a:xfrm>
-            <a:off x="8092440" y="3931920"/>
-            <a:ext cx="3017520" cy="228600"/>
+            <a:off x="8092440" y="3456432"/>
+            <a:ext cx="3063240" cy="228600"/>
           </a:xfrm>
           <a:prstGeom prst="rect">
             <a:avLst/>
@@ -20174,21 +19626,21 @@
                 </a:solidFill>
                 <a:latin typeface="Consolas"/>
               </a:rPr>
-              <a:t>net/http + pgxpool (Go)</a:t>
-            </a:r>
-          </a:p>
-        </p:txBody>
-      </p:sp>
-      <p:sp>
-        <p:nvSpPr>
-          <p:cNvPr id="15" name="TextBox 14"/>
+              <a:t>net/http + pgxpool</a:t>
+            </a:r>
+          </a:p>
+        </p:txBody>
+      </p:sp>
+      <p:sp>
+        <p:nvSpPr>
+          <p:cNvPr id="19" name="TextBox 18"/>
           <p:cNvSpPr txBox="1"/>
           <p:nvPr/>
         </p:nvSpPr>
         <p:spPr>
           <a:xfrm>
-            <a:off x="7909560" y="4224528"/>
-            <a:ext cx="3383280" cy="237744"/>
+            <a:off x="7909560" y="3749040"/>
+            <a:ext cx="3429000" cy="219456"/>
           </a:xfrm>
           <a:prstGeom prst="rect">
             <a:avLst/>
@@ -20210,37 +19662,79 @@
               </a:spcAft>
             </a:pPr>
             <a:r>
+              <a:rPr sz="1200" b="1" i="0">
+                <a:solidFill>
+                  <a:srgbClr val="E97132"/>
+                </a:solidFill>
+                <a:latin typeface="Calibri"/>
+              </a:rPr>
+              <a:t>▼  SQL</a:t>
+            </a:r>
+          </a:p>
+        </p:txBody>
+      </p:sp>
+      <p:sp>
+        <p:nvSpPr>
+          <p:cNvPr id="20" name="TextBox 19"/>
+          <p:cNvSpPr txBox="1"/>
+          <p:nvPr/>
+        </p:nvSpPr>
+        <p:spPr>
+          <a:xfrm>
+            <a:off x="7909560" y="3959352"/>
+            <a:ext cx="3429000" cy="201168"/>
+          </a:xfrm>
+          <a:prstGeom prst="rect">
+            <a:avLst/>
+          </a:prstGeom>
+          <a:noFill/>
+        </p:spPr>
+        <p:txBody>
+          <a:bodyPr wrap="square" anchor="t" lIns="0" rIns="0" tIns="0" bIns="0">
+            <a:noAutofit/>
+          </a:bodyPr>
+          <a:lstStyle/>
+          <a:p>
+            <a:pPr algn="ctr">
+              <a:spcBef>
+                <a:spcPts val="0"/>
+              </a:spcBef>
+              <a:spcAft>
+                <a:spcPts val="200"/>
+              </a:spcAft>
+            </a:pPr>
+            <a:r>
               <a:rPr sz="1200" b="0" i="0">
                 <a:solidFill>
                   <a:srgbClr val="5B6B78"/>
                 </a:solidFill>
-                <a:latin typeface="Calibri"/>
-              </a:rPr>
-              <a:t>▼</a:t>
-            </a:r>
-          </a:p>
-        </p:txBody>
-      </p:sp>
-      <p:sp>
-        <p:nvSpPr>
-          <p:cNvPr id="16" name="Rounded Rectangle 15"/>
+                <a:latin typeface="Consolas"/>
+              </a:rPr>
+              <a:t>PostgreSQL wire · pgx</a:t>
+            </a:r>
+          </a:p>
+        </p:txBody>
+      </p:sp>
+      <p:sp>
+        <p:nvSpPr>
+          <p:cNvPr id="21" name="Rounded Rectangle 20"/>
           <p:cNvSpPr/>
           <p:nvPr/>
         </p:nvSpPr>
         <p:spPr>
           <a:xfrm>
-            <a:off x="7909560" y="4535424"/>
-            <a:ext cx="3383280" cy="676656"/>
+            <a:off x="7909560" y="4242816"/>
+            <a:ext cx="3429000" cy="621792"/>
           </a:xfrm>
           <a:prstGeom prst="roundRect">
             <a:avLst>
-              <a:gd name="adj" fmla="val 12000"/>
+              <a:gd name="adj" fmla="val 10000"/>
             </a:avLst>
           </a:prstGeom>
           <a:solidFill>
             <a:srgbClr val="FFFFFF"/>
           </a:solidFill>
-          <a:ln w="19050">
+          <a:ln w="21590">
             <a:solidFill>
               <a:srgbClr val="0E2841"/>
             </a:solidFill>
@@ -20271,14 +19765,14 @@
       </p:sp>
       <p:sp>
         <p:nvSpPr>
-          <p:cNvPr id="17" name="TextBox 16"/>
+          <p:cNvPr id="22" name="TextBox 21"/>
           <p:cNvSpPr txBox="1"/>
           <p:nvPr/>
         </p:nvSpPr>
         <p:spPr>
           <a:xfrm>
-            <a:off x="8092440" y="4636008"/>
-            <a:ext cx="3017520" cy="274320"/>
+            <a:off x="8092440" y="4334256"/>
+            <a:ext cx="3063240" cy="274320"/>
           </a:xfrm>
           <a:prstGeom prst="rect">
             <a:avLst/>
@@ -20300,7 +19794,7 @@
               </a:spcAft>
             </a:pPr>
             <a:r>
-              <a:rPr sz="1400" b="1" i="0">
+              <a:rPr sz="1200" b="1" i="0">
                 <a:solidFill>
                   <a:srgbClr val="0E2841"/>
                 </a:solidFill>
@@ -20313,14 +19807,14 @@
       </p:sp>
       <p:sp>
         <p:nvSpPr>
-          <p:cNvPr id="18" name="TextBox 17"/>
+          <p:cNvPr id="23" name="TextBox 22"/>
           <p:cNvSpPr txBox="1"/>
           <p:nvPr/>
         </p:nvSpPr>
         <p:spPr>
           <a:xfrm>
-            <a:off x="8092440" y="4919472"/>
-            <a:ext cx="3017520" cy="228600"/>
+            <a:off x="8092440" y="4599432"/>
+            <a:ext cx="3063240" cy="228600"/>
           </a:xfrm>
           <a:prstGeom prst="rect">
             <a:avLst/>
@@ -20355,7 +19849,7 @@
       </p:sp>
       <p:sp>
         <p:nvSpPr>
-          <p:cNvPr id="19" name="Rectangle 18"/>
+          <p:cNvPr id="24" name="Rectangle 23"/>
           <p:cNvSpPr/>
           <p:nvPr/>
         </p:nvSpPr>
@@ -20399,7 +19893,7 @@
       </p:sp>
       <p:sp>
         <p:nvSpPr>
-          <p:cNvPr id="20" name="TextBox 19"/>
+          <p:cNvPr id="25" name="TextBox 24"/>
           <p:cNvSpPr txBox="1"/>
           <p:nvPr/>
         </p:nvSpPr>
@@ -20441,7 +19935,7 @@
       </p:sp>
       <p:sp>
         <p:nvSpPr>
-          <p:cNvPr id="21" name="TextBox 20"/>
+          <p:cNvPr id="26" name="TextBox 25"/>
           <p:cNvSpPr txBox="1"/>
           <p:nvPr/>
         </p:nvSpPr>
@@ -20727,7 +20221,7 @@
                 </a:solidFill>
                 <a:latin typeface="Consolas"/>
               </a:rPr>
-              <a:t>…/items/1/tproperties</a:t>
+              <a:t>/collections/ships/items/1/tproperties</a:t>
             </a:r>
           </a:p>
         </p:txBody>
@@ -21554,7 +21048,7 @@
                 </a:solidFill>
                 <a:latin typeface="Consolas"/>
               </a:rPr>
-              <a:t>…/tproperties/velocity?leaf=…</a:t>
+              <a:t>/collections/ships/items/1/tproperties/velocity?leaf=...</a:t>
             </a:r>
           </a:p>
         </p:txBody>
@@ -23896,7 +23390,7 @@
                 </a:solidFill>
                 <a:latin typeface="Calibri"/>
               </a:rPr>
-              <a:t>streamed in one NDJSON export</a:t>
+              <a:t>in one streamed response</a:t>
             </a:r>
           </a:p>
         </p:txBody>
@@ -23993,7 +23487,7 @@
         </p:nvSpPr>
         <p:spPr>
           <a:xfrm>
-            <a:off x="4681728" y="1828800"/>
+            <a:off x="4681728" y="1920240"/>
             <a:ext cx="6943039" cy="4023360"/>
           </a:xfrm>
           <a:prstGeom prst="rect">
@@ -24015,11 +23509,11 @@
                 <a:spcPts val="0"/>
               </a:spcBef>
               <a:spcAft>
-                <a:spcPts val="1200"/>
-              </a:spcAft>
-            </a:pPr>
-            <a:r>
-              <a:rPr sz="1200" b="1">
+                <a:spcPts val="1600"/>
+              </a:spcAft>
+            </a:pPr>
+            <a:r>
+              <a:rPr sz="1400" b="1">
                 <a:solidFill>
                   <a:srgbClr val="196B24"/>
                 </a:solidFill>
@@ -24028,7 +23522,7 @@
               <a:t>▸  </a:t>
             </a:r>
             <a:r>
-              <a:rPr sz="1200" b="1">
+              <a:rPr sz="1400" b="1">
                 <a:solidFill>
                   <a:srgbClr val="0E2841"/>
                 </a:solidFill>
@@ -24037,7 +23531,7 @@
               <a:t>Streaming responses:  </a:t>
             </a:r>
             <a:r>
-              <a:rPr sz="1200">
+              <a:rPr sz="1400">
                 <a:solidFill>
                   <a:srgbClr val="1E2B36"/>
                 </a:solidFill>
@@ -24055,11 +23549,11 @@
                 <a:spcPts val="0"/>
               </a:spcBef>
               <a:spcAft>
-                <a:spcPts val="1200"/>
-              </a:spcAft>
-            </a:pPr>
-            <a:r>
-              <a:rPr sz="1200" b="1">
+                <a:spcPts val="1600"/>
+              </a:spcAft>
+            </a:pPr>
+            <a:r>
+              <a:rPr sz="1400" b="1">
                 <a:solidFill>
                   <a:srgbClr val="196B24"/>
                 </a:solidFill>
@@ -24068,7 +23562,7 @@
               <a:t>▸  </a:t>
             </a:r>
             <a:r>
-              <a:rPr sz="1200" b="1">
+              <a:rPr sz="1400" b="1">
                 <a:solidFill>
                   <a:srgbClr val="0E2841"/>
                 </a:solidFill>
@@ -24077,7 +23571,7 @@
               <a:t>Keyset pagination:  </a:t>
             </a:r>
             <a:r>
-              <a:rPr sz="1200">
+              <a:rPr sz="1400">
                 <a:solidFill>
                   <a:srgbClr val="1E2B36"/>
                 </a:solidFill>
@@ -24095,11 +23589,11 @@
                 <a:spcPts val="0"/>
               </a:spcBef>
               <a:spcAft>
-                <a:spcPts val="1200"/>
-              </a:spcAft>
-            </a:pPr>
-            <a:r>
-              <a:rPr sz="1200" b="1">
+                <a:spcPts val="1600"/>
+              </a:spcAft>
+            </a:pPr>
+            <a:r>
+              <a:rPr sz="1400" b="1">
                 <a:solidFill>
                   <a:srgbClr val="196B24"/>
                 </a:solidFill>
@@ -24108,7 +23602,7 @@
               <a:t>▸  </a:t>
             </a:r>
             <a:r>
-              <a:rPr sz="1200" b="1">
+              <a:rPr sz="1400" b="1">
                 <a:solidFill>
                   <a:srgbClr val="0E2841"/>
                 </a:solidFill>
@@ -24117,53 +23611,13 @@
               <a:t>Index-using filters:  </a:t>
             </a:r>
             <a:r>
-              <a:rPr sz="1200">
+              <a:rPr sz="1400">
                 <a:solidFill>
                   <a:srgbClr val="1E2B36"/>
                 </a:solidFill>
                 <a:latin typeface="Calibri"/>
               </a:rPr>
               <a:t>bbox and datetime push to the MobilityDB GiST index; subtrajectory clips with atTime</a:t>
-            </a:r>
-          </a:p>
-          <a:p>
-            <a:pPr>
-              <a:lnSpc>
-                <a:spcPct val="106000"/>
-              </a:lnSpc>
-              <a:spcBef>
-                <a:spcPts val="0"/>
-              </a:spcBef>
-              <a:spcAft>
-                <a:spcPts val="1200"/>
-              </a:spcAft>
-            </a:pPr>
-            <a:r>
-              <a:rPr sz="1200" b="1">
-                <a:solidFill>
-                  <a:srgbClr val="196B24"/>
-                </a:solidFill>
-                <a:latin typeface="Calibri"/>
-              </a:rPr>
-              <a:t>▸  </a:t>
-            </a:r>
-            <a:r>
-              <a:rPr sz="1200" b="1">
-                <a:solidFill>
-                  <a:srgbClr val="0E2841"/>
-                </a:solidFill>
-                <a:latin typeface="Calibri"/>
-              </a:rPr>
-              <a:t>Lakehouse export:  </a:t>
-            </a:r>
-            <a:r>
-              <a:rPr sz="1200">
-                <a:solidFill>
-                  <a:srgbClr val="1E2B36"/>
-                </a:solidFill>
-                <a:latin typeface="Calibri"/>
-              </a:rPr>
-              <a:t>NDJSON for direct ingestion, or Parquet carrying trajectory WKB plus a bbox and time sidecar; the row group bounds export memory</a:t>
             </a:r>
           </a:p>
         </p:txBody>
@@ -24205,7 +23659,7 @@
                 </a:solidFill>
                 <a:latin typeface="Calibri"/>
               </a:rPr>
-              <a:t>Every temporal computation stays in MobilityDB; the tier is a single static binary. A step toward the Data Lake House architecture in the MobilityDB ecosystem.</a:t>
+              <a:t>Every temporal computation stays in MobilityDB; the tier is a single static binary. Streaming, keyset paging and index-using filters keep cost bounded as the database grows.</a:t>
             </a:r>
           </a:p>
         </p:txBody>
@@ -24397,11 +23851,11 @@
             <a:r>
               <a:rPr sz="1200" b="1" i="0">
                 <a:solidFill>
-                  <a:srgbClr val="A02B93"/>
-                </a:solidFill>
-                <a:latin typeface="Calibri"/>
-              </a:rPr>
-              <a:t>FUTURE WORK</a:t>
+                  <a:srgbClr val="196B24"/>
+                </a:solidFill>
+                <a:latin typeface="Calibri"/>
+              </a:rPr>
+              <a:t>ADDITIONAL FEATURES</a:t>
             </a:r>
           </a:p>
         </p:txBody>
@@ -24443,7 +23897,7 @@
                 </a:solidFill>
                 <a:latin typeface="Calibri Light"/>
               </a:rPr>
-              <a:t>One Tier, Many MEOS Engines</a:t>
+              <a:t>Extensions Beyond the Standard</a:t>
             </a:r>
           </a:p>
         </p:txBody>
@@ -24463,7 +23917,7 @@
             <a:avLst/>
           </a:prstGeom>
           <a:solidFill>
-            <a:srgbClr val="A02B93"/>
+            <a:srgbClr val="196B24"/>
           </a:solidFill>
           <a:ln>
             <a:noFill/>
@@ -24500,12 +23954,100 @@
         </p:nvSpPr>
         <p:spPr>
           <a:xfrm>
-            <a:off x="566928" y="1645920"/>
-            <a:ext cx="11057839" cy="868680"/>
+            <a:off x="566928" y="1554480"/>
+            <a:ext cx="11057839" cy="512064"/>
           </a:xfrm>
           <a:prstGeom prst="roundRect">
             <a:avLst>
-              <a:gd name="adj" fmla="val 6000"/>
+              <a:gd name="adj" fmla="val 8000"/>
+            </a:avLst>
+          </a:prstGeom>
+          <a:solidFill>
+            <a:srgbClr val="C0392B"/>
+          </a:solidFill>
+          <a:ln>
+            <a:noFill/>
+          </a:ln>
+          <a:effectLst/>
+        </p:spPr>
+        <p:style>
+          <a:lnRef idx="1">
+            <a:schemeClr val="accent1"/>
+          </a:lnRef>
+          <a:fillRef idx="3">
+            <a:schemeClr val="accent1"/>
+          </a:fillRef>
+          <a:effectRef idx="2">
+            <a:schemeClr val="accent1"/>
+          </a:effectRef>
+          <a:fontRef idx="minor">
+            <a:schemeClr val="lt1"/>
+          </a:fontRef>
+        </p:style>
+        <p:txBody>
+          <a:bodyPr rtlCol="0" anchor="ctr"/>
+          <a:lstStyle/>
+          <a:p>
+            <a:pPr algn="ctr"/>
+          </a:p>
+        </p:txBody>
+      </p:sp>
+      <p:sp>
+        <p:nvSpPr>
+          <p:cNvPr id="6" name="TextBox 5"/>
+          <p:cNvSpPr txBox="1"/>
+          <p:nvPr/>
+        </p:nvSpPr>
+        <p:spPr>
+          <a:xfrm>
+            <a:off x="841247" y="1600200"/>
+            <a:ext cx="10509199" cy="411480"/>
+          </a:xfrm>
+          <a:prstGeom prst="rect">
+            <a:avLst/>
+          </a:prstGeom>
+          <a:noFill/>
+        </p:spPr>
+        <p:txBody>
+          <a:bodyPr wrap="square" anchor="ctr" lIns="0" rIns="0" tIns="0" bIns="0">
+            <a:noAutofit/>
+          </a:bodyPr>
+          <a:lstStyle/>
+          <a:p>
+            <a:pPr algn="l">
+              <a:spcBef>
+                <a:spcPts val="0"/>
+              </a:spcBef>
+              <a:spcAft>
+                <a:spcPts val="200"/>
+              </a:spcAft>
+            </a:pPr>
+            <a:r>
+              <a:rPr sz="1400" b="1" i="0">
+                <a:solidFill>
+                  <a:srgbClr val="FFFFFF"/>
+                </a:solidFill>
+                <a:latin typeface="Calibri"/>
+              </a:rPr>
+              <a:t>Not part of OGC API – Moving Features; excluded from conformsTo.</a:t>
+            </a:r>
+          </a:p>
+        </p:txBody>
+      </p:sp>
+      <p:sp>
+        <p:nvSpPr>
+          <p:cNvPr id="7" name="Rounded Rectangle 6"/>
+          <p:cNvSpPr/>
+          <p:nvPr/>
+        </p:nvSpPr>
+        <p:spPr>
+          <a:xfrm>
+            <a:off x="566928" y="2359152"/>
+            <a:ext cx="640080" cy="292608"/>
+          </a:xfrm>
+          <a:prstGeom prst="roundRect">
+            <a:avLst>
+              <a:gd name="adj" fmla="val 40000"/>
             </a:avLst>
           </a:prstGeom>
           <a:solidFill>
@@ -24531,23 +24073,32 @@
           </a:fontRef>
         </p:style>
         <p:txBody>
-          <a:bodyPr rtlCol="0" anchor="ctr"/>
+          <a:bodyPr rtlCol="0" anchor="ctr" wrap="none" lIns="0" rIns="0" tIns="0" bIns="0"/>
           <a:lstStyle/>
           <a:p>
             <a:pPr algn="ctr"/>
-          </a:p>
-        </p:txBody>
-      </p:sp>
-      <p:sp>
-        <p:nvSpPr>
-          <p:cNvPr id="6" name="TextBox 5"/>
+            <a:r>
+              <a:rPr sz="1200" b="1">
+                <a:solidFill>
+                  <a:srgbClr val="FFFFFF"/>
+                </a:solidFill>
+                <a:latin typeface="Calibri"/>
+              </a:rPr>
+              <a:t>GET</a:t>
+            </a:r>
+          </a:p>
+        </p:txBody>
+      </p:sp>
+      <p:sp>
+        <p:nvSpPr>
+          <p:cNvPr id="8" name="TextBox 7"/>
           <p:cNvSpPr txBox="1"/>
           <p:nvPr/>
         </p:nvSpPr>
         <p:spPr>
           <a:xfrm>
-            <a:off x="859536" y="1755648"/>
-            <a:ext cx="10472623" cy="320040"/>
+            <a:off x="1316736" y="2350008"/>
+            <a:ext cx="10308031" cy="274320"/>
           </a:xfrm>
           <a:prstGeom prst="rect">
             <a:avLst/>
@@ -24555,7 +24106,7 @@
           <a:noFill/>
         </p:spPr>
         <p:txBody>
-          <a:bodyPr wrap="square" anchor="t" lIns="0" rIns="0" tIns="0" bIns="0">
+          <a:bodyPr wrap="square" anchor="ctr" lIns="0" rIns="0" tIns="0" bIns="0">
             <a:noAutofit/>
           </a:bodyPr>
           <a:lstStyle/>
@@ -24569,27 +24120,27 @@
               </a:spcAft>
             </a:pPr>
             <a:r>
-              <a:rPr sz="1600" b="1" i="0">
-                <a:solidFill>
-                  <a:srgbClr val="FFFFFF"/>
-                </a:solidFill>
-                <a:latin typeface="Calibri"/>
-              </a:rPr>
-              <a:t>Thin OGC API – Moving Features tier</a:t>
-            </a:r>
-          </a:p>
-        </p:txBody>
-      </p:sp>
-      <p:sp>
-        <p:nvSpPr>
-          <p:cNvPr id="7" name="TextBox 6"/>
+              <a:rPr sz="1200" b="1" i="0">
+                <a:solidFill>
+                  <a:srgbClr val="0E2841"/>
+                </a:solidFill>
+                <a:latin typeface="Consolas"/>
+              </a:rPr>
+              <a:t>/collections/{collectionId}/export</a:t>
+            </a:r>
+          </a:p>
+        </p:txBody>
+      </p:sp>
+      <p:sp>
+        <p:nvSpPr>
+          <p:cNvPr id="9" name="TextBox 8"/>
           <p:cNvSpPr txBox="1"/>
           <p:nvPr/>
         </p:nvSpPr>
         <p:spPr>
           <a:xfrm>
-            <a:off x="859536" y="2139696"/>
-            <a:ext cx="10472623" cy="274320"/>
+            <a:off x="566928" y="2761488"/>
+            <a:ext cx="6812280" cy="1554480"/>
           </a:xfrm>
           <a:prstGeom prst="rect">
             <a:avLst/>
@@ -24597,83 +24148,142 @@
           <a:noFill/>
         </p:spPr>
         <p:txBody>
-          <a:bodyPr wrap="square" anchor="t" lIns="0" rIns="0" tIns="0" bIns="0">
+          <a:bodyPr wrap="square" lIns="0" rIns="0" tIns="0" bIns="0">
             <a:noAutofit/>
           </a:bodyPr>
           <a:lstStyle/>
           <a:p>
-            <a:pPr algn="l">
-              <a:spcBef>
-                <a:spcPts val="0"/>
-              </a:spcBef>
-              <a:spcAft>
-                <a:spcPts val="200"/>
-              </a:spcAft>
-            </a:pPr>
-            <a:r>
-              <a:rPr sz="1200" b="0" i="0">
-                <a:solidFill>
-                  <a:srgbClr val="CFE2EC"/>
-                </a:solidFill>
-                <a:latin typeface="Calibri"/>
-              </a:rPr>
-              <a:t>MF-JSON / WKB wire format  ·  streaming  ·  keyset paging  ·  index pushdown  ·  no MEOS in the tier</a:t>
-            </a:r>
-          </a:p>
-        </p:txBody>
-      </p:sp>
-      <p:sp>
-        <p:nvSpPr>
-          <p:cNvPr id="8" name="TextBox 7"/>
-          <p:cNvSpPr txBox="1"/>
-          <p:nvPr/>
-        </p:nvSpPr>
-        <p:spPr>
-          <a:xfrm>
-            <a:off x="566928" y="2633472"/>
-            <a:ext cx="11057839" cy="274320"/>
-          </a:xfrm>
-          <a:prstGeom prst="rect">
-            <a:avLst/>
-          </a:prstGeom>
-          <a:noFill/>
-        </p:spPr>
-        <p:txBody>
-          <a:bodyPr wrap="square" anchor="t" lIns="0" rIns="0" tIns="0" bIns="0">
-            <a:noAutofit/>
-          </a:bodyPr>
-          <a:lstStyle/>
-          <a:p>
-            <a:pPr algn="ctr">
-              <a:spcBef>
-                <a:spcPts val="0"/>
-              </a:spcBef>
-              <a:spcAft>
-                <a:spcPts val="200"/>
-              </a:spcAft>
-            </a:pPr>
-            <a:r>
-              <a:rPr sz="1200" b="0" i="0">
-                <a:solidFill>
-                  <a:srgbClr val="5B6B78"/>
-                </a:solidFill>
-                <a:latin typeface="Calibri"/>
-              </a:rPr>
-              <a:t>▼   serves any MEOS-backed engine; the engine becomes a configuration choice</a:t>
-            </a:r>
-          </a:p>
-        </p:txBody>
-      </p:sp>
-      <p:sp>
-        <p:nvSpPr>
-          <p:cNvPr id="9" name="Rounded Rectangle 8"/>
+            <a:pPr>
+              <a:lnSpc>
+                <a:spcPct val="106000"/>
+              </a:lnSpc>
+              <a:spcBef>
+                <a:spcPts val="0"/>
+              </a:spcBef>
+              <a:spcAft>
+                <a:spcPts val="900"/>
+              </a:spcAft>
+            </a:pPr>
+            <a:r>
+              <a:rPr sz="1200" b="1">
+                <a:solidFill>
+                  <a:srgbClr val="196B24"/>
+                </a:solidFill>
+                <a:latin typeface="Calibri"/>
+              </a:rPr>
+              <a:t>▸  </a:t>
+            </a:r>
+            <a:r>
+              <a:rPr sz="1200" b="1">
+                <a:solidFill>
+                  <a:srgbClr val="0E2841"/>
+                </a:solidFill>
+                <a:latin typeface="Calibri"/>
+              </a:rPr>
+              <a:t>NDJSON (default):  </a:t>
+            </a:r>
+            <a:r>
+              <a:rPr sz="1200">
+                <a:solidFill>
+                  <a:srgbClr val="1E2B36"/>
+                </a:solidFill>
+                <a:latin typeface="Calibri"/>
+              </a:rPr>
+              <a:t>one Feature per line, streamed; DuckDB, Spark and pandas ingest it directly</a:t>
+            </a:r>
+          </a:p>
+          <a:p>
+            <a:pPr>
+              <a:lnSpc>
+                <a:spcPct val="106000"/>
+              </a:lnSpc>
+              <a:spcBef>
+                <a:spcPts val="0"/>
+              </a:spcBef>
+              <a:spcAft>
+                <a:spcPts val="900"/>
+              </a:spcAft>
+            </a:pPr>
+            <a:r>
+              <a:rPr sz="1200" b="1">
+                <a:solidFill>
+                  <a:srgbClr val="196B24"/>
+                </a:solidFill>
+                <a:latin typeface="Calibri"/>
+              </a:rPr>
+              <a:t>▸  </a:t>
+            </a:r>
+            <a:r>
+              <a:rPr sz="1200" b="1">
+                <a:solidFill>
+                  <a:srgbClr val="0E2841"/>
+                </a:solidFill>
+                <a:latin typeface="Calibri"/>
+              </a:rPr>
+              <a:t>format=parquet:  </a:t>
+            </a:r>
+            <a:r>
+              <a:rPr sz="1200">
+                <a:solidFill>
+                  <a:srgbClr val="1E2B36"/>
+                </a:solidFill>
+                <a:latin typeface="Calibri"/>
+              </a:rPr>
+              <a:t>columnar trajectory WKB plus a bbox and time sidecar; the row group bounds export memory</a:t>
+            </a:r>
+          </a:p>
+          <a:p>
+            <a:pPr>
+              <a:lnSpc>
+                <a:spcPct val="106000"/>
+              </a:lnSpc>
+              <a:spcBef>
+                <a:spcPts val="0"/>
+              </a:spcBef>
+              <a:spcAft>
+                <a:spcPts val="900"/>
+              </a:spcAft>
+            </a:pPr>
+            <a:r>
+              <a:rPr sz="1200" b="1">
+                <a:solidFill>
+                  <a:srgbClr val="196B24"/>
+                </a:solidFill>
+                <a:latin typeface="Calibri"/>
+              </a:rPr>
+              <a:t>▸  </a:t>
+            </a:r>
+            <a:r>
+              <a:rPr sz="1200" b="1">
+                <a:solidFill>
+                  <a:srgbClr val="0E2841"/>
+                </a:solidFill>
+                <a:latin typeface="Calibri"/>
+              </a:rPr>
+              <a:t>enclosure link:  </a:t>
+            </a:r>
+            <a:r>
+              <a:rPr sz="1200">
+                <a:solidFill>
+                  <a:srgbClr val="1E2B36"/>
+                </a:solidFill>
+                <a:latin typeface="Calibri"/>
+              </a:rPr>
+              <a:t>advertised from the collection via the IANA enclosure relation</a:t>
+            </a:r>
+          </a:p>
+        </p:txBody>
+      </p:sp>
+      <p:sp>
+        <p:nvSpPr>
+          <p:cNvPr id="10" name="Rounded Rectangle 9"/>
           <p:cNvSpPr/>
           <p:nvPr/>
         </p:nvSpPr>
         <p:spPr>
           <a:xfrm>
-            <a:off x="566928" y="3108960"/>
-            <a:ext cx="2558719" cy="2331720"/>
+            <a:off x="7653527" y="2286000"/>
+            <a:ext cx="3971239" cy="2057400"/>
           </a:xfrm>
           <a:prstGeom prst="roundRect">
             <a:avLst>
@@ -24712,102 +24322,14 @@
       </p:sp>
       <p:sp>
         <p:nvSpPr>
-          <p:cNvPr id="10" name="Rounded Rectangle 9"/>
-          <p:cNvSpPr/>
-          <p:nvPr/>
-        </p:nvSpPr>
-        <p:spPr>
-          <a:xfrm>
-            <a:off x="566928" y="3108960"/>
-            <a:ext cx="2558719" cy="475488"/>
-          </a:xfrm>
-          <a:prstGeom prst="roundRect">
-            <a:avLst>
-              <a:gd name="adj" fmla="val 8000"/>
-            </a:avLst>
-          </a:prstGeom>
-          <a:solidFill>
-            <a:srgbClr val="156082"/>
-          </a:solidFill>
-          <a:ln>
-            <a:noFill/>
-          </a:ln>
-          <a:effectLst/>
-        </p:spPr>
-        <p:style>
-          <a:lnRef idx="1">
-            <a:schemeClr val="accent1"/>
-          </a:lnRef>
-          <a:fillRef idx="3">
-            <a:schemeClr val="accent1"/>
-          </a:fillRef>
-          <a:effectRef idx="2">
-            <a:schemeClr val="accent1"/>
-          </a:effectRef>
-          <a:fontRef idx="minor">
-            <a:schemeClr val="lt1"/>
-          </a:fontRef>
-        </p:style>
-        <p:txBody>
-          <a:bodyPr rtlCol="0" anchor="ctr"/>
-          <a:lstStyle/>
-          <a:p>
-            <a:pPr algn="ctr"/>
-          </a:p>
-        </p:txBody>
-      </p:sp>
-      <p:sp>
-        <p:nvSpPr>
           <p:cNvPr id="11" name="TextBox 10"/>
           <p:cNvSpPr txBox="1"/>
           <p:nvPr/>
         </p:nvSpPr>
         <p:spPr>
           <a:xfrm>
-            <a:off x="731520" y="3163824"/>
-            <a:ext cx="2284399" cy="365760"/>
-          </a:xfrm>
-          <a:prstGeom prst="rect">
-            <a:avLst/>
-          </a:prstGeom>
-          <a:noFill/>
-        </p:spPr>
-        <p:txBody>
-          <a:bodyPr wrap="square" anchor="ctr" lIns="0" rIns="0" tIns="0" bIns="0">
-            <a:noAutofit/>
-          </a:bodyPr>
-          <a:lstStyle/>
-          <a:p>
-            <a:pPr algn="l">
-              <a:spcBef>
-                <a:spcPts val="0"/>
-              </a:spcBef>
-              <a:spcAft>
-                <a:spcPts val="200"/>
-              </a:spcAft>
-            </a:pPr>
-            <a:r>
-              <a:rPr sz="1400" b="1" i="0">
-                <a:solidFill>
-                  <a:srgbClr val="FFFFFF"/>
-                </a:solidFill>
-                <a:latin typeface="Calibri"/>
-              </a:rPr>
-              <a:t>MobilityDB</a:t>
-            </a:r>
-          </a:p>
-        </p:txBody>
-      </p:sp>
-      <p:sp>
-        <p:nvSpPr>
-          <p:cNvPr id="12" name="TextBox 11"/>
-          <p:cNvSpPr txBox="1"/>
-          <p:nvPr/>
-        </p:nvSpPr>
-        <p:spPr>
-          <a:xfrm>
-            <a:off x="731520" y="3703320"/>
-            <a:ext cx="2284399" cy="274320"/>
+            <a:off x="7882127" y="2468880"/>
+            <a:ext cx="3468319" cy="640080"/>
           </a:xfrm>
           <a:prstGeom prst="rect">
             <a:avLst/>
@@ -24829,27 +24351,27 @@
               </a:spcAft>
             </a:pPr>
             <a:r>
-              <a:rPr sz="1200" b="1" i="0">
-                <a:solidFill>
-                  <a:srgbClr val="156082"/>
-                </a:solidFill>
-                <a:latin typeface="Consolas"/>
-              </a:rPr>
-              <a:t>PostgreSQL</a:t>
-            </a:r>
-          </a:p>
-        </p:txBody>
-      </p:sp>
-      <p:sp>
-        <p:nvSpPr>
-          <p:cNvPr id="13" name="TextBox 12"/>
+              <a:rPr sz="4000" b="1" i="0">
+                <a:solidFill>
+                  <a:srgbClr val="196B24"/>
+                </a:solidFill>
+                <a:latin typeface="Calibri Light"/>
+              </a:rPr>
+              <a:t>393 MB</a:t>
+            </a:r>
+          </a:p>
+        </p:txBody>
+      </p:sp>
+      <p:sp>
+        <p:nvSpPr>
+          <p:cNvPr id="12" name="TextBox 11"/>
           <p:cNvSpPr txBox="1"/>
           <p:nvPr/>
         </p:nvSpPr>
         <p:spPr>
           <a:xfrm>
-            <a:off x="731520" y="4041648"/>
-            <a:ext cx="2229535" cy="914400"/>
+            <a:off x="7882127" y="3163824"/>
+            <a:ext cx="3468319" cy="274320"/>
           </a:xfrm>
           <a:prstGeom prst="rect">
             <a:avLst/>
@@ -24873,25 +24395,25 @@
             <a:r>
               <a:rPr sz="1200" b="0" i="0">
                 <a:solidFill>
-                  <a:srgbClr val="1E2B36"/>
-                </a:solidFill>
-                <a:latin typeface="Calibri"/>
-              </a:rPr>
-              <a:t>Transactional serving over a live database.</a:t>
-            </a:r>
-          </a:p>
-        </p:txBody>
-      </p:sp>
-      <p:sp>
-        <p:nvSpPr>
-          <p:cNvPr id="14" name="TextBox 13"/>
+                  <a:srgbClr val="5B6B78"/>
+                </a:solidFill>
+                <a:latin typeface="Calibri"/>
+              </a:rPr>
+              <a:t>exported at about</a:t>
+            </a:r>
+          </a:p>
+        </p:txBody>
+      </p:sp>
+      <p:sp>
+        <p:nvSpPr>
+          <p:cNvPr id="13" name="TextBox 12"/>
           <p:cNvSpPr txBox="1"/>
           <p:nvPr/>
         </p:nvSpPr>
         <p:spPr>
           <a:xfrm>
-            <a:off x="731520" y="5074920"/>
-            <a:ext cx="2284399" cy="274320"/>
+            <a:off x="7882127" y="3474720"/>
+            <a:ext cx="3468319" cy="548640"/>
           </a:xfrm>
           <a:prstGeom prst="rect">
             <a:avLst/>
@@ -24913,161 +24435,27 @@
               </a:spcAft>
             </a:pPr>
             <a:r>
-              <a:rPr sz="1200" b="1" i="0">
-                <a:solidFill>
-                  <a:srgbClr val="196B24"/>
-                </a:solidFill>
-                <a:latin typeface="Calibri"/>
-              </a:rPr>
-              <a:t>Implemented today</a:t>
-            </a:r>
-          </a:p>
-        </p:txBody>
-      </p:sp>
-      <p:sp>
-        <p:nvSpPr>
-          <p:cNvPr id="15" name="Rounded Rectangle 14"/>
-          <p:cNvSpPr/>
-          <p:nvPr/>
-        </p:nvSpPr>
-        <p:spPr>
-          <a:xfrm>
-            <a:off x="3399967" y="3108960"/>
-            <a:ext cx="2558719" cy="2331720"/>
-          </a:xfrm>
-          <a:prstGeom prst="roundRect">
-            <a:avLst>
-              <a:gd name="adj" fmla="val 5000"/>
-            </a:avLst>
-          </a:prstGeom>
-          <a:solidFill>
-            <a:srgbClr val="F1F5F8"/>
-          </a:solidFill>
-          <a:ln>
-            <a:noFill/>
-          </a:ln>
-          <a:effectLst/>
-        </p:spPr>
-        <p:style>
-          <a:lnRef idx="1">
-            <a:schemeClr val="accent1"/>
-          </a:lnRef>
-          <a:fillRef idx="3">
-            <a:schemeClr val="accent1"/>
-          </a:fillRef>
-          <a:effectRef idx="2">
-            <a:schemeClr val="accent1"/>
-          </a:effectRef>
-          <a:fontRef idx="minor">
-            <a:schemeClr val="lt1"/>
-          </a:fontRef>
-        </p:style>
-        <p:txBody>
-          <a:bodyPr rtlCol="0" anchor="ctr"/>
-          <a:lstStyle/>
-          <a:p>
-            <a:pPr algn="ctr"/>
-          </a:p>
-        </p:txBody>
-      </p:sp>
-      <p:sp>
-        <p:nvSpPr>
-          <p:cNvPr id="16" name="Rounded Rectangle 15"/>
-          <p:cNvSpPr/>
-          <p:nvPr/>
-        </p:nvSpPr>
-        <p:spPr>
-          <a:xfrm>
-            <a:off x="3399967" y="3108960"/>
-            <a:ext cx="2558719" cy="475488"/>
-          </a:xfrm>
-          <a:prstGeom prst="roundRect">
-            <a:avLst>
-              <a:gd name="adj" fmla="val 8000"/>
-            </a:avLst>
-          </a:prstGeom>
-          <a:solidFill>
-            <a:srgbClr val="196B24"/>
-          </a:solidFill>
-          <a:ln>
-            <a:noFill/>
-          </a:ln>
-          <a:effectLst/>
-        </p:spPr>
-        <p:style>
-          <a:lnRef idx="1">
-            <a:schemeClr val="accent1"/>
-          </a:lnRef>
-          <a:fillRef idx="3">
-            <a:schemeClr val="accent1"/>
-          </a:fillRef>
-          <a:effectRef idx="2">
-            <a:schemeClr val="accent1"/>
-          </a:effectRef>
-          <a:fontRef idx="minor">
-            <a:schemeClr val="lt1"/>
-          </a:fontRef>
-        </p:style>
-        <p:txBody>
-          <a:bodyPr rtlCol="0" anchor="ctr"/>
-          <a:lstStyle/>
-          <a:p>
-            <a:pPr algn="ctr"/>
-          </a:p>
-        </p:txBody>
-      </p:sp>
-      <p:sp>
-        <p:nvSpPr>
-          <p:cNvPr id="17" name="TextBox 16"/>
+              <a:rPr sz="3200" b="1" i="0">
+                <a:solidFill>
+                  <a:srgbClr val="156082"/>
+                </a:solidFill>
+                <a:latin typeface="Calibri Light"/>
+              </a:rPr>
+              <a:t>18 MB</a:t>
+            </a:r>
+          </a:p>
+        </p:txBody>
+      </p:sp>
+      <p:sp>
+        <p:nvSpPr>
+          <p:cNvPr id="14" name="TextBox 13"/>
           <p:cNvSpPr txBox="1"/>
           <p:nvPr/>
         </p:nvSpPr>
         <p:spPr>
           <a:xfrm>
-            <a:off x="3564559" y="3163824"/>
-            <a:ext cx="2284399" cy="365760"/>
-          </a:xfrm>
-          <a:prstGeom prst="rect">
-            <a:avLst/>
-          </a:prstGeom>
-          <a:noFill/>
-        </p:spPr>
-        <p:txBody>
-          <a:bodyPr wrap="square" anchor="ctr" lIns="0" rIns="0" tIns="0" bIns="0">
-            <a:noAutofit/>
-          </a:bodyPr>
-          <a:lstStyle/>
-          <a:p>
-            <a:pPr algn="l">
-              <a:spcBef>
-                <a:spcPts val="0"/>
-              </a:spcBef>
-              <a:spcAft>
-                <a:spcPts val="200"/>
-              </a:spcAft>
-            </a:pPr>
-            <a:r>
-              <a:rPr sz="1400" b="1" i="0">
-                <a:solidFill>
-                  <a:srgbClr val="FFFFFF"/>
-                </a:solidFill>
-                <a:latin typeface="Calibri"/>
-              </a:rPr>
-              <a:t>MobilityDuck</a:t>
-            </a:r>
-          </a:p>
-        </p:txBody>
-      </p:sp>
-      <p:sp>
-        <p:nvSpPr>
-          <p:cNvPr id="18" name="TextBox 17"/>
-          <p:cNvSpPr txBox="1"/>
-          <p:nvPr/>
-        </p:nvSpPr>
-        <p:spPr>
-          <a:xfrm>
-            <a:off x="3564559" y="3703320"/>
-            <a:ext cx="2284399" cy="274320"/>
+            <a:off x="7882127" y="4069080"/>
+            <a:ext cx="3468319" cy="274320"/>
           </a:xfrm>
           <a:prstGeom prst="rect">
             <a:avLst/>
@@ -25089,161 +24477,31 @@
               </a:spcAft>
             </a:pPr>
             <a:r>
-              <a:rPr sz="1200" b="1" i="0">
-                <a:solidFill>
-                  <a:srgbClr val="196B24"/>
-                </a:solidFill>
-                <a:latin typeface="Consolas"/>
-              </a:rPr>
-              <a:t>DuckDB</a:t>
-            </a:r>
-          </a:p>
-        </p:txBody>
-      </p:sp>
-      <p:sp>
-        <p:nvSpPr>
-          <p:cNvPr id="19" name="TextBox 18"/>
-          <p:cNvSpPr txBox="1"/>
-          <p:nvPr/>
-        </p:nvSpPr>
-        <p:spPr>
-          <a:xfrm>
-            <a:off x="3564559" y="4041648"/>
-            <a:ext cx="2229535" cy="914400"/>
-          </a:xfrm>
-          <a:prstGeom prst="rect">
-            <a:avLst/>
-          </a:prstGeom>
-          <a:noFill/>
-        </p:spPr>
-        <p:txBody>
-          <a:bodyPr wrap="square" anchor="t" lIns="0" rIns="0" tIns="0" bIns="0">
-            <a:noAutofit/>
-          </a:bodyPr>
-          <a:lstStyle/>
-          <a:p>
-            <a:pPr algn="l">
-              <a:spcBef>
-                <a:spcPts val="0"/>
-              </a:spcBef>
-              <a:spcAft>
-                <a:spcPts val="200"/>
-              </a:spcAft>
-            </a:pPr>
-            <a:r>
               <a:rPr sz="1200" b="0" i="0">
                 <a:solidFill>
-                  <a:srgbClr val="1E2B36"/>
-                </a:solidFill>
-                <a:latin typeface="Calibri"/>
-              </a:rPr>
-              <a:t>Embedded, Parquet-native lakehouse queries.</a:t>
-            </a:r>
-          </a:p>
-        </p:txBody>
-      </p:sp>
-      <p:sp>
-        <p:nvSpPr>
-          <p:cNvPr id="20" name="TextBox 19"/>
-          <p:cNvSpPr txBox="1"/>
-          <p:nvPr/>
-        </p:nvSpPr>
-        <p:spPr>
-          <a:xfrm>
-            <a:off x="3564559" y="5074920"/>
-            <a:ext cx="2284399" cy="274320"/>
-          </a:xfrm>
-          <a:prstGeom prst="rect">
-            <a:avLst/>
-          </a:prstGeom>
-          <a:noFill/>
-        </p:spPr>
-        <p:txBody>
-          <a:bodyPr wrap="square" anchor="t" lIns="0" rIns="0" tIns="0" bIns="0">
-            <a:noAutofit/>
-          </a:bodyPr>
-          <a:lstStyle/>
-          <a:p>
-            <a:pPr algn="l">
-              <a:spcBef>
-                <a:spcPts val="0"/>
-              </a:spcBef>
-              <a:spcAft>
-                <a:spcPts val="200"/>
-              </a:spcAft>
-            </a:pPr>
-            <a:r>
-              <a:rPr sz="1200" b="1" i="0">
-                <a:solidFill>
                   <a:srgbClr val="5B6B78"/>
                 </a:solidFill>
                 <a:latin typeface="Calibri"/>
               </a:rPr>
-              <a:t>Direction</a:t>
-            </a:r>
-          </a:p>
-        </p:txBody>
-      </p:sp>
-      <p:sp>
-        <p:nvSpPr>
-          <p:cNvPr id="21" name="Rounded Rectangle 20"/>
+              <a:t>resident, bounded by the row group</a:t>
+            </a:r>
+          </a:p>
+        </p:txBody>
+      </p:sp>
+      <p:sp>
+        <p:nvSpPr>
+          <p:cNvPr id="15" name="Rounded Rectangle 14"/>
           <p:cNvSpPr/>
           <p:nvPr/>
         </p:nvSpPr>
         <p:spPr>
           <a:xfrm>
-            <a:off x="6233007" y="3108960"/>
-            <a:ext cx="2558719" cy="2331720"/>
+            <a:off x="566928" y="4617720"/>
+            <a:ext cx="603504" cy="292608"/>
           </a:xfrm>
           <a:prstGeom prst="roundRect">
             <a:avLst>
-              <a:gd name="adj" fmla="val 5000"/>
-            </a:avLst>
-          </a:prstGeom>
-          <a:solidFill>
-            <a:srgbClr val="F1F5F8"/>
-          </a:solidFill>
-          <a:ln>
-            <a:noFill/>
-          </a:ln>
-          <a:effectLst/>
-        </p:spPr>
-        <p:style>
-          <a:lnRef idx="1">
-            <a:schemeClr val="accent1"/>
-          </a:lnRef>
-          <a:fillRef idx="3">
-            <a:schemeClr val="accent1"/>
-          </a:fillRef>
-          <a:effectRef idx="2">
-            <a:schemeClr val="accent1"/>
-          </a:effectRef>
-          <a:fontRef idx="minor">
-            <a:schemeClr val="lt1"/>
-          </a:fontRef>
-        </p:style>
-        <p:txBody>
-          <a:bodyPr rtlCol="0" anchor="ctr"/>
-          <a:lstStyle/>
-          <a:p>
-            <a:pPr algn="ctr"/>
-          </a:p>
-        </p:txBody>
-      </p:sp>
-      <p:sp>
-        <p:nvSpPr>
-          <p:cNvPr id="22" name="Rounded Rectangle 21"/>
-          <p:cNvSpPr/>
-          <p:nvPr/>
-        </p:nvSpPr>
-        <p:spPr>
-          <a:xfrm>
-            <a:off x="6233007" y="3108960"/>
-            <a:ext cx="2558719" cy="475488"/>
-          </a:xfrm>
-          <a:prstGeom prst="roundRect">
-            <a:avLst>
-              <a:gd name="adj" fmla="val 8000"/>
+              <a:gd name="adj" fmla="val 40000"/>
             </a:avLst>
           </a:prstGeom>
           <a:solidFill>
@@ -25269,23 +24527,32 @@
           </a:fontRef>
         </p:style>
         <p:txBody>
-          <a:bodyPr rtlCol="0" anchor="ctr"/>
+          <a:bodyPr rtlCol="0" anchor="ctr" wrap="none" lIns="0" rIns="0" tIns="0" bIns="0"/>
           <a:lstStyle/>
           <a:p>
             <a:pPr algn="ctr"/>
-          </a:p>
-        </p:txBody>
-      </p:sp>
-      <p:sp>
-        <p:nvSpPr>
-          <p:cNvPr id="23" name="TextBox 22"/>
+            <a:r>
+              <a:rPr sz="1200" b="1">
+                <a:solidFill>
+                  <a:srgbClr val="FFFFFF"/>
+                </a:solidFill>
+                <a:latin typeface="Calibri"/>
+              </a:rPr>
+              <a:t>PUT</a:t>
+            </a:r>
+          </a:p>
+        </p:txBody>
+      </p:sp>
+      <p:sp>
+        <p:nvSpPr>
+          <p:cNvPr id="16" name="TextBox 15"/>
           <p:cNvSpPr txBox="1"/>
           <p:nvPr/>
         </p:nvSpPr>
         <p:spPr>
           <a:xfrm>
-            <a:off x="6397599" y="3163824"/>
-            <a:ext cx="2284399" cy="365760"/>
+            <a:off x="1280160" y="4608576"/>
+            <a:ext cx="10344607" cy="274320"/>
           </a:xfrm>
           <a:prstGeom prst="rect">
             <a:avLst/>
@@ -25307,27 +24574,90 @@
               </a:spcAft>
             </a:pPr>
             <a:r>
-              <a:rPr sz="1400" b="1" i="0">
-                <a:solidFill>
-                  <a:srgbClr val="FFFFFF"/>
-                </a:solidFill>
-                <a:latin typeface="Calibri"/>
-              </a:rPr>
-              <a:t>MobilitySpark</a:t>
-            </a:r>
-          </a:p>
-        </p:txBody>
-      </p:sp>
-      <p:sp>
-        <p:nvSpPr>
-          <p:cNvPr id="24" name="TextBox 23"/>
+              <a:rPr sz="1200" b="1" i="0">
+                <a:solidFill>
+                  <a:srgbClr val="0E2841"/>
+                </a:solidFill>
+                <a:latin typeface="Consolas"/>
+              </a:rPr>
+              <a:t>/collections/{collectionId}/items/{mFeatureId}</a:t>
+            </a:r>
+          </a:p>
+        </p:txBody>
+      </p:sp>
+      <p:sp>
+        <p:nvSpPr>
+          <p:cNvPr id="17" name="TextBox 16"/>
           <p:cNvSpPr txBox="1"/>
           <p:nvPr/>
         </p:nvSpPr>
         <p:spPr>
           <a:xfrm>
-            <a:off x="6397599" y="3703320"/>
-            <a:ext cx="2284399" cy="274320"/>
+            <a:off x="566928" y="5020056"/>
+            <a:ext cx="11057839" cy="731520"/>
+          </a:xfrm>
+          <a:prstGeom prst="rect">
+            <a:avLst/>
+          </a:prstGeom>
+          <a:noFill/>
+        </p:spPr>
+        <p:txBody>
+          <a:bodyPr wrap="square" lIns="0" rIns="0" tIns="0" bIns="0">
+            <a:noAutofit/>
+          </a:bodyPr>
+          <a:lstStyle/>
+          <a:p>
+            <a:pPr>
+              <a:lnSpc>
+                <a:spcPct val="106000"/>
+              </a:lnSpc>
+              <a:spcBef>
+                <a:spcPts val="0"/>
+              </a:spcBef>
+              <a:spcAft>
+                <a:spcPts val="800"/>
+              </a:spcAft>
+            </a:pPr>
+            <a:r>
+              <a:rPr sz="1200" b="1">
+                <a:solidFill>
+                  <a:srgbClr val="E97132"/>
+                </a:solidFill>
+                <a:latin typeface="Calibri"/>
+              </a:rPr>
+              <a:t>▸  </a:t>
+            </a:r>
+            <a:r>
+              <a:rPr sz="1200" b="1">
+                <a:solidFill>
+                  <a:srgbClr val="0E2841"/>
+                </a:solidFill>
+                <a:latin typeface="Calibri"/>
+              </a:rPr>
+              <a:t>In-place replace:  </a:t>
+            </a:r>
+            <a:r>
+              <a:rPr sz="1200">
+                <a:solidFill>
+                  <a:srgbClr val="1E2B36"/>
+                </a:solidFill>
+                <a:latin typeface="Calibri"/>
+              </a:rPr>
+              <a:t>the standard allows only GET and DELETE on a feature; PUT replaces its geometry and properties</a:t>
+            </a:r>
+          </a:p>
+        </p:txBody>
+      </p:sp>
+      <p:sp>
+        <p:nvSpPr>
+          <p:cNvPr id="18" name="TextBox 17"/>
+          <p:cNvSpPr txBox="1"/>
+          <p:nvPr/>
+        </p:nvSpPr>
+        <p:spPr>
+          <a:xfrm>
+            <a:off x="566928" y="5943600"/>
+            <a:ext cx="11057839" cy="457200"/>
           </a:xfrm>
           <a:prstGeom prst="rect">
             <a:avLst/>
@@ -25340,7 +24670,7 @@
           </a:bodyPr>
           <a:lstStyle/>
           <a:p>
-            <a:pPr algn="l">
+            <a:pPr algn="ctr">
               <a:spcBef>
                 <a:spcPts val="0"/>
               </a:spcBef>
@@ -25349,406 +24679,20 @@
               </a:spcAft>
             </a:pPr>
             <a:r>
-              <a:rPr sz="1200" b="1" i="0">
-                <a:solidFill>
-                  <a:srgbClr val="E97132"/>
-                </a:solidFill>
-                <a:latin typeface="Consolas"/>
-              </a:rPr>
-              <a:t>Apache Spark</a:t>
-            </a:r>
-          </a:p>
-        </p:txBody>
-      </p:sp>
-      <p:sp>
-        <p:nvSpPr>
-          <p:cNvPr id="25" name="TextBox 24"/>
-          <p:cNvSpPr txBox="1"/>
-          <p:nvPr/>
-        </p:nvSpPr>
-        <p:spPr>
-          <a:xfrm>
-            <a:off x="6397599" y="4041648"/>
-            <a:ext cx="2229535" cy="914400"/>
-          </a:xfrm>
-          <a:prstGeom prst="rect">
-            <a:avLst/>
-          </a:prstGeom>
-          <a:noFill/>
-        </p:spPr>
-        <p:txBody>
-          <a:bodyPr wrap="square" anchor="t" lIns="0" rIns="0" tIns="0" bIns="0">
-            <a:noAutofit/>
-          </a:bodyPr>
-          <a:lstStyle/>
-          <a:p>
-            <a:pPr algn="l">
-              <a:spcBef>
-                <a:spcPts val="0"/>
-              </a:spcBef>
-              <a:spcAft>
-                <a:spcPts val="200"/>
-              </a:spcAft>
-            </a:pPr>
-            <a:r>
-              <a:rPr sz="1200" b="0" i="0">
-                <a:solidFill>
-                  <a:srgbClr val="1E2B36"/>
-                </a:solidFill>
-                <a:latin typeface="Calibri"/>
-              </a:rPr>
-              <a:t>Distributed batch over very large histories.</a:t>
-            </a:r>
-          </a:p>
-        </p:txBody>
-      </p:sp>
-      <p:sp>
-        <p:nvSpPr>
-          <p:cNvPr id="26" name="TextBox 25"/>
-          <p:cNvSpPr txBox="1"/>
-          <p:nvPr/>
-        </p:nvSpPr>
-        <p:spPr>
-          <a:xfrm>
-            <a:off x="6397599" y="5074920"/>
-            <a:ext cx="2284399" cy="274320"/>
-          </a:xfrm>
-          <a:prstGeom prst="rect">
-            <a:avLst/>
-          </a:prstGeom>
-          <a:noFill/>
-        </p:spPr>
-        <p:txBody>
-          <a:bodyPr wrap="square" anchor="t" lIns="0" rIns="0" tIns="0" bIns="0">
-            <a:noAutofit/>
-          </a:bodyPr>
-          <a:lstStyle/>
-          <a:p>
-            <a:pPr algn="l">
-              <a:spcBef>
-                <a:spcPts val="0"/>
-              </a:spcBef>
-              <a:spcAft>
-                <a:spcPts val="200"/>
-              </a:spcAft>
-            </a:pPr>
-            <a:r>
-              <a:rPr sz="1200" b="1" i="0">
+              <a:rPr sz="1200" b="0" i="1">
                 <a:solidFill>
                   <a:srgbClr val="5B6B78"/>
                 </a:solidFill>
                 <a:latin typeface="Calibri"/>
               </a:rPr>
-              <a:t>Direction</a:t>
-            </a:r>
-          </a:p>
-        </p:txBody>
-      </p:sp>
-      <p:sp>
-        <p:nvSpPr>
-          <p:cNvPr id="27" name="Rounded Rectangle 26"/>
-          <p:cNvSpPr/>
-          <p:nvPr/>
-        </p:nvSpPr>
-        <p:spPr>
-          <a:xfrm>
-            <a:off x="9066047" y="3108960"/>
-            <a:ext cx="2558719" cy="2331720"/>
-          </a:xfrm>
-          <a:prstGeom prst="roundRect">
-            <a:avLst>
-              <a:gd name="adj" fmla="val 5000"/>
-            </a:avLst>
-          </a:prstGeom>
-          <a:solidFill>
-            <a:srgbClr val="F1F5F8"/>
-          </a:solidFill>
-          <a:ln>
-            <a:noFill/>
-          </a:ln>
-          <a:effectLst/>
-        </p:spPr>
-        <p:style>
-          <a:lnRef idx="1">
-            <a:schemeClr val="accent1"/>
-          </a:lnRef>
-          <a:fillRef idx="3">
-            <a:schemeClr val="accent1"/>
-          </a:fillRef>
-          <a:effectRef idx="2">
-            <a:schemeClr val="accent1"/>
-          </a:effectRef>
-          <a:fontRef idx="minor">
-            <a:schemeClr val="lt1"/>
-          </a:fontRef>
-        </p:style>
-        <p:txBody>
-          <a:bodyPr rtlCol="0" anchor="ctr"/>
-          <a:lstStyle/>
-          <a:p>
-            <a:pPr algn="ctr"/>
-          </a:p>
-        </p:txBody>
-      </p:sp>
-      <p:sp>
-        <p:nvSpPr>
-          <p:cNvPr id="28" name="Rounded Rectangle 27"/>
-          <p:cNvSpPr/>
-          <p:nvPr/>
-        </p:nvSpPr>
-        <p:spPr>
-          <a:xfrm>
-            <a:off x="9066047" y="3108960"/>
-            <a:ext cx="2558719" cy="475488"/>
-          </a:xfrm>
-          <a:prstGeom prst="roundRect">
-            <a:avLst>
-              <a:gd name="adj" fmla="val 8000"/>
-            </a:avLst>
-          </a:prstGeom>
-          <a:solidFill>
-            <a:srgbClr val="A02B93"/>
-          </a:solidFill>
-          <a:ln>
-            <a:noFill/>
-          </a:ln>
-          <a:effectLst/>
-        </p:spPr>
-        <p:style>
-          <a:lnRef idx="1">
-            <a:schemeClr val="accent1"/>
-          </a:lnRef>
-          <a:fillRef idx="3">
-            <a:schemeClr val="accent1"/>
-          </a:fillRef>
-          <a:effectRef idx="2">
-            <a:schemeClr val="accent1"/>
-          </a:effectRef>
-          <a:fontRef idx="minor">
-            <a:schemeClr val="lt1"/>
-          </a:fontRef>
-        </p:style>
-        <p:txBody>
-          <a:bodyPr rtlCol="0" anchor="ctr"/>
-          <a:lstStyle/>
-          <a:p>
-            <a:pPr algn="ctr"/>
-          </a:p>
-        </p:txBody>
-      </p:sp>
-      <p:sp>
-        <p:nvSpPr>
-          <p:cNvPr id="29" name="TextBox 28"/>
-          <p:cNvSpPr txBox="1"/>
-          <p:nvPr/>
-        </p:nvSpPr>
-        <p:spPr>
-          <a:xfrm>
-            <a:off x="9230639" y="3163824"/>
-            <a:ext cx="2284399" cy="365760"/>
-          </a:xfrm>
-          <a:prstGeom prst="rect">
-            <a:avLst/>
-          </a:prstGeom>
-          <a:noFill/>
-        </p:spPr>
-        <p:txBody>
-          <a:bodyPr wrap="square" anchor="ctr" lIns="0" rIns="0" tIns="0" bIns="0">
-            <a:noAutofit/>
-          </a:bodyPr>
-          <a:lstStyle/>
-          <a:p>
-            <a:pPr algn="l">
-              <a:spcBef>
-                <a:spcPts val="0"/>
-              </a:spcBef>
-              <a:spcAft>
-                <a:spcPts val="200"/>
-              </a:spcAft>
-            </a:pPr>
-            <a:r>
-              <a:rPr sz="1400" b="1" i="0">
-                <a:solidFill>
-                  <a:srgbClr val="FFFFFF"/>
-                </a:solidFill>
-                <a:latin typeface="Calibri"/>
-              </a:rPr>
-              <a:t>MobilityFlink</a:t>
-            </a:r>
-          </a:p>
-        </p:txBody>
-      </p:sp>
-      <p:sp>
-        <p:nvSpPr>
-          <p:cNvPr id="30" name="TextBox 29"/>
-          <p:cNvSpPr txBox="1"/>
-          <p:nvPr/>
-        </p:nvSpPr>
-        <p:spPr>
-          <a:xfrm>
-            <a:off x="9230639" y="3703320"/>
-            <a:ext cx="2284399" cy="274320"/>
-          </a:xfrm>
-          <a:prstGeom prst="rect">
-            <a:avLst/>
-          </a:prstGeom>
-          <a:noFill/>
-        </p:spPr>
-        <p:txBody>
-          <a:bodyPr wrap="square" anchor="t" lIns="0" rIns="0" tIns="0" bIns="0">
-            <a:noAutofit/>
-          </a:bodyPr>
-          <a:lstStyle/>
-          <a:p>
-            <a:pPr algn="l">
-              <a:spcBef>
-                <a:spcPts val="0"/>
-              </a:spcBef>
-              <a:spcAft>
-                <a:spcPts val="200"/>
-              </a:spcAft>
-            </a:pPr>
-            <a:r>
-              <a:rPr sz="1200" b="1" i="0">
-                <a:solidFill>
-                  <a:srgbClr val="A02B93"/>
-                </a:solidFill>
-                <a:latin typeface="Consolas"/>
-              </a:rPr>
-              <a:t>Apache Flink</a:t>
-            </a:r>
-          </a:p>
-        </p:txBody>
-      </p:sp>
-      <p:sp>
-        <p:nvSpPr>
-          <p:cNvPr id="31" name="TextBox 30"/>
-          <p:cNvSpPr txBox="1"/>
-          <p:nvPr/>
-        </p:nvSpPr>
-        <p:spPr>
-          <a:xfrm>
-            <a:off x="9230639" y="4041648"/>
-            <a:ext cx="2229535" cy="914400"/>
-          </a:xfrm>
-          <a:prstGeom prst="rect">
-            <a:avLst/>
-          </a:prstGeom>
-          <a:noFill/>
-        </p:spPr>
-        <p:txBody>
-          <a:bodyPr wrap="square" anchor="t" lIns="0" rIns="0" tIns="0" bIns="0">
-            <a:noAutofit/>
-          </a:bodyPr>
-          <a:lstStyle/>
-          <a:p>
-            <a:pPr algn="l">
-              <a:spcBef>
-                <a:spcPts val="0"/>
-              </a:spcBef>
-              <a:spcAft>
-                <a:spcPts val="200"/>
-              </a:spcAft>
-            </a:pPr>
-            <a:r>
-              <a:rPr sz="1200" b="0" i="0">
-                <a:solidFill>
-                  <a:srgbClr val="1E2B36"/>
-                </a:solidFill>
-                <a:latin typeface="Calibri"/>
-              </a:rPr>
-              <a:t>Streaming, real-time moving features.</a:t>
-            </a:r>
-          </a:p>
-        </p:txBody>
-      </p:sp>
-      <p:sp>
-        <p:nvSpPr>
-          <p:cNvPr id="32" name="TextBox 31"/>
-          <p:cNvSpPr txBox="1"/>
-          <p:nvPr/>
-        </p:nvSpPr>
-        <p:spPr>
-          <a:xfrm>
-            <a:off x="9230639" y="5074920"/>
-            <a:ext cx="2284399" cy="274320"/>
-          </a:xfrm>
-          <a:prstGeom prst="rect">
-            <a:avLst/>
-          </a:prstGeom>
-          <a:noFill/>
-        </p:spPr>
-        <p:txBody>
-          <a:bodyPr wrap="square" anchor="t" lIns="0" rIns="0" tIns="0" bIns="0">
-            <a:noAutofit/>
-          </a:bodyPr>
-          <a:lstStyle/>
-          <a:p>
-            <a:pPr algn="l">
-              <a:spcBef>
-                <a:spcPts val="0"/>
-              </a:spcBef>
-              <a:spcAft>
-                <a:spcPts val="200"/>
-              </a:spcAft>
-            </a:pPr>
-            <a:r>
-              <a:rPr sz="1200" b="1" i="0">
-                <a:solidFill>
-                  <a:srgbClr val="5B6B78"/>
-                </a:solidFill>
-                <a:latin typeface="Calibri"/>
-              </a:rPr>
-              <a:t>Direction</a:t>
-            </a:r>
-          </a:p>
-        </p:txBody>
-      </p:sp>
-      <p:sp>
-        <p:nvSpPr>
-          <p:cNvPr id="33" name="TextBox 32"/>
-          <p:cNvSpPr txBox="1"/>
-          <p:nvPr/>
-        </p:nvSpPr>
-        <p:spPr>
-          <a:xfrm>
-            <a:off x="566928" y="5669280"/>
-            <a:ext cx="11057839" cy="640080"/>
-          </a:xfrm>
-          <a:prstGeom prst="rect">
-            <a:avLst/>
-          </a:prstGeom>
-          <a:noFill/>
-        </p:spPr>
-        <p:txBody>
-          <a:bodyPr wrap="square" anchor="t" lIns="0" rIns="0" tIns="0" bIns="0">
-            <a:noAutofit/>
-          </a:bodyPr>
-          <a:lstStyle/>
-          <a:p>
-            <a:pPr algn="ctr">
-              <a:spcBef>
-                <a:spcPts val="0"/>
-              </a:spcBef>
-              <a:spcAft>
-                <a:spcPts val="200"/>
-              </a:spcAft>
-            </a:pPr>
-            <a:r>
-              <a:rPr sz="1200" b="0" i="1">
-                <a:solidFill>
-                  <a:srgbClr val="5B6B78"/>
-                </a:solidFill>
-                <a:latin typeface="Calibri"/>
-              </a:rPr>
-              <a:t>MEOS types and the MF-JSON / WKB wire format are shared across the ecosystem, so the same tier fronts a transactional database today and the lakehouse and streaming engines as they mature.</a:t>
-            </a:r>
-          </a:p>
-        </p:txBody>
-      </p:sp>
-      <p:sp>
-        <p:nvSpPr>
-          <p:cNvPr id="34" name="Rectangle 33"/>
+              <a:t>A step toward the Data Lake House architecture in the MobilityDB ecosystem.</a:t>
+            </a:r>
+          </a:p>
+        </p:txBody>
+      </p:sp>
+      <p:sp>
+        <p:nvSpPr>
+          <p:cNvPr id="19" name="Rectangle 18"/>
           <p:cNvSpPr/>
           <p:nvPr/>
         </p:nvSpPr>
@@ -25792,7 +24736,7 @@
       </p:sp>
       <p:sp>
         <p:nvSpPr>
-          <p:cNvPr id="35" name="TextBox 34"/>
+          <p:cNvPr id="20" name="TextBox 19"/>
           <p:cNvSpPr txBox="1"/>
           <p:nvPr/>
         </p:nvSpPr>
@@ -25834,7 +24778,7 @@
       </p:sp>
       <p:sp>
         <p:nvSpPr>
-          <p:cNvPr id="36" name="TextBox 35"/>
+          <p:cNvPr id="21" name="TextBox 20"/>
           <p:cNvSpPr txBox="1"/>
           <p:nvPr/>
         </p:nvSpPr>
@@ -25933,11 +24877,11 @@
             <a:r>
               <a:rPr sz="1200" b="1" i="0">
                 <a:solidFill>
-                  <a:srgbClr val="156082"/>
-                </a:solidFill>
-                <a:latin typeface="Calibri"/>
-              </a:rPr>
-              <a:t>RECAP</a:t>
+                  <a:srgbClr val="A02B93"/>
+                </a:solidFill>
+                <a:latin typeface="Calibri"/>
+              </a:rPr>
+              <a:t>FUTURE WORK</a:t>
             </a:r>
           </a:p>
         </p:txBody>
@@ -25979,7 +24923,7 @@
                 </a:solidFill>
                 <a:latin typeface="Calibri Light"/>
               </a:rPr>
-              <a:t>Everything the Server Implements</a:t>
+              <a:t>One Tier, Many MEOS Engines</a:t>
             </a:r>
           </a:p>
         </p:txBody>
@@ -25997,6 +24941,52 @@
           </a:xfrm>
           <a:prstGeom prst="rect">
             <a:avLst/>
+          </a:prstGeom>
+          <a:solidFill>
+            <a:srgbClr val="A02B93"/>
+          </a:solidFill>
+          <a:ln>
+            <a:noFill/>
+          </a:ln>
+          <a:effectLst/>
+        </p:spPr>
+        <p:style>
+          <a:lnRef idx="1">
+            <a:schemeClr val="accent1"/>
+          </a:lnRef>
+          <a:fillRef idx="3">
+            <a:schemeClr val="accent1"/>
+          </a:fillRef>
+          <a:effectRef idx="2">
+            <a:schemeClr val="accent1"/>
+          </a:effectRef>
+          <a:fontRef idx="minor">
+            <a:schemeClr val="lt1"/>
+          </a:fontRef>
+        </p:style>
+        <p:txBody>
+          <a:bodyPr rtlCol="0" anchor="ctr"/>
+          <a:lstStyle/>
+          <a:p>
+            <a:pPr algn="ctr"/>
+          </a:p>
+        </p:txBody>
+      </p:sp>
+      <p:sp>
+        <p:nvSpPr>
+          <p:cNvPr id="5" name="Rounded Rectangle 4"/>
+          <p:cNvSpPr/>
+          <p:nvPr/>
+        </p:nvSpPr>
+        <p:spPr>
+          <a:xfrm>
+            <a:off x="566928" y="1645920"/>
+            <a:ext cx="11057839" cy="868680"/>
+          </a:xfrm>
+          <a:prstGeom prst="roundRect">
+            <a:avLst>
+              <a:gd name="adj" fmla="val 6000"/>
+            </a:avLst>
           </a:prstGeom>
           <a:solidFill>
             <a:srgbClr val="156082"/>
@@ -26030,18 +25020,144 @@
       </p:sp>
       <p:sp>
         <p:nvSpPr>
-          <p:cNvPr id="5" name="Rounded Rectangle 4"/>
+          <p:cNvPr id="6" name="TextBox 5"/>
+          <p:cNvSpPr txBox="1"/>
+          <p:nvPr/>
+        </p:nvSpPr>
+        <p:spPr>
+          <a:xfrm>
+            <a:off x="859536" y="1755648"/>
+            <a:ext cx="10472623" cy="320040"/>
+          </a:xfrm>
+          <a:prstGeom prst="rect">
+            <a:avLst/>
+          </a:prstGeom>
+          <a:noFill/>
+        </p:spPr>
+        <p:txBody>
+          <a:bodyPr wrap="square" anchor="t" lIns="0" rIns="0" tIns="0" bIns="0">
+            <a:noAutofit/>
+          </a:bodyPr>
+          <a:lstStyle/>
+          <a:p>
+            <a:pPr algn="l">
+              <a:spcBef>
+                <a:spcPts val="0"/>
+              </a:spcBef>
+              <a:spcAft>
+                <a:spcPts val="200"/>
+              </a:spcAft>
+            </a:pPr>
+            <a:r>
+              <a:rPr sz="1600" b="1" i="0">
+                <a:solidFill>
+                  <a:srgbClr val="FFFFFF"/>
+                </a:solidFill>
+                <a:latin typeface="Calibri"/>
+              </a:rPr>
+              <a:t>Thin OGC API – Moving Features tier</a:t>
+            </a:r>
+          </a:p>
+        </p:txBody>
+      </p:sp>
+      <p:sp>
+        <p:nvSpPr>
+          <p:cNvPr id="7" name="TextBox 6"/>
+          <p:cNvSpPr txBox="1"/>
+          <p:nvPr/>
+        </p:nvSpPr>
+        <p:spPr>
+          <a:xfrm>
+            <a:off x="859536" y="2139696"/>
+            <a:ext cx="10472623" cy="274320"/>
+          </a:xfrm>
+          <a:prstGeom prst="rect">
+            <a:avLst/>
+          </a:prstGeom>
+          <a:noFill/>
+        </p:spPr>
+        <p:txBody>
+          <a:bodyPr wrap="square" anchor="t" lIns="0" rIns="0" tIns="0" bIns="0">
+            <a:noAutofit/>
+          </a:bodyPr>
+          <a:lstStyle/>
+          <a:p>
+            <a:pPr algn="l">
+              <a:spcBef>
+                <a:spcPts val="0"/>
+              </a:spcBef>
+              <a:spcAft>
+                <a:spcPts val="200"/>
+              </a:spcAft>
+            </a:pPr>
+            <a:r>
+              <a:rPr sz="1200" b="0" i="0">
+                <a:solidFill>
+                  <a:srgbClr val="CFE2EC"/>
+                </a:solidFill>
+                <a:latin typeface="Calibri"/>
+              </a:rPr>
+              <a:t>MF-JSON / WKB wire format  ·  streaming  ·  keyset paging  ·  index pushdown  ·  no MEOS in the tier</a:t>
+            </a:r>
+          </a:p>
+        </p:txBody>
+      </p:sp>
+      <p:sp>
+        <p:nvSpPr>
+          <p:cNvPr id="8" name="TextBox 7"/>
+          <p:cNvSpPr txBox="1"/>
+          <p:nvPr/>
+        </p:nvSpPr>
+        <p:spPr>
+          <a:xfrm>
+            <a:off x="566928" y="2633472"/>
+            <a:ext cx="11057839" cy="274320"/>
+          </a:xfrm>
+          <a:prstGeom prst="rect">
+            <a:avLst/>
+          </a:prstGeom>
+          <a:noFill/>
+        </p:spPr>
+        <p:txBody>
+          <a:bodyPr wrap="square" anchor="t" lIns="0" rIns="0" tIns="0" bIns="0">
+            <a:noAutofit/>
+          </a:bodyPr>
+          <a:lstStyle/>
+          <a:p>
+            <a:pPr algn="ctr">
+              <a:spcBef>
+                <a:spcPts val="0"/>
+              </a:spcBef>
+              <a:spcAft>
+                <a:spcPts val="200"/>
+              </a:spcAft>
+            </a:pPr>
+            <a:r>
+              <a:rPr sz="1200" b="0" i="0">
+                <a:solidFill>
+                  <a:srgbClr val="5B6B78"/>
+                </a:solidFill>
+                <a:latin typeface="Calibri"/>
+              </a:rPr>
+              <a:t>▼   serves any MEOS-backed engine; the engine becomes a configuration choice</a:t>
+            </a:r>
+          </a:p>
+        </p:txBody>
+      </p:sp>
+      <p:sp>
+        <p:nvSpPr>
+          <p:cNvPr id="9" name="Rounded Rectangle 8"/>
           <p:cNvSpPr/>
           <p:nvPr/>
         </p:nvSpPr>
         <p:spPr>
           <a:xfrm>
-            <a:off x="566928" y="1645920"/>
-            <a:ext cx="3503066" cy="2057400"/>
+            <a:off x="566928" y="3108960"/>
+            <a:ext cx="2558719" cy="2331720"/>
           </a:xfrm>
           <a:prstGeom prst="roundRect">
             <a:avLst>
-              <a:gd name="adj" fmla="val 4000"/>
+              <a:gd name="adj" fmla="val 5000"/>
             </a:avLst>
           </a:prstGeom>
           <a:solidFill>
@@ -26076,17 +25192,19 @@
       </p:sp>
       <p:sp>
         <p:nvSpPr>
-          <p:cNvPr id="6" name="Rectangle 5"/>
+          <p:cNvPr id="10" name="Rounded Rectangle 9"/>
           <p:cNvSpPr/>
           <p:nvPr/>
         </p:nvSpPr>
         <p:spPr>
           <a:xfrm>
-            <a:off x="566928" y="1645920"/>
-            <a:ext cx="82296" cy="2057400"/>
-          </a:xfrm>
-          <a:prstGeom prst="rect">
-            <a:avLst/>
+            <a:off x="566928" y="3108960"/>
+            <a:ext cx="2558719" cy="475488"/>
+          </a:xfrm>
+          <a:prstGeom prst="roundRect">
+            <a:avLst>
+              <a:gd name="adj" fmla="val 8000"/>
+            </a:avLst>
           </a:prstGeom>
           <a:solidFill>
             <a:srgbClr val="156082"/>
@@ -26120,14 +25238,56 @@
       </p:sp>
       <p:sp>
         <p:nvSpPr>
-          <p:cNvPr id="7" name="TextBox 6"/>
+          <p:cNvPr id="11" name="TextBox 10"/>
           <p:cNvSpPr txBox="1"/>
           <p:nvPr/>
         </p:nvSpPr>
         <p:spPr>
           <a:xfrm>
-            <a:off x="822960" y="1792224"/>
-            <a:ext cx="3137306" cy="274320"/>
+            <a:off x="731520" y="3163824"/>
+            <a:ext cx="2284399" cy="365760"/>
+          </a:xfrm>
+          <a:prstGeom prst="rect">
+            <a:avLst/>
+          </a:prstGeom>
+          <a:noFill/>
+        </p:spPr>
+        <p:txBody>
+          <a:bodyPr wrap="square" anchor="ctr" lIns="0" rIns="0" tIns="0" bIns="0">
+            <a:noAutofit/>
+          </a:bodyPr>
+          <a:lstStyle/>
+          <a:p>
+            <a:pPr algn="l">
+              <a:spcBef>
+                <a:spcPts val="0"/>
+              </a:spcBef>
+              <a:spcAft>
+                <a:spcPts val="200"/>
+              </a:spcAft>
+            </a:pPr>
+            <a:r>
+              <a:rPr sz="1400" b="1" i="0">
+                <a:solidFill>
+                  <a:srgbClr val="FFFFFF"/>
+                </a:solidFill>
+                <a:latin typeface="Calibri"/>
+              </a:rPr>
+              <a:t>MobilityDB</a:t>
+            </a:r>
+          </a:p>
+        </p:txBody>
+      </p:sp>
+      <p:sp>
+        <p:nvSpPr>
+          <p:cNvPr id="12" name="TextBox 11"/>
+          <p:cNvSpPr txBox="1"/>
+          <p:nvPr/>
+        </p:nvSpPr>
+        <p:spPr>
+          <a:xfrm>
+            <a:off x="731520" y="3703320"/>
+            <a:ext cx="2284399" cy="274320"/>
           </a:xfrm>
           <a:prstGeom prst="rect">
             <a:avLst/>
@@ -26153,23 +25313,23 @@
                 <a:solidFill>
                   <a:srgbClr val="156082"/>
                 </a:solidFill>
-                <a:latin typeface="Calibri"/>
-              </a:rPr>
-              <a:t>COLLECTIONS</a:t>
-            </a:r>
-          </a:p>
-        </p:txBody>
-      </p:sp>
-      <p:sp>
-        <p:nvSpPr>
-          <p:cNvPr id="8" name="TextBox 7"/>
+                <a:latin typeface="Consolas"/>
+              </a:rPr>
+              <a:t>PostgreSQL</a:t>
+            </a:r>
+          </a:p>
+        </p:txBody>
+      </p:sp>
+      <p:sp>
+        <p:nvSpPr>
+          <p:cNvPr id="13" name="TextBox 12"/>
           <p:cNvSpPr txBox="1"/>
           <p:nvPr/>
         </p:nvSpPr>
         <p:spPr>
           <a:xfrm>
-            <a:off x="822960" y="2148840"/>
-            <a:ext cx="3045866" cy="1463040"/>
+            <a:off x="731520" y="4041648"/>
+            <a:ext cx="2229535" cy="914400"/>
           </a:xfrm>
           <a:prstGeom prst="rect">
             <a:avLst/>
@@ -26177,110 +25337,87 @@
           <a:noFill/>
         </p:spPr>
         <p:txBody>
-          <a:bodyPr wrap="square" lIns="0" rIns="0" tIns="0" bIns="0">
+          <a:bodyPr wrap="square" anchor="t" lIns="0" rIns="0" tIns="0" bIns="0">
             <a:noAutofit/>
           </a:bodyPr>
           <a:lstStyle/>
           <a:p>
-            <a:pPr>
-              <a:lnSpc>
-                <a:spcPct val="100000"/>
-              </a:lnSpc>
-              <a:spcAft>
-                <a:spcPts val="300"/>
-              </a:spcAft>
-            </a:pPr>
-            <a:r>
-              <a:rPr sz="1200" b="1">
-                <a:solidFill>
-                  <a:srgbClr val="156082"/>
-                </a:solidFill>
-                <a:latin typeface="Calibri"/>
-              </a:rPr>
-              <a:t>✓ </a:t>
-            </a:r>
-            <a:r>
-              <a:rPr sz="1200">
+            <a:pPr algn="l">
+              <a:spcBef>
+                <a:spcPts val="0"/>
+              </a:spcBef>
+              <a:spcAft>
+                <a:spcPts val="200"/>
+              </a:spcAft>
+            </a:pPr>
+            <a:r>
+              <a:rPr sz="1200" b="0" i="0">
                 <a:solidFill>
                   <a:srgbClr val="1E2B36"/>
                 </a:solidFill>
                 <a:latin typeface="Calibri"/>
               </a:rPr>
-              <a:t>list (GET)</a:t>
-            </a:r>
-          </a:p>
-          <a:p>
-            <a:pPr>
-              <a:lnSpc>
-                <a:spcPct val="100000"/>
-              </a:lnSpc>
-              <a:spcAft>
-                <a:spcPts val="300"/>
-              </a:spcAft>
-            </a:pPr>
-            <a:r>
-              <a:rPr sz="1200" b="1">
-                <a:solidFill>
-                  <a:srgbClr val="156082"/>
-                </a:solidFill>
-                <a:latin typeface="Calibri"/>
-              </a:rPr>
-              <a:t>✓ </a:t>
-            </a:r>
-            <a:r>
-              <a:rPr sz="1200">
-                <a:solidFill>
-                  <a:srgbClr val="1E2B36"/>
-                </a:solidFill>
-                <a:latin typeface="Calibri"/>
-              </a:rPr>
-              <a:t>retrieve (GET)</a:t>
-            </a:r>
-          </a:p>
-          <a:p>
-            <a:pPr>
-              <a:lnSpc>
-                <a:spcPct val="100000"/>
-              </a:lnSpc>
-              <a:spcAft>
-                <a:spcPts val="300"/>
-              </a:spcAft>
-            </a:pPr>
-            <a:r>
-              <a:rPr sz="1200" b="1">
-                <a:solidFill>
-                  <a:srgbClr val="156082"/>
-                </a:solidFill>
-                <a:latin typeface="Calibri"/>
-              </a:rPr>
-              <a:t>✓ </a:t>
-            </a:r>
-            <a:r>
-              <a:rPr sz="1200">
-                <a:solidFill>
-                  <a:srgbClr val="1E2B36"/>
-                </a:solidFill>
-                <a:latin typeface="Calibri"/>
-              </a:rPr>
-              <a:t>registry-backed</a:t>
-            </a:r>
-          </a:p>
-        </p:txBody>
-      </p:sp>
-      <p:sp>
-        <p:nvSpPr>
-          <p:cNvPr id="9" name="Rounded Rectangle 8"/>
+              <a:t>Transactional serving over a live database.</a:t>
+            </a:r>
+          </a:p>
+        </p:txBody>
+      </p:sp>
+      <p:sp>
+        <p:nvSpPr>
+          <p:cNvPr id="14" name="TextBox 13"/>
+          <p:cNvSpPr txBox="1"/>
+          <p:nvPr/>
+        </p:nvSpPr>
+        <p:spPr>
+          <a:xfrm>
+            <a:off x="731520" y="5074920"/>
+            <a:ext cx="2284399" cy="274320"/>
+          </a:xfrm>
+          <a:prstGeom prst="rect">
+            <a:avLst/>
+          </a:prstGeom>
+          <a:noFill/>
+        </p:spPr>
+        <p:txBody>
+          <a:bodyPr wrap="square" anchor="t" lIns="0" rIns="0" tIns="0" bIns="0">
+            <a:noAutofit/>
+          </a:bodyPr>
+          <a:lstStyle/>
+          <a:p>
+            <a:pPr algn="l">
+              <a:spcBef>
+                <a:spcPts val="0"/>
+              </a:spcBef>
+              <a:spcAft>
+                <a:spcPts val="200"/>
+              </a:spcAft>
+            </a:pPr>
+            <a:r>
+              <a:rPr sz="1200" b="1" i="0">
+                <a:solidFill>
+                  <a:srgbClr val="196B24"/>
+                </a:solidFill>
+                <a:latin typeface="Calibri"/>
+              </a:rPr>
+              <a:t>Implemented today</a:t>
+            </a:r>
+          </a:p>
+        </p:txBody>
+      </p:sp>
+      <p:sp>
+        <p:nvSpPr>
+          <p:cNvPr id="15" name="Rounded Rectangle 14"/>
           <p:cNvSpPr/>
           <p:nvPr/>
         </p:nvSpPr>
         <p:spPr>
           <a:xfrm>
-            <a:off x="4344314" y="1645920"/>
-            <a:ext cx="3503066" cy="2057400"/>
+            <a:off x="3399967" y="3108960"/>
+            <a:ext cx="2558719" cy="2331720"/>
           </a:xfrm>
           <a:prstGeom prst="roundRect">
             <a:avLst>
-              <a:gd name="adj" fmla="val 4000"/>
+              <a:gd name="adj" fmla="val 5000"/>
             </a:avLst>
           </a:prstGeom>
           <a:solidFill>
@@ -26315,17 +25452,279 @@
       </p:sp>
       <p:sp>
         <p:nvSpPr>
-          <p:cNvPr id="10" name="Rectangle 9"/>
+          <p:cNvPr id="16" name="Rounded Rectangle 15"/>
           <p:cNvSpPr/>
           <p:nvPr/>
         </p:nvSpPr>
         <p:spPr>
           <a:xfrm>
-            <a:off x="4344314" y="1645920"/>
-            <a:ext cx="82296" cy="2057400"/>
+            <a:off x="3399967" y="3108960"/>
+            <a:ext cx="2558719" cy="475488"/>
+          </a:xfrm>
+          <a:prstGeom prst="roundRect">
+            <a:avLst>
+              <a:gd name="adj" fmla="val 8000"/>
+            </a:avLst>
+          </a:prstGeom>
+          <a:solidFill>
+            <a:srgbClr val="196B24"/>
+          </a:solidFill>
+          <a:ln>
+            <a:noFill/>
+          </a:ln>
+          <a:effectLst/>
+        </p:spPr>
+        <p:style>
+          <a:lnRef idx="1">
+            <a:schemeClr val="accent1"/>
+          </a:lnRef>
+          <a:fillRef idx="3">
+            <a:schemeClr val="accent1"/>
+          </a:fillRef>
+          <a:effectRef idx="2">
+            <a:schemeClr val="accent1"/>
+          </a:effectRef>
+          <a:fontRef idx="minor">
+            <a:schemeClr val="lt1"/>
+          </a:fontRef>
+        </p:style>
+        <p:txBody>
+          <a:bodyPr rtlCol="0" anchor="ctr"/>
+          <a:lstStyle/>
+          <a:p>
+            <a:pPr algn="ctr"/>
+          </a:p>
+        </p:txBody>
+      </p:sp>
+      <p:sp>
+        <p:nvSpPr>
+          <p:cNvPr id="17" name="TextBox 16"/>
+          <p:cNvSpPr txBox="1"/>
+          <p:nvPr/>
+        </p:nvSpPr>
+        <p:spPr>
+          <a:xfrm>
+            <a:off x="3564559" y="3163824"/>
+            <a:ext cx="2284399" cy="365760"/>
           </a:xfrm>
           <a:prstGeom prst="rect">
             <a:avLst/>
+          </a:prstGeom>
+          <a:noFill/>
+        </p:spPr>
+        <p:txBody>
+          <a:bodyPr wrap="square" anchor="ctr" lIns="0" rIns="0" tIns="0" bIns="0">
+            <a:noAutofit/>
+          </a:bodyPr>
+          <a:lstStyle/>
+          <a:p>
+            <a:pPr algn="l">
+              <a:spcBef>
+                <a:spcPts val="0"/>
+              </a:spcBef>
+              <a:spcAft>
+                <a:spcPts val="200"/>
+              </a:spcAft>
+            </a:pPr>
+            <a:r>
+              <a:rPr sz="1400" b="1" i="0">
+                <a:solidFill>
+                  <a:srgbClr val="FFFFFF"/>
+                </a:solidFill>
+                <a:latin typeface="Calibri"/>
+              </a:rPr>
+              <a:t>MobilityDuck</a:t>
+            </a:r>
+          </a:p>
+        </p:txBody>
+      </p:sp>
+      <p:sp>
+        <p:nvSpPr>
+          <p:cNvPr id="18" name="TextBox 17"/>
+          <p:cNvSpPr txBox="1"/>
+          <p:nvPr/>
+        </p:nvSpPr>
+        <p:spPr>
+          <a:xfrm>
+            <a:off x="3564559" y="3703320"/>
+            <a:ext cx="2284399" cy="274320"/>
+          </a:xfrm>
+          <a:prstGeom prst="rect">
+            <a:avLst/>
+          </a:prstGeom>
+          <a:noFill/>
+        </p:spPr>
+        <p:txBody>
+          <a:bodyPr wrap="square" anchor="t" lIns="0" rIns="0" tIns="0" bIns="0">
+            <a:noAutofit/>
+          </a:bodyPr>
+          <a:lstStyle/>
+          <a:p>
+            <a:pPr algn="l">
+              <a:spcBef>
+                <a:spcPts val="0"/>
+              </a:spcBef>
+              <a:spcAft>
+                <a:spcPts val="200"/>
+              </a:spcAft>
+            </a:pPr>
+            <a:r>
+              <a:rPr sz="1200" b="1" i="0">
+                <a:solidFill>
+                  <a:srgbClr val="196B24"/>
+                </a:solidFill>
+                <a:latin typeface="Consolas"/>
+              </a:rPr>
+              <a:t>DuckDB</a:t>
+            </a:r>
+          </a:p>
+        </p:txBody>
+      </p:sp>
+      <p:sp>
+        <p:nvSpPr>
+          <p:cNvPr id="19" name="TextBox 18"/>
+          <p:cNvSpPr txBox="1"/>
+          <p:nvPr/>
+        </p:nvSpPr>
+        <p:spPr>
+          <a:xfrm>
+            <a:off x="3564559" y="4041648"/>
+            <a:ext cx="2229535" cy="914400"/>
+          </a:xfrm>
+          <a:prstGeom prst="rect">
+            <a:avLst/>
+          </a:prstGeom>
+          <a:noFill/>
+        </p:spPr>
+        <p:txBody>
+          <a:bodyPr wrap="square" anchor="t" lIns="0" rIns="0" tIns="0" bIns="0">
+            <a:noAutofit/>
+          </a:bodyPr>
+          <a:lstStyle/>
+          <a:p>
+            <a:pPr algn="l">
+              <a:spcBef>
+                <a:spcPts val="0"/>
+              </a:spcBef>
+              <a:spcAft>
+                <a:spcPts val="200"/>
+              </a:spcAft>
+            </a:pPr>
+            <a:r>
+              <a:rPr sz="1200" b="0" i="0">
+                <a:solidFill>
+                  <a:srgbClr val="1E2B36"/>
+                </a:solidFill>
+                <a:latin typeface="Calibri"/>
+              </a:rPr>
+              <a:t>Embedded, Parquet-native lakehouse queries.</a:t>
+            </a:r>
+          </a:p>
+        </p:txBody>
+      </p:sp>
+      <p:sp>
+        <p:nvSpPr>
+          <p:cNvPr id="20" name="TextBox 19"/>
+          <p:cNvSpPr txBox="1"/>
+          <p:nvPr/>
+        </p:nvSpPr>
+        <p:spPr>
+          <a:xfrm>
+            <a:off x="3564559" y="5074920"/>
+            <a:ext cx="2284399" cy="274320"/>
+          </a:xfrm>
+          <a:prstGeom prst="rect">
+            <a:avLst/>
+          </a:prstGeom>
+          <a:noFill/>
+        </p:spPr>
+        <p:txBody>
+          <a:bodyPr wrap="square" anchor="t" lIns="0" rIns="0" tIns="0" bIns="0">
+            <a:noAutofit/>
+          </a:bodyPr>
+          <a:lstStyle/>
+          <a:p>
+            <a:pPr algn="l">
+              <a:spcBef>
+                <a:spcPts val="0"/>
+              </a:spcBef>
+              <a:spcAft>
+                <a:spcPts val="200"/>
+              </a:spcAft>
+            </a:pPr>
+            <a:r>
+              <a:rPr sz="1200" b="1" i="0">
+                <a:solidFill>
+                  <a:srgbClr val="5B6B78"/>
+                </a:solidFill>
+                <a:latin typeface="Calibri"/>
+              </a:rPr>
+              <a:t>Direction</a:t>
+            </a:r>
+          </a:p>
+        </p:txBody>
+      </p:sp>
+      <p:sp>
+        <p:nvSpPr>
+          <p:cNvPr id="21" name="Rounded Rectangle 20"/>
+          <p:cNvSpPr/>
+          <p:nvPr/>
+        </p:nvSpPr>
+        <p:spPr>
+          <a:xfrm>
+            <a:off x="6233007" y="3108960"/>
+            <a:ext cx="2558719" cy="2331720"/>
+          </a:xfrm>
+          <a:prstGeom prst="roundRect">
+            <a:avLst>
+              <a:gd name="adj" fmla="val 5000"/>
+            </a:avLst>
+          </a:prstGeom>
+          <a:solidFill>
+            <a:srgbClr val="F1F5F8"/>
+          </a:solidFill>
+          <a:ln>
+            <a:noFill/>
+          </a:ln>
+          <a:effectLst/>
+        </p:spPr>
+        <p:style>
+          <a:lnRef idx="1">
+            <a:schemeClr val="accent1"/>
+          </a:lnRef>
+          <a:fillRef idx="3">
+            <a:schemeClr val="accent1"/>
+          </a:fillRef>
+          <a:effectRef idx="2">
+            <a:schemeClr val="accent1"/>
+          </a:effectRef>
+          <a:fontRef idx="minor">
+            <a:schemeClr val="lt1"/>
+          </a:fontRef>
+        </p:style>
+        <p:txBody>
+          <a:bodyPr rtlCol="0" anchor="ctr"/>
+          <a:lstStyle/>
+          <a:p>
+            <a:pPr algn="ctr"/>
+          </a:p>
+        </p:txBody>
+      </p:sp>
+      <p:sp>
+        <p:nvSpPr>
+          <p:cNvPr id="22" name="Rounded Rectangle 21"/>
+          <p:cNvSpPr/>
+          <p:nvPr/>
+        </p:nvSpPr>
+        <p:spPr>
+          <a:xfrm>
+            <a:off x="6233007" y="3108960"/>
+            <a:ext cx="2558719" cy="475488"/>
+          </a:xfrm>
+          <a:prstGeom prst="roundRect">
+            <a:avLst>
+              <a:gd name="adj" fmla="val 8000"/>
+            </a:avLst>
           </a:prstGeom>
           <a:solidFill>
             <a:srgbClr val="E97132"/>
@@ -26359,14 +25758,56 @@
       </p:sp>
       <p:sp>
         <p:nvSpPr>
-          <p:cNvPr id="11" name="TextBox 10"/>
+          <p:cNvPr id="23" name="TextBox 22"/>
           <p:cNvSpPr txBox="1"/>
           <p:nvPr/>
         </p:nvSpPr>
         <p:spPr>
           <a:xfrm>
-            <a:off x="4600346" y="1792224"/>
-            <a:ext cx="3137306" cy="274320"/>
+            <a:off x="6397599" y="3163824"/>
+            <a:ext cx="2284399" cy="365760"/>
+          </a:xfrm>
+          <a:prstGeom prst="rect">
+            <a:avLst/>
+          </a:prstGeom>
+          <a:noFill/>
+        </p:spPr>
+        <p:txBody>
+          <a:bodyPr wrap="square" anchor="ctr" lIns="0" rIns="0" tIns="0" bIns="0">
+            <a:noAutofit/>
+          </a:bodyPr>
+          <a:lstStyle/>
+          <a:p>
+            <a:pPr algn="l">
+              <a:spcBef>
+                <a:spcPts val="0"/>
+              </a:spcBef>
+              <a:spcAft>
+                <a:spcPts val="200"/>
+              </a:spcAft>
+            </a:pPr>
+            <a:r>
+              <a:rPr sz="1400" b="1" i="0">
+                <a:solidFill>
+                  <a:srgbClr val="FFFFFF"/>
+                </a:solidFill>
+                <a:latin typeface="Calibri"/>
+              </a:rPr>
+              <a:t>MobilitySpark</a:t>
+            </a:r>
+          </a:p>
+        </p:txBody>
+      </p:sp>
+      <p:sp>
+        <p:nvSpPr>
+          <p:cNvPr id="24" name="TextBox 23"/>
+          <p:cNvSpPr txBox="1"/>
+          <p:nvPr/>
+        </p:nvSpPr>
+        <p:spPr>
+          <a:xfrm>
+            <a:off x="6397599" y="3703320"/>
+            <a:ext cx="2284399" cy="274320"/>
           </a:xfrm>
           <a:prstGeom prst="rect">
             <a:avLst/>
@@ -26392,23 +25833,23 @@
                 <a:solidFill>
                   <a:srgbClr val="E97132"/>
                 </a:solidFill>
-                <a:latin typeface="Calibri"/>
-              </a:rPr>
-              <a:t>MOVING FEATURES</a:t>
-            </a:r>
-          </a:p>
-        </p:txBody>
-      </p:sp>
-      <p:sp>
-        <p:nvSpPr>
-          <p:cNvPr id="12" name="TextBox 11"/>
+                <a:latin typeface="Consolas"/>
+              </a:rPr>
+              <a:t>Apache Spark</a:t>
+            </a:r>
+          </a:p>
+        </p:txBody>
+      </p:sp>
+      <p:sp>
+        <p:nvSpPr>
+          <p:cNvPr id="25" name="TextBox 24"/>
           <p:cNvSpPr txBox="1"/>
           <p:nvPr/>
         </p:nvSpPr>
         <p:spPr>
           <a:xfrm>
-            <a:off x="4600346" y="2148840"/>
-            <a:ext cx="3045866" cy="1463040"/>
+            <a:off x="6397599" y="4041648"/>
+            <a:ext cx="2229535" cy="914400"/>
           </a:xfrm>
           <a:prstGeom prst="rect">
             <a:avLst/>
@@ -26416,166 +25857,87 @@
           <a:noFill/>
         </p:spPr>
         <p:txBody>
-          <a:bodyPr wrap="square" lIns="0" rIns="0" tIns="0" bIns="0">
+          <a:bodyPr wrap="square" anchor="t" lIns="0" rIns="0" tIns="0" bIns="0">
             <a:noAutofit/>
           </a:bodyPr>
           <a:lstStyle/>
           <a:p>
-            <a:pPr>
-              <a:lnSpc>
-                <a:spcPct val="100000"/>
-              </a:lnSpc>
-              <a:spcAft>
-                <a:spcPts val="300"/>
-              </a:spcAft>
-            </a:pPr>
-            <a:r>
-              <a:rPr sz="1200" b="1">
-                <a:solidFill>
-                  <a:srgbClr val="E97132"/>
-                </a:solidFill>
-                <a:latin typeface="Calibri"/>
-              </a:rPr>
-              <a:t>✓ </a:t>
-            </a:r>
-            <a:r>
-              <a:rPr sz="1200">
+            <a:pPr algn="l">
+              <a:spcBef>
+                <a:spcPts val="0"/>
+              </a:spcBef>
+              <a:spcAft>
+                <a:spcPts val="200"/>
+              </a:spcAft>
+            </a:pPr>
+            <a:r>
+              <a:rPr sz="1200" b="0" i="0">
                 <a:solidFill>
                   <a:srgbClr val="1E2B36"/>
                 </a:solidFill>
                 <a:latin typeface="Calibri"/>
               </a:rPr>
-              <a:t>insert (POST)</a:t>
-            </a:r>
-          </a:p>
-          <a:p>
-            <a:pPr>
-              <a:lnSpc>
-                <a:spcPct val="100000"/>
-              </a:lnSpc>
-              <a:spcAft>
-                <a:spcPts val="300"/>
-              </a:spcAft>
-            </a:pPr>
-            <a:r>
-              <a:rPr sz="1200" b="1">
-                <a:solidFill>
-                  <a:srgbClr val="E97132"/>
-                </a:solidFill>
-                <a:latin typeface="Calibri"/>
-              </a:rPr>
-              <a:t>✓ </a:t>
-            </a:r>
-            <a:r>
-              <a:rPr sz="1200">
-                <a:solidFill>
-                  <a:srgbClr val="1E2B36"/>
-                </a:solidFill>
-                <a:latin typeface="Calibri"/>
-              </a:rPr>
-              <a:t>retrieve / stream</a:t>
-            </a:r>
-          </a:p>
-          <a:p>
-            <a:pPr>
-              <a:lnSpc>
-                <a:spcPct val="100000"/>
-              </a:lnSpc>
-              <a:spcAft>
-                <a:spcPts val="300"/>
-              </a:spcAft>
-            </a:pPr>
-            <a:r>
-              <a:rPr sz="1200" b="1">
-                <a:solidFill>
-                  <a:srgbClr val="E97132"/>
-                </a:solidFill>
-                <a:latin typeface="Calibri"/>
-              </a:rPr>
-              <a:t>✓ </a:t>
-            </a:r>
-            <a:r>
-              <a:rPr sz="1200">
-                <a:solidFill>
-                  <a:srgbClr val="1E2B36"/>
-                </a:solidFill>
-                <a:latin typeface="Calibri"/>
-              </a:rPr>
-              <a:t>replace (PUT)</a:t>
-            </a:r>
-          </a:p>
-          <a:p>
-            <a:pPr>
-              <a:lnSpc>
-                <a:spcPct val="100000"/>
-              </a:lnSpc>
-              <a:spcAft>
-                <a:spcPts val="300"/>
-              </a:spcAft>
-            </a:pPr>
-            <a:r>
-              <a:rPr sz="1200" b="1">
-                <a:solidFill>
-                  <a:srgbClr val="E97132"/>
-                </a:solidFill>
-                <a:latin typeface="Calibri"/>
-              </a:rPr>
-              <a:t>✓ </a:t>
-            </a:r>
-            <a:r>
-              <a:rPr sz="1200">
-                <a:solidFill>
-                  <a:srgbClr val="1E2B36"/>
-                </a:solidFill>
-                <a:latin typeface="Calibri"/>
-              </a:rPr>
-              <a:t>delete (DELETE)</a:t>
-            </a:r>
-          </a:p>
-          <a:p>
-            <a:pPr>
-              <a:lnSpc>
-                <a:spcPct val="100000"/>
-              </a:lnSpc>
-              <a:spcAft>
-                <a:spcPts val="300"/>
-              </a:spcAft>
-            </a:pPr>
-            <a:r>
-              <a:rPr sz="1200" b="1">
-                <a:solidFill>
-                  <a:srgbClr val="E97132"/>
-                </a:solidFill>
-                <a:latin typeface="Calibri"/>
-              </a:rPr>
-              <a:t>✓ </a:t>
-            </a:r>
-            <a:r>
-              <a:rPr sz="1200">
-                <a:solidFill>
-                  <a:srgbClr val="1E2B36"/>
-                </a:solidFill>
-                <a:latin typeface="Calibri"/>
-              </a:rPr>
-              <a:t>keyset paging</a:t>
-            </a:r>
-          </a:p>
-        </p:txBody>
-      </p:sp>
-      <p:sp>
-        <p:nvSpPr>
-          <p:cNvPr id="13" name="Rounded Rectangle 12"/>
+              <a:t>Distributed batch over very large histories.</a:t>
+            </a:r>
+          </a:p>
+        </p:txBody>
+      </p:sp>
+      <p:sp>
+        <p:nvSpPr>
+          <p:cNvPr id="26" name="TextBox 25"/>
+          <p:cNvSpPr txBox="1"/>
+          <p:nvPr/>
+        </p:nvSpPr>
+        <p:spPr>
+          <a:xfrm>
+            <a:off x="6397599" y="5074920"/>
+            <a:ext cx="2284399" cy="274320"/>
+          </a:xfrm>
+          <a:prstGeom prst="rect">
+            <a:avLst/>
+          </a:prstGeom>
+          <a:noFill/>
+        </p:spPr>
+        <p:txBody>
+          <a:bodyPr wrap="square" anchor="t" lIns="0" rIns="0" tIns="0" bIns="0">
+            <a:noAutofit/>
+          </a:bodyPr>
+          <a:lstStyle/>
+          <a:p>
+            <a:pPr algn="l">
+              <a:spcBef>
+                <a:spcPts val="0"/>
+              </a:spcBef>
+              <a:spcAft>
+                <a:spcPts val="200"/>
+              </a:spcAft>
+            </a:pPr>
+            <a:r>
+              <a:rPr sz="1200" b="1" i="0">
+                <a:solidFill>
+                  <a:srgbClr val="5B6B78"/>
+                </a:solidFill>
+                <a:latin typeface="Calibri"/>
+              </a:rPr>
+              <a:t>Direction</a:t>
+            </a:r>
+          </a:p>
+        </p:txBody>
+      </p:sp>
+      <p:sp>
+        <p:nvSpPr>
+          <p:cNvPr id="27" name="Rounded Rectangle 26"/>
           <p:cNvSpPr/>
           <p:nvPr/>
         </p:nvSpPr>
         <p:spPr>
           <a:xfrm>
-            <a:off x="8121700" y="1645920"/>
-            <a:ext cx="3503066" cy="2057400"/>
+            <a:off x="9066047" y="3108960"/>
+            <a:ext cx="2558719" cy="2331720"/>
           </a:xfrm>
           <a:prstGeom prst="roundRect">
             <a:avLst>
-              <a:gd name="adj" fmla="val 4000"/>
+              <a:gd name="adj" fmla="val 5000"/>
             </a:avLst>
           </a:prstGeom>
           <a:solidFill>
@@ -26610,284 +25972,19 @@
       </p:sp>
       <p:sp>
         <p:nvSpPr>
-          <p:cNvPr id="14" name="Rectangle 13"/>
+          <p:cNvPr id="28" name="Rounded Rectangle 27"/>
           <p:cNvSpPr/>
           <p:nvPr/>
         </p:nvSpPr>
         <p:spPr>
           <a:xfrm>
-            <a:off x="8121700" y="1645920"/>
-            <a:ext cx="82296" cy="2057400"/>
-          </a:xfrm>
-          <a:prstGeom prst="rect">
-            <a:avLst/>
-          </a:prstGeom>
-          <a:solidFill>
-            <a:srgbClr val="196B24"/>
-          </a:solidFill>
-          <a:ln>
-            <a:noFill/>
-          </a:ln>
-          <a:effectLst/>
-        </p:spPr>
-        <p:style>
-          <a:lnRef idx="1">
-            <a:schemeClr val="accent1"/>
-          </a:lnRef>
-          <a:fillRef idx="3">
-            <a:schemeClr val="accent1"/>
-          </a:fillRef>
-          <a:effectRef idx="2">
-            <a:schemeClr val="accent1"/>
-          </a:effectRef>
-          <a:fontRef idx="minor">
-            <a:schemeClr val="lt1"/>
-          </a:fontRef>
-        </p:style>
-        <p:txBody>
-          <a:bodyPr rtlCol="0" anchor="ctr"/>
-          <a:lstStyle/>
-          <a:p>
-            <a:pPr algn="ctr"/>
-          </a:p>
-        </p:txBody>
-      </p:sp>
-      <p:sp>
-        <p:nvSpPr>
-          <p:cNvPr id="15" name="TextBox 14"/>
-          <p:cNvSpPr txBox="1"/>
-          <p:nvPr/>
-        </p:nvSpPr>
-        <p:spPr>
-          <a:xfrm>
-            <a:off x="8377732" y="1792224"/>
-            <a:ext cx="3137306" cy="274320"/>
-          </a:xfrm>
-          <a:prstGeom prst="rect">
-            <a:avLst/>
-          </a:prstGeom>
-          <a:noFill/>
-        </p:spPr>
-        <p:txBody>
-          <a:bodyPr wrap="square" anchor="t" lIns="0" rIns="0" tIns="0" bIns="0">
-            <a:noAutofit/>
-          </a:bodyPr>
-          <a:lstStyle/>
-          <a:p>
-            <a:pPr algn="l">
-              <a:spcBef>
-                <a:spcPts val="0"/>
-              </a:spcBef>
-              <a:spcAft>
-                <a:spcPts val="200"/>
-              </a:spcAft>
-            </a:pPr>
-            <a:r>
-              <a:rPr sz="1200" b="1" i="0">
-                <a:solidFill>
-                  <a:srgbClr val="196B24"/>
-                </a:solidFill>
-                <a:latin typeface="Calibri"/>
-              </a:rPr>
-              <a:t>QUERYING</a:t>
-            </a:r>
-          </a:p>
-        </p:txBody>
-      </p:sp>
-      <p:sp>
-        <p:nvSpPr>
-          <p:cNvPr id="16" name="TextBox 15"/>
-          <p:cNvSpPr txBox="1"/>
-          <p:nvPr/>
-        </p:nvSpPr>
-        <p:spPr>
-          <a:xfrm>
-            <a:off x="8377732" y="2148840"/>
-            <a:ext cx="3045866" cy="1463040"/>
-          </a:xfrm>
-          <a:prstGeom prst="rect">
-            <a:avLst/>
-          </a:prstGeom>
-          <a:noFill/>
-        </p:spPr>
-        <p:txBody>
-          <a:bodyPr wrap="square" lIns="0" rIns="0" tIns="0" bIns="0">
-            <a:noAutofit/>
-          </a:bodyPr>
-          <a:lstStyle/>
-          <a:p>
-            <a:pPr>
-              <a:lnSpc>
-                <a:spcPct val="100000"/>
-              </a:lnSpc>
-              <a:spcAft>
-                <a:spcPts val="300"/>
-              </a:spcAft>
-            </a:pPr>
-            <a:r>
-              <a:rPr sz="1200" b="1">
-                <a:solidFill>
-                  <a:srgbClr val="196B24"/>
-                </a:solidFill>
-                <a:latin typeface="Calibri"/>
-              </a:rPr>
-              <a:t>✓ </a:t>
-            </a:r>
-            <a:r>
-              <a:rPr sz="1200">
-                <a:solidFill>
-                  <a:srgbClr val="1E2B36"/>
-                </a:solidFill>
-                <a:latin typeface="Calibri"/>
-              </a:rPr>
-              <a:t>bbox spatial filter</a:t>
-            </a:r>
-          </a:p>
-          <a:p>
-            <a:pPr>
-              <a:lnSpc>
-                <a:spcPct val="100000"/>
-              </a:lnSpc>
-              <a:spcAft>
-                <a:spcPts val="300"/>
-              </a:spcAft>
-            </a:pPr>
-            <a:r>
-              <a:rPr sz="1200" b="1">
-                <a:solidFill>
-                  <a:srgbClr val="196B24"/>
-                </a:solidFill>
-                <a:latin typeface="Calibri"/>
-              </a:rPr>
-              <a:t>✓ </a:t>
-            </a:r>
-            <a:r>
-              <a:rPr sz="1200">
-                <a:solidFill>
-                  <a:srgbClr val="1E2B36"/>
-                </a:solidFill>
-                <a:latin typeface="Calibri"/>
-              </a:rPr>
-              <a:t>datetime interval / instant</a:t>
-            </a:r>
-          </a:p>
-          <a:p>
-            <a:pPr>
-              <a:lnSpc>
-                <a:spcPct val="100000"/>
-              </a:lnSpc>
-              <a:spcAft>
-                <a:spcPts val="300"/>
-              </a:spcAft>
-            </a:pPr>
-            <a:r>
-              <a:rPr sz="1200" b="1">
-                <a:solidFill>
-                  <a:srgbClr val="196B24"/>
-                </a:solidFill>
-                <a:latin typeface="Calibri"/>
-              </a:rPr>
-              <a:t>✓ </a:t>
-            </a:r>
-            <a:r>
-              <a:rPr sz="1200">
-                <a:solidFill>
-                  <a:srgbClr val="1E2B36"/>
-                </a:solidFill>
-                <a:latin typeface="Calibri"/>
-              </a:rPr>
-              <a:t>subtrajectory clipping</a:t>
-            </a:r>
-          </a:p>
-          <a:p>
-            <a:pPr>
-              <a:lnSpc>
-                <a:spcPct val="100000"/>
-              </a:lnSpc>
-              <a:spcAft>
-                <a:spcPts val="300"/>
-              </a:spcAft>
-            </a:pPr>
-            <a:r>
-              <a:rPr sz="1200" b="1">
-                <a:solidFill>
-                  <a:srgbClr val="196B24"/>
-                </a:solidFill>
-                <a:latin typeface="Calibri"/>
-              </a:rPr>
-              <a:t>✓ </a:t>
-            </a:r>
-            <a:r>
-              <a:rPr sz="1200">
-                <a:solidFill>
-                  <a:srgbClr val="1E2B36"/>
-                </a:solidFill>
-                <a:latin typeface="Calibri"/>
-              </a:rPr>
-              <a:t>leaf selector</a:t>
-            </a:r>
-          </a:p>
-        </p:txBody>
-      </p:sp>
-      <p:sp>
-        <p:nvSpPr>
-          <p:cNvPr id="17" name="Rounded Rectangle 16"/>
-          <p:cNvSpPr/>
-          <p:nvPr/>
-        </p:nvSpPr>
-        <p:spPr>
-          <a:xfrm>
-            <a:off x="566928" y="3886200"/>
-            <a:ext cx="3503066" cy="2057400"/>
+            <a:off x="9066047" y="3108960"/>
+            <a:ext cx="2558719" cy="475488"/>
           </a:xfrm>
           <a:prstGeom prst="roundRect">
             <a:avLst>
-              <a:gd name="adj" fmla="val 4000"/>
+              <a:gd name="adj" fmla="val 8000"/>
             </a:avLst>
-          </a:prstGeom>
-          <a:solidFill>
-            <a:srgbClr val="F1F5F8"/>
-          </a:solidFill>
-          <a:ln>
-            <a:noFill/>
-          </a:ln>
-          <a:effectLst/>
-        </p:spPr>
-        <p:style>
-          <a:lnRef idx="1">
-            <a:schemeClr val="accent1"/>
-          </a:lnRef>
-          <a:fillRef idx="3">
-            <a:schemeClr val="accent1"/>
-          </a:fillRef>
-          <a:effectRef idx="2">
-            <a:schemeClr val="accent1"/>
-          </a:effectRef>
-          <a:fontRef idx="minor">
-            <a:schemeClr val="lt1"/>
-          </a:fontRef>
-        </p:style>
-        <p:txBody>
-          <a:bodyPr rtlCol="0" anchor="ctr"/>
-          <a:lstStyle/>
-          <a:p>
-            <a:pPr algn="ctr"/>
-          </a:p>
-        </p:txBody>
-      </p:sp>
-      <p:sp>
-        <p:nvSpPr>
-          <p:cNvPr id="18" name="Rectangle 17"/>
-          <p:cNvSpPr/>
-          <p:nvPr/>
-        </p:nvSpPr>
-        <p:spPr>
-          <a:xfrm>
-            <a:off x="566928" y="3886200"/>
-            <a:ext cx="82296" cy="2057400"/>
-          </a:xfrm>
-          <a:prstGeom prst="rect">
-            <a:avLst/>
           </a:prstGeom>
           <a:solidFill>
             <a:srgbClr val="A02B93"/>
@@ -26921,14 +26018,56 @@
       </p:sp>
       <p:sp>
         <p:nvSpPr>
-          <p:cNvPr id="19" name="TextBox 18"/>
+          <p:cNvPr id="29" name="TextBox 28"/>
           <p:cNvSpPr txBox="1"/>
           <p:nvPr/>
         </p:nvSpPr>
         <p:spPr>
           <a:xfrm>
-            <a:off x="822960" y="4032504"/>
-            <a:ext cx="3137306" cy="274320"/>
+            <a:off x="9230639" y="3163824"/>
+            <a:ext cx="2284399" cy="365760"/>
+          </a:xfrm>
+          <a:prstGeom prst="rect">
+            <a:avLst/>
+          </a:prstGeom>
+          <a:noFill/>
+        </p:spPr>
+        <p:txBody>
+          <a:bodyPr wrap="square" anchor="ctr" lIns="0" rIns="0" tIns="0" bIns="0">
+            <a:noAutofit/>
+          </a:bodyPr>
+          <a:lstStyle/>
+          <a:p>
+            <a:pPr algn="l">
+              <a:spcBef>
+                <a:spcPts val="0"/>
+              </a:spcBef>
+              <a:spcAft>
+                <a:spcPts val="200"/>
+              </a:spcAft>
+            </a:pPr>
+            <a:r>
+              <a:rPr sz="1400" b="1" i="0">
+                <a:solidFill>
+                  <a:srgbClr val="FFFFFF"/>
+                </a:solidFill>
+                <a:latin typeface="Calibri"/>
+              </a:rPr>
+              <a:t>MobilityFlink</a:t>
+            </a:r>
+          </a:p>
+        </p:txBody>
+      </p:sp>
+      <p:sp>
+        <p:nvSpPr>
+          <p:cNvPr id="30" name="TextBox 29"/>
+          <p:cNvSpPr txBox="1"/>
+          <p:nvPr/>
+        </p:nvSpPr>
+        <p:spPr>
+          <a:xfrm>
+            <a:off x="9230639" y="3703320"/>
+            <a:ext cx="2284399" cy="274320"/>
           </a:xfrm>
           <a:prstGeom prst="rect">
             <a:avLst/>
@@ -26954,220 +26093,23 @@
                 <a:solidFill>
                   <a:srgbClr val="A02B93"/>
                 </a:solidFill>
-                <a:latin typeface="Calibri"/>
-              </a:rPr>
-              <a:t>TEMPORAL GEOMETRY</a:t>
-            </a:r>
-          </a:p>
-        </p:txBody>
-      </p:sp>
-      <p:sp>
-        <p:nvSpPr>
-          <p:cNvPr id="20" name="TextBox 19"/>
+                <a:latin typeface="Consolas"/>
+              </a:rPr>
+              <a:t>Apache Flink</a:t>
+            </a:r>
+          </a:p>
+        </p:txBody>
+      </p:sp>
+      <p:sp>
+        <p:nvSpPr>
+          <p:cNvPr id="31" name="TextBox 30"/>
           <p:cNvSpPr txBox="1"/>
           <p:nvPr/>
         </p:nvSpPr>
         <p:spPr>
           <a:xfrm>
-            <a:off x="822960" y="4389120"/>
-            <a:ext cx="3045866" cy="1463040"/>
-          </a:xfrm>
-          <a:prstGeom prst="rect">
-            <a:avLst/>
-          </a:prstGeom>
-          <a:noFill/>
-        </p:spPr>
-        <p:txBody>
-          <a:bodyPr wrap="square" lIns="0" rIns="0" tIns="0" bIns="0">
-            <a:noAutofit/>
-          </a:bodyPr>
-          <a:lstStyle/>
-          <a:p>
-            <a:pPr>
-              <a:lnSpc>
-                <a:spcPct val="100000"/>
-              </a:lnSpc>
-              <a:spcAft>
-                <a:spcPts val="300"/>
-              </a:spcAft>
-            </a:pPr>
-            <a:r>
-              <a:rPr sz="1200" b="1">
-                <a:solidFill>
-                  <a:srgbClr val="A02B93"/>
-                </a:solidFill>
-                <a:latin typeface="Calibri"/>
-              </a:rPr>
-              <a:t>✓ </a:t>
-            </a:r>
-            <a:r>
-              <a:rPr sz="1200">
-                <a:solidFill>
-                  <a:srgbClr val="1E2B36"/>
-                </a:solidFill>
-                <a:latin typeface="Calibri"/>
-              </a:rPr>
-              <a:t>get sequence (GET)</a:t>
-            </a:r>
-          </a:p>
-          <a:p>
-            <a:pPr>
-              <a:lnSpc>
-                <a:spcPct val="100000"/>
-              </a:lnSpc>
-              <a:spcAft>
-                <a:spcPts val="300"/>
-              </a:spcAft>
-            </a:pPr>
-            <a:r>
-              <a:rPr sz="1200" b="1">
-                <a:solidFill>
-                  <a:srgbClr val="A02B93"/>
-                </a:solidFill>
-                <a:latin typeface="Calibri"/>
-              </a:rPr>
-              <a:t>✓ </a:t>
-            </a:r>
-            <a:r>
-              <a:rPr sz="1200">
-                <a:solidFill>
-                  <a:srgbClr val="1E2B36"/>
-                </a:solidFill>
-                <a:latin typeface="Calibri"/>
-              </a:rPr>
-              <a:t>append sub-trajectory (POST)</a:t>
-            </a:r>
-          </a:p>
-          <a:p>
-            <a:pPr>
-              <a:lnSpc>
-                <a:spcPct val="100000"/>
-              </a:lnSpc>
-              <a:spcAft>
-                <a:spcPts val="300"/>
-              </a:spcAft>
-            </a:pPr>
-            <a:r>
-              <a:rPr sz="1200" b="1">
-                <a:solidFill>
-                  <a:srgbClr val="A02B93"/>
-                </a:solidFill>
-                <a:latin typeface="Calibri"/>
-              </a:rPr>
-              <a:t>✓ </a:t>
-            </a:r>
-            <a:r>
-              <a:rPr sz="1200">
-                <a:solidFill>
-                  <a:srgbClr val="1E2B36"/>
-                </a:solidFill>
-                <a:latin typeface="Calibri"/>
-              </a:rPr>
-              <a:t>datetime / leaf clip</a:t>
-            </a:r>
-          </a:p>
-        </p:txBody>
-      </p:sp>
-      <p:sp>
-        <p:nvSpPr>
-          <p:cNvPr id="21" name="Rounded Rectangle 20"/>
-          <p:cNvSpPr/>
-          <p:nvPr/>
-        </p:nvSpPr>
-        <p:spPr>
-          <a:xfrm>
-            <a:off x="4344314" y="3886200"/>
-            <a:ext cx="3503066" cy="2057400"/>
-          </a:xfrm>
-          <a:prstGeom prst="roundRect">
-            <a:avLst>
-              <a:gd name="adj" fmla="val 4000"/>
-            </a:avLst>
-          </a:prstGeom>
-          <a:solidFill>
-            <a:srgbClr val="F1F5F8"/>
-          </a:solidFill>
-          <a:ln>
-            <a:noFill/>
-          </a:ln>
-          <a:effectLst/>
-        </p:spPr>
-        <p:style>
-          <a:lnRef idx="1">
-            <a:schemeClr val="accent1"/>
-          </a:lnRef>
-          <a:fillRef idx="3">
-            <a:schemeClr val="accent1"/>
-          </a:fillRef>
-          <a:effectRef idx="2">
-            <a:schemeClr val="accent1"/>
-          </a:effectRef>
-          <a:fontRef idx="minor">
-            <a:schemeClr val="lt1"/>
-          </a:fontRef>
-        </p:style>
-        <p:txBody>
-          <a:bodyPr rtlCol="0" anchor="ctr"/>
-          <a:lstStyle/>
-          <a:p>
-            <a:pPr algn="ctr"/>
-          </a:p>
-        </p:txBody>
-      </p:sp>
-      <p:sp>
-        <p:nvSpPr>
-          <p:cNvPr id="22" name="Rectangle 21"/>
-          <p:cNvSpPr/>
-          <p:nvPr/>
-        </p:nvSpPr>
-        <p:spPr>
-          <a:xfrm>
-            <a:off x="4344314" y="3886200"/>
-            <a:ext cx="82296" cy="2057400"/>
-          </a:xfrm>
-          <a:prstGeom prst="rect">
-            <a:avLst/>
-          </a:prstGeom>
-          <a:solidFill>
-            <a:srgbClr val="156082"/>
-          </a:solidFill>
-          <a:ln>
-            <a:noFill/>
-          </a:ln>
-          <a:effectLst/>
-        </p:spPr>
-        <p:style>
-          <a:lnRef idx="1">
-            <a:schemeClr val="accent1"/>
-          </a:lnRef>
-          <a:fillRef idx="3">
-            <a:schemeClr val="accent1"/>
-          </a:fillRef>
-          <a:effectRef idx="2">
-            <a:schemeClr val="accent1"/>
-          </a:effectRef>
-          <a:fontRef idx="minor">
-            <a:schemeClr val="lt1"/>
-          </a:fontRef>
-        </p:style>
-        <p:txBody>
-          <a:bodyPr rtlCol="0" anchor="ctr"/>
-          <a:lstStyle/>
-          <a:p>
-            <a:pPr algn="ctr"/>
-          </a:p>
-        </p:txBody>
-      </p:sp>
-      <p:sp>
-        <p:nvSpPr>
-          <p:cNvPr id="23" name="TextBox 22"/>
-          <p:cNvSpPr txBox="1"/>
-          <p:nvPr/>
-        </p:nvSpPr>
-        <p:spPr>
-          <a:xfrm>
-            <a:off x="4600346" y="4032504"/>
-            <a:ext cx="3137306" cy="274320"/>
+            <a:off x="9230639" y="4041648"/>
+            <a:ext cx="2229535" cy="914400"/>
           </a:xfrm>
           <a:prstGeom prst="rect">
             <a:avLst/>
@@ -27189,252 +26131,27 @@
               </a:spcAft>
             </a:pPr>
             <a:r>
-              <a:rPr sz="1200" b="1" i="0">
-                <a:solidFill>
-                  <a:srgbClr val="156082"/>
-                </a:solidFill>
-                <a:latin typeface="Calibri"/>
-              </a:rPr>
-              <a:t>DERIVED MEASURES</a:t>
-            </a:r>
-          </a:p>
-        </p:txBody>
-      </p:sp>
-      <p:sp>
-        <p:nvSpPr>
-          <p:cNvPr id="24" name="TextBox 23"/>
+              <a:rPr sz="1200" b="0" i="0">
+                <a:solidFill>
+                  <a:srgbClr val="1E2B36"/>
+                </a:solidFill>
+                <a:latin typeface="Calibri"/>
+              </a:rPr>
+              <a:t>Streaming, real-time moving features.</a:t>
+            </a:r>
+          </a:p>
+        </p:txBody>
+      </p:sp>
+      <p:sp>
+        <p:nvSpPr>
+          <p:cNvPr id="32" name="TextBox 31"/>
           <p:cNvSpPr txBox="1"/>
           <p:nvPr/>
         </p:nvSpPr>
         <p:spPr>
           <a:xfrm>
-            <a:off x="4600346" y="4389120"/>
-            <a:ext cx="3045866" cy="1463040"/>
-          </a:xfrm>
-          <a:prstGeom prst="rect">
-            <a:avLst/>
-          </a:prstGeom>
-          <a:noFill/>
-        </p:spPr>
-        <p:txBody>
-          <a:bodyPr wrap="square" lIns="0" rIns="0" tIns="0" bIns="0">
-            <a:noAutofit/>
-          </a:bodyPr>
-          <a:lstStyle/>
-          <a:p>
-            <a:pPr>
-              <a:lnSpc>
-                <a:spcPct val="100000"/>
-              </a:lnSpc>
-              <a:spcAft>
-                <a:spcPts val="300"/>
-              </a:spcAft>
-            </a:pPr>
-            <a:r>
-              <a:rPr sz="1200" b="1">
-                <a:solidFill>
-                  <a:srgbClr val="156082"/>
-                </a:solidFill>
-                <a:latin typeface="Calibri"/>
-              </a:rPr>
-              <a:t>✓ </a:t>
-            </a:r>
-            <a:r>
-              <a:rPr sz="1200">
-                <a:solidFill>
-                  <a:srgbClr val="1E2B36"/>
-                </a:solidFill>
-                <a:latin typeface="Calibri"/>
-              </a:rPr>
-              <a:t>distance</a:t>
-            </a:r>
-          </a:p>
-          <a:p>
-            <a:pPr>
-              <a:lnSpc>
-                <a:spcPct val="100000"/>
-              </a:lnSpc>
-              <a:spcAft>
-                <a:spcPts val="300"/>
-              </a:spcAft>
-            </a:pPr>
-            <a:r>
-              <a:rPr sz="1200" b="1">
-                <a:solidFill>
-                  <a:srgbClr val="156082"/>
-                </a:solidFill>
-                <a:latin typeface="Calibri"/>
-              </a:rPr>
-              <a:t>✓ </a:t>
-            </a:r>
-            <a:r>
-              <a:rPr sz="1200">
-                <a:solidFill>
-                  <a:srgbClr val="1E2B36"/>
-                </a:solidFill>
-                <a:latin typeface="Calibri"/>
-              </a:rPr>
-              <a:t>velocity</a:t>
-            </a:r>
-          </a:p>
-          <a:p>
-            <a:pPr>
-              <a:lnSpc>
-                <a:spcPct val="100000"/>
-              </a:lnSpc>
-              <a:spcAft>
-                <a:spcPts val="300"/>
-              </a:spcAft>
-            </a:pPr>
-            <a:r>
-              <a:rPr sz="1200" b="1">
-                <a:solidFill>
-                  <a:srgbClr val="156082"/>
-                </a:solidFill>
-                <a:latin typeface="Calibri"/>
-              </a:rPr>
-              <a:t>✓ </a:t>
-            </a:r>
-            <a:r>
-              <a:rPr sz="1200">
-                <a:solidFill>
-                  <a:srgbClr val="1E2B36"/>
-                </a:solidFill>
-                <a:latin typeface="Calibri"/>
-              </a:rPr>
-              <a:t>acceleration → 501 (not derivable)</a:t>
-            </a:r>
-          </a:p>
-          <a:p>
-            <a:pPr>
-              <a:lnSpc>
-                <a:spcPct val="100000"/>
-              </a:lnSpc>
-              <a:spcAft>
-                <a:spcPts val="300"/>
-              </a:spcAft>
-            </a:pPr>
-            <a:r>
-              <a:rPr sz="1200" b="1">
-                <a:solidFill>
-                  <a:srgbClr val="156082"/>
-                </a:solidFill>
-                <a:latin typeface="Calibri"/>
-              </a:rPr>
-              <a:t>✓ </a:t>
-            </a:r>
-            <a:r>
-              <a:rPr sz="1200">
-                <a:solidFill>
-                  <a:srgbClr val="1E2B36"/>
-                </a:solidFill>
-                <a:latin typeface="Calibri"/>
-              </a:rPr>
-              <a:t>exact, as TReal</a:t>
-            </a:r>
-          </a:p>
-        </p:txBody>
-      </p:sp>
-      <p:sp>
-        <p:nvSpPr>
-          <p:cNvPr id="25" name="Rounded Rectangle 24"/>
-          <p:cNvSpPr/>
-          <p:nvPr/>
-        </p:nvSpPr>
-        <p:spPr>
-          <a:xfrm>
-            <a:off x="8121700" y="3886200"/>
-            <a:ext cx="3503066" cy="2057400"/>
-          </a:xfrm>
-          <a:prstGeom prst="roundRect">
-            <a:avLst>
-              <a:gd name="adj" fmla="val 4000"/>
-            </a:avLst>
-          </a:prstGeom>
-          <a:solidFill>
-            <a:srgbClr val="F1F5F8"/>
-          </a:solidFill>
-          <a:ln>
-            <a:noFill/>
-          </a:ln>
-          <a:effectLst/>
-        </p:spPr>
-        <p:style>
-          <a:lnRef idx="1">
-            <a:schemeClr val="accent1"/>
-          </a:lnRef>
-          <a:fillRef idx="3">
-            <a:schemeClr val="accent1"/>
-          </a:fillRef>
-          <a:effectRef idx="2">
-            <a:schemeClr val="accent1"/>
-          </a:effectRef>
-          <a:fontRef idx="minor">
-            <a:schemeClr val="lt1"/>
-          </a:fontRef>
-        </p:style>
-        <p:txBody>
-          <a:bodyPr rtlCol="0" anchor="ctr"/>
-          <a:lstStyle/>
-          <a:p>
-            <a:pPr algn="ctr"/>
-          </a:p>
-        </p:txBody>
-      </p:sp>
-      <p:sp>
-        <p:nvSpPr>
-          <p:cNvPr id="26" name="Rectangle 25"/>
-          <p:cNvSpPr/>
-          <p:nvPr/>
-        </p:nvSpPr>
-        <p:spPr>
-          <a:xfrm>
-            <a:off x="8121700" y="3886200"/>
-            <a:ext cx="82296" cy="2057400"/>
-          </a:xfrm>
-          <a:prstGeom prst="rect">
-            <a:avLst/>
-          </a:prstGeom>
-          <a:solidFill>
-            <a:srgbClr val="E97132"/>
-          </a:solidFill>
-          <a:ln>
-            <a:noFill/>
-          </a:ln>
-          <a:effectLst/>
-        </p:spPr>
-        <p:style>
-          <a:lnRef idx="1">
-            <a:schemeClr val="accent1"/>
-          </a:lnRef>
-          <a:fillRef idx="3">
-            <a:schemeClr val="accent1"/>
-          </a:fillRef>
-          <a:effectRef idx="2">
-            <a:schemeClr val="accent1"/>
-          </a:effectRef>
-          <a:fontRef idx="minor">
-            <a:schemeClr val="lt1"/>
-          </a:fontRef>
-        </p:style>
-        <p:txBody>
-          <a:bodyPr rtlCol="0" anchor="ctr"/>
-          <a:lstStyle/>
-          <a:p>
-            <a:pPr algn="ctr"/>
-          </a:p>
-        </p:txBody>
-      </p:sp>
-      <p:sp>
-        <p:nvSpPr>
-          <p:cNvPr id="27" name="TextBox 26"/>
-          <p:cNvSpPr txBox="1"/>
-          <p:nvPr/>
-        </p:nvSpPr>
-        <p:spPr>
-          <a:xfrm>
-            <a:off x="8377732" y="4032504"/>
-            <a:ext cx="3137306" cy="274320"/>
+            <a:off x="9230639" y="5074920"/>
+            <a:ext cx="2284399" cy="274320"/>
           </a:xfrm>
           <a:prstGeom prst="rect">
             <a:avLst/>
@@ -27458,25 +26175,25 @@
             <a:r>
               <a:rPr sz="1200" b="1" i="0">
                 <a:solidFill>
-                  <a:srgbClr val="E97132"/>
-                </a:solidFill>
-                <a:latin typeface="Calibri"/>
-              </a:rPr>
-              <a:t>CONFORMANCE &amp; SCALE</a:t>
-            </a:r>
-          </a:p>
-        </p:txBody>
-      </p:sp>
-      <p:sp>
-        <p:nvSpPr>
-          <p:cNvPr id="28" name="TextBox 27"/>
+                  <a:srgbClr val="5B6B78"/>
+                </a:solidFill>
+                <a:latin typeface="Calibri"/>
+              </a:rPr>
+              <a:t>Direction</a:t>
+            </a:r>
+          </a:p>
+        </p:txBody>
+      </p:sp>
+      <p:sp>
+        <p:nvSpPr>
+          <p:cNvPr id="33" name="TextBox 32"/>
           <p:cNvSpPr txBox="1"/>
           <p:nvPr/>
         </p:nvSpPr>
         <p:spPr>
           <a:xfrm>
-            <a:off x="8377732" y="4389120"/>
-            <a:ext cx="3045866" cy="1463040"/>
+            <a:off x="566928" y="5669280"/>
+            <a:ext cx="11057839" cy="640080"/>
           </a:xfrm>
           <a:prstGeom prst="rect">
             <a:avLst/>
@@ -27484,127 +26201,34 @@
           <a:noFill/>
         </p:spPr>
         <p:txBody>
-          <a:bodyPr wrap="square" lIns="0" rIns="0" tIns="0" bIns="0">
+          <a:bodyPr wrap="square" anchor="t" lIns="0" rIns="0" tIns="0" bIns="0">
             <a:noAutofit/>
           </a:bodyPr>
           <a:lstStyle/>
           <a:p>
-            <a:pPr>
-              <a:lnSpc>
-                <a:spcPct val="100000"/>
-              </a:lnSpc>
-              <a:spcAft>
-                <a:spcPts val="300"/>
-              </a:spcAft>
-            </a:pPr>
-            <a:r>
-              <a:rPr sz="1200" b="1">
-                <a:solidFill>
-                  <a:srgbClr val="E97132"/>
-                </a:solidFill>
-                <a:latin typeface="Calibri"/>
-              </a:rPr>
-              <a:t>✓ </a:t>
-            </a:r>
-            <a:r>
-              <a:rPr sz="1200">
-                <a:solidFill>
-                  <a:srgbClr val="1E2B36"/>
-                </a:solidFill>
-                <a:latin typeface="Calibri"/>
-              </a:rPr>
-              <a:t>5 conformance classes</a:t>
-            </a:r>
-          </a:p>
-          <a:p>
-            <a:pPr>
-              <a:lnSpc>
-                <a:spcPct val="100000"/>
-              </a:lnSpc>
-              <a:spcAft>
-                <a:spcPts val="300"/>
-              </a:spcAft>
-            </a:pPr>
-            <a:r>
-              <a:rPr sz="1200" b="1">
-                <a:solidFill>
-                  <a:srgbClr val="E97132"/>
-                </a:solidFill>
-                <a:latin typeface="Calibri"/>
-              </a:rPr>
-              <a:t>✓ </a:t>
-            </a:r>
-            <a:r>
-              <a:rPr sz="1200">
-                <a:solidFill>
-                  <a:srgbClr val="1E2B36"/>
-                </a:solidFill>
-                <a:latin typeface="Calibri"/>
-              </a:rPr>
-              <a:t>OpenAPI at /api</a:t>
-            </a:r>
-          </a:p>
-          <a:p>
-            <a:pPr>
-              <a:lnSpc>
-                <a:spcPct val="100000"/>
-              </a:lnSpc>
-              <a:spcAft>
-                <a:spcPts val="300"/>
-              </a:spcAft>
-            </a:pPr>
-            <a:r>
-              <a:rPr sz="1200" b="1">
-                <a:solidFill>
-                  <a:srgbClr val="E97132"/>
-                </a:solidFill>
-                <a:latin typeface="Calibri"/>
-              </a:rPr>
-              <a:t>✓ </a:t>
-            </a:r>
-            <a:r>
-              <a:rPr sz="1200">
-                <a:solidFill>
-                  <a:srgbClr val="1E2B36"/>
-                </a:solidFill>
-                <a:latin typeface="Calibri"/>
-              </a:rPr>
-              <a:t>streaming + keyset</a:t>
-            </a:r>
-          </a:p>
-          <a:p>
-            <a:pPr>
-              <a:lnSpc>
-                <a:spcPct val="100000"/>
-              </a:lnSpc>
-              <a:spcAft>
-                <a:spcPts val="300"/>
-              </a:spcAft>
-            </a:pPr>
-            <a:r>
-              <a:rPr sz="1200" b="1">
-                <a:solidFill>
-                  <a:srgbClr val="E97132"/>
-                </a:solidFill>
-                <a:latin typeface="Calibri"/>
-              </a:rPr>
-              <a:t>✓ </a:t>
-            </a:r>
-            <a:r>
-              <a:rPr sz="1200">
-                <a:solidFill>
-                  <a:srgbClr val="1E2B36"/>
-                </a:solidFill>
-                <a:latin typeface="Calibri"/>
-              </a:rPr>
-              <a:t>NDJSON · Parquet export</a:t>
-            </a:r>
-          </a:p>
-        </p:txBody>
-      </p:sp>
-      <p:sp>
-        <p:nvSpPr>
-          <p:cNvPr id="29" name="Rectangle 28"/>
+            <a:pPr algn="ctr">
+              <a:spcBef>
+                <a:spcPts val="0"/>
+              </a:spcBef>
+              <a:spcAft>
+                <a:spcPts val="200"/>
+              </a:spcAft>
+            </a:pPr>
+            <a:r>
+              <a:rPr sz="1200" b="0" i="1">
+                <a:solidFill>
+                  <a:srgbClr val="5B6B78"/>
+                </a:solidFill>
+                <a:latin typeface="Calibri"/>
+              </a:rPr>
+              <a:t>MEOS types and the MF-JSON / WKB wire format are shared across the ecosystem, so the same tier fronts a transactional database today and the lakehouse and streaming engines as they mature.</a:t>
+            </a:r>
+          </a:p>
+        </p:txBody>
+      </p:sp>
+      <p:sp>
+        <p:nvSpPr>
+          <p:cNvPr id="34" name="Rectangle 33"/>
           <p:cNvSpPr/>
           <p:nvPr/>
         </p:nvSpPr>
@@ -27648,7 +26272,7 @@
       </p:sp>
       <p:sp>
         <p:nvSpPr>
-          <p:cNvPr id="30" name="TextBox 29"/>
+          <p:cNvPr id="35" name="TextBox 34"/>
           <p:cNvSpPr txBox="1"/>
           <p:nvPr/>
         </p:nvSpPr>
@@ -27690,7 +26314,7 @@
       </p:sp>
       <p:sp>
         <p:nvSpPr>
-          <p:cNvPr id="31" name="TextBox 30"/>
+          <p:cNvPr id="36" name="TextBox 35"/>
           <p:cNvSpPr txBox="1"/>
           <p:nvPr/>
         </p:nvSpPr>
@@ -27739,6 +26363,1834 @@
 </file>
 
 <file path=ppt/slides/slide25.xml><?xml version="1.0" encoding="utf-8"?>
+<p:sld xmlns:a="http://schemas.openxmlformats.org/drawingml/2006/main" xmlns:p="http://schemas.openxmlformats.org/presentationml/2006/main" xmlns:r="http://schemas.openxmlformats.org/officeDocument/2006/relationships">
+  <p:cSld>
+    <p:bg>
+      <p:bgPr>
+        <a:solidFill>
+          <a:srgbClr val="FFFFFF"/>
+        </a:solidFill>
+        <a:effectLst/>
+      </p:bgPr>
+    </p:bg>
+    <p:spTree>
+      <p:nvGrpSpPr>
+        <p:cNvPr id="1" name=""/>
+        <p:cNvGrpSpPr/>
+        <p:nvPr/>
+      </p:nvGrpSpPr>
+      <p:grpSpPr/>
+      <p:sp>
+        <p:nvSpPr>
+          <p:cNvPr id="2" name="TextBox 1"/>
+          <p:cNvSpPr txBox="1"/>
+          <p:nvPr/>
+        </p:nvSpPr>
+        <p:spPr>
+          <a:xfrm>
+            <a:off x="566928" y="365760"/>
+            <a:ext cx="11057839" cy="274320"/>
+          </a:xfrm>
+          <a:prstGeom prst="rect">
+            <a:avLst/>
+          </a:prstGeom>
+          <a:noFill/>
+        </p:spPr>
+        <p:txBody>
+          <a:bodyPr wrap="square" anchor="t" lIns="0" rIns="0" tIns="0" bIns="0">
+            <a:noAutofit/>
+          </a:bodyPr>
+          <a:lstStyle/>
+          <a:p>
+            <a:pPr algn="l">
+              <a:spcBef>
+                <a:spcPts val="0"/>
+              </a:spcBef>
+              <a:spcAft>
+                <a:spcPts val="200"/>
+              </a:spcAft>
+            </a:pPr>
+            <a:r>
+              <a:rPr sz="1200" b="1" i="0">
+                <a:solidFill>
+                  <a:srgbClr val="156082"/>
+                </a:solidFill>
+                <a:latin typeface="Calibri"/>
+              </a:rPr>
+              <a:t>RECAP</a:t>
+            </a:r>
+          </a:p>
+        </p:txBody>
+      </p:sp>
+      <p:sp>
+        <p:nvSpPr>
+          <p:cNvPr id="3" name="TextBox 2"/>
+          <p:cNvSpPr txBox="1"/>
+          <p:nvPr/>
+        </p:nvSpPr>
+        <p:spPr>
+          <a:xfrm>
+            <a:off x="566928" y="603504"/>
+            <a:ext cx="11057839" cy="777240"/>
+          </a:xfrm>
+          <a:prstGeom prst="rect">
+            <a:avLst/>
+          </a:prstGeom>
+          <a:noFill/>
+        </p:spPr>
+        <p:txBody>
+          <a:bodyPr wrap="square" anchor="t" lIns="0" rIns="0" tIns="0" bIns="0">
+            <a:noAutofit/>
+          </a:bodyPr>
+          <a:lstStyle/>
+          <a:p>
+            <a:pPr algn="l">
+              <a:spcBef>
+                <a:spcPts val="0"/>
+              </a:spcBef>
+              <a:spcAft>
+                <a:spcPts val="200"/>
+              </a:spcAft>
+            </a:pPr>
+            <a:r>
+              <a:rPr sz="3200" b="1" i="0">
+                <a:solidFill>
+                  <a:srgbClr val="0E2841"/>
+                </a:solidFill>
+                <a:latin typeface="Calibri Light"/>
+              </a:rPr>
+              <a:t>The Standard Surface, Recapped</a:t>
+            </a:r>
+          </a:p>
+        </p:txBody>
+      </p:sp>
+      <p:sp>
+        <p:nvSpPr>
+          <p:cNvPr id="4" name="Rectangle 3"/>
+          <p:cNvSpPr/>
+          <p:nvPr/>
+        </p:nvSpPr>
+        <p:spPr>
+          <a:xfrm>
+            <a:off x="566928" y="1389888"/>
+            <a:ext cx="1554480" cy="45720"/>
+          </a:xfrm>
+          <a:prstGeom prst="rect">
+            <a:avLst/>
+          </a:prstGeom>
+          <a:solidFill>
+            <a:srgbClr val="156082"/>
+          </a:solidFill>
+          <a:ln>
+            <a:noFill/>
+          </a:ln>
+          <a:effectLst/>
+        </p:spPr>
+        <p:style>
+          <a:lnRef idx="1">
+            <a:schemeClr val="accent1"/>
+          </a:lnRef>
+          <a:fillRef idx="3">
+            <a:schemeClr val="accent1"/>
+          </a:fillRef>
+          <a:effectRef idx="2">
+            <a:schemeClr val="accent1"/>
+          </a:effectRef>
+          <a:fontRef idx="minor">
+            <a:schemeClr val="lt1"/>
+          </a:fontRef>
+        </p:style>
+        <p:txBody>
+          <a:bodyPr rtlCol="0" anchor="ctr"/>
+          <a:lstStyle/>
+          <a:p>
+            <a:pPr algn="ctr"/>
+          </a:p>
+        </p:txBody>
+      </p:sp>
+      <p:sp>
+        <p:nvSpPr>
+          <p:cNvPr id="5" name="Rounded Rectangle 4"/>
+          <p:cNvSpPr/>
+          <p:nvPr/>
+        </p:nvSpPr>
+        <p:spPr>
+          <a:xfrm>
+            <a:off x="566928" y="1645920"/>
+            <a:ext cx="3503066" cy="2057400"/>
+          </a:xfrm>
+          <a:prstGeom prst="roundRect">
+            <a:avLst>
+              <a:gd name="adj" fmla="val 4000"/>
+            </a:avLst>
+          </a:prstGeom>
+          <a:solidFill>
+            <a:srgbClr val="F1F5F8"/>
+          </a:solidFill>
+          <a:ln>
+            <a:noFill/>
+          </a:ln>
+          <a:effectLst/>
+        </p:spPr>
+        <p:style>
+          <a:lnRef idx="1">
+            <a:schemeClr val="accent1"/>
+          </a:lnRef>
+          <a:fillRef idx="3">
+            <a:schemeClr val="accent1"/>
+          </a:fillRef>
+          <a:effectRef idx="2">
+            <a:schemeClr val="accent1"/>
+          </a:effectRef>
+          <a:fontRef idx="minor">
+            <a:schemeClr val="lt1"/>
+          </a:fontRef>
+        </p:style>
+        <p:txBody>
+          <a:bodyPr rtlCol="0" anchor="ctr"/>
+          <a:lstStyle/>
+          <a:p>
+            <a:pPr algn="ctr"/>
+          </a:p>
+        </p:txBody>
+      </p:sp>
+      <p:sp>
+        <p:nvSpPr>
+          <p:cNvPr id="6" name="Rectangle 5"/>
+          <p:cNvSpPr/>
+          <p:nvPr/>
+        </p:nvSpPr>
+        <p:spPr>
+          <a:xfrm>
+            <a:off x="566928" y="1645920"/>
+            <a:ext cx="82296" cy="2057400"/>
+          </a:xfrm>
+          <a:prstGeom prst="rect">
+            <a:avLst/>
+          </a:prstGeom>
+          <a:solidFill>
+            <a:srgbClr val="156082"/>
+          </a:solidFill>
+          <a:ln>
+            <a:noFill/>
+          </a:ln>
+          <a:effectLst/>
+        </p:spPr>
+        <p:style>
+          <a:lnRef idx="1">
+            <a:schemeClr val="accent1"/>
+          </a:lnRef>
+          <a:fillRef idx="3">
+            <a:schemeClr val="accent1"/>
+          </a:fillRef>
+          <a:effectRef idx="2">
+            <a:schemeClr val="accent1"/>
+          </a:effectRef>
+          <a:fontRef idx="minor">
+            <a:schemeClr val="lt1"/>
+          </a:fontRef>
+        </p:style>
+        <p:txBody>
+          <a:bodyPr rtlCol="0" anchor="ctr"/>
+          <a:lstStyle/>
+          <a:p>
+            <a:pPr algn="ctr"/>
+          </a:p>
+        </p:txBody>
+      </p:sp>
+      <p:sp>
+        <p:nvSpPr>
+          <p:cNvPr id="7" name="TextBox 6"/>
+          <p:cNvSpPr txBox="1"/>
+          <p:nvPr/>
+        </p:nvSpPr>
+        <p:spPr>
+          <a:xfrm>
+            <a:off x="822960" y="1792224"/>
+            <a:ext cx="3137306" cy="274320"/>
+          </a:xfrm>
+          <a:prstGeom prst="rect">
+            <a:avLst/>
+          </a:prstGeom>
+          <a:noFill/>
+        </p:spPr>
+        <p:txBody>
+          <a:bodyPr wrap="square" anchor="t" lIns="0" rIns="0" tIns="0" bIns="0">
+            <a:noAutofit/>
+          </a:bodyPr>
+          <a:lstStyle/>
+          <a:p>
+            <a:pPr algn="l">
+              <a:spcBef>
+                <a:spcPts val="0"/>
+              </a:spcBef>
+              <a:spcAft>
+                <a:spcPts val="200"/>
+              </a:spcAft>
+            </a:pPr>
+            <a:r>
+              <a:rPr sz="1200" b="1" i="0">
+                <a:solidFill>
+                  <a:srgbClr val="156082"/>
+                </a:solidFill>
+                <a:latin typeface="Calibri"/>
+              </a:rPr>
+              <a:t>COLLECTIONS</a:t>
+            </a:r>
+          </a:p>
+        </p:txBody>
+      </p:sp>
+      <p:sp>
+        <p:nvSpPr>
+          <p:cNvPr id="8" name="TextBox 7"/>
+          <p:cNvSpPr txBox="1"/>
+          <p:nvPr/>
+        </p:nvSpPr>
+        <p:spPr>
+          <a:xfrm>
+            <a:off x="822960" y="2148840"/>
+            <a:ext cx="3045866" cy="1463040"/>
+          </a:xfrm>
+          <a:prstGeom prst="rect">
+            <a:avLst/>
+          </a:prstGeom>
+          <a:noFill/>
+        </p:spPr>
+        <p:txBody>
+          <a:bodyPr wrap="square" lIns="0" rIns="0" tIns="0" bIns="0">
+            <a:noAutofit/>
+          </a:bodyPr>
+          <a:lstStyle/>
+          <a:p>
+            <a:pPr>
+              <a:lnSpc>
+                <a:spcPct val="100000"/>
+              </a:lnSpc>
+              <a:spcAft>
+                <a:spcPts val="300"/>
+              </a:spcAft>
+            </a:pPr>
+            <a:r>
+              <a:rPr sz="1200" b="1">
+                <a:solidFill>
+                  <a:srgbClr val="156082"/>
+                </a:solidFill>
+                <a:latin typeface="Calibri"/>
+              </a:rPr>
+              <a:t>✓ </a:t>
+            </a:r>
+            <a:r>
+              <a:rPr sz="1200">
+                <a:solidFill>
+                  <a:srgbClr val="1E2B36"/>
+                </a:solidFill>
+                <a:latin typeface="Calibri"/>
+              </a:rPr>
+              <a:t>list (GET)</a:t>
+            </a:r>
+          </a:p>
+          <a:p>
+            <a:pPr>
+              <a:lnSpc>
+                <a:spcPct val="100000"/>
+              </a:lnSpc>
+              <a:spcAft>
+                <a:spcPts val="300"/>
+              </a:spcAft>
+            </a:pPr>
+            <a:r>
+              <a:rPr sz="1200" b="1">
+                <a:solidFill>
+                  <a:srgbClr val="156082"/>
+                </a:solidFill>
+                <a:latin typeface="Calibri"/>
+              </a:rPr>
+              <a:t>✓ </a:t>
+            </a:r>
+            <a:r>
+              <a:rPr sz="1200">
+                <a:solidFill>
+                  <a:srgbClr val="1E2B36"/>
+                </a:solidFill>
+                <a:latin typeface="Calibri"/>
+              </a:rPr>
+              <a:t>retrieve (GET)</a:t>
+            </a:r>
+          </a:p>
+          <a:p>
+            <a:pPr>
+              <a:lnSpc>
+                <a:spcPct val="100000"/>
+              </a:lnSpc>
+              <a:spcAft>
+                <a:spcPts val="300"/>
+              </a:spcAft>
+            </a:pPr>
+            <a:r>
+              <a:rPr sz="1200" b="1">
+                <a:solidFill>
+                  <a:srgbClr val="156082"/>
+                </a:solidFill>
+                <a:latin typeface="Calibri"/>
+              </a:rPr>
+              <a:t>✓ </a:t>
+            </a:r>
+            <a:r>
+              <a:rPr sz="1200">
+                <a:solidFill>
+                  <a:srgbClr val="1E2B36"/>
+                </a:solidFill>
+                <a:latin typeface="Calibri"/>
+              </a:rPr>
+              <a:t>registry-backed</a:t>
+            </a:r>
+          </a:p>
+        </p:txBody>
+      </p:sp>
+      <p:sp>
+        <p:nvSpPr>
+          <p:cNvPr id="9" name="Rounded Rectangle 8"/>
+          <p:cNvSpPr/>
+          <p:nvPr/>
+        </p:nvSpPr>
+        <p:spPr>
+          <a:xfrm>
+            <a:off x="4344314" y="1645920"/>
+            <a:ext cx="3503066" cy="2057400"/>
+          </a:xfrm>
+          <a:prstGeom prst="roundRect">
+            <a:avLst>
+              <a:gd name="adj" fmla="val 4000"/>
+            </a:avLst>
+          </a:prstGeom>
+          <a:solidFill>
+            <a:srgbClr val="F1F5F8"/>
+          </a:solidFill>
+          <a:ln>
+            <a:noFill/>
+          </a:ln>
+          <a:effectLst/>
+        </p:spPr>
+        <p:style>
+          <a:lnRef idx="1">
+            <a:schemeClr val="accent1"/>
+          </a:lnRef>
+          <a:fillRef idx="3">
+            <a:schemeClr val="accent1"/>
+          </a:fillRef>
+          <a:effectRef idx="2">
+            <a:schemeClr val="accent1"/>
+          </a:effectRef>
+          <a:fontRef idx="minor">
+            <a:schemeClr val="lt1"/>
+          </a:fontRef>
+        </p:style>
+        <p:txBody>
+          <a:bodyPr rtlCol="0" anchor="ctr"/>
+          <a:lstStyle/>
+          <a:p>
+            <a:pPr algn="ctr"/>
+          </a:p>
+        </p:txBody>
+      </p:sp>
+      <p:sp>
+        <p:nvSpPr>
+          <p:cNvPr id="10" name="Rectangle 9"/>
+          <p:cNvSpPr/>
+          <p:nvPr/>
+        </p:nvSpPr>
+        <p:spPr>
+          <a:xfrm>
+            <a:off x="4344314" y="1645920"/>
+            <a:ext cx="82296" cy="2057400"/>
+          </a:xfrm>
+          <a:prstGeom prst="rect">
+            <a:avLst/>
+          </a:prstGeom>
+          <a:solidFill>
+            <a:srgbClr val="E97132"/>
+          </a:solidFill>
+          <a:ln>
+            <a:noFill/>
+          </a:ln>
+          <a:effectLst/>
+        </p:spPr>
+        <p:style>
+          <a:lnRef idx="1">
+            <a:schemeClr val="accent1"/>
+          </a:lnRef>
+          <a:fillRef idx="3">
+            <a:schemeClr val="accent1"/>
+          </a:fillRef>
+          <a:effectRef idx="2">
+            <a:schemeClr val="accent1"/>
+          </a:effectRef>
+          <a:fontRef idx="minor">
+            <a:schemeClr val="lt1"/>
+          </a:fontRef>
+        </p:style>
+        <p:txBody>
+          <a:bodyPr rtlCol="0" anchor="ctr"/>
+          <a:lstStyle/>
+          <a:p>
+            <a:pPr algn="ctr"/>
+          </a:p>
+        </p:txBody>
+      </p:sp>
+      <p:sp>
+        <p:nvSpPr>
+          <p:cNvPr id="11" name="TextBox 10"/>
+          <p:cNvSpPr txBox="1"/>
+          <p:nvPr/>
+        </p:nvSpPr>
+        <p:spPr>
+          <a:xfrm>
+            <a:off x="4600346" y="1792224"/>
+            <a:ext cx="3137306" cy="274320"/>
+          </a:xfrm>
+          <a:prstGeom prst="rect">
+            <a:avLst/>
+          </a:prstGeom>
+          <a:noFill/>
+        </p:spPr>
+        <p:txBody>
+          <a:bodyPr wrap="square" anchor="t" lIns="0" rIns="0" tIns="0" bIns="0">
+            <a:noAutofit/>
+          </a:bodyPr>
+          <a:lstStyle/>
+          <a:p>
+            <a:pPr algn="l">
+              <a:spcBef>
+                <a:spcPts val="0"/>
+              </a:spcBef>
+              <a:spcAft>
+                <a:spcPts val="200"/>
+              </a:spcAft>
+            </a:pPr>
+            <a:r>
+              <a:rPr sz="1200" b="1" i="0">
+                <a:solidFill>
+                  <a:srgbClr val="E97132"/>
+                </a:solidFill>
+                <a:latin typeface="Calibri"/>
+              </a:rPr>
+              <a:t>MOVING FEATURES</a:t>
+            </a:r>
+          </a:p>
+        </p:txBody>
+      </p:sp>
+      <p:sp>
+        <p:nvSpPr>
+          <p:cNvPr id="12" name="TextBox 11"/>
+          <p:cNvSpPr txBox="1"/>
+          <p:nvPr/>
+        </p:nvSpPr>
+        <p:spPr>
+          <a:xfrm>
+            <a:off x="4600346" y="2148840"/>
+            <a:ext cx="3045866" cy="1463040"/>
+          </a:xfrm>
+          <a:prstGeom prst="rect">
+            <a:avLst/>
+          </a:prstGeom>
+          <a:noFill/>
+        </p:spPr>
+        <p:txBody>
+          <a:bodyPr wrap="square" lIns="0" rIns="0" tIns="0" bIns="0">
+            <a:noAutofit/>
+          </a:bodyPr>
+          <a:lstStyle/>
+          <a:p>
+            <a:pPr>
+              <a:lnSpc>
+                <a:spcPct val="100000"/>
+              </a:lnSpc>
+              <a:spcAft>
+                <a:spcPts val="300"/>
+              </a:spcAft>
+            </a:pPr>
+            <a:r>
+              <a:rPr sz="1200" b="1">
+                <a:solidFill>
+                  <a:srgbClr val="E97132"/>
+                </a:solidFill>
+                <a:latin typeface="Calibri"/>
+              </a:rPr>
+              <a:t>✓ </a:t>
+            </a:r>
+            <a:r>
+              <a:rPr sz="1200">
+                <a:solidFill>
+                  <a:srgbClr val="1E2B36"/>
+                </a:solidFill>
+                <a:latin typeface="Calibri"/>
+              </a:rPr>
+              <a:t>insert (POST)</a:t>
+            </a:r>
+          </a:p>
+          <a:p>
+            <a:pPr>
+              <a:lnSpc>
+                <a:spcPct val="100000"/>
+              </a:lnSpc>
+              <a:spcAft>
+                <a:spcPts val="300"/>
+              </a:spcAft>
+            </a:pPr>
+            <a:r>
+              <a:rPr sz="1200" b="1">
+                <a:solidFill>
+                  <a:srgbClr val="E97132"/>
+                </a:solidFill>
+                <a:latin typeface="Calibri"/>
+              </a:rPr>
+              <a:t>✓ </a:t>
+            </a:r>
+            <a:r>
+              <a:rPr sz="1200">
+                <a:solidFill>
+                  <a:srgbClr val="1E2B36"/>
+                </a:solidFill>
+                <a:latin typeface="Calibri"/>
+              </a:rPr>
+              <a:t>retrieve / stream</a:t>
+            </a:r>
+          </a:p>
+          <a:p>
+            <a:pPr>
+              <a:lnSpc>
+                <a:spcPct val="100000"/>
+              </a:lnSpc>
+              <a:spcAft>
+                <a:spcPts val="300"/>
+              </a:spcAft>
+            </a:pPr>
+            <a:r>
+              <a:rPr sz="1200" b="1">
+                <a:solidFill>
+                  <a:srgbClr val="E97132"/>
+                </a:solidFill>
+                <a:latin typeface="Calibri"/>
+              </a:rPr>
+              <a:t>✓ </a:t>
+            </a:r>
+            <a:r>
+              <a:rPr sz="1200">
+                <a:solidFill>
+                  <a:srgbClr val="1E2B36"/>
+                </a:solidFill>
+                <a:latin typeface="Calibri"/>
+              </a:rPr>
+              <a:t>delete (DELETE)</a:t>
+            </a:r>
+          </a:p>
+          <a:p>
+            <a:pPr>
+              <a:lnSpc>
+                <a:spcPct val="100000"/>
+              </a:lnSpc>
+              <a:spcAft>
+                <a:spcPts val="300"/>
+              </a:spcAft>
+            </a:pPr>
+            <a:r>
+              <a:rPr sz="1200" b="1">
+                <a:solidFill>
+                  <a:srgbClr val="E97132"/>
+                </a:solidFill>
+                <a:latin typeface="Calibri"/>
+              </a:rPr>
+              <a:t>✓ </a:t>
+            </a:r>
+            <a:r>
+              <a:rPr sz="1200">
+                <a:solidFill>
+                  <a:srgbClr val="1E2B36"/>
+                </a:solidFill>
+                <a:latin typeface="Calibri"/>
+              </a:rPr>
+              <a:t>keyset paging</a:t>
+            </a:r>
+          </a:p>
+        </p:txBody>
+      </p:sp>
+      <p:sp>
+        <p:nvSpPr>
+          <p:cNvPr id="13" name="Rounded Rectangle 12"/>
+          <p:cNvSpPr/>
+          <p:nvPr/>
+        </p:nvSpPr>
+        <p:spPr>
+          <a:xfrm>
+            <a:off x="8121700" y="1645920"/>
+            <a:ext cx="3503066" cy="2057400"/>
+          </a:xfrm>
+          <a:prstGeom prst="roundRect">
+            <a:avLst>
+              <a:gd name="adj" fmla="val 4000"/>
+            </a:avLst>
+          </a:prstGeom>
+          <a:solidFill>
+            <a:srgbClr val="F1F5F8"/>
+          </a:solidFill>
+          <a:ln>
+            <a:noFill/>
+          </a:ln>
+          <a:effectLst/>
+        </p:spPr>
+        <p:style>
+          <a:lnRef idx="1">
+            <a:schemeClr val="accent1"/>
+          </a:lnRef>
+          <a:fillRef idx="3">
+            <a:schemeClr val="accent1"/>
+          </a:fillRef>
+          <a:effectRef idx="2">
+            <a:schemeClr val="accent1"/>
+          </a:effectRef>
+          <a:fontRef idx="minor">
+            <a:schemeClr val="lt1"/>
+          </a:fontRef>
+        </p:style>
+        <p:txBody>
+          <a:bodyPr rtlCol="0" anchor="ctr"/>
+          <a:lstStyle/>
+          <a:p>
+            <a:pPr algn="ctr"/>
+          </a:p>
+        </p:txBody>
+      </p:sp>
+      <p:sp>
+        <p:nvSpPr>
+          <p:cNvPr id="14" name="Rectangle 13"/>
+          <p:cNvSpPr/>
+          <p:nvPr/>
+        </p:nvSpPr>
+        <p:spPr>
+          <a:xfrm>
+            <a:off x="8121700" y="1645920"/>
+            <a:ext cx="82296" cy="2057400"/>
+          </a:xfrm>
+          <a:prstGeom prst="rect">
+            <a:avLst/>
+          </a:prstGeom>
+          <a:solidFill>
+            <a:srgbClr val="196B24"/>
+          </a:solidFill>
+          <a:ln>
+            <a:noFill/>
+          </a:ln>
+          <a:effectLst/>
+        </p:spPr>
+        <p:style>
+          <a:lnRef idx="1">
+            <a:schemeClr val="accent1"/>
+          </a:lnRef>
+          <a:fillRef idx="3">
+            <a:schemeClr val="accent1"/>
+          </a:fillRef>
+          <a:effectRef idx="2">
+            <a:schemeClr val="accent1"/>
+          </a:effectRef>
+          <a:fontRef idx="minor">
+            <a:schemeClr val="lt1"/>
+          </a:fontRef>
+        </p:style>
+        <p:txBody>
+          <a:bodyPr rtlCol="0" anchor="ctr"/>
+          <a:lstStyle/>
+          <a:p>
+            <a:pPr algn="ctr"/>
+          </a:p>
+        </p:txBody>
+      </p:sp>
+      <p:sp>
+        <p:nvSpPr>
+          <p:cNvPr id="15" name="TextBox 14"/>
+          <p:cNvSpPr txBox="1"/>
+          <p:nvPr/>
+        </p:nvSpPr>
+        <p:spPr>
+          <a:xfrm>
+            <a:off x="8377732" y="1792224"/>
+            <a:ext cx="3137306" cy="274320"/>
+          </a:xfrm>
+          <a:prstGeom prst="rect">
+            <a:avLst/>
+          </a:prstGeom>
+          <a:noFill/>
+        </p:spPr>
+        <p:txBody>
+          <a:bodyPr wrap="square" anchor="t" lIns="0" rIns="0" tIns="0" bIns="0">
+            <a:noAutofit/>
+          </a:bodyPr>
+          <a:lstStyle/>
+          <a:p>
+            <a:pPr algn="l">
+              <a:spcBef>
+                <a:spcPts val="0"/>
+              </a:spcBef>
+              <a:spcAft>
+                <a:spcPts val="200"/>
+              </a:spcAft>
+            </a:pPr>
+            <a:r>
+              <a:rPr sz="1200" b="1" i="0">
+                <a:solidFill>
+                  <a:srgbClr val="196B24"/>
+                </a:solidFill>
+                <a:latin typeface="Calibri"/>
+              </a:rPr>
+              <a:t>QUERYING</a:t>
+            </a:r>
+          </a:p>
+        </p:txBody>
+      </p:sp>
+      <p:sp>
+        <p:nvSpPr>
+          <p:cNvPr id="16" name="TextBox 15"/>
+          <p:cNvSpPr txBox="1"/>
+          <p:nvPr/>
+        </p:nvSpPr>
+        <p:spPr>
+          <a:xfrm>
+            <a:off x="8377732" y="2148840"/>
+            <a:ext cx="3045866" cy="1463040"/>
+          </a:xfrm>
+          <a:prstGeom prst="rect">
+            <a:avLst/>
+          </a:prstGeom>
+          <a:noFill/>
+        </p:spPr>
+        <p:txBody>
+          <a:bodyPr wrap="square" lIns="0" rIns="0" tIns="0" bIns="0">
+            <a:noAutofit/>
+          </a:bodyPr>
+          <a:lstStyle/>
+          <a:p>
+            <a:pPr>
+              <a:lnSpc>
+                <a:spcPct val="100000"/>
+              </a:lnSpc>
+              <a:spcAft>
+                <a:spcPts val="300"/>
+              </a:spcAft>
+            </a:pPr>
+            <a:r>
+              <a:rPr sz="1200" b="1">
+                <a:solidFill>
+                  <a:srgbClr val="196B24"/>
+                </a:solidFill>
+                <a:latin typeface="Calibri"/>
+              </a:rPr>
+              <a:t>✓ </a:t>
+            </a:r>
+            <a:r>
+              <a:rPr sz="1200">
+                <a:solidFill>
+                  <a:srgbClr val="1E2B36"/>
+                </a:solidFill>
+                <a:latin typeface="Calibri"/>
+              </a:rPr>
+              <a:t>bbox spatial filter</a:t>
+            </a:r>
+          </a:p>
+          <a:p>
+            <a:pPr>
+              <a:lnSpc>
+                <a:spcPct val="100000"/>
+              </a:lnSpc>
+              <a:spcAft>
+                <a:spcPts val="300"/>
+              </a:spcAft>
+            </a:pPr>
+            <a:r>
+              <a:rPr sz="1200" b="1">
+                <a:solidFill>
+                  <a:srgbClr val="196B24"/>
+                </a:solidFill>
+                <a:latin typeface="Calibri"/>
+              </a:rPr>
+              <a:t>✓ </a:t>
+            </a:r>
+            <a:r>
+              <a:rPr sz="1200">
+                <a:solidFill>
+                  <a:srgbClr val="1E2B36"/>
+                </a:solidFill>
+                <a:latin typeface="Calibri"/>
+              </a:rPr>
+              <a:t>datetime interval / instant</a:t>
+            </a:r>
+          </a:p>
+          <a:p>
+            <a:pPr>
+              <a:lnSpc>
+                <a:spcPct val="100000"/>
+              </a:lnSpc>
+              <a:spcAft>
+                <a:spcPts val="300"/>
+              </a:spcAft>
+            </a:pPr>
+            <a:r>
+              <a:rPr sz="1200" b="1">
+                <a:solidFill>
+                  <a:srgbClr val="196B24"/>
+                </a:solidFill>
+                <a:latin typeface="Calibri"/>
+              </a:rPr>
+              <a:t>✓ </a:t>
+            </a:r>
+            <a:r>
+              <a:rPr sz="1200">
+                <a:solidFill>
+                  <a:srgbClr val="1E2B36"/>
+                </a:solidFill>
+                <a:latin typeface="Calibri"/>
+              </a:rPr>
+              <a:t>subtrajectory clipping</a:t>
+            </a:r>
+          </a:p>
+          <a:p>
+            <a:pPr>
+              <a:lnSpc>
+                <a:spcPct val="100000"/>
+              </a:lnSpc>
+              <a:spcAft>
+                <a:spcPts val="300"/>
+              </a:spcAft>
+            </a:pPr>
+            <a:r>
+              <a:rPr sz="1200" b="1">
+                <a:solidFill>
+                  <a:srgbClr val="196B24"/>
+                </a:solidFill>
+                <a:latin typeface="Calibri"/>
+              </a:rPr>
+              <a:t>✓ </a:t>
+            </a:r>
+            <a:r>
+              <a:rPr sz="1200">
+                <a:solidFill>
+                  <a:srgbClr val="1E2B36"/>
+                </a:solidFill>
+                <a:latin typeface="Calibri"/>
+              </a:rPr>
+              <a:t>leaf selector</a:t>
+            </a:r>
+          </a:p>
+        </p:txBody>
+      </p:sp>
+      <p:sp>
+        <p:nvSpPr>
+          <p:cNvPr id="17" name="Rounded Rectangle 16"/>
+          <p:cNvSpPr/>
+          <p:nvPr/>
+        </p:nvSpPr>
+        <p:spPr>
+          <a:xfrm>
+            <a:off x="566928" y="3886200"/>
+            <a:ext cx="3503066" cy="2057400"/>
+          </a:xfrm>
+          <a:prstGeom prst="roundRect">
+            <a:avLst>
+              <a:gd name="adj" fmla="val 4000"/>
+            </a:avLst>
+          </a:prstGeom>
+          <a:solidFill>
+            <a:srgbClr val="F1F5F8"/>
+          </a:solidFill>
+          <a:ln>
+            <a:noFill/>
+          </a:ln>
+          <a:effectLst/>
+        </p:spPr>
+        <p:style>
+          <a:lnRef idx="1">
+            <a:schemeClr val="accent1"/>
+          </a:lnRef>
+          <a:fillRef idx="3">
+            <a:schemeClr val="accent1"/>
+          </a:fillRef>
+          <a:effectRef idx="2">
+            <a:schemeClr val="accent1"/>
+          </a:effectRef>
+          <a:fontRef idx="minor">
+            <a:schemeClr val="lt1"/>
+          </a:fontRef>
+        </p:style>
+        <p:txBody>
+          <a:bodyPr rtlCol="0" anchor="ctr"/>
+          <a:lstStyle/>
+          <a:p>
+            <a:pPr algn="ctr"/>
+          </a:p>
+        </p:txBody>
+      </p:sp>
+      <p:sp>
+        <p:nvSpPr>
+          <p:cNvPr id="18" name="Rectangle 17"/>
+          <p:cNvSpPr/>
+          <p:nvPr/>
+        </p:nvSpPr>
+        <p:spPr>
+          <a:xfrm>
+            <a:off x="566928" y="3886200"/>
+            <a:ext cx="82296" cy="2057400"/>
+          </a:xfrm>
+          <a:prstGeom prst="rect">
+            <a:avLst/>
+          </a:prstGeom>
+          <a:solidFill>
+            <a:srgbClr val="A02B93"/>
+          </a:solidFill>
+          <a:ln>
+            <a:noFill/>
+          </a:ln>
+          <a:effectLst/>
+        </p:spPr>
+        <p:style>
+          <a:lnRef idx="1">
+            <a:schemeClr val="accent1"/>
+          </a:lnRef>
+          <a:fillRef idx="3">
+            <a:schemeClr val="accent1"/>
+          </a:fillRef>
+          <a:effectRef idx="2">
+            <a:schemeClr val="accent1"/>
+          </a:effectRef>
+          <a:fontRef idx="minor">
+            <a:schemeClr val="lt1"/>
+          </a:fontRef>
+        </p:style>
+        <p:txBody>
+          <a:bodyPr rtlCol="0" anchor="ctr"/>
+          <a:lstStyle/>
+          <a:p>
+            <a:pPr algn="ctr"/>
+          </a:p>
+        </p:txBody>
+      </p:sp>
+      <p:sp>
+        <p:nvSpPr>
+          <p:cNvPr id="19" name="TextBox 18"/>
+          <p:cNvSpPr txBox="1"/>
+          <p:nvPr/>
+        </p:nvSpPr>
+        <p:spPr>
+          <a:xfrm>
+            <a:off x="822960" y="4032504"/>
+            <a:ext cx="3137306" cy="274320"/>
+          </a:xfrm>
+          <a:prstGeom prst="rect">
+            <a:avLst/>
+          </a:prstGeom>
+          <a:noFill/>
+        </p:spPr>
+        <p:txBody>
+          <a:bodyPr wrap="square" anchor="t" lIns="0" rIns="0" tIns="0" bIns="0">
+            <a:noAutofit/>
+          </a:bodyPr>
+          <a:lstStyle/>
+          <a:p>
+            <a:pPr algn="l">
+              <a:spcBef>
+                <a:spcPts val="0"/>
+              </a:spcBef>
+              <a:spcAft>
+                <a:spcPts val="200"/>
+              </a:spcAft>
+            </a:pPr>
+            <a:r>
+              <a:rPr sz="1200" b="1" i="0">
+                <a:solidFill>
+                  <a:srgbClr val="A02B93"/>
+                </a:solidFill>
+                <a:latin typeface="Calibri"/>
+              </a:rPr>
+              <a:t>TEMPORAL GEOMETRY</a:t>
+            </a:r>
+          </a:p>
+        </p:txBody>
+      </p:sp>
+      <p:sp>
+        <p:nvSpPr>
+          <p:cNvPr id="20" name="TextBox 19"/>
+          <p:cNvSpPr txBox="1"/>
+          <p:nvPr/>
+        </p:nvSpPr>
+        <p:spPr>
+          <a:xfrm>
+            <a:off x="822960" y="4389120"/>
+            <a:ext cx="3045866" cy="1463040"/>
+          </a:xfrm>
+          <a:prstGeom prst="rect">
+            <a:avLst/>
+          </a:prstGeom>
+          <a:noFill/>
+        </p:spPr>
+        <p:txBody>
+          <a:bodyPr wrap="square" lIns="0" rIns="0" tIns="0" bIns="0">
+            <a:noAutofit/>
+          </a:bodyPr>
+          <a:lstStyle/>
+          <a:p>
+            <a:pPr>
+              <a:lnSpc>
+                <a:spcPct val="100000"/>
+              </a:lnSpc>
+              <a:spcAft>
+                <a:spcPts val="300"/>
+              </a:spcAft>
+            </a:pPr>
+            <a:r>
+              <a:rPr sz="1200" b="1">
+                <a:solidFill>
+                  <a:srgbClr val="A02B93"/>
+                </a:solidFill>
+                <a:latin typeface="Calibri"/>
+              </a:rPr>
+              <a:t>✓ </a:t>
+            </a:r>
+            <a:r>
+              <a:rPr sz="1200">
+                <a:solidFill>
+                  <a:srgbClr val="1E2B36"/>
+                </a:solidFill>
+                <a:latin typeface="Calibri"/>
+              </a:rPr>
+              <a:t>get sequence (GET)</a:t>
+            </a:r>
+          </a:p>
+          <a:p>
+            <a:pPr>
+              <a:lnSpc>
+                <a:spcPct val="100000"/>
+              </a:lnSpc>
+              <a:spcAft>
+                <a:spcPts val="300"/>
+              </a:spcAft>
+            </a:pPr>
+            <a:r>
+              <a:rPr sz="1200" b="1">
+                <a:solidFill>
+                  <a:srgbClr val="A02B93"/>
+                </a:solidFill>
+                <a:latin typeface="Calibri"/>
+              </a:rPr>
+              <a:t>✓ </a:t>
+            </a:r>
+            <a:r>
+              <a:rPr sz="1200">
+                <a:solidFill>
+                  <a:srgbClr val="1E2B36"/>
+                </a:solidFill>
+                <a:latin typeface="Calibri"/>
+              </a:rPr>
+              <a:t>append sub-trajectory (POST)</a:t>
+            </a:r>
+          </a:p>
+          <a:p>
+            <a:pPr>
+              <a:lnSpc>
+                <a:spcPct val="100000"/>
+              </a:lnSpc>
+              <a:spcAft>
+                <a:spcPts val="300"/>
+              </a:spcAft>
+            </a:pPr>
+            <a:r>
+              <a:rPr sz="1200" b="1">
+                <a:solidFill>
+                  <a:srgbClr val="A02B93"/>
+                </a:solidFill>
+                <a:latin typeface="Calibri"/>
+              </a:rPr>
+              <a:t>✓ </a:t>
+            </a:r>
+            <a:r>
+              <a:rPr sz="1200">
+                <a:solidFill>
+                  <a:srgbClr val="1E2B36"/>
+                </a:solidFill>
+                <a:latin typeface="Calibri"/>
+              </a:rPr>
+              <a:t>datetime / leaf clip</a:t>
+            </a:r>
+          </a:p>
+        </p:txBody>
+      </p:sp>
+      <p:sp>
+        <p:nvSpPr>
+          <p:cNvPr id="21" name="Rounded Rectangle 20"/>
+          <p:cNvSpPr/>
+          <p:nvPr/>
+        </p:nvSpPr>
+        <p:spPr>
+          <a:xfrm>
+            <a:off x="4344314" y="3886200"/>
+            <a:ext cx="3503066" cy="2057400"/>
+          </a:xfrm>
+          <a:prstGeom prst="roundRect">
+            <a:avLst>
+              <a:gd name="adj" fmla="val 4000"/>
+            </a:avLst>
+          </a:prstGeom>
+          <a:solidFill>
+            <a:srgbClr val="F1F5F8"/>
+          </a:solidFill>
+          <a:ln>
+            <a:noFill/>
+          </a:ln>
+          <a:effectLst/>
+        </p:spPr>
+        <p:style>
+          <a:lnRef idx="1">
+            <a:schemeClr val="accent1"/>
+          </a:lnRef>
+          <a:fillRef idx="3">
+            <a:schemeClr val="accent1"/>
+          </a:fillRef>
+          <a:effectRef idx="2">
+            <a:schemeClr val="accent1"/>
+          </a:effectRef>
+          <a:fontRef idx="minor">
+            <a:schemeClr val="lt1"/>
+          </a:fontRef>
+        </p:style>
+        <p:txBody>
+          <a:bodyPr rtlCol="0" anchor="ctr"/>
+          <a:lstStyle/>
+          <a:p>
+            <a:pPr algn="ctr"/>
+          </a:p>
+        </p:txBody>
+      </p:sp>
+      <p:sp>
+        <p:nvSpPr>
+          <p:cNvPr id="22" name="Rectangle 21"/>
+          <p:cNvSpPr/>
+          <p:nvPr/>
+        </p:nvSpPr>
+        <p:spPr>
+          <a:xfrm>
+            <a:off x="4344314" y="3886200"/>
+            <a:ext cx="82296" cy="2057400"/>
+          </a:xfrm>
+          <a:prstGeom prst="rect">
+            <a:avLst/>
+          </a:prstGeom>
+          <a:solidFill>
+            <a:srgbClr val="156082"/>
+          </a:solidFill>
+          <a:ln>
+            <a:noFill/>
+          </a:ln>
+          <a:effectLst/>
+        </p:spPr>
+        <p:style>
+          <a:lnRef idx="1">
+            <a:schemeClr val="accent1"/>
+          </a:lnRef>
+          <a:fillRef idx="3">
+            <a:schemeClr val="accent1"/>
+          </a:fillRef>
+          <a:effectRef idx="2">
+            <a:schemeClr val="accent1"/>
+          </a:effectRef>
+          <a:fontRef idx="minor">
+            <a:schemeClr val="lt1"/>
+          </a:fontRef>
+        </p:style>
+        <p:txBody>
+          <a:bodyPr rtlCol="0" anchor="ctr"/>
+          <a:lstStyle/>
+          <a:p>
+            <a:pPr algn="ctr"/>
+          </a:p>
+        </p:txBody>
+      </p:sp>
+      <p:sp>
+        <p:nvSpPr>
+          <p:cNvPr id="23" name="TextBox 22"/>
+          <p:cNvSpPr txBox="1"/>
+          <p:nvPr/>
+        </p:nvSpPr>
+        <p:spPr>
+          <a:xfrm>
+            <a:off x="4600346" y="4032504"/>
+            <a:ext cx="3137306" cy="274320"/>
+          </a:xfrm>
+          <a:prstGeom prst="rect">
+            <a:avLst/>
+          </a:prstGeom>
+          <a:noFill/>
+        </p:spPr>
+        <p:txBody>
+          <a:bodyPr wrap="square" anchor="t" lIns="0" rIns="0" tIns="0" bIns="0">
+            <a:noAutofit/>
+          </a:bodyPr>
+          <a:lstStyle/>
+          <a:p>
+            <a:pPr algn="l">
+              <a:spcBef>
+                <a:spcPts val="0"/>
+              </a:spcBef>
+              <a:spcAft>
+                <a:spcPts val="200"/>
+              </a:spcAft>
+            </a:pPr>
+            <a:r>
+              <a:rPr sz="1200" b="1" i="0">
+                <a:solidFill>
+                  <a:srgbClr val="156082"/>
+                </a:solidFill>
+                <a:latin typeface="Calibri"/>
+              </a:rPr>
+              <a:t>DERIVED MEASURES</a:t>
+            </a:r>
+          </a:p>
+        </p:txBody>
+      </p:sp>
+      <p:sp>
+        <p:nvSpPr>
+          <p:cNvPr id="24" name="TextBox 23"/>
+          <p:cNvSpPr txBox="1"/>
+          <p:nvPr/>
+        </p:nvSpPr>
+        <p:spPr>
+          <a:xfrm>
+            <a:off x="4600346" y="4389120"/>
+            <a:ext cx="3045866" cy="1463040"/>
+          </a:xfrm>
+          <a:prstGeom prst="rect">
+            <a:avLst/>
+          </a:prstGeom>
+          <a:noFill/>
+        </p:spPr>
+        <p:txBody>
+          <a:bodyPr wrap="square" lIns="0" rIns="0" tIns="0" bIns="0">
+            <a:noAutofit/>
+          </a:bodyPr>
+          <a:lstStyle/>
+          <a:p>
+            <a:pPr>
+              <a:lnSpc>
+                <a:spcPct val="100000"/>
+              </a:lnSpc>
+              <a:spcAft>
+                <a:spcPts val="300"/>
+              </a:spcAft>
+            </a:pPr>
+            <a:r>
+              <a:rPr sz="1200" b="1">
+                <a:solidFill>
+                  <a:srgbClr val="156082"/>
+                </a:solidFill>
+                <a:latin typeface="Calibri"/>
+              </a:rPr>
+              <a:t>✓ </a:t>
+            </a:r>
+            <a:r>
+              <a:rPr sz="1200">
+                <a:solidFill>
+                  <a:srgbClr val="1E2B36"/>
+                </a:solidFill>
+                <a:latin typeface="Calibri"/>
+              </a:rPr>
+              <a:t>distance</a:t>
+            </a:r>
+          </a:p>
+          <a:p>
+            <a:pPr>
+              <a:lnSpc>
+                <a:spcPct val="100000"/>
+              </a:lnSpc>
+              <a:spcAft>
+                <a:spcPts val="300"/>
+              </a:spcAft>
+            </a:pPr>
+            <a:r>
+              <a:rPr sz="1200" b="1">
+                <a:solidFill>
+                  <a:srgbClr val="156082"/>
+                </a:solidFill>
+                <a:latin typeface="Calibri"/>
+              </a:rPr>
+              <a:t>✓ </a:t>
+            </a:r>
+            <a:r>
+              <a:rPr sz="1200">
+                <a:solidFill>
+                  <a:srgbClr val="1E2B36"/>
+                </a:solidFill>
+                <a:latin typeface="Calibri"/>
+              </a:rPr>
+              <a:t>velocity</a:t>
+            </a:r>
+          </a:p>
+          <a:p>
+            <a:pPr>
+              <a:lnSpc>
+                <a:spcPct val="100000"/>
+              </a:lnSpc>
+              <a:spcAft>
+                <a:spcPts val="300"/>
+              </a:spcAft>
+            </a:pPr>
+            <a:r>
+              <a:rPr sz="1200" b="1">
+                <a:solidFill>
+                  <a:srgbClr val="156082"/>
+                </a:solidFill>
+                <a:latin typeface="Calibri"/>
+              </a:rPr>
+              <a:t>✓ </a:t>
+            </a:r>
+            <a:r>
+              <a:rPr sz="1200">
+                <a:solidFill>
+                  <a:srgbClr val="1E2B36"/>
+                </a:solidFill>
+                <a:latin typeface="Calibri"/>
+              </a:rPr>
+              <a:t>acceleration → 501 (not derivable)</a:t>
+            </a:r>
+          </a:p>
+          <a:p>
+            <a:pPr>
+              <a:lnSpc>
+                <a:spcPct val="100000"/>
+              </a:lnSpc>
+              <a:spcAft>
+                <a:spcPts val="300"/>
+              </a:spcAft>
+            </a:pPr>
+            <a:r>
+              <a:rPr sz="1200" b="1">
+                <a:solidFill>
+                  <a:srgbClr val="156082"/>
+                </a:solidFill>
+                <a:latin typeface="Calibri"/>
+              </a:rPr>
+              <a:t>✓ </a:t>
+            </a:r>
+            <a:r>
+              <a:rPr sz="1200">
+                <a:solidFill>
+                  <a:srgbClr val="1E2B36"/>
+                </a:solidFill>
+                <a:latin typeface="Calibri"/>
+              </a:rPr>
+              <a:t>exact, as TReal</a:t>
+            </a:r>
+          </a:p>
+        </p:txBody>
+      </p:sp>
+      <p:sp>
+        <p:nvSpPr>
+          <p:cNvPr id="25" name="Rounded Rectangle 24"/>
+          <p:cNvSpPr/>
+          <p:nvPr/>
+        </p:nvSpPr>
+        <p:spPr>
+          <a:xfrm>
+            <a:off x="8121700" y="3886200"/>
+            <a:ext cx="3503066" cy="2057400"/>
+          </a:xfrm>
+          <a:prstGeom prst="roundRect">
+            <a:avLst>
+              <a:gd name="adj" fmla="val 4000"/>
+            </a:avLst>
+          </a:prstGeom>
+          <a:solidFill>
+            <a:srgbClr val="F1F5F8"/>
+          </a:solidFill>
+          <a:ln>
+            <a:noFill/>
+          </a:ln>
+          <a:effectLst/>
+        </p:spPr>
+        <p:style>
+          <a:lnRef idx="1">
+            <a:schemeClr val="accent1"/>
+          </a:lnRef>
+          <a:fillRef idx="3">
+            <a:schemeClr val="accent1"/>
+          </a:fillRef>
+          <a:effectRef idx="2">
+            <a:schemeClr val="accent1"/>
+          </a:effectRef>
+          <a:fontRef idx="minor">
+            <a:schemeClr val="lt1"/>
+          </a:fontRef>
+        </p:style>
+        <p:txBody>
+          <a:bodyPr rtlCol="0" anchor="ctr"/>
+          <a:lstStyle/>
+          <a:p>
+            <a:pPr algn="ctr"/>
+          </a:p>
+        </p:txBody>
+      </p:sp>
+      <p:sp>
+        <p:nvSpPr>
+          <p:cNvPr id="26" name="Rectangle 25"/>
+          <p:cNvSpPr/>
+          <p:nvPr/>
+        </p:nvSpPr>
+        <p:spPr>
+          <a:xfrm>
+            <a:off x="8121700" y="3886200"/>
+            <a:ext cx="82296" cy="2057400"/>
+          </a:xfrm>
+          <a:prstGeom prst="rect">
+            <a:avLst/>
+          </a:prstGeom>
+          <a:solidFill>
+            <a:srgbClr val="E97132"/>
+          </a:solidFill>
+          <a:ln>
+            <a:noFill/>
+          </a:ln>
+          <a:effectLst/>
+        </p:spPr>
+        <p:style>
+          <a:lnRef idx="1">
+            <a:schemeClr val="accent1"/>
+          </a:lnRef>
+          <a:fillRef idx="3">
+            <a:schemeClr val="accent1"/>
+          </a:fillRef>
+          <a:effectRef idx="2">
+            <a:schemeClr val="accent1"/>
+          </a:effectRef>
+          <a:fontRef idx="minor">
+            <a:schemeClr val="lt1"/>
+          </a:fontRef>
+        </p:style>
+        <p:txBody>
+          <a:bodyPr rtlCol="0" anchor="ctr"/>
+          <a:lstStyle/>
+          <a:p>
+            <a:pPr algn="ctr"/>
+          </a:p>
+        </p:txBody>
+      </p:sp>
+      <p:sp>
+        <p:nvSpPr>
+          <p:cNvPr id="27" name="TextBox 26"/>
+          <p:cNvSpPr txBox="1"/>
+          <p:nvPr/>
+        </p:nvSpPr>
+        <p:spPr>
+          <a:xfrm>
+            <a:off x="8377732" y="4032504"/>
+            <a:ext cx="3137306" cy="274320"/>
+          </a:xfrm>
+          <a:prstGeom prst="rect">
+            <a:avLst/>
+          </a:prstGeom>
+          <a:noFill/>
+        </p:spPr>
+        <p:txBody>
+          <a:bodyPr wrap="square" anchor="t" lIns="0" rIns="0" tIns="0" bIns="0">
+            <a:noAutofit/>
+          </a:bodyPr>
+          <a:lstStyle/>
+          <a:p>
+            <a:pPr algn="l">
+              <a:spcBef>
+                <a:spcPts val="0"/>
+              </a:spcBef>
+              <a:spcAft>
+                <a:spcPts val="200"/>
+              </a:spcAft>
+            </a:pPr>
+            <a:r>
+              <a:rPr sz="1200" b="1" i="0">
+                <a:solidFill>
+                  <a:srgbClr val="E97132"/>
+                </a:solidFill>
+                <a:latin typeface="Calibri"/>
+              </a:rPr>
+              <a:t>CONFORMANCE &amp; SCALE</a:t>
+            </a:r>
+          </a:p>
+        </p:txBody>
+      </p:sp>
+      <p:sp>
+        <p:nvSpPr>
+          <p:cNvPr id="28" name="TextBox 27"/>
+          <p:cNvSpPr txBox="1"/>
+          <p:nvPr/>
+        </p:nvSpPr>
+        <p:spPr>
+          <a:xfrm>
+            <a:off x="8377732" y="4389120"/>
+            <a:ext cx="3045866" cy="1463040"/>
+          </a:xfrm>
+          <a:prstGeom prst="rect">
+            <a:avLst/>
+          </a:prstGeom>
+          <a:noFill/>
+        </p:spPr>
+        <p:txBody>
+          <a:bodyPr wrap="square" lIns="0" rIns="0" tIns="0" bIns="0">
+            <a:noAutofit/>
+          </a:bodyPr>
+          <a:lstStyle/>
+          <a:p>
+            <a:pPr>
+              <a:lnSpc>
+                <a:spcPct val="100000"/>
+              </a:lnSpc>
+              <a:spcAft>
+                <a:spcPts val="300"/>
+              </a:spcAft>
+            </a:pPr>
+            <a:r>
+              <a:rPr sz="1200" b="1">
+                <a:solidFill>
+                  <a:srgbClr val="E97132"/>
+                </a:solidFill>
+                <a:latin typeface="Calibri"/>
+              </a:rPr>
+              <a:t>✓ </a:t>
+            </a:r>
+            <a:r>
+              <a:rPr sz="1200">
+                <a:solidFill>
+                  <a:srgbClr val="1E2B36"/>
+                </a:solidFill>
+                <a:latin typeface="Calibri"/>
+              </a:rPr>
+              <a:t>5 conformance classes</a:t>
+            </a:r>
+          </a:p>
+          <a:p>
+            <a:pPr>
+              <a:lnSpc>
+                <a:spcPct val="100000"/>
+              </a:lnSpc>
+              <a:spcAft>
+                <a:spcPts val="300"/>
+              </a:spcAft>
+            </a:pPr>
+            <a:r>
+              <a:rPr sz="1200" b="1">
+                <a:solidFill>
+                  <a:srgbClr val="E97132"/>
+                </a:solidFill>
+                <a:latin typeface="Calibri"/>
+              </a:rPr>
+              <a:t>✓ </a:t>
+            </a:r>
+            <a:r>
+              <a:rPr sz="1200">
+                <a:solidFill>
+                  <a:srgbClr val="1E2B36"/>
+                </a:solidFill>
+                <a:latin typeface="Calibri"/>
+              </a:rPr>
+              <a:t>OpenAPI at /api</a:t>
+            </a:r>
+          </a:p>
+          <a:p>
+            <a:pPr>
+              <a:lnSpc>
+                <a:spcPct val="100000"/>
+              </a:lnSpc>
+              <a:spcAft>
+                <a:spcPts val="300"/>
+              </a:spcAft>
+            </a:pPr>
+            <a:r>
+              <a:rPr sz="1200" b="1">
+                <a:solidFill>
+                  <a:srgbClr val="E97132"/>
+                </a:solidFill>
+                <a:latin typeface="Calibri"/>
+              </a:rPr>
+              <a:t>✓ </a:t>
+            </a:r>
+            <a:r>
+              <a:rPr sz="1200">
+                <a:solidFill>
+                  <a:srgbClr val="1E2B36"/>
+                </a:solidFill>
+                <a:latin typeface="Calibri"/>
+              </a:rPr>
+              <a:t>streaming + keyset</a:t>
+            </a:r>
+          </a:p>
+          <a:p>
+            <a:pPr>
+              <a:lnSpc>
+                <a:spcPct val="100000"/>
+              </a:lnSpc>
+              <a:spcAft>
+                <a:spcPts val="300"/>
+              </a:spcAft>
+            </a:pPr>
+            <a:r>
+              <a:rPr sz="1200" b="1">
+                <a:solidFill>
+                  <a:srgbClr val="E97132"/>
+                </a:solidFill>
+                <a:latin typeface="Calibri"/>
+              </a:rPr>
+              <a:t>✓ </a:t>
+            </a:r>
+            <a:r>
+              <a:rPr sz="1200">
+                <a:solidFill>
+                  <a:srgbClr val="1E2B36"/>
+                </a:solidFill>
+                <a:latin typeface="Calibri"/>
+              </a:rPr>
+              <a:t>index-using filters</a:t>
+            </a:r>
+          </a:p>
+        </p:txBody>
+      </p:sp>
+      <p:sp>
+        <p:nvSpPr>
+          <p:cNvPr id="29" name="Rectangle 28"/>
+          <p:cNvSpPr/>
+          <p:nvPr/>
+        </p:nvSpPr>
+        <p:spPr>
+          <a:xfrm>
+            <a:off x="566928" y="6455664"/>
+            <a:ext cx="11057839" cy="10972"/>
+          </a:xfrm>
+          <a:prstGeom prst="rect">
+            <a:avLst/>
+          </a:prstGeom>
+          <a:solidFill>
+            <a:srgbClr val="D3DEE6"/>
+          </a:solidFill>
+          <a:ln>
+            <a:noFill/>
+          </a:ln>
+          <a:effectLst/>
+        </p:spPr>
+        <p:style>
+          <a:lnRef idx="1">
+            <a:schemeClr val="accent1"/>
+          </a:lnRef>
+          <a:fillRef idx="3">
+            <a:schemeClr val="accent1"/>
+          </a:fillRef>
+          <a:effectRef idx="2">
+            <a:schemeClr val="accent1"/>
+          </a:effectRef>
+          <a:fontRef idx="minor">
+            <a:schemeClr val="lt1"/>
+          </a:fontRef>
+        </p:style>
+        <p:txBody>
+          <a:bodyPr rtlCol="0" anchor="ctr"/>
+          <a:lstStyle/>
+          <a:p>
+            <a:pPr algn="ctr"/>
+          </a:p>
+        </p:txBody>
+      </p:sp>
+      <p:sp>
+        <p:nvSpPr>
+          <p:cNvPr id="30" name="TextBox 29"/>
+          <p:cNvSpPr txBox="1"/>
+          <p:nvPr/>
+        </p:nvSpPr>
+        <p:spPr>
+          <a:xfrm>
+            <a:off x="566928" y="6510528"/>
+            <a:ext cx="7315200" cy="274320"/>
+          </a:xfrm>
+          <a:prstGeom prst="rect">
+            <a:avLst/>
+          </a:prstGeom>
+          <a:noFill/>
+        </p:spPr>
+        <p:txBody>
+          <a:bodyPr wrap="square" anchor="t" lIns="0" rIns="0" tIns="0" bIns="0">
+            <a:noAutofit/>
+          </a:bodyPr>
+          <a:lstStyle/>
+          <a:p>
+            <a:pPr algn="l">
+              <a:spcBef>
+                <a:spcPts val="0"/>
+              </a:spcBef>
+              <a:spcAft>
+                <a:spcPts val="200"/>
+              </a:spcAft>
+            </a:pPr>
+            <a:r>
+              <a:rPr sz="1200" b="0" i="0">
+                <a:solidFill>
+                  <a:srgbClr val="5B6B78"/>
+                </a:solidFill>
+                <a:latin typeface="Calibri"/>
+              </a:rPr>
+              <a:t>MobilityAPI  ·  OGC API – Moving Features</a:t>
+            </a:r>
+          </a:p>
+        </p:txBody>
+      </p:sp>
+      <p:sp>
+        <p:nvSpPr>
+          <p:cNvPr id="31" name="TextBox 30"/>
+          <p:cNvSpPr txBox="1"/>
+          <p:nvPr/>
+        </p:nvSpPr>
+        <p:spPr>
+          <a:xfrm>
+            <a:off x="10911535" y="6510528"/>
+            <a:ext cx="731520" cy="274320"/>
+          </a:xfrm>
+          <a:prstGeom prst="rect">
+            <a:avLst/>
+          </a:prstGeom>
+          <a:noFill/>
+        </p:spPr>
+        <p:txBody>
+          <a:bodyPr wrap="square" anchor="t" lIns="0" rIns="0" tIns="0" bIns="0">
+            <a:noAutofit/>
+          </a:bodyPr>
+          <a:lstStyle/>
+          <a:p>
+            <a:pPr algn="r">
+              <a:spcBef>
+                <a:spcPts val="0"/>
+              </a:spcBef>
+              <a:spcAft>
+                <a:spcPts val="200"/>
+              </a:spcAft>
+            </a:pPr>
+            <a:r>
+              <a:rPr sz="1200" b="0" i="0">
+                <a:solidFill>
+                  <a:srgbClr val="5B6B78"/>
+                </a:solidFill>
+                <a:latin typeface="Calibri"/>
+              </a:rPr>
+              <a:t>22</a:t>
+            </a:r>
+          </a:p>
+        </p:txBody>
+      </p:sp>
+    </p:spTree>
+  </p:cSld>
+  <p:clrMapOvr>
+    <a:masterClrMapping/>
+  </p:clrMapOvr>
+</p:sld>
+</file>
+
+<file path=ppt/slides/slide26.xml><?xml version="1.0" encoding="utf-8"?>
 <p:sld xmlns:a="http://schemas.openxmlformats.org/drawingml/2006/main" xmlns:p="http://schemas.openxmlformats.org/presentationml/2006/main" xmlns:r="http://schemas.openxmlformats.org/officeDocument/2006/relationships">
   <p:cSld>
     <p:bg>
@@ -27960,7 +28412,7 @@
 </p:sld>
 </file>
 
-<file path=ppt/slides/slide26.xml><?xml version="1.0" encoding="utf-8"?>
+<file path=ppt/slides/slide27.xml><?xml version="1.0" encoding="utf-8"?>
 <p:sld xmlns:a="http://schemas.openxmlformats.org/drawingml/2006/main" xmlns:p="http://schemas.openxmlformats.org/presentationml/2006/main" xmlns:r="http://schemas.openxmlformats.org/officeDocument/2006/relationships">
   <p:cSld>
     <p:bg>
@@ -28736,7 +29188,7 @@
                 </a:solidFill>
                 <a:latin typeface="Calibri"/>
               </a:rPr>
-              <a:t>22</a:t>
+              <a:t>23</a:t>
             </a:r>
           </a:p>
         </p:txBody>
@@ -29470,7 +29922,7 @@
                 </a:solidFill>
                 <a:latin typeface="Calibri"/>
               </a:rPr>
-              <a:t>The trajectory is never materialised, parsed or transformed in the tier. It travels as asMFJSON text on the way out and as a MovingFeaturesJSON payload on the way in; MobilityDB does the parsing, the geometry algebra and the temporal computations. The result is a single static binary with no cgo dependency.</a:t>
+              <a:t>The trajectory is never materialised, parsed or transformed in the tier. It travels as MF-JSON text on the way out and as a MovingFeaturesJSON payload on the way in; MobilityDB does the parsing, the geometry algebra and the temporal computations. The result is a single static binary with no cgo dependency.</a:t>
             </a:r>
           </a:p>
         </p:txBody>
@@ -29909,6 +30361,42 @@
               </a:rPr>
               <a:t>VALUES (</a:t>
             </a:r>
+            <a:r>
+              <a:rPr sz="1200">
+                <a:solidFill>
+                  <a:srgbClr val="C9E08A"/>
+                </a:solidFill>
+                <a:latin typeface="Consolas"/>
+              </a:rPr>
+              <a:t>205106000</a:t>
+            </a:r>
+            <a:r>
+              <a:rPr sz="1200">
+                <a:solidFill>
+                  <a:srgbClr val="C2D0DA"/>
+                </a:solidFill>
+                <a:latin typeface="Consolas"/>
+              </a:rPr>
+              <a:t>, </a:t>
+            </a:r>
+            <a:r>
+              <a:rPr sz="1200">
+                <a:solidFill>
+                  <a:srgbClr val="C9E08A"/>
+                </a:solidFill>
+                <a:latin typeface="Consolas"/>
+              </a:rPr>
+              <a:t>205106000</a:t>
+            </a:r>
+            <a:r>
+              <a:rPr sz="1200">
+                <a:solidFill>
+                  <a:srgbClr val="C2D0DA"/>
+                </a:solidFill>
+                <a:latin typeface="Consolas"/>
+              </a:rPr>
+              <a:t>, 'MARCUS',</a:t>
+            </a:r>
           </a:p>
           <a:p>
             <a:pPr>
@@ -29929,43 +30417,7 @@
                 </a:solidFill>
                 <a:latin typeface="Consolas"/>
               </a:rPr>
-              <a:t>  </a:t>
-            </a:r>
-            <a:r>
-              <a:rPr sz="1200">
-                <a:solidFill>
-                  <a:srgbClr val="C9E08A"/>
-                </a:solidFill>
-                <a:latin typeface="Consolas"/>
-              </a:rPr>
-              <a:t>205106000</a:t>
-            </a:r>
-            <a:r>
-              <a:rPr sz="1200">
-                <a:solidFill>
-                  <a:srgbClr val="C2D0DA"/>
-                </a:solidFill>
-                <a:latin typeface="Consolas"/>
-              </a:rPr>
-              <a:t>, </a:t>
-            </a:r>
-            <a:r>
-              <a:rPr sz="1200">
-                <a:solidFill>
-                  <a:srgbClr val="C9E08A"/>
-                </a:solidFill>
-                <a:latin typeface="Consolas"/>
-              </a:rPr>
-              <a:t>205106000</a:t>
-            </a:r>
-            <a:r>
-              <a:rPr sz="1200">
-                <a:solidFill>
-                  <a:srgbClr val="C2D0DA"/>
-                </a:solidFill>
-                <a:latin typeface="Consolas"/>
-              </a:rPr>
-              <a:t>, 'MARCUS',</a:t>
+              <a:t>  tgeompoint '[</a:t>
             </a:r>
           </a:p>
           <a:p>
@@ -29987,7 +30439,7 @@
                 </a:solidFill>
                 <a:latin typeface="Consolas"/>
               </a:rPr>
-              <a:t>  tgeompoint '[Point(</a:t>
+              <a:t>    Point(</a:t>
             </a:r>
             <a:r>
               <a:rPr sz="1200">
@@ -30135,7 +30587,7 @@
                 </a:solidFill>
                 <a:latin typeface="Consolas"/>
               </a:rPr>
-              <a:t>               Point(</a:t>
+              <a:t>    Point(</a:t>
             </a:r>
             <a:r>
               <a:rPr sz="1200">
@@ -30283,7 +30735,7 @@
                 </a:solidFill>
                 <a:latin typeface="Consolas"/>
               </a:rPr>
-              <a:t>               Point(</a:t>
+              <a:t>    Point(</a:t>
             </a:r>
             <a:r>
               <a:rPr sz="1200">
@@ -31635,7 +32087,7 @@
                 </a:solidFill>
                 <a:latin typeface="Calibri"/>
               </a:rPr>
-              <a:t>a MovingPoint: parallel coordinates and datetimes plus interpolation</a:t>
+              <a:t>a MovingPoint with parallel coordinates and datetimes plus interpolation</a:t>
             </a:r>
           </a:p>
           <a:p>
@@ -33110,7 +33562,7 @@
                 </a:solidFill>
                 <a:latin typeface="Consolas"/>
               </a:rPr>
-              <a:t>ships  (one table per collection)</a:t>
+              <a:t>ships</a:t>
             </a:r>
           </a:p>
         </p:txBody>
@@ -33279,6 +33731,48 @@
         </p:nvSpPr>
         <p:spPr>
           <a:xfrm>
+            <a:off x="566928" y="5660136"/>
+            <a:ext cx="4297680" cy="274320"/>
+          </a:xfrm>
+          <a:prstGeom prst="rect">
+            <a:avLst/>
+          </a:prstGeom>
+          <a:noFill/>
+        </p:spPr>
+        <p:txBody>
+          <a:bodyPr wrap="square" anchor="t" lIns="0" rIns="0" tIns="0" bIns="0">
+            <a:noAutofit/>
+          </a:bodyPr>
+          <a:lstStyle/>
+          <a:p>
+            <a:pPr algn="l">
+              <a:spcBef>
+                <a:spcPts val="0"/>
+              </a:spcBef>
+              <a:spcAft>
+                <a:spcPts val="200"/>
+              </a:spcAft>
+            </a:pPr>
+            <a:r>
+              <a:rPr sz="1200" b="0" i="1">
+                <a:solidFill>
+                  <a:srgbClr val="5B6B78"/>
+                </a:solidFill>
+                <a:latin typeface="Calibri"/>
+              </a:rPr>
+              <a:t>one feature table per collection</a:t>
+            </a:r>
+          </a:p>
+        </p:txBody>
+      </p:sp>
+      <p:sp>
+        <p:nvSpPr>
+          <p:cNvPr id="14" name="TextBox 13"/>
+          <p:cNvSpPr txBox="1"/>
+          <p:nvPr/>
+        </p:nvSpPr>
+        <p:spPr>
+          <a:xfrm>
             <a:off x="5532120" y="1783080"/>
             <a:ext cx="6092647" cy="4023360"/>
           </a:xfrm>
@@ -33329,7 +33823,7 @@
                 </a:solidFill>
                 <a:latin typeface="Calibri"/>
               </a:rPr>
-              <a:t>a small registry: each row maps a collection id to its feature table and CRS</a:t>
+              <a:t>a small registry that maps each collection id to its feature table and CRS</a:t>
             </a:r>
           </a:p>
           <a:p>
@@ -33456,7 +33950,7 @@
       </p:sp>
       <p:sp>
         <p:nvSpPr>
-          <p:cNvPr id="14" name="TextBox 13"/>
+          <p:cNvPr id="15" name="TextBox 14"/>
           <p:cNvSpPr txBox="1"/>
           <p:nvPr/>
         </p:nvSpPr>
@@ -33498,7 +33992,7 @@
       </p:sp>
       <p:sp>
         <p:nvSpPr>
-          <p:cNvPr id="15" name="Rectangle 14"/>
+          <p:cNvPr id="16" name="Rectangle 15"/>
           <p:cNvSpPr/>
           <p:nvPr/>
         </p:nvSpPr>
@@ -33542,7 +34036,7 @@
       </p:sp>
       <p:sp>
         <p:nvSpPr>
-          <p:cNvPr id="16" name="TextBox 15"/>
+          <p:cNvPr id="17" name="TextBox 16"/>
           <p:cNvSpPr txBox="1"/>
           <p:nvPr/>
         </p:nvSpPr>
@@ -33584,7 +34078,7 @@
       </p:sp>
       <p:sp>
         <p:nvSpPr>
-          <p:cNvPr id="17" name="TextBox 16"/>
+          <p:cNvPr id="18" name="TextBox 17"/>
           <p:cNvSpPr txBox="1"/>
           <p:nvPr/>
         </p:nvSpPr>
@@ -33795,7 +34289,7 @@
         <p:spPr>
           <a:xfrm>
             <a:off x="6400800" y="1554480"/>
-            <a:ext cx="5394960" cy="4002455"/>
+            <a:ext cx="5394960" cy="4046220"/>
           </a:xfrm>
           <a:prstGeom prst="rect">
             <a:avLst/>
@@ -34033,7 +34527,7 @@
         </p:nvSpPr>
         <p:spPr>
           <a:xfrm>
-            <a:off x="6035040" y="5648375"/>
+            <a:off x="6035040" y="5692140"/>
             <a:ext cx="6126480" cy="274320"/>
           </a:xfrm>
           <a:prstGeom prst="rect">

--- a/MobilityAPIV5.pptx
+++ b/MobilityAPIV5.pptx
@@ -31,7 +31,6 @@
     <p:sldId id="279" r:id="rId31"/>
     <p:sldId id="280" r:id="rId32"/>
     <p:sldId id="281" r:id="rId33"/>
-    <p:sldId id="282" r:id="rId34"/>
   </p:sldIdLst>
   <p:sldSz cx="12191695" cy="6858000" type="screen4x3"/>
   <p:notesSz cx="6858000" cy="9144000"/>
@@ -1158,7 +1157,7 @@
           <a:lstStyle/>
           <a:p>
             <a:r>
-              <a:t>Bounded by design on the standard items resource: a 393 MB response streamed at about 18 MB resident, keyset pagination pages through arbitrarily large collections, and bbox and datetime use the MobilityDB index.</a:t>
+              <a:t>Scale and the lakehouse on one slide. The standard items resource streams from a cursor with keyset pagination and index-using filters, so a 393 MB response holds about 18 MB resident. Beyond the standard and excluded from conformsTo: a bulk export (NDJSON, or Parquet with trajectory WKB plus a bbox and time sidecar, advertised via the enclosure link) and an in-place replace (PUT).</a:t>
             </a:r>
           </a:p>
         </p:txBody>
@@ -1228,7 +1227,7 @@
           <a:lstStyle/>
           <a:p>
             <a:r>
-              <a:t>Two features beyond OGC API – Moving Features, excluded from conformsTo: a bulk lakehouse export (NDJSON by default, or Parquet carrying trajectory WKB plus a bbox and time sidecar, with the row group bounding memory; advertised via the IANA enclosure link relation), and an in-place replace (PUT), since the standard allows only GET and DELETE on a feature.</a:t>
+              <a:t>The thin-tier pattern generalises across the MEOS ecosystem: the tier speaks MF-JSON and WKB and keeps all temporal work in the engine, so the storage and compute engine becomes a configuration choice. MobilityDB is implemented today; MobilityDuck (embedded lakehouse), MobilitySpark (distributed batch) and MobilityFlink (streaming, real time) reuse the same surface.</a:t>
             </a:r>
           </a:p>
         </p:txBody>
@@ -1366,76 +1365,6 @@
         <p:txBody>
           <a:bodyPr/>
           <a:lstStyle/>
-          <a:p>
-            <a:r>
-              <a:t>The thin-tier pattern generalises across the MEOS ecosystem: the tier speaks MF-JSON and WKB and keeps all temporal work in the engine, so the storage and compute engine becomes a configuration choice. MobilityDB is implemented today; MobilityDuck (embedded lakehouse), MobilitySpark (distributed batch) and MobilityFlink (streaming, real time) reuse the same surface.</a:t>
-            </a:r>
-          </a:p>
-        </p:txBody>
-      </p:sp>
-      <p:sp>
-        <p:nvSpPr>
-          <p:cNvPr id="4" name="Slide Number Placeholder 3"/>
-          <p:cNvSpPr>
-            <a:spLocks noGrp="1"/>
-          </p:cNvSpPr>
-          <p:nvPr>
-            <p:ph type="sldNum" idx="5" sz="quarter"/>
-          </p:nvPr>
-        </p:nvSpPr>
-        <p:spPr/>
-      </p:sp>
-    </p:spTree>
-  </p:cSld>
-  <p:clrMapOvr>
-    <a:masterClrMapping/>
-  </p:clrMapOvr>
-</p:notes>
-</file>
-
-<file path=ppt/notesSlides/notesSlide21.xml><?xml version="1.0" encoding="utf-8"?>
-<p:notes xmlns:a="http://schemas.openxmlformats.org/drawingml/2006/main" xmlns:p="http://schemas.openxmlformats.org/presentationml/2006/main" xmlns:r="http://schemas.openxmlformats.org/officeDocument/2006/relationships">
-  <p:cSld>
-    <p:spTree>
-      <p:nvGrpSpPr>
-        <p:cNvPr id="1" name=""/>
-        <p:cNvGrpSpPr/>
-        <p:nvPr/>
-      </p:nvGrpSpPr>
-      <p:grpSpPr>
-        <a:xfrm>
-          <a:off x="0" y="0"/>
-          <a:ext cx="0" cy="0"/>
-          <a:chOff x="0" y="0"/>
-          <a:chExt cx="0" cy="0"/>
-        </a:xfrm>
-      </p:grpSpPr>
-      <p:sp>
-        <p:nvSpPr>
-          <p:cNvPr id="2" name="Slide Image Placeholder 1"/>
-          <p:cNvSpPr>
-            <a:spLocks noGrp="1"/>
-          </p:cNvSpPr>
-          <p:nvPr>
-            <p:ph type="sldImg" idx="2"/>
-          </p:nvPr>
-        </p:nvSpPr>
-        <p:spPr/>
-      </p:sp>
-      <p:sp>
-        <p:nvSpPr>
-          <p:cNvPr id="3" name="Notes Placeholder 2"/>
-          <p:cNvSpPr>
-            <a:spLocks noGrp="1"/>
-          </p:cNvSpPr>
-          <p:nvPr>
-            <p:ph type="body" idx="3" sz="quarter"/>
-          </p:nvPr>
-        </p:nvSpPr>
-        <p:spPr/>
-        <p:txBody>
-          <a:bodyPr/>
-          <a:lstStyle/>
           <a:p/>
         </p:txBody>
       </p:sp>
@@ -1784,7 +1713,7 @@
           <a:lstStyle/>
           <a:p>
             <a:r>
-              <a:t>The backing model is small: a collections registry and one feature table holding a tgeompoint, indexed by GiST. Temporal properties are derived from the geometry, not stored in side tables.</a:t>
+              <a:t>Stored versus served: the two tables hold the columns; every other OGC field (the collection extent, and the feature bbox, time, geometry, crs, trs and links) is derived O(1) from the tgeompoint and its inline STBOX, or generated per request.</a:t>
             </a:r>
           </a:p>
         </p:txBody>
@@ -18109,7 +18038,7 @@
                 </a:solidFill>
                 <a:latin typeface="Consolas"/>
               </a:rPr>
-              <a:t>…/tgsequence/0/acceleration</a:t>
+              <a:t>/collections/ships/items/1/tgsequence/0/acceleration</a:t>
             </a:r>
           </a:p>
         </p:txBody>
@@ -23174,7 +23103,7 @@
                 </a:solidFill>
                 <a:latin typeface="Calibri"/>
               </a:rPr>
-              <a:t>SCALE AND LAKEHOUSE</a:t>
+              <a:t>SCALE AND THE LAKEHOUSE</a:t>
             </a:r>
           </a:p>
         </p:txBody>
@@ -23216,7 +23145,7 @@
                 </a:solidFill>
                 <a:latin typeface="Calibri Light"/>
               </a:rPr>
-              <a:t>Bounded Memory at Any Result Size</a:t>
+              <a:t>One Streaming Tier, Standard and Beyond</a:t>
             </a:r>
           </a:p>
         </p:txBody>
@@ -23273,8 +23202,8 @@
         </p:nvSpPr>
         <p:spPr>
           <a:xfrm>
-            <a:off x="566928" y="1783080"/>
-            <a:ext cx="3840480" cy="2788920"/>
+            <a:off x="566928" y="1828800"/>
+            <a:ext cx="3566160" cy="2286000"/>
           </a:xfrm>
           <a:prstGeom prst="roundRect">
             <a:avLst>
@@ -23319,8 +23248,8 @@
         </p:nvSpPr>
         <p:spPr>
           <a:xfrm>
-            <a:off x="886968" y="2011680"/>
-            <a:ext cx="3291840" cy="731520"/>
+            <a:off x="841247" y="2011680"/>
+            <a:ext cx="3108960" cy="640080"/>
           </a:xfrm>
           <a:prstGeom prst="rect">
             <a:avLst/>
@@ -23342,7 +23271,7 @@
               </a:spcAft>
             </a:pPr>
             <a:r>
-              <a:rPr sz="4400" b="1" i="0">
+              <a:rPr sz="4000" b="1" i="0">
                 <a:solidFill>
                   <a:srgbClr val="196B24"/>
                 </a:solidFill>
@@ -23361,8 +23290,8 @@
         </p:nvSpPr>
         <p:spPr>
           <a:xfrm>
-            <a:off x="886968" y="2761488"/>
-            <a:ext cx="3291840" cy="274320"/>
+            <a:off x="841247" y="2706624"/>
+            <a:ext cx="3108960" cy="274320"/>
           </a:xfrm>
           <a:prstGeom prst="rect">
             <a:avLst/>
@@ -23403,8 +23332,8 @@
         </p:nvSpPr>
         <p:spPr>
           <a:xfrm>
-            <a:off x="886968" y="3200400"/>
-            <a:ext cx="3291840" cy="640080"/>
+            <a:off x="841247" y="3035808"/>
+            <a:ext cx="3108960" cy="548640"/>
           </a:xfrm>
           <a:prstGeom prst="rect">
             <a:avLst/>
@@ -23426,7 +23355,7 @@
               </a:spcAft>
             </a:pPr>
             <a:r>
-              <a:rPr sz="3600" b="1" i="0">
+              <a:rPr sz="3200" b="1" i="0">
                 <a:solidFill>
                   <a:srgbClr val="156082"/>
                 </a:solidFill>
@@ -23445,8 +23374,8 @@
         </p:nvSpPr>
         <p:spPr>
           <a:xfrm>
-            <a:off x="886968" y="3931920"/>
-            <a:ext cx="3291840" cy="457200"/>
+            <a:off x="841247" y="3675887"/>
+            <a:ext cx="3108960" cy="365760"/>
           </a:xfrm>
           <a:prstGeom prst="rect">
             <a:avLst/>
@@ -23474,7 +23403,7 @@
                 </a:solidFill>
                 <a:latin typeface="Calibri"/>
               </a:rPr>
-              <a:t>resident memory, bounded by the stream and not the result size</a:t>
+              <a:t>resident, bounded by the stream not the result size</a:t>
             </a:r>
           </a:p>
         </p:txBody>
@@ -23487,8 +23416,50 @@
         </p:nvSpPr>
         <p:spPr>
           <a:xfrm>
-            <a:off x="4681728" y="1920240"/>
-            <a:ext cx="6943039" cy="4023360"/>
+            <a:off x="4453128" y="1783080"/>
+            <a:ext cx="7171639" cy="274320"/>
+          </a:xfrm>
+          <a:prstGeom prst="rect">
+            <a:avLst/>
+          </a:prstGeom>
+          <a:noFill/>
+        </p:spPr>
+        <p:txBody>
+          <a:bodyPr wrap="square" anchor="t" lIns="0" rIns="0" tIns="0" bIns="0">
+            <a:noAutofit/>
+          </a:bodyPr>
+          <a:lstStyle/>
+          <a:p>
+            <a:pPr algn="l">
+              <a:spcBef>
+                <a:spcPts val="0"/>
+              </a:spcBef>
+              <a:spcAft>
+                <a:spcPts val="200"/>
+              </a:spcAft>
+            </a:pPr>
+            <a:r>
+              <a:rPr sz="1200" b="1" i="0">
+                <a:solidFill>
+                  <a:srgbClr val="156082"/>
+                </a:solidFill>
+                <a:latin typeface="Calibri"/>
+              </a:rPr>
+              <a:t>STANDARD ITEMS RESOURCE</a:t>
+            </a:r>
+          </a:p>
+        </p:txBody>
+      </p:sp>
+      <p:sp>
+        <p:nvSpPr>
+          <p:cNvPr id="11" name="TextBox 10"/>
+          <p:cNvSpPr txBox="1"/>
+          <p:nvPr/>
+        </p:nvSpPr>
+        <p:spPr>
+          <a:xfrm>
+            <a:off x="4453128" y="2084831"/>
+            <a:ext cx="7171639" cy="1554480"/>
           </a:xfrm>
           <a:prstGeom prst="rect">
             <a:avLst/>
@@ -23509,35 +23480,35 @@
                 <a:spcPts val="0"/>
               </a:spcBef>
               <a:spcAft>
-                <a:spcPts val="1600"/>
-              </a:spcAft>
-            </a:pPr>
-            <a:r>
-              <a:rPr sz="1400" b="1">
-                <a:solidFill>
-                  <a:srgbClr val="196B24"/>
+                <a:spcPts val="600"/>
+              </a:spcAft>
+            </a:pPr>
+            <a:r>
+              <a:rPr sz="1200" b="1">
+                <a:solidFill>
+                  <a:srgbClr val="156082"/>
                 </a:solidFill>
                 <a:latin typeface="Calibri"/>
               </a:rPr>
               <a:t>▸  </a:t>
             </a:r>
             <a:r>
-              <a:rPr sz="1400" b="1">
+              <a:rPr sz="1200" b="1">
                 <a:solidFill>
                   <a:srgbClr val="0E2841"/>
                 </a:solidFill>
                 <a:latin typeface="Calibri"/>
               </a:rPr>
-              <a:t>Streaming responses:  </a:t>
-            </a:r>
-            <a:r>
-              <a:rPr sz="1400">
+              <a:t>Streaming:  </a:t>
+            </a:r>
+            <a:r>
+              <a:rPr sz="1200">
                 <a:solidFill>
                   <a:srgbClr val="1E2B36"/>
                 </a:solidFill>
                 <a:latin typeface="Calibri"/>
               </a:rPr>
-              <a:t>the FeatureCollection is written row by row from a server-side cursor, so memory is bounded for any result size</a:t>
+              <a:t>the FeatureCollection is written row by row from a cursor, so memory is bounded for any size</a:t>
             </a:r>
           </a:p>
           <a:p>
@@ -23549,20 +23520,20 @@
                 <a:spcPts val="0"/>
               </a:spcBef>
               <a:spcAft>
-                <a:spcPts val="1600"/>
-              </a:spcAft>
-            </a:pPr>
-            <a:r>
-              <a:rPr sz="1400" b="1">
-                <a:solidFill>
-                  <a:srgbClr val="196B24"/>
+                <a:spcPts val="600"/>
+              </a:spcAft>
+            </a:pPr>
+            <a:r>
+              <a:rPr sz="1200" b="1">
+                <a:solidFill>
+                  <a:srgbClr val="156082"/>
                 </a:solidFill>
                 <a:latin typeface="Calibri"/>
               </a:rPr>
               <a:t>▸  </a:t>
             </a:r>
             <a:r>
-              <a:rPr sz="1400" b="1">
+              <a:rPr sz="1200" b="1">
                 <a:solidFill>
                   <a:srgbClr val="0E2841"/>
                 </a:solidFill>
@@ -23571,13 +23542,13 @@
               <a:t>Keyset pagination:  </a:t>
             </a:r>
             <a:r>
-              <a:rPr sz="1400">
+              <a:rPr sz="1200">
                 <a:solidFill>
                   <a:srgbClr val="1E2B36"/>
                 </a:solidFill>
                 <a:latin typeface="Calibri"/>
               </a:rPr>
-              <a:t>next links advance by id with no OFFSET, so paging stays constant cost through arbitrarily large collections</a:t>
+              <a:t>next links advance by id with no OFFSET, constant cost through large collections</a:t>
             </a:r>
           </a:p>
           <a:p>
@@ -23589,20 +23560,20 @@
                 <a:spcPts val="0"/>
               </a:spcBef>
               <a:spcAft>
-                <a:spcPts val="1600"/>
-              </a:spcAft>
-            </a:pPr>
-            <a:r>
-              <a:rPr sz="1400" b="1">
-                <a:solidFill>
-                  <a:srgbClr val="196B24"/>
+                <a:spcPts val="600"/>
+              </a:spcAft>
+            </a:pPr>
+            <a:r>
+              <a:rPr sz="1200" b="1">
+                <a:solidFill>
+                  <a:srgbClr val="156082"/>
                 </a:solidFill>
                 <a:latin typeface="Calibri"/>
               </a:rPr>
               <a:t>▸  </a:t>
             </a:r>
             <a:r>
-              <a:rPr sz="1400" b="1">
+              <a:rPr sz="1200" b="1">
                 <a:solidFill>
                   <a:srgbClr val="0E2841"/>
                 </a:solidFill>
@@ -23611,7 +23582,7 @@
               <a:t>Index-using filters:  </a:t>
             </a:r>
             <a:r>
-              <a:rPr sz="1400">
+              <a:rPr sz="1200">
                 <a:solidFill>
                   <a:srgbClr val="1E2B36"/>
                 </a:solidFill>
@@ -23624,14 +23595,14 @@
       </p:sp>
       <p:sp>
         <p:nvSpPr>
-          <p:cNvPr id="11" name="TextBox 10"/>
+          <p:cNvPr id="12" name="TextBox 11"/>
           <p:cNvSpPr txBox="1"/>
           <p:nvPr/>
         </p:nvSpPr>
         <p:spPr>
           <a:xfrm>
-            <a:off x="566928" y="5760720"/>
-            <a:ext cx="11057839" cy="548640"/>
+            <a:off x="4453128" y="3712463"/>
+            <a:ext cx="7171639" cy="274320"/>
           </a:xfrm>
           <a:prstGeom prst="rect">
             <a:avLst/>
@@ -23644,6 +23615,326 @@
           </a:bodyPr>
           <a:lstStyle/>
           <a:p>
+            <a:pPr algn="l">
+              <a:spcBef>
+                <a:spcPts val="0"/>
+              </a:spcBef>
+              <a:spcAft>
+                <a:spcPts val="200"/>
+              </a:spcAft>
+            </a:pPr>
+            <a:r>
+              <a:rPr sz="1200" b="1" i="0">
+                <a:solidFill>
+                  <a:srgbClr val="C0392B"/>
+                </a:solidFill>
+                <a:latin typeface="Calibri"/>
+              </a:rPr>
+              <a:t>EXTENSIONS  —  NOT IN conformsTo</a:t>
+            </a:r>
+          </a:p>
+        </p:txBody>
+      </p:sp>
+      <p:sp>
+        <p:nvSpPr>
+          <p:cNvPr id="13" name="Rounded Rectangle 12"/>
+          <p:cNvSpPr/>
+          <p:nvPr/>
+        </p:nvSpPr>
+        <p:spPr>
+          <a:xfrm>
+            <a:off x="4453128" y="4041648"/>
+            <a:ext cx="640080" cy="292608"/>
+          </a:xfrm>
+          <a:prstGeom prst="roundRect">
+            <a:avLst>
+              <a:gd name="adj" fmla="val 40000"/>
+            </a:avLst>
+          </a:prstGeom>
+          <a:solidFill>
+            <a:srgbClr val="156082"/>
+          </a:solidFill>
+          <a:ln>
+            <a:noFill/>
+          </a:ln>
+          <a:effectLst/>
+        </p:spPr>
+        <p:style>
+          <a:lnRef idx="1">
+            <a:schemeClr val="accent1"/>
+          </a:lnRef>
+          <a:fillRef idx="3">
+            <a:schemeClr val="accent1"/>
+          </a:fillRef>
+          <a:effectRef idx="2">
+            <a:schemeClr val="accent1"/>
+          </a:effectRef>
+          <a:fontRef idx="minor">
+            <a:schemeClr val="lt1"/>
+          </a:fontRef>
+        </p:style>
+        <p:txBody>
+          <a:bodyPr rtlCol="0" anchor="ctr" wrap="none" lIns="0" rIns="0" tIns="0" bIns="0"/>
+          <a:lstStyle/>
+          <a:p>
+            <a:pPr algn="ctr"/>
+            <a:r>
+              <a:rPr sz="1200" b="1">
+                <a:solidFill>
+                  <a:srgbClr val="FFFFFF"/>
+                </a:solidFill>
+                <a:latin typeface="Calibri"/>
+              </a:rPr>
+              <a:t>GET</a:t>
+            </a:r>
+          </a:p>
+        </p:txBody>
+      </p:sp>
+      <p:sp>
+        <p:nvSpPr>
+          <p:cNvPr id="14" name="TextBox 13"/>
+          <p:cNvSpPr txBox="1"/>
+          <p:nvPr/>
+        </p:nvSpPr>
+        <p:spPr>
+          <a:xfrm>
+            <a:off x="5202936" y="4032504"/>
+            <a:ext cx="6421831" cy="274320"/>
+          </a:xfrm>
+          <a:prstGeom prst="rect">
+            <a:avLst/>
+          </a:prstGeom>
+          <a:noFill/>
+        </p:spPr>
+        <p:txBody>
+          <a:bodyPr wrap="square" anchor="ctr" lIns="0" rIns="0" tIns="0" bIns="0">
+            <a:noAutofit/>
+          </a:bodyPr>
+          <a:lstStyle/>
+          <a:p>
+            <a:pPr algn="l">
+              <a:spcBef>
+                <a:spcPts val="0"/>
+              </a:spcBef>
+              <a:spcAft>
+                <a:spcPts val="200"/>
+              </a:spcAft>
+            </a:pPr>
+            <a:r>
+              <a:rPr sz="1200" b="1" i="0">
+                <a:solidFill>
+                  <a:srgbClr val="0E2841"/>
+                </a:solidFill>
+                <a:latin typeface="Consolas"/>
+              </a:rPr>
+              <a:t>/collections/{collectionId}/export</a:t>
+            </a:r>
+          </a:p>
+        </p:txBody>
+      </p:sp>
+      <p:sp>
+        <p:nvSpPr>
+          <p:cNvPr id="15" name="TextBox 14"/>
+          <p:cNvSpPr txBox="1"/>
+          <p:nvPr/>
+        </p:nvSpPr>
+        <p:spPr>
+          <a:xfrm>
+            <a:off x="4453128" y="4361688"/>
+            <a:ext cx="7171639" cy="274320"/>
+          </a:xfrm>
+          <a:prstGeom prst="rect">
+            <a:avLst/>
+          </a:prstGeom>
+          <a:noFill/>
+        </p:spPr>
+        <p:txBody>
+          <a:bodyPr wrap="square" anchor="t" lIns="0" rIns="0" tIns="0" bIns="0">
+            <a:noAutofit/>
+          </a:bodyPr>
+          <a:lstStyle/>
+          <a:p>
+            <a:pPr algn="l">
+              <a:spcBef>
+                <a:spcPts val="0"/>
+              </a:spcBef>
+              <a:spcAft>
+                <a:spcPts val="200"/>
+              </a:spcAft>
+            </a:pPr>
+            <a:r>
+              <a:rPr sz="1200" b="0" i="0">
+                <a:solidFill>
+                  <a:srgbClr val="5B6B78"/>
+                </a:solidFill>
+                <a:latin typeface="Calibri"/>
+              </a:rPr>
+              <a:t>NDJSON, or Parquet with trajectory WKB + bbox/time sidecar; enclosure link</a:t>
+            </a:r>
+          </a:p>
+        </p:txBody>
+      </p:sp>
+      <p:sp>
+        <p:nvSpPr>
+          <p:cNvPr id="16" name="Rounded Rectangle 15"/>
+          <p:cNvSpPr/>
+          <p:nvPr/>
+        </p:nvSpPr>
+        <p:spPr>
+          <a:xfrm>
+            <a:off x="4453128" y="4736592"/>
+            <a:ext cx="603504" cy="292608"/>
+          </a:xfrm>
+          <a:prstGeom prst="roundRect">
+            <a:avLst>
+              <a:gd name="adj" fmla="val 40000"/>
+            </a:avLst>
+          </a:prstGeom>
+          <a:solidFill>
+            <a:srgbClr val="E97132"/>
+          </a:solidFill>
+          <a:ln>
+            <a:noFill/>
+          </a:ln>
+          <a:effectLst/>
+        </p:spPr>
+        <p:style>
+          <a:lnRef idx="1">
+            <a:schemeClr val="accent1"/>
+          </a:lnRef>
+          <a:fillRef idx="3">
+            <a:schemeClr val="accent1"/>
+          </a:fillRef>
+          <a:effectRef idx="2">
+            <a:schemeClr val="accent1"/>
+          </a:effectRef>
+          <a:fontRef idx="minor">
+            <a:schemeClr val="lt1"/>
+          </a:fontRef>
+        </p:style>
+        <p:txBody>
+          <a:bodyPr rtlCol="0" anchor="ctr" wrap="none" lIns="0" rIns="0" tIns="0" bIns="0"/>
+          <a:lstStyle/>
+          <a:p>
+            <a:pPr algn="ctr"/>
+            <a:r>
+              <a:rPr sz="1200" b="1">
+                <a:solidFill>
+                  <a:srgbClr val="FFFFFF"/>
+                </a:solidFill>
+                <a:latin typeface="Calibri"/>
+              </a:rPr>
+              <a:t>PUT</a:t>
+            </a:r>
+          </a:p>
+        </p:txBody>
+      </p:sp>
+      <p:sp>
+        <p:nvSpPr>
+          <p:cNvPr id="17" name="TextBox 16"/>
+          <p:cNvSpPr txBox="1"/>
+          <p:nvPr/>
+        </p:nvSpPr>
+        <p:spPr>
+          <a:xfrm>
+            <a:off x="5166360" y="4727448"/>
+            <a:ext cx="6458407" cy="274320"/>
+          </a:xfrm>
+          <a:prstGeom prst="rect">
+            <a:avLst/>
+          </a:prstGeom>
+          <a:noFill/>
+        </p:spPr>
+        <p:txBody>
+          <a:bodyPr wrap="square" anchor="ctr" lIns="0" rIns="0" tIns="0" bIns="0">
+            <a:noAutofit/>
+          </a:bodyPr>
+          <a:lstStyle/>
+          <a:p>
+            <a:pPr algn="l">
+              <a:spcBef>
+                <a:spcPts val="0"/>
+              </a:spcBef>
+              <a:spcAft>
+                <a:spcPts val="200"/>
+              </a:spcAft>
+            </a:pPr>
+            <a:r>
+              <a:rPr sz="1200" b="1" i="0">
+                <a:solidFill>
+                  <a:srgbClr val="0E2841"/>
+                </a:solidFill>
+                <a:latin typeface="Consolas"/>
+              </a:rPr>
+              <a:t>/collections/{collectionId}/items/{mFeatureId}</a:t>
+            </a:r>
+          </a:p>
+        </p:txBody>
+      </p:sp>
+      <p:sp>
+        <p:nvSpPr>
+          <p:cNvPr id="18" name="TextBox 17"/>
+          <p:cNvSpPr txBox="1"/>
+          <p:nvPr/>
+        </p:nvSpPr>
+        <p:spPr>
+          <a:xfrm>
+            <a:off x="4453128" y="5056632"/>
+            <a:ext cx="7171639" cy="274320"/>
+          </a:xfrm>
+          <a:prstGeom prst="rect">
+            <a:avLst/>
+          </a:prstGeom>
+          <a:noFill/>
+        </p:spPr>
+        <p:txBody>
+          <a:bodyPr wrap="square" anchor="t" lIns="0" rIns="0" tIns="0" bIns="0">
+            <a:noAutofit/>
+          </a:bodyPr>
+          <a:lstStyle/>
+          <a:p>
+            <a:pPr algn="l">
+              <a:spcBef>
+                <a:spcPts val="0"/>
+              </a:spcBef>
+              <a:spcAft>
+                <a:spcPts val="200"/>
+              </a:spcAft>
+            </a:pPr>
+            <a:r>
+              <a:rPr sz="1200" b="0" i="0">
+                <a:solidFill>
+                  <a:srgbClr val="5B6B78"/>
+                </a:solidFill>
+                <a:latin typeface="Calibri"/>
+              </a:rPr>
+              <a:t>in-place replace; the standard allows only GET and DELETE on a feature</a:t>
+            </a:r>
+          </a:p>
+        </p:txBody>
+      </p:sp>
+      <p:sp>
+        <p:nvSpPr>
+          <p:cNvPr id="19" name="TextBox 18"/>
+          <p:cNvSpPr txBox="1"/>
+          <p:nvPr/>
+        </p:nvSpPr>
+        <p:spPr>
+          <a:xfrm>
+            <a:off x="566928" y="5897880"/>
+            <a:ext cx="11057839" cy="457200"/>
+          </a:xfrm>
+          <a:prstGeom prst="rect">
+            <a:avLst/>
+          </a:prstGeom>
+          <a:noFill/>
+        </p:spPr>
+        <p:txBody>
+          <a:bodyPr wrap="square" anchor="t" lIns="0" rIns="0" tIns="0" bIns="0">
+            <a:noAutofit/>
+          </a:bodyPr>
+          <a:lstStyle/>
+          <a:p>
             <a:pPr algn="ctr">
               <a:spcBef>
                 <a:spcPts val="0"/>
@@ -23659,14 +23950,14 @@
                 </a:solidFill>
                 <a:latin typeface="Calibri"/>
               </a:rPr>
-              <a:t>Every temporal computation stays in MobilityDB; the tier is a single static binary. Streaming, keyset paging and index-using filters keep cost bounded as the database grows.</a:t>
-            </a:r>
-          </a:p>
-        </p:txBody>
-      </p:sp>
-      <p:sp>
-        <p:nvSpPr>
-          <p:cNvPr id="12" name="Rectangle 11"/>
+              <a:t>Streaming keeps memory bounded for the standard responses and the lakehouse export; a step toward the Data Lake House architecture in the MobilityDB ecosystem.</a:t>
+            </a:r>
+          </a:p>
+        </p:txBody>
+      </p:sp>
+      <p:sp>
+        <p:nvSpPr>
+          <p:cNvPr id="20" name="Rectangle 19"/>
           <p:cNvSpPr/>
           <p:nvPr/>
         </p:nvSpPr>
@@ -23710,7 +24001,7 @@
       </p:sp>
       <p:sp>
         <p:nvSpPr>
-          <p:cNvPr id="13" name="TextBox 12"/>
+          <p:cNvPr id="21" name="TextBox 20"/>
           <p:cNvSpPr txBox="1"/>
           <p:nvPr/>
         </p:nvSpPr>
@@ -23752,7 +24043,7 @@
       </p:sp>
       <p:sp>
         <p:nvSpPr>
-          <p:cNvPr id="14" name="TextBox 13"/>
+          <p:cNvPr id="22" name="TextBox 21"/>
           <p:cNvSpPr txBox="1"/>
           <p:nvPr/>
         </p:nvSpPr>
@@ -23851,11 +24142,11 @@
             <a:r>
               <a:rPr sz="1200" b="1" i="0">
                 <a:solidFill>
-                  <a:srgbClr val="196B24"/>
-                </a:solidFill>
-                <a:latin typeface="Calibri"/>
-              </a:rPr>
-              <a:t>ADDITIONAL FEATURES</a:t>
+                  <a:srgbClr val="A02B93"/>
+                </a:solidFill>
+                <a:latin typeface="Calibri"/>
+              </a:rPr>
+              <a:t>FUTURE WORK</a:t>
             </a:r>
           </a:p>
         </p:txBody>
@@ -23897,7 +24188,7 @@
                 </a:solidFill>
                 <a:latin typeface="Calibri Light"/>
               </a:rPr>
-              <a:t>Extensions Beyond the Standard</a:t>
+              <a:t>One Tier, Many MEOS Engines</a:t>
             </a:r>
           </a:p>
         </p:txBody>
@@ -23915,6 +24206,530 @@
           </a:xfrm>
           <a:prstGeom prst="rect">
             <a:avLst/>
+          </a:prstGeom>
+          <a:solidFill>
+            <a:srgbClr val="A02B93"/>
+          </a:solidFill>
+          <a:ln>
+            <a:noFill/>
+          </a:ln>
+          <a:effectLst/>
+        </p:spPr>
+        <p:style>
+          <a:lnRef idx="1">
+            <a:schemeClr val="accent1"/>
+          </a:lnRef>
+          <a:fillRef idx="3">
+            <a:schemeClr val="accent1"/>
+          </a:fillRef>
+          <a:effectRef idx="2">
+            <a:schemeClr val="accent1"/>
+          </a:effectRef>
+          <a:fontRef idx="minor">
+            <a:schemeClr val="lt1"/>
+          </a:fontRef>
+        </p:style>
+        <p:txBody>
+          <a:bodyPr rtlCol="0" anchor="ctr"/>
+          <a:lstStyle/>
+          <a:p>
+            <a:pPr algn="ctr"/>
+          </a:p>
+        </p:txBody>
+      </p:sp>
+      <p:sp>
+        <p:nvSpPr>
+          <p:cNvPr id="5" name="Rounded Rectangle 4"/>
+          <p:cNvSpPr/>
+          <p:nvPr/>
+        </p:nvSpPr>
+        <p:spPr>
+          <a:xfrm>
+            <a:off x="566928" y="1645920"/>
+            <a:ext cx="11057839" cy="868680"/>
+          </a:xfrm>
+          <a:prstGeom prst="roundRect">
+            <a:avLst>
+              <a:gd name="adj" fmla="val 6000"/>
+            </a:avLst>
+          </a:prstGeom>
+          <a:solidFill>
+            <a:srgbClr val="156082"/>
+          </a:solidFill>
+          <a:ln>
+            <a:noFill/>
+          </a:ln>
+          <a:effectLst/>
+        </p:spPr>
+        <p:style>
+          <a:lnRef idx="1">
+            <a:schemeClr val="accent1"/>
+          </a:lnRef>
+          <a:fillRef idx="3">
+            <a:schemeClr val="accent1"/>
+          </a:fillRef>
+          <a:effectRef idx="2">
+            <a:schemeClr val="accent1"/>
+          </a:effectRef>
+          <a:fontRef idx="minor">
+            <a:schemeClr val="lt1"/>
+          </a:fontRef>
+        </p:style>
+        <p:txBody>
+          <a:bodyPr rtlCol="0" anchor="ctr"/>
+          <a:lstStyle/>
+          <a:p>
+            <a:pPr algn="ctr"/>
+          </a:p>
+        </p:txBody>
+      </p:sp>
+      <p:sp>
+        <p:nvSpPr>
+          <p:cNvPr id="6" name="TextBox 5"/>
+          <p:cNvSpPr txBox="1"/>
+          <p:nvPr/>
+        </p:nvSpPr>
+        <p:spPr>
+          <a:xfrm>
+            <a:off x="859536" y="1755648"/>
+            <a:ext cx="10472623" cy="320040"/>
+          </a:xfrm>
+          <a:prstGeom prst="rect">
+            <a:avLst/>
+          </a:prstGeom>
+          <a:noFill/>
+        </p:spPr>
+        <p:txBody>
+          <a:bodyPr wrap="square" anchor="t" lIns="0" rIns="0" tIns="0" bIns="0">
+            <a:noAutofit/>
+          </a:bodyPr>
+          <a:lstStyle/>
+          <a:p>
+            <a:pPr algn="l">
+              <a:spcBef>
+                <a:spcPts val="0"/>
+              </a:spcBef>
+              <a:spcAft>
+                <a:spcPts val="200"/>
+              </a:spcAft>
+            </a:pPr>
+            <a:r>
+              <a:rPr sz="1600" b="1" i="0">
+                <a:solidFill>
+                  <a:srgbClr val="FFFFFF"/>
+                </a:solidFill>
+                <a:latin typeface="Calibri"/>
+              </a:rPr>
+              <a:t>Thin OGC API – Moving Features tier</a:t>
+            </a:r>
+          </a:p>
+        </p:txBody>
+      </p:sp>
+      <p:sp>
+        <p:nvSpPr>
+          <p:cNvPr id="7" name="TextBox 6"/>
+          <p:cNvSpPr txBox="1"/>
+          <p:nvPr/>
+        </p:nvSpPr>
+        <p:spPr>
+          <a:xfrm>
+            <a:off x="859536" y="2139696"/>
+            <a:ext cx="10472623" cy="274320"/>
+          </a:xfrm>
+          <a:prstGeom prst="rect">
+            <a:avLst/>
+          </a:prstGeom>
+          <a:noFill/>
+        </p:spPr>
+        <p:txBody>
+          <a:bodyPr wrap="square" anchor="t" lIns="0" rIns="0" tIns="0" bIns="0">
+            <a:noAutofit/>
+          </a:bodyPr>
+          <a:lstStyle/>
+          <a:p>
+            <a:pPr algn="l">
+              <a:spcBef>
+                <a:spcPts val="0"/>
+              </a:spcBef>
+              <a:spcAft>
+                <a:spcPts val="200"/>
+              </a:spcAft>
+            </a:pPr>
+            <a:r>
+              <a:rPr sz="1200" b="0" i="0">
+                <a:solidFill>
+                  <a:srgbClr val="CFE2EC"/>
+                </a:solidFill>
+                <a:latin typeface="Calibri"/>
+              </a:rPr>
+              <a:t>MF-JSON / WKB wire format  ·  streaming  ·  keyset paging  ·  index pushdown  ·  no MEOS in the tier</a:t>
+            </a:r>
+          </a:p>
+        </p:txBody>
+      </p:sp>
+      <p:sp>
+        <p:nvSpPr>
+          <p:cNvPr id="8" name="TextBox 7"/>
+          <p:cNvSpPr txBox="1"/>
+          <p:nvPr/>
+        </p:nvSpPr>
+        <p:spPr>
+          <a:xfrm>
+            <a:off x="566928" y="2633472"/>
+            <a:ext cx="11057839" cy="274320"/>
+          </a:xfrm>
+          <a:prstGeom prst="rect">
+            <a:avLst/>
+          </a:prstGeom>
+          <a:noFill/>
+        </p:spPr>
+        <p:txBody>
+          <a:bodyPr wrap="square" anchor="t" lIns="0" rIns="0" tIns="0" bIns="0">
+            <a:noAutofit/>
+          </a:bodyPr>
+          <a:lstStyle/>
+          <a:p>
+            <a:pPr algn="ctr">
+              <a:spcBef>
+                <a:spcPts val="0"/>
+              </a:spcBef>
+              <a:spcAft>
+                <a:spcPts val="200"/>
+              </a:spcAft>
+            </a:pPr>
+            <a:r>
+              <a:rPr sz="1200" b="0" i="0">
+                <a:solidFill>
+                  <a:srgbClr val="5B6B78"/>
+                </a:solidFill>
+                <a:latin typeface="Calibri"/>
+              </a:rPr>
+              <a:t>▼   serves any MEOS-backed engine; the engine becomes a configuration choice</a:t>
+            </a:r>
+          </a:p>
+        </p:txBody>
+      </p:sp>
+      <p:sp>
+        <p:nvSpPr>
+          <p:cNvPr id="9" name="Rounded Rectangle 8"/>
+          <p:cNvSpPr/>
+          <p:nvPr/>
+        </p:nvSpPr>
+        <p:spPr>
+          <a:xfrm>
+            <a:off x="566928" y="3108960"/>
+            <a:ext cx="2558719" cy="2331720"/>
+          </a:xfrm>
+          <a:prstGeom prst="roundRect">
+            <a:avLst>
+              <a:gd name="adj" fmla="val 5000"/>
+            </a:avLst>
+          </a:prstGeom>
+          <a:solidFill>
+            <a:srgbClr val="F1F5F8"/>
+          </a:solidFill>
+          <a:ln>
+            <a:noFill/>
+          </a:ln>
+          <a:effectLst/>
+        </p:spPr>
+        <p:style>
+          <a:lnRef idx="1">
+            <a:schemeClr val="accent1"/>
+          </a:lnRef>
+          <a:fillRef idx="3">
+            <a:schemeClr val="accent1"/>
+          </a:fillRef>
+          <a:effectRef idx="2">
+            <a:schemeClr val="accent1"/>
+          </a:effectRef>
+          <a:fontRef idx="minor">
+            <a:schemeClr val="lt1"/>
+          </a:fontRef>
+        </p:style>
+        <p:txBody>
+          <a:bodyPr rtlCol="0" anchor="ctr"/>
+          <a:lstStyle/>
+          <a:p>
+            <a:pPr algn="ctr"/>
+          </a:p>
+        </p:txBody>
+      </p:sp>
+      <p:sp>
+        <p:nvSpPr>
+          <p:cNvPr id="10" name="Rounded Rectangle 9"/>
+          <p:cNvSpPr/>
+          <p:nvPr/>
+        </p:nvSpPr>
+        <p:spPr>
+          <a:xfrm>
+            <a:off x="566928" y="3108960"/>
+            <a:ext cx="2558719" cy="475488"/>
+          </a:xfrm>
+          <a:prstGeom prst="roundRect">
+            <a:avLst>
+              <a:gd name="adj" fmla="val 8000"/>
+            </a:avLst>
+          </a:prstGeom>
+          <a:solidFill>
+            <a:srgbClr val="156082"/>
+          </a:solidFill>
+          <a:ln>
+            <a:noFill/>
+          </a:ln>
+          <a:effectLst/>
+        </p:spPr>
+        <p:style>
+          <a:lnRef idx="1">
+            <a:schemeClr val="accent1"/>
+          </a:lnRef>
+          <a:fillRef idx="3">
+            <a:schemeClr val="accent1"/>
+          </a:fillRef>
+          <a:effectRef idx="2">
+            <a:schemeClr val="accent1"/>
+          </a:effectRef>
+          <a:fontRef idx="minor">
+            <a:schemeClr val="lt1"/>
+          </a:fontRef>
+        </p:style>
+        <p:txBody>
+          <a:bodyPr rtlCol="0" anchor="ctr"/>
+          <a:lstStyle/>
+          <a:p>
+            <a:pPr algn="ctr"/>
+          </a:p>
+        </p:txBody>
+      </p:sp>
+      <p:sp>
+        <p:nvSpPr>
+          <p:cNvPr id="11" name="TextBox 10"/>
+          <p:cNvSpPr txBox="1"/>
+          <p:nvPr/>
+        </p:nvSpPr>
+        <p:spPr>
+          <a:xfrm>
+            <a:off x="731520" y="3163824"/>
+            <a:ext cx="2284399" cy="365760"/>
+          </a:xfrm>
+          <a:prstGeom prst="rect">
+            <a:avLst/>
+          </a:prstGeom>
+          <a:noFill/>
+        </p:spPr>
+        <p:txBody>
+          <a:bodyPr wrap="square" anchor="ctr" lIns="0" rIns="0" tIns="0" bIns="0">
+            <a:noAutofit/>
+          </a:bodyPr>
+          <a:lstStyle/>
+          <a:p>
+            <a:pPr algn="l">
+              <a:spcBef>
+                <a:spcPts val="0"/>
+              </a:spcBef>
+              <a:spcAft>
+                <a:spcPts val="200"/>
+              </a:spcAft>
+            </a:pPr>
+            <a:r>
+              <a:rPr sz="1400" b="1" i="0">
+                <a:solidFill>
+                  <a:srgbClr val="FFFFFF"/>
+                </a:solidFill>
+                <a:latin typeface="Calibri"/>
+              </a:rPr>
+              <a:t>MobilityDB</a:t>
+            </a:r>
+          </a:p>
+        </p:txBody>
+      </p:sp>
+      <p:sp>
+        <p:nvSpPr>
+          <p:cNvPr id="12" name="TextBox 11"/>
+          <p:cNvSpPr txBox="1"/>
+          <p:nvPr/>
+        </p:nvSpPr>
+        <p:spPr>
+          <a:xfrm>
+            <a:off x="731520" y="3703320"/>
+            <a:ext cx="2284399" cy="274320"/>
+          </a:xfrm>
+          <a:prstGeom prst="rect">
+            <a:avLst/>
+          </a:prstGeom>
+          <a:noFill/>
+        </p:spPr>
+        <p:txBody>
+          <a:bodyPr wrap="square" anchor="t" lIns="0" rIns="0" tIns="0" bIns="0">
+            <a:noAutofit/>
+          </a:bodyPr>
+          <a:lstStyle/>
+          <a:p>
+            <a:pPr algn="l">
+              <a:spcBef>
+                <a:spcPts val="0"/>
+              </a:spcBef>
+              <a:spcAft>
+                <a:spcPts val="200"/>
+              </a:spcAft>
+            </a:pPr>
+            <a:r>
+              <a:rPr sz="1200" b="1" i="0">
+                <a:solidFill>
+                  <a:srgbClr val="156082"/>
+                </a:solidFill>
+                <a:latin typeface="Consolas"/>
+              </a:rPr>
+              <a:t>PostgreSQL</a:t>
+            </a:r>
+          </a:p>
+        </p:txBody>
+      </p:sp>
+      <p:sp>
+        <p:nvSpPr>
+          <p:cNvPr id="13" name="TextBox 12"/>
+          <p:cNvSpPr txBox="1"/>
+          <p:nvPr/>
+        </p:nvSpPr>
+        <p:spPr>
+          <a:xfrm>
+            <a:off x="731520" y="4041648"/>
+            <a:ext cx="2229535" cy="914400"/>
+          </a:xfrm>
+          <a:prstGeom prst="rect">
+            <a:avLst/>
+          </a:prstGeom>
+          <a:noFill/>
+        </p:spPr>
+        <p:txBody>
+          <a:bodyPr wrap="square" anchor="t" lIns="0" rIns="0" tIns="0" bIns="0">
+            <a:noAutofit/>
+          </a:bodyPr>
+          <a:lstStyle/>
+          <a:p>
+            <a:pPr algn="l">
+              <a:spcBef>
+                <a:spcPts val="0"/>
+              </a:spcBef>
+              <a:spcAft>
+                <a:spcPts val="200"/>
+              </a:spcAft>
+            </a:pPr>
+            <a:r>
+              <a:rPr sz="1200" b="0" i="0">
+                <a:solidFill>
+                  <a:srgbClr val="1E2B36"/>
+                </a:solidFill>
+                <a:latin typeface="Calibri"/>
+              </a:rPr>
+              <a:t>Transactional serving over a live database</a:t>
+            </a:r>
+          </a:p>
+        </p:txBody>
+      </p:sp>
+      <p:sp>
+        <p:nvSpPr>
+          <p:cNvPr id="14" name="TextBox 13"/>
+          <p:cNvSpPr txBox="1"/>
+          <p:nvPr/>
+        </p:nvSpPr>
+        <p:spPr>
+          <a:xfrm>
+            <a:off x="731520" y="5074920"/>
+            <a:ext cx="2284399" cy="274320"/>
+          </a:xfrm>
+          <a:prstGeom prst="rect">
+            <a:avLst/>
+          </a:prstGeom>
+          <a:noFill/>
+        </p:spPr>
+        <p:txBody>
+          <a:bodyPr wrap="square" anchor="t" lIns="0" rIns="0" tIns="0" bIns="0">
+            <a:noAutofit/>
+          </a:bodyPr>
+          <a:lstStyle/>
+          <a:p>
+            <a:pPr algn="l">
+              <a:spcBef>
+                <a:spcPts val="0"/>
+              </a:spcBef>
+              <a:spcAft>
+                <a:spcPts val="200"/>
+              </a:spcAft>
+            </a:pPr>
+            <a:r>
+              <a:rPr sz="1200" b="1" i="0">
+                <a:solidFill>
+                  <a:srgbClr val="196B24"/>
+                </a:solidFill>
+                <a:latin typeface="Calibri"/>
+              </a:rPr>
+              <a:t>Implemented today</a:t>
+            </a:r>
+          </a:p>
+        </p:txBody>
+      </p:sp>
+      <p:sp>
+        <p:nvSpPr>
+          <p:cNvPr id="15" name="Rounded Rectangle 14"/>
+          <p:cNvSpPr/>
+          <p:nvPr/>
+        </p:nvSpPr>
+        <p:spPr>
+          <a:xfrm>
+            <a:off x="3399967" y="3108960"/>
+            <a:ext cx="2558719" cy="2331720"/>
+          </a:xfrm>
+          <a:prstGeom prst="roundRect">
+            <a:avLst>
+              <a:gd name="adj" fmla="val 5000"/>
+            </a:avLst>
+          </a:prstGeom>
+          <a:solidFill>
+            <a:srgbClr val="F1F5F8"/>
+          </a:solidFill>
+          <a:ln>
+            <a:noFill/>
+          </a:ln>
+          <a:effectLst/>
+        </p:spPr>
+        <p:style>
+          <a:lnRef idx="1">
+            <a:schemeClr val="accent1"/>
+          </a:lnRef>
+          <a:fillRef idx="3">
+            <a:schemeClr val="accent1"/>
+          </a:fillRef>
+          <a:effectRef idx="2">
+            <a:schemeClr val="accent1"/>
+          </a:effectRef>
+          <a:fontRef idx="minor">
+            <a:schemeClr val="lt1"/>
+          </a:fontRef>
+        </p:style>
+        <p:txBody>
+          <a:bodyPr rtlCol="0" anchor="ctr"/>
+          <a:lstStyle/>
+          <a:p>
+            <a:pPr algn="ctr"/>
+          </a:p>
+        </p:txBody>
+      </p:sp>
+      <p:sp>
+        <p:nvSpPr>
+          <p:cNvPr id="16" name="Rounded Rectangle 15"/>
+          <p:cNvSpPr/>
+          <p:nvPr/>
+        </p:nvSpPr>
+        <p:spPr>
+          <a:xfrm>
+            <a:off x="3399967" y="3108960"/>
+            <a:ext cx="2558719" cy="475488"/>
+          </a:xfrm>
+          <a:prstGeom prst="roundRect">
+            <a:avLst>
+              <a:gd name="adj" fmla="val 8000"/>
+            </a:avLst>
           </a:prstGeom>
           <a:solidFill>
             <a:srgbClr val="196B24"/>
@@ -23948,60 +24763,14 @@
       </p:sp>
       <p:sp>
         <p:nvSpPr>
-          <p:cNvPr id="5" name="Rounded Rectangle 4"/>
-          <p:cNvSpPr/>
-          <p:nvPr/>
-        </p:nvSpPr>
-        <p:spPr>
-          <a:xfrm>
-            <a:off x="566928" y="1554480"/>
-            <a:ext cx="11057839" cy="512064"/>
-          </a:xfrm>
-          <a:prstGeom prst="roundRect">
-            <a:avLst>
-              <a:gd name="adj" fmla="val 8000"/>
-            </a:avLst>
-          </a:prstGeom>
-          <a:solidFill>
-            <a:srgbClr val="C0392B"/>
-          </a:solidFill>
-          <a:ln>
-            <a:noFill/>
-          </a:ln>
-          <a:effectLst/>
-        </p:spPr>
-        <p:style>
-          <a:lnRef idx="1">
-            <a:schemeClr val="accent1"/>
-          </a:lnRef>
-          <a:fillRef idx="3">
-            <a:schemeClr val="accent1"/>
-          </a:fillRef>
-          <a:effectRef idx="2">
-            <a:schemeClr val="accent1"/>
-          </a:effectRef>
-          <a:fontRef idx="minor">
-            <a:schemeClr val="lt1"/>
-          </a:fontRef>
-        </p:style>
-        <p:txBody>
-          <a:bodyPr rtlCol="0" anchor="ctr"/>
-          <a:lstStyle/>
-          <a:p>
-            <a:pPr algn="ctr"/>
-          </a:p>
-        </p:txBody>
-      </p:sp>
-      <p:sp>
-        <p:nvSpPr>
-          <p:cNvPr id="6" name="TextBox 5"/>
+          <p:cNvPr id="17" name="TextBox 16"/>
           <p:cNvSpPr txBox="1"/>
           <p:nvPr/>
         </p:nvSpPr>
         <p:spPr>
           <a:xfrm>
-            <a:off x="841247" y="1600200"/>
-            <a:ext cx="10509199" cy="411480"/>
+            <a:off x="3564559" y="3163824"/>
+            <a:ext cx="2284399" cy="365760"/>
           </a:xfrm>
           <a:prstGeom prst="rect">
             <a:avLst/>
@@ -24029,76 +24798,21 @@
                 </a:solidFill>
                 <a:latin typeface="Calibri"/>
               </a:rPr>
-              <a:t>Not part of OGC API – Moving Features; excluded from conformsTo.</a:t>
-            </a:r>
-          </a:p>
-        </p:txBody>
-      </p:sp>
-      <p:sp>
-        <p:nvSpPr>
-          <p:cNvPr id="7" name="Rounded Rectangle 6"/>
-          <p:cNvSpPr/>
-          <p:nvPr/>
-        </p:nvSpPr>
-        <p:spPr>
-          <a:xfrm>
-            <a:off x="566928" y="2359152"/>
-            <a:ext cx="640080" cy="292608"/>
-          </a:xfrm>
-          <a:prstGeom prst="roundRect">
-            <a:avLst>
-              <a:gd name="adj" fmla="val 40000"/>
-            </a:avLst>
-          </a:prstGeom>
-          <a:solidFill>
-            <a:srgbClr val="156082"/>
-          </a:solidFill>
-          <a:ln>
-            <a:noFill/>
-          </a:ln>
-          <a:effectLst/>
-        </p:spPr>
-        <p:style>
-          <a:lnRef idx="1">
-            <a:schemeClr val="accent1"/>
-          </a:lnRef>
-          <a:fillRef idx="3">
-            <a:schemeClr val="accent1"/>
-          </a:fillRef>
-          <a:effectRef idx="2">
-            <a:schemeClr val="accent1"/>
-          </a:effectRef>
-          <a:fontRef idx="minor">
-            <a:schemeClr val="lt1"/>
-          </a:fontRef>
-        </p:style>
-        <p:txBody>
-          <a:bodyPr rtlCol="0" anchor="ctr" wrap="none" lIns="0" rIns="0" tIns="0" bIns="0"/>
-          <a:lstStyle/>
-          <a:p>
-            <a:pPr algn="ctr"/>
-            <a:r>
-              <a:rPr sz="1200" b="1">
-                <a:solidFill>
-                  <a:srgbClr val="FFFFFF"/>
-                </a:solidFill>
-                <a:latin typeface="Calibri"/>
-              </a:rPr>
-              <a:t>GET</a:t>
-            </a:r>
-          </a:p>
-        </p:txBody>
-      </p:sp>
-      <p:sp>
-        <p:nvSpPr>
-          <p:cNvPr id="8" name="TextBox 7"/>
+              <a:t>MobilityDuck</a:t>
+            </a:r>
+          </a:p>
+        </p:txBody>
+      </p:sp>
+      <p:sp>
+        <p:nvSpPr>
+          <p:cNvPr id="18" name="TextBox 17"/>
           <p:cNvSpPr txBox="1"/>
           <p:nvPr/>
         </p:nvSpPr>
         <p:spPr>
           <a:xfrm>
-            <a:off x="1316736" y="2350008"/>
-            <a:ext cx="10308031" cy="274320"/>
+            <a:off x="3564559" y="3703320"/>
+            <a:ext cx="2284399" cy="274320"/>
           </a:xfrm>
           <a:prstGeom prst="rect">
             <a:avLst/>
@@ -24106,7 +24820,7 @@
           <a:noFill/>
         </p:spPr>
         <p:txBody>
-          <a:bodyPr wrap="square" anchor="ctr" lIns="0" rIns="0" tIns="0" bIns="0">
+          <a:bodyPr wrap="square" anchor="t" lIns="0" rIns="0" tIns="0" bIns="0">
             <a:noAutofit/>
           </a:bodyPr>
           <a:lstStyle/>
@@ -24122,25 +24836,25 @@
             <a:r>
               <a:rPr sz="1200" b="1" i="0">
                 <a:solidFill>
-                  <a:srgbClr val="0E2841"/>
-                </a:solidFill>
-                <a:latin typeface="Consolas"/>
-              </a:rPr>
-              <a:t>/collections/{collectionId}/export</a:t>
-            </a:r>
-          </a:p>
-        </p:txBody>
-      </p:sp>
-      <p:sp>
-        <p:nvSpPr>
-          <p:cNvPr id="9" name="TextBox 8"/>
+                  <a:srgbClr val="196B24"/>
+                </a:solidFill>
+                <a:latin typeface="Consolas"/>
+              </a:rPr>
+              <a:t>DuckDB</a:t>
+            </a:r>
+          </a:p>
+        </p:txBody>
+      </p:sp>
+      <p:sp>
+        <p:nvSpPr>
+          <p:cNvPr id="19" name="TextBox 18"/>
           <p:cNvSpPr txBox="1"/>
           <p:nvPr/>
         </p:nvSpPr>
         <p:spPr>
           <a:xfrm>
-            <a:off x="566928" y="2761488"/>
-            <a:ext cx="6812280" cy="1554480"/>
+            <a:off x="3564559" y="4041648"/>
+            <a:ext cx="2229535" cy="914400"/>
           </a:xfrm>
           <a:prstGeom prst="rect">
             <a:avLst/>
@@ -24148,142 +24862,83 @@
           <a:noFill/>
         </p:spPr>
         <p:txBody>
-          <a:bodyPr wrap="square" lIns="0" rIns="0" tIns="0" bIns="0">
+          <a:bodyPr wrap="square" anchor="t" lIns="0" rIns="0" tIns="0" bIns="0">
             <a:noAutofit/>
           </a:bodyPr>
           <a:lstStyle/>
           <a:p>
-            <a:pPr>
-              <a:lnSpc>
-                <a:spcPct val="106000"/>
-              </a:lnSpc>
-              <a:spcBef>
-                <a:spcPts val="0"/>
-              </a:spcBef>
-              <a:spcAft>
-                <a:spcPts val="900"/>
-              </a:spcAft>
-            </a:pPr>
-            <a:r>
-              <a:rPr sz="1200" b="1">
-                <a:solidFill>
-                  <a:srgbClr val="196B24"/>
-                </a:solidFill>
-                <a:latin typeface="Calibri"/>
-              </a:rPr>
-              <a:t>▸  </a:t>
-            </a:r>
-            <a:r>
-              <a:rPr sz="1200" b="1">
-                <a:solidFill>
-                  <a:srgbClr val="0E2841"/>
-                </a:solidFill>
-                <a:latin typeface="Calibri"/>
-              </a:rPr>
-              <a:t>NDJSON (default):  </a:t>
-            </a:r>
-            <a:r>
-              <a:rPr sz="1200">
+            <a:pPr algn="l">
+              <a:spcBef>
+                <a:spcPts val="0"/>
+              </a:spcBef>
+              <a:spcAft>
+                <a:spcPts val="200"/>
+              </a:spcAft>
+            </a:pPr>
+            <a:r>
+              <a:rPr sz="1200" b="0" i="0">
                 <a:solidFill>
                   <a:srgbClr val="1E2B36"/>
                 </a:solidFill>
                 <a:latin typeface="Calibri"/>
               </a:rPr>
-              <a:t>one Feature per line, streamed; DuckDB, Spark and pandas ingest it directly</a:t>
-            </a:r>
-          </a:p>
-          <a:p>
-            <a:pPr>
-              <a:lnSpc>
-                <a:spcPct val="106000"/>
-              </a:lnSpc>
-              <a:spcBef>
-                <a:spcPts val="0"/>
-              </a:spcBef>
-              <a:spcAft>
-                <a:spcPts val="900"/>
-              </a:spcAft>
-            </a:pPr>
-            <a:r>
-              <a:rPr sz="1200" b="1">
-                <a:solidFill>
-                  <a:srgbClr val="196B24"/>
-                </a:solidFill>
-                <a:latin typeface="Calibri"/>
-              </a:rPr>
-              <a:t>▸  </a:t>
-            </a:r>
-            <a:r>
-              <a:rPr sz="1200" b="1">
-                <a:solidFill>
-                  <a:srgbClr val="0E2841"/>
-                </a:solidFill>
-                <a:latin typeface="Calibri"/>
-              </a:rPr>
-              <a:t>format=parquet:  </a:t>
-            </a:r>
-            <a:r>
-              <a:rPr sz="1200">
-                <a:solidFill>
-                  <a:srgbClr val="1E2B36"/>
-                </a:solidFill>
-                <a:latin typeface="Calibri"/>
-              </a:rPr>
-              <a:t>columnar trajectory WKB plus a bbox and time sidecar; the row group bounds export memory</a:t>
-            </a:r>
-          </a:p>
-          <a:p>
-            <a:pPr>
-              <a:lnSpc>
-                <a:spcPct val="106000"/>
-              </a:lnSpc>
-              <a:spcBef>
-                <a:spcPts val="0"/>
-              </a:spcBef>
-              <a:spcAft>
-                <a:spcPts val="900"/>
-              </a:spcAft>
-            </a:pPr>
-            <a:r>
-              <a:rPr sz="1200" b="1">
-                <a:solidFill>
-                  <a:srgbClr val="196B24"/>
-                </a:solidFill>
-                <a:latin typeface="Calibri"/>
-              </a:rPr>
-              <a:t>▸  </a:t>
-            </a:r>
-            <a:r>
-              <a:rPr sz="1200" b="1">
-                <a:solidFill>
-                  <a:srgbClr val="0E2841"/>
-                </a:solidFill>
-                <a:latin typeface="Calibri"/>
-              </a:rPr>
-              <a:t>enclosure link:  </a:t>
-            </a:r>
-            <a:r>
-              <a:rPr sz="1200">
-                <a:solidFill>
-                  <a:srgbClr val="1E2B36"/>
-                </a:solidFill>
-                <a:latin typeface="Calibri"/>
-              </a:rPr>
-              <a:t>advertised from the collection via the IANA enclosure relation</a:t>
-            </a:r>
-          </a:p>
-        </p:txBody>
-      </p:sp>
-      <p:sp>
-        <p:nvSpPr>
-          <p:cNvPr id="10" name="Rounded Rectangle 9"/>
+              <a:t>Embedded, Parquet-native lakehouse queries</a:t>
+            </a:r>
+          </a:p>
+        </p:txBody>
+      </p:sp>
+      <p:sp>
+        <p:nvSpPr>
+          <p:cNvPr id="20" name="TextBox 19"/>
+          <p:cNvSpPr txBox="1"/>
+          <p:nvPr/>
+        </p:nvSpPr>
+        <p:spPr>
+          <a:xfrm>
+            <a:off x="3564559" y="5074920"/>
+            <a:ext cx="2284399" cy="274320"/>
+          </a:xfrm>
+          <a:prstGeom prst="rect">
+            <a:avLst/>
+          </a:prstGeom>
+          <a:noFill/>
+        </p:spPr>
+        <p:txBody>
+          <a:bodyPr wrap="square" anchor="t" lIns="0" rIns="0" tIns="0" bIns="0">
+            <a:noAutofit/>
+          </a:bodyPr>
+          <a:lstStyle/>
+          <a:p>
+            <a:pPr algn="l">
+              <a:spcBef>
+                <a:spcPts val="0"/>
+              </a:spcBef>
+              <a:spcAft>
+                <a:spcPts val="200"/>
+              </a:spcAft>
+            </a:pPr>
+            <a:r>
+              <a:rPr sz="1200" b="1" i="0">
+                <a:solidFill>
+                  <a:srgbClr val="5B6B78"/>
+                </a:solidFill>
+                <a:latin typeface="Calibri"/>
+              </a:rPr>
+              <a:t>Planned</a:t>
+            </a:r>
+          </a:p>
+        </p:txBody>
+      </p:sp>
+      <p:sp>
+        <p:nvSpPr>
+          <p:cNvPr id="21" name="Rounded Rectangle 20"/>
           <p:cNvSpPr/>
           <p:nvPr/>
         </p:nvSpPr>
         <p:spPr>
           <a:xfrm>
-            <a:off x="7653527" y="2286000"/>
-            <a:ext cx="3971239" cy="2057400"/>
+            <a:off x="6233007" y="3108960"/>
+            <a:ext cx="2558719" cy="2331720"/>
           </a:xfrm>
           <a:prstGeom prst="roundRect">
             <a:avLst>
@@ -24322,186 +24977,18 @@
       </p:sp>
       <p:sp>
         <p:nvSpPr>
-          <p:cNvPr id="11" name="TextBox 10"/>
-          <p:cNvSpPr txBox="1"/>
-          <p:nvPr/>
-        </p:nvSpPr>
-        <p:spPr>
-          <a:xfrm>
-            <a:off x="7882127" y="2468880"/>
-            <a:ext cx="3468319" cy="640080"/>
-          </a:xfrm>
-          <a:prstGeom prst="rect">
-            <a:avLst/>
-          </a:prstGeom>
-          <a:noFill/>
-        </p:spPr>
-        <p:txBody>
-          <a:bodyPr wrap="square" anchor="t" lIns="0" rIns="0" tIns="0" bIns="0">
-            <a:noAutofit/>
-          </a:bodyPr>
-          <a:lstStyle/>
-          <a:p>
-            <a:pPr algn="l">
-              <a:spcBef>
-                <a:spcPts val="0"/>
-              </a:spcBef>
-              <a:spcAft>
-                <a:spcPts val="200"/>
-              </a:spcAft>
-            </a:pPr>
-            <a:r>
-              <a:rPr sz="4000" b="1" i="0">
-                <a:solidFill>
-                  <a:srgbClr val="196B24"/>
-                </a:solidFill>
-                <a:latin typeface="Calibri Light"/>
-              </a:rPr>
-              <a:t>393 MB</a:t>
-            </a:r>
-          </a:p>
-        </p:txBody>
-      </p:sp>
-      <p:sp>
-        <p:nvSpPr>
-          <p:cNvPr id="12" name="TextBox 11"/>
-          <p:cNvSpPr txBox="1"/>
-          <p:nvPr/>
-        </p:nvSpPr>
-        <p:spPr>
-          <a:xfrm>
-            <a:off x="7882127" y="3163824"/>
-            <a:ext cx="3468319" cy="274320"/>
-          </a:xfrm>
-          <a:prstGeom prst="rect">
-            <a:avLst/>
-          </a:prstGeom>
-          <a:noFill/>
-        </p:spPr>
-        <p:txBody>
-          <a:bodyPr wrap="square" anchor="t" lIns="0" rIns="0" tIns="0" bIns="0">
-            <a:noAutofit/>
-          </a:bodyPr>
-          <a:lstStyle/>
-          <a:p>
-            <a:pPr algn="l">
-              <a:spcBef>
-                <a:spcPts val="0"/>
-              </a:spcBef>
-              <a:spcAft>
-                <a:spcPts val="200"/>
-              </a:spcAft>
-            </a:pPr>
-            <a:r>
-              <a:rPr sz="1200" b="0" i="0">
-                <a:solidFill>
-                  <a:srgbClr val="5B6B78"/>
-                </a:solidFill>
-                <a:latin typeface="Calibri"/>
-              </a:rPr>
-              <a:t>exported at about</a:t>
-            </a:r>
-          </a:p>
-        </p:txBody>
-      </p:sp>
-      <p:sp>
-        <p:nvSpPr>
-          <p:cNvPr id="13" name="TextBox 12"/>
-          <p:cNvSpPr txBox="1"/>
-          <p:nvPr/>
-        </p:nvSpPr>
-        <p:spPr>
-          <a:xfrm>
-            <a:off x="7882127" y="3474720"/>
-            <a:ext cx="3468319" cy="548640"/>
-          </a:xfrm>
-          <a:prstGeom prst="rect">
-            <a:avLst/>
-          </a:prstGeom>
-          <a:noFill/>
-        </p:spPr>
-        <p:txBody>
-          <a:bodyPr wrap="square" anchor="t" lIns="0" rIns="0" tIns="0" bIns="0">
-            <a:noAutofit/>
-          </a:bodyPr>
-          <a:lstStyle/>
-          <a:p>
-            <a:pPr algn="l">
-              <a:spcBef>
-                <a:spcPts val="0"/>
-              </a:spcBef>
-              <a:spcAft>
-                <a:spcPts val="200"/>
-              </a:spcAft>
-            </a:pPr>
-            <a:r>
-              <a:rPr sz="3200" b="1" i="0">
-                <a:solidFill>
-                  <a:srgbClr val="156082"/>
-                </a:solidFill>
-                <a:latin typeface="Calibri Light"/>
-              </a:rPr>
-              <a:t>18 MB</a:t>
-            </a:r>
-          </a:p>
-        </p:txBody>
-      </p:sp>
-      <p:sp>
-        <p:nvSpPr>
-          <p:cNvPr id="14" name="TextBox 13"/>
-          <p:cNvSpPr txBox="1"/>
-          <p:nvPr/>
-        </p:nvSpPr>
-        <p:spPr>
-          <a:xfrm>
-            <a:off x="7882127" y="4069080"/>
-            <a:ext cx="3468319" cy="274320"/>
-          </a:xfrm>
-          <a:prstGeom prst="rect">
-            <a:avLst/>
-          </a:prstGeom>
-          <a:noFill/>
-        </p:spPr>
-        <p:txBody>
-          <a:bodyPr wrap="square" anchor="t" lIns="0" rIns="0" tIns="0" bIns="0">
-            <a:noAutofit/>
-          </a:bodyPr>
-          <a:lstStyle/>
-          <a:p>
-            <a:pPr algn="l">
-              <a:spcBef>
-                <a:spcPts val="0"/>
-              </a:spcBef>
-              <a:spcAft>
-                <a:spcPts val="200"/>
-              </a:spcAft>
-            </a:pPr>
-            <a:r>
-              <a:rPr sz="1200" b="0" i="0">
-                <a:solidFill>
-                  <a:srgbClr val="5B6B78"/>
-                </a:solidFill>
-                <a:latin typeface="Calibri"/>
-              </a:rPr>
-              <a:t>resident, bounded by the row group</a:t>
-            </a:r>
-          </a:p>
-        </p:txBody>
-      </p:sp>
-      <p:sp>
-        <p:nvSpPr>
-          <p:cNvPr id="15" name="Rounded Rectangle 14"/>
+          <p:cNvPr id="22" name="Rounded Rectangle 21"/>
           <p:cNvSpPr/>
           <p:nvPr/>
         </p:nvSpPr>
         <p:spPr>
           <a:xfrm>
-            <a:off x="566928" y="4617720"/>
-            <a:ext cx="603504" cy="292608"/>
+            <a:off x="6233007" y="3108960"/>
+            <a:ext cx="2558719" cy="475488"/>
           </a:xfrm>
           <a:prstGeom prst="roundRect">
             <a:avLst>
-              <a:gd name="adj" fmla="val 40000"/>
+              <a:gd name="adj" fmla="val 8000"/>
             </a:avLst>
           </a:prstGeom>
           <a:solidFill>
@@ -24527,32 +25014,23 @@
           </a:fontRef>
         </p:style>
         <p:txBody>
-          <a:bodyPr rtlCol="0" anchor="ctr" wrap="none" lIns="0" rIns="0" tIns="0" bIns="0"/>
+          <a:bodyPr rtlCol="0" anchor="ctr"/>
           <a:lstStyle/>
           <a:p>
             <a:pPr algn="ctr"/>
-            <a:r>
-              <a:rPr sz="1200" b="1">
-                <a:solidFill>
-                  <a:srgbClr val="FFFFFF"/>
-                </a:solidFill>
-                <a:latin typeface="Calibri"/>
-              </a:rPr>
-              <a:t>PUT</a:t>
-            </a:r>
-          </a:p>
-        </p:txBody>
-      </p:sp>
-      <p:sp>
-        <p:nvSpPr>
-          <p:cNvPr id="16" name="TextBox 15"/>
+          </a:p>
+        </p:txBody>
+      </p:sp>
+      <p:sp>
+        <p:nvSpPr>
+          <p:cNvPr id="23" name="TextBox 22"/>
           <p:cNvSpPr txBox="1"/>
           <p:nvPr/>
         </p:nvSpPr>
         <p:spPr>
           <a:xfrm>
-            <a:off x="1280160" y="4608576"/>
-            <a:ext cx="10344607" cy="274320"/>
+            <a:off x="6397599" y="3163824"/>
+            <a:ext cx="2284399" cy="365760"/>
           </a:xfrm>
           <a:prstGeom prst="rect">
             <a:avLst/>
@@ -24574,90 +25052,27 @@
               </a:spcAft>
             </a:pPr>
             <a:r>
-              <a:rPr sz="1200" b="1" i="0">
-                <a:solidFill>
-                  <a:srgbClr val="0E2841"/>
-                </a:solidFill>
-                <a:latin typeface="Consolas"/>
-              </a:rPr>
-              <a:t>/collections/{collectionId}/items/{mFeatureId}</a:t>
-            </a:r>
-          </a:p>
-        </p:txBody>
-      </p:sp>
-      <p:sp>
-        <p:nvSpPr>
-          <p:cNvPr id="17" name="TextBox 16"/>
+              <a:rPr sz="1400" b="1" i="0">
+                <a:solidFill>
+                  <a:srgbClr val="FFFFFF"/>
+                </a:solidFill>
+                <a:latin typeface="Calibri"/>
+              </a:rPr>
+              <a:t>MobilitySpark</a:t>
+            </a:r>
+          </a:p>
+        </p:txBody>
+      </p:sp>
+      <p:sp>
+        <p:nvSpPr>
+          <p:cNvPr id="24" name="TextBox 23"/>
           <p:cNvSpPr txBox="1"/>
           <p:nvPr/>
         </p:nvSpPr>
         <p:spPr>
           <a:xfrm>
-            <a:off x="566928" y="5020056"/>
-            <a:ext cx="11057839" cy="731520"/>
-          </a:xfrm>
-          <a:prstGeom prst="rect">
-            <a:avLst/>
-          </a:prstGeom>
-          <a:noFill/>
-        </p:spPr>
-        <p:txBody>
-          <a:bodyPr wrap="square" lIns="0" rIns="0" tIns="0" bIns="0">
-            <a:noAutofit/>
-          </a:bodyPr>
-          <a:lstStyle/>
-          <a:p>
-            <a:pPr>
-              <a:lnSpc>
-                <a:spcPct val="106000"/>
-              </a:lnSpc>
-              <a:spcBef>
-                <a:spcPts val="0"/>
-              </a:spcBef>
-              <a:spcAft>
-                <a:spcPts val="800"/>
-              </a:spcAft>
-            </a:pPr>
-            <a:r>
-              <a:rPr sz="1200" b="1">
-                <a:solidFill>
-                  <a:srgbClr val="E97132"/>
-                </a:solidFill>
-                <a:latin typeface="Calibri"/>
-              </a:rPr>
-              <a:t>▸  </a:t>
-            </a:r>
-            <a:r>
-              <a:rPr sz="1200" b="1">
-                <a:solidFill>
-                  <a:srgbClr val="0E2841"/>
-                </a:solidFill>
-                <a:latin typeface="Calibri"/>
-              </a:rPr>
-              <a:t>In-place replace:  </a:t>
-            </a:r>
-            <a:r>
-              <a:rPr sz="1200">
-                <a:solidFill>
-                  <a:srgbClr val="1E2B36"/>
-                </a:solidFill>
-                <a:latin typeface="Calibri"/>
-              </a:rPr>
-              <a:t>the standard allows only GET and DELETE on a feature; PUT replaces its geometry and properties</a:t>
-            </a:r>
-          </a:p>
-        </p:txBody>
-      </p:sp>
-      <p:sp>
-        <p:nvSpPr>
-          <p:cNvPr id="18" name="TextBox 17"/>
-          <p:cNvSpPr txBox="1"/>
-          <p:nvPr/>
-        </p:nvSpPr>
-        <p:spPr>
-          <a:xfrm>
-            <a:off x="566928" y="5943600"/>
-            <a:ext cx="11057839" cy="457200"/>
+            <a:off x="6397599" y="3703320"/>
+            <a:ext cx="2284399" cy="274320"/>
           </a:xfrm>
           <a:prstGeom prst="rect">
             <a:avLst/>
@@ -24670,6 +25085,392 @@
           </a:bodyPr>
           <a:lstStyle/>
           <a:p>
+            <a:pPr algn="l">
+              <a:spcBef>
+                <a:spcPts val="0"/>
+              </a:spcBef>
+              <a:spcAft>
+                <a:spcPts val="200"/>
+              </a:spcAft>
+            </a:pPr>
+            <a:r>
+              <a:rPr sz="1200" b="1" i="0">
+                <a:solidFill>
+                  <a:srgbClr val="E97132"/>
+                </a:solidFill>
+                <a:latin typeface="Consolas"/>
+              </a:rPr>
+              <a:t>Apache Spark</a:t>
+            </a:r>
+          </a:p>
+        </p:txBody>
+      </p:sp>
+      <p:sp>
+        <p:nvSpPr>
+          <p:cNvPr id="25" name="TextBox 24"/>
+          <p:cNvSpPr txBox="1"/>
+          <p:nvPr/>
+        </p:nvSpPr>
+        <p:spPr>
+          <a:xfrm>
+            <a:off x="6397599" y="4041648"/>
+            <a:ext cx="2229535" cy="914400"/>
+          </a:xfrm>
+          <a:prstGeom prst="rect">
+            <a:avLst/>
+          </a:prstGeom>
+          <a:noFill/>
+        </p:spPr>
+        <p:txBody>
+          <a:bodyPr wrap="square" anchor="t" lIns="0" rIns="0" tIns="0" bIns="0">
+            <a:noAutofit/>
+          </a:bodyPr>
+          <a:lstStyle/>
+          <a:p>
+            <a:pPr algn="l">
+              <a:spcBef>
+                <a:spcPts val="0"/>
+              </a:spcBef>
+              <a:spcAft>
+                <a:spcPts val="200"/>
+              </a:spcAft>
+            </a:pPr>
+            <a:r>
+              <a:rPr sz="1200" b="0" i="0">
+                <a:solidFill>
+                  <a:srgbClr val="1E2B36"/>
+                </a:solidFill>
+                <a:latin typeface="Calibri"/>
+              </a:rPr>
+              <a:t>Distributed batch over very large histories</a:t>
+            </a:r>
+          </a:p>
+        </p:txBody>
+      </p:sp>
+      <p:sp>
+        <p:nvSpPr>
+          <p:cNvPr id="26" name="TextBox 25"/>
+          <p:cNvSpPr txBox="1"/>
+          <p:nvPr/>
+        </p:nvSpPr>
+        <p:spPr>
+          <a:xfrm>
+            <a:off x="6397599" y="5074920"/>
+            <a:ext cx="2284399" cy="274320"/>
+          </a:xfrm>
+          <a:prstGeom prst="rect">
+            <a:avLst/>
+          </a:prstGeom>
+          <a:noFill/>
+        </p:spPr>
+        <p:txBody>
+          <a:bodyPr wrap="square" anchor="t" lIns="0" rIns="0" tIns="0" bIns="0">
+            <a:noAutofit/>
+          </a:bodyPr>
+          <a:lstStyle/>
+          <a:p>
+            <a:pPr algn="l">
+              <a:spcBef>
+                <a:spcPts val="0"/>
+              </a:spcBef>
+              <a:spcAft>
+                <a:spcPts val="200"/>
+              </a:spcAft>
+            </a:pPr>
+            <a:r>
+              <a:rPr sz="1200" b="1" i="0">
+                <a:solidFill>
+                  <a:srgbClr val="5B6B78"/>
+                </a:solidFill>
+                <a:latin typeface="Calibri"/>
+              </a:rPr>
+              <a:t>Planned</a:t>
+            </a:r>
+          </a:p>
+        </p:txBody>
+      </p:sp>
+      <p:sp>
+        <p:nvSpPr>
+          <p:cNvPr id="27" name="Rounded Rectangle 26"/>
+          <p:cNvSpPr/>
+          <p:nvPr/>
+        </p:nvSpPr>
+        <p:spPr>
+          <a:xfrm>
+            <a:off x="9066047" y="3108960"/>
+            <a:ext cx="2558719" cy="2331720"/>
+          </a:xfrm>
+          <a:prstGeom prst="roundRect">
+            <a:avLst>
+              <a:gd name="adj" fmla="val 5000"/>
+            </a:avLst>
+          </a:prstGeom>
+          <a:solidFill>
+            <a:srgbClr val="F1F5F8"/>
+          </a:solidFill>
+          <a:ln>
+            <a:noFill/>
+          </a:ln>
+          <a:effectLst/>
+        </p:spPr>
+        <p:style>
+          <a:lnRef idx="1">
+            <a:schemeClr val="accent1"/>
+          </a:lnRef>
+          <a:fillRef idx="3">
+            <a:schemeClr val="accent1"/>
+          </a:fillRef>
+          <a:effectRef idx="2">
+            <a:schemeClr val="accent1"/>
+          </a:effectRef>
+          <a:fontRef idx="minor">
+            <a:schemeClr val="lt1"/>
+          </a:fontRef>
+        </p:style>
+        <p:txBody>
+          <a:bodyPr rtlCol="0" anchor="ctr"/>
+          <a:lstStyle/>
+          <a:p>
+            <a:pPr algn="ctr"/>
+          </a:p>
+        </p:txBody>
+      </p:sp>
+      <p:sp>
+        <p:nvSpPr>
+          <p:cNvPr id="28" name="Rounded Rectangle 27"/>
+          <p:cNvSpPr/>
+          <p:nvPr/>
+        </p:nvSpPr>
+        <p:spPr>
+          <a:xfrm>
+            <a:off x="9066047" y="3108960"/>
+            <a:ext cx="2558719" cy="475488"/>
+          </a:xfrm>
+          <a:prstGeom prst="roundRect">
+            <a:avLst>
+              <a:gd name="adj" fmla="val 8000"/>
+            </a:avLst>
+          </a:prstGeom>
+          <a:solidFill>
+            <a:srgbClr val="A02B93"/>
+          </a:solidFill>
+          <a:ln>
+            <a:noFill/>
+          </a:ln>
+          <a:effectLst/>
+        </p:spPr>
+        <p:style>
+          <a:lnRef idx="1">
+            <a:schemeClr val="accent1"/>
+          </a:lnRef>
+          <a:fillRef idx="3">
+            <a:schemeClr val="accent1"/>
+          </a:fillRef>
+          <a:effectRef idx="2">
+            <a:schemeClr val="accent1"/>
+          </a:effectRef>
+          <a:fontRef idx="minor">
+            <a:schemeClr val="lt1"/>
+          </a:fontRef>
+        </p:style>
+        <p:txBody>
+          <a:bodyPr rtlCol="0" anchor="ctr"/>
+          <a:lstStyle/>
+          <a:p>
+            <a:pPr algn="ctr"/>
+          </a:p>
+        </p:txBody>
+      </p:sp>
+      <p:sp>
+        <p:nvSpPr>
+          <p:cNvPr id="29" name="TextBox 28"/>
+          <p:cNvSpPr txBox="1"/>
+          <p:nvPr/>
+        </p:nvSpPr>
+        <p:spPr>
+          <a:xfrm>
+            <a:off x="9230639" y="3163824"/>
+            <a:ext cx="2284399" cy="365760"/>
+          </a:xfrm>
+          <a:prstGeom prst="rect">
+            <a:avLst/>
+          </a:prstGeom>
+          <a:noFill/>
+        </p:spPr>
+        <p:txBody>
+          <a:bodyPr wrap="square" anchor="ctr" lIns="0" rIns="0" tIns="0" bIns="0">
+            <a:noAutofit/>
+          </a:bodyPr>
+          <a:lstStyle/>
+          <a:p>
+            <a:pPr algn="l">
+              <a:spcBef>
+                <a:spcPts val="0"/>
+              </a:spcBef>
+              <a:spcAft>
+                <a:spcPts val="200"/>
+              </a:spcAft>
+            </a:pPr>
+            <a:r>
+              <a:rPr sz="1400" b="1" i="0">
+                <a:solidFill>
+                  <a:srgbClr val="FFFFFF"/>
+                </a:solidFill>
+                <a:latin typeface="Calibri"/>
+              </a:rPr>
+              <a:t>MobilityFlink</a:t>
+            </a:r>
+          </a:p>
+        </p:txBody>
+      </p:sp>
+      <p:sp>
+        <p:nvSpPr>
+          <p:cNvPr id="30" name="TextBox 29"/>
+          <p:cNvSpPr txBox="1"/>
+          <p:nvPr/>
+        </p:nvSpPr>
+        <p:spPr>
+          <a:xfrm>
+            <a:off x="9230639" y="3703320"/>
+            <a:ext cx="2284399" cy="274320"/>
+          </a:xfrm>
+          <a:prstGeom prst="rect">
+            <a:avLst/>
+          </a:prstGeom>
+          <a:noFill/>
+        </p:spPr>
+        <p:txBody>
+          <a:bodyPr wrap="square" anchor="t" lIns="0" rIns="0" tIns="0" bIns="0">
+            <a:noAutofit/>
+          </a:bodyPr>
+          <a:lstStyle/>
+          <a:p>
+            <a:pPr algn="l">
+              <a:spcBef>
+                <a:spcPts val="0"/>
+              </a:spcBef>
+              <a:spcAft>
+                <a:spcPts val="200"/>
+              </a:spcAft>
+            </a:pPr>
+            <a:r>
+              <a:rPr sz="1200" b="1" i="0">
+                <a:solidFill>
+                  <a:srgbClr val="A02B93"/>
+                </a:solidFill>
+                <a:latin typeface="Consolas"/>
+              </a:rPr>
+              <a:t>Apache Flink</a:t>
+            </a:r>
+          </a:p>
+        </p:txBody>
+      </p:sp>
+      <p:sp>
+        <p:nvSpPr>
+          <p:cNvPr id="31" name="TextBox 30"/>
+          <p:cNvSpPr txBox="1"/>
+          <p:nvPr/>
+        </p:nvSpPr>
+        <p:spPr>
+          <a:xfrm>
+            <a:off x="9230639" y="4041648"/>
+            <a:ext cx="2229535" cy="914400"/>
+          </a:xfrm>
+          <a:prstGeom prst="rect">
+            <a:avLst/>
+          </a:prstGeom>
+          <a:noFill/>
+        </p:spPr>
+        <p:txBody>
+          <a:bodyPr wrap="square" anchor="t" lIns="0" rIns="0" tIns="0" bIns="0">
+            <a:noAutofit/>
+          </a:bodyPr>
+          <a:lstStyle/>
+          <a:p>
+            <a:pPr algn="l">
+              <a:spcBef>
+                <a:spcPts val="0"/>
+              </a:spcBef>
+              <a:spcAft>
+                <a:spcPts val="200"/>
+              </a:spcAft>
+            </a:pPr>
+            <a:r>
+              <a:rPr sz="1200" b="0" i="0">
+                <a:solidFill>
+                  <a:srgbClr val="1E2B36"/>
+                </a:solidFill>
+                <a:latin typeface="Calibri"/>
+              </a:rPr>
+              <a:t>Streaming, real-time moving features</a:t>
+            </a:r>
+          </a:p>
+        </p:txBody>
+      </p:sp>
+      <p:sp>
+        <p:nvSpPr>
+          <p:cNvPr id="32" name="TextBox 31"/>
+          <p:cNvSpPr txBox="1"/>
+          <p:nvPr/>
+        </p:nvSpPr>
+        <p:spPr>
+          <a:xfrm>
+            <a:off x="9230639" y="5074920"/>
+            <a:ext cx="2284399" cy="274320"/>
+          </a:xfrm>
+          <a:prstGeom prst="rect">
+            <a:avLst/>
+          </a:prstGeom>
+          <a:noFill/>
+        </p:spPr>
+        <p:txBody>
+          <a:bodyPr wrap="square" anchor="t" lIns="0" rIns="0" tIns="0" bIns="0">
+            <a:noAutofit/>
+          </a:bodyPr>
+          <a:lstStyle/>
+          <a:p>
+            <a:pPr algn="l">
+              <a:spcBef>
+                <a:spcPts val="0"/>
+              </a:spcBef>
+              <a:spcAft>
+                <a:spcPts val="200"/>
+              </a:spcAft>
+            </a:pPr>
+            <a:r>
+              <a:rPr sz="1200" b="1" i="0">
+                <a:solidFill>
+                  <a:srgbClr val="5B6B78"/>
+                </a:solidFill>
+                <a:latin typeface="Calibri"/>
+              </a:rPr>
+              <a:t>Planned</a:t>
+            </a:r>
+          </a:p>
+        </p:txBody>
+      </p:sp>
+      <p:sp>
+        <p:nvSpPr>
+          <p:cNvPr id="33" name="TextBox 32"/>
+          <p:cNvSpPr txBox="1"/>
+          <p:nvPr/>
+        </p:nvSpPr>
+        <p:spPr>
+          <a:xfrm>
+            <a:off x="566928" y="5669280"/>
+            <a:ext cx="11057839" cy="640080"/>
+          </a:xfrm>
+          <a:prstGeom prst="rect">
+            <a:avLst/>
+          </a:prstGeom>
+          <a:noFill/>
+        </p:spPr>
+        <p:txBody>
+          <a:bodyPr wrap="square" anchor="t" lIns="0" rIns="0" tIns="0" bIns="0">
+            <a:noAutofit/>
+          </a:bodyPr>
+          <a:lstStyle/>
+          <a:p>
             <a:pPr algn="ctr">
               <a:spcBef>
                 <a:spcPts val="0"/>
@@ -24685,14 +25486,14 @@
                 </a:solidFill>
                 <a:latin typeface="Calibri"/>
               </a:rPr>
-              <a:t>A step toward the Data Lake House architecture in the MobilityDB ecosystem.</a:t>
-            </a:r>
-          </a:p>
-        </p:txBody>
-      </p:sp>
-      <p:sp>
-        <p:nvSpPr>
-          <p:cNvPr id="19" name="Rectangle 18"/>
+              <a:t>MEOS types and the MF-JSON / WKB wire format are shared across the ecosystem, so the same tier fronts a transactional database today and the lakehouse and streaming engines as they mature.</a:t>
+            </a:r>
+          </a:p>
+        </p:txBody>
+      </p:sp>
+      <p:sp>
+        <p:nvSpPr>
+          <p:cNvPr id="34" name="Rectangle 33"/>
           <p:cNvSpPr/>
           <p:nvPr/>
         </p:nvSpPr>
@@ -24736,7 +25537,7 @@
       </p:sp>
       <p:sp>
         <p:nvSpPr>
-          <p:cNvPr id="20" name="TextBox 19"/>
+          <p:cNvPr id="35" name="TextBox 34"/>
           <p:cNvSpPr txBox="1"/>
           <p:nvPr/>
         </p:nvSpPr>
@@ -24778,7 +25579,7 @@
       </p:sp>
       <p:sp>
         <p:nvSpPr>
-          <p:cNvPr id="21" name="TextBox 20"/>
+          <p:cNvPr id="36" name="TextBox 35"/>
           <p:cNvSpPr txBox="1"/>
           <p:nvPr/>
         </p:nvSpPr>
@@ -24877,11 +25678,11 @@
             <a:r>
               <a:rPr sz="1200" b="1" i="0">
                 <a:solidFill>
-                  <a:srgbClr val="A02B93"/>
-                </a:solidFill>
-                <a:latin typeface="Calibri"/>
-              </a:rPr>
-              <a:t>FUTURE WORK</a:t>
+                  <a:srgbClr val="156082"/>
+                </a:solidFill>
+                <a:latin typeface="Calibri"/>
+              </a:rPr>
+              <a:t>RECAP</a:t>
             </a:r>
           </a:p>
         </p:txBody>
@@ -24923,7 +25724,7 @@
                 </a:solidFill>
                 <a:latin typeface="Calibri Light"/>
               </a:rPr>
-              <a:t>One Tier, Many MEOS Engines</a:t>
+              <a:t>The Standard Surface, Recapped</a:t>
             </a:r>
           </a:p>
         </p:txBody>
@@ -24938,6 +25739,869 @@
           <a:xfrm>
             <a:off x="566928" y="1389888"/>
             <a:ext cx="1554480" cy="45720"/>
+          </a:xfrm>
+          <a:prstGeom prst="rect">
+            <a:avLst/>
+          </a:prstGeom>
+          <a:solidFill>
+            <a:srgbClr val="156082"/>
+          </a:solidFill>
+          <a:ln>
+            <a:noFill/>
+          </a:ln>
+          <a:effectLst/>
+        </p:spPr>
+        <p:style>
+          <a:lnRef idx="1">
+            <a:schemeClr val="accent1"/>
+          </a:lnRef>
+          <a:fillRef idx="3">
+            <a:schemeClr val="accent1"/>
+          </a:fillRef>
+          <a:effectRef idx="2">
+            <a:schemeClr val="accent1"/>
+          </a:effectRef>
+          <a:fontRef idx="minor">
+            <a:schemeClr val="lt1"/>
+          </a:fontRef>
+        </p:style>
+        <p:txBody>
+          <a:bodyPr rtlCol="0" anchor="ctr"/>
+          <a:lstStyle/>
+          <a:p>
+            <a:pPr algn="ctr"/>
+          </a:p>
+        </p:txBody>
+      </p:sp>
+      <p:sp>
+        <p:nvSpPr>
+          <p:cNvPr id="5" name="Rounded Rectangle 4"/>
+          <p:cNvSpPr/>
+          <p:nvPr/>
+        </p:nvSpPr>
+        <p:spPr>
+          <a:xfrm>
+            <a:off x="566928" y="1645920"/>
+            <a:ext cx="3503066" cy="2057400"/>
+          </a:xfrm>
+          <a:prstGeom prst="roundRect">
+            <a:avLst>
+              <a:gd name="adj" fmla="val 4000"/>
+            </a:avLst>
+          </a:prstGeom>
+          <a:solidFill>
+            <a:srgbClr val="F1F5F8"/>
+          </a:solidFill>
+          <a:ln>
+            <a:noFill/>
+          </a:ln>
+          <a:effectLst/>
+        </p:spPr>
+        <p:style>
+          <a:lnRef idx="1">
+            <a:schemeClr val="accent1"/>
+          </a:lnRef>
+          <a:fillRef idx="3">
+            <a:schemeClr val="accent1"/>
+          </a:fillRef>
+          <a:effectRef idx="2">
+            <a:schemeClr val="accent1"/>
+          </a:effectRef>
+          <a:fontRef idx="minor">
+            <a:schemeClr val="lt1"/>
+          </a:fontRef>
+        </p:style>
+        <p:txBody>
+          <a:bodyPr rtlCol="0" anchor="ctr"/>
+          <a:lstStyle/>
+          <a:p>
+            <a:pPr algn="ctr"/>
+          </a:p>
+        </p:txBody>
+      </p:sp>
+      <p:sp>
+        <p:nvSpPr>
+          <p:cNvPr id="6" name="Rectangle 5"/>
+          <p:cNvSpPr/>
+          <p:nvPr/>
+        </p:nvSpPr>
+        <p:spPr>
+          <a:xfrm>
+            <a:off x="566928" y="1645920"/>
+            <a:ext cx="82296" cy="2057400"/>
+          </a:xfrm>
+          <a:prstGeom prst="rect">
+            <a:avLst/>
+          </a:prstGeom>
+          <a:solidFill>
+            <a:srgbClr val="156082"/>
+          </a:solidFill>
+          <a:ln>
+            <a:noFill/>
+          </a:ln>
+          <a:effectLst/>
+        </p:spPr>
+        <p:style>
+          <a:lnRef idx="1">
+            <a:schemeClr val="accent1"/>
+          </a:lnRef>
+          <a:fillRef idx="3">
+            <a:schemeClr val="accent1"/>
+          </a:fillRef>
+          <a:effectRef idx="2">
+            <a:schemeClr val="accent1"/>
+          </a:effectRef>
+          <a:fontRef idx="minor">
+            <a:schemeClr val="lt1"/>
+          </a:fontRef>
+        </p:style>
+        <p:txBody>
+          <a:bodyPr rtlCol="0" anchor="ctr"/>
+          <a:lstStyle/>
+          <a:p>
+            <a:pPr algn="ctr"/>
+          </a:p>
+        </p:txBody>
+      </p:sp>
+      <p:sp>
+        <p:nvSpPr>
+          <p:cNvPr id="7" name="TextBox 6"/>
+          <p:cNvSpPr txBox="1"/>
+          <p:nvPr/>
+        </p:nvSpPr>
+        <p:spPr>
+          <a:xfrm>
+            <a:off x="822960" y="1792224"/>
+            <a:ext cx="3137306" cy="274320"/>
+          </a:xfrm>
+          <a:prstGeom prst="rect">
+            <a:avLst/>
+          </a:prstGeom>
+          <a:noFill/>
+        </p:spPr>
+        <p:txBody>
+          <a:bodyPr wrap="square" anchor="t" lIns="0" rIns="0" tIns="0" bIns="0">
+            <a:noAutofit/>
+          </a:bodyPr>
+          <a:lstStyle/>
+          <a:p>
+            <a:pPr algn="l">
+              <a:spcBef>
+                <a:spcPts val="0"/>
+              </a:spcBef>
+              <a:spcAft>
+                <a:spcPts val="200"/>
+              </a:spcAft>
+            </a:pPr>
+            <a:r>
+              <a:rPr sz="1200" b="1" i="0">
+                <a:solidFill>
+                  <a:srgbClr val="156082"/>
+                </a:solidFill>
+                <a:latin typeface="Calibri"/>
+              </a:rPr>
+              <a:t>COLLECTIONS</a:t>
+            </a:r>
+          </a:p>
+        </p:txBody>
+      </p:sp>
+      <p:sp>
+        <p:nvSpPr>
+          <p:cNvPr id="8" name="TextBox 7"/>
+          <p:cNvSpPr txBox="1"/>
+          <p:nvPr/>
+        </p:nvSpPr>
+        <p:spPr>
+          <a:xfrm>
+            <a:off x="822960" y="2148840"/>
+            <a:ext cx="3045866" cy="1463040"/>
+          </a:xfrm>
+          <a:prstGeom prst="rect">
+            <a:avLst/>
+          </a:prstGeom>
+          <a:noFill/>
+        </p:spPr>
+        <p:txBody>
+          <a:bodyPr wrap="square" lIns="0" rIns="0" tIns="0" bIns="0">
+            <a:noAutofit/>
+          </a:bodyPr>
+          <a:lstStyle/>
+          <a:p>
+            <a:pPr>
+              <a:lnSpc>
+                <a:spcPct val="100000"/>
+              </a:lnSpc>
+              <a:spcAft>
+                <a:spcPts val="300"/>
+              </a:spcAft>
+            </a:pPr>
+            <a:r>
+              <a:rPr sz="1200" b="1">
+                <a:solidFill>
+                  <a:srgbClr val="156082"/>
+                </a:solidFill>
+                <a:latin typeface="Calibri"/>
+              </a:rPr>
+              <a:t>✓ </a:t>
+            </a:r>
+            <a:r>
+              <a:rPr sz="1200">
+                <a:solidFill>
+                  <a:srgbClr val="1E2B36"/>
+                </a:solidFill>
+                <a:latin typeface="Calibri"/>
+              </a:rPr>
+              <a:t>list (GET)</a:t>
+            </a:r>
+          </a:p>
+          <a:p>
+            <a:pPr>
+              <a:lnSpc>
+                <a:spcPct val="100000"/>
+              </a:lnSpc>
+              <a:spcAft>
+                <a:spcPts val="300"/>
+              </a:spcAft>
+            </a:pPr>
+            <a:r>
+              <a:rPr sz="1200" b="1">
+                <a:solidFill>
+                  <a:srgbClr val="156082"/>
+                </a:solidFill>
+                <a:latin typeface="Calibri"/>
+              </a:rPr>
+              <a:t>✓ </a:t>
+            </a:r>
+            <a:r>
+              <a:rPr sz="1200">
+                <a:solidFill>
+                  <a:srgbClr val="1E2B36"/>
+                </a:solidFill>
+                <a:latin typeface="Calibri"/>
+              </a:rPr>
+              <a:t>retrieve (GET)</a:t>
+            </a:r>
+          </a:p>
+          <a:p>
+            <a:pPr>
+              <a:lnSpc>
+                <a:spcPct val="100000"/>
+              </a:lnSpc>
+              <a:spcAft>
+                <a:spcPts val="300"/>
+              </a:spcAft>
+            </a:pPr>
+            <a:r>
+              <a:rPr sz="1200" b="1">
+                <a:solidFill>
+                  <a:srgbClr val="156082"/>
+                </a:solidFill>
+                <a:latin typeface="Calibri"/>
+              </a:rPr>
+              <a:t>✓ </a:t>
+            </a:r>
+            <a:r>
+              <a:rPr sz="1200">
+                <a:solidFill>
+                  <a:srgbClr val="1E2B36"/>
+                </a:solidFill>
+                <a:latin typeface="Calibri"/>
+              </a:rPr>
+              <a:t>registry-backed</a:t>
+            </a:r>
+          </a:p>
+        </p:txBody>
+      </p:sp>
+      <p:sp>
+        <p:nvSpPr>
+          <p:cNvPr id="9" name="Rounded Rectangle 8"/>
+          <p:cNvSpPr/>
+          <p:nvPr/>
+        </p:nvSpPr>
+        <p:spPr>
+          <a:xfrm>
+            <a:off x="4344314" y="1645920"/>
+            <a:ext cx="3503066" cy="2057400"/>
+          </a:xfrm>
+          <a:prstGeom prst="roundRect">
+            <a:avLst>
+              <a:gd name="adj" fmla="val 4000"/>
+            </a:avLst>
+          </a:prstGeom>
+          <a:solidFill>
+            <a:srgbClr val="F1F5F8"/>
+          </a:solidFill>
+          <a:ln>
+            <a:noFill/>
+          </a:ln>
+          <a:effectLst/>
+        </p:spPr>
+        <p:style>
+          <a:lnRef idx="1">
+            <a:schemeClr val="accent1"/>
+          </a:lnRef>
+          <a:fillRef idx="3">
+            <a:schemeClr val="accent1"/>
+          </a:fillRef>
+          <a:effectRef idx="2">
+            <a:schemeClr val="accent1"/>
+          </a:effectRef>
+          <a:fontRef idx="minor">
+            <a:schemeClr val="lt1"/>
+          </a:fontRef>
+        </p:style>
+        <p:txBody>
+          <a:bodyPr rtlCol="0" anchor="ctr"/>
+          <a:lstStyle/>
+          <a:p>
+            <a:pPr algn="ctr"/>
+          </a:p>
+        </p:txBody>
+      </p:sp>
+      <p:sp>
+        <p:nvSpPr>
+          <p:cNvPr id="10" name="Rectangle 9"/>
+          <p:cNvSpPr/>
+          <p:nvPr/>
+        </p:nvSpPr>
+        <p:spPr>
+          <a:xfrm>
+            <a:off x="4344314" y="1645920"/>
+            <a:ext cx="82296" cy="2057400"/>
+          </a:xfrm>
+          <a:prstGeom prst="rect">
+            <a:avLst/>
+          </a:prstGeom>
+          <a:solidFill>
+            <a:srgbClr val="E97132"/>
+          </a:solidFill>
+          <a:ln>
+            <a:noFill/>
+          </a:ln>
+          <a:effectLst/>
+        </p:spPr>
+        <p:style>
+          <a:lnRef idx="1">
+            <a:schemeClr val="accent1"/>
+          </a:lnRef>
+          <a:fillRef idx="3">
+            <a:schemeClr val="accent1"/>
+          </a:fillRef>
+          <a:effectRef idx="2">
+            <a:schemeClr val="accent1"/>
+          </a:effectRef>
+          <a:fontRef idx="minor">
+            <a:schemeClr val="lt1"/>
+          </a:fontRef>
+        </p:style>
+        <p:txBody>
+          <a:bodyPr rtlCol="0" anchor="ctr"/>
+          <a:lstStyle/>
+          <a:p>
+            <a:pPr algn="ctr"/>
+          </a:p>
+        </p:txBody>
+      </p:sp>
+      <p:sp>
+        <p:nvSpPr>
+          <p:cNvPr id="11" name="TextBox 10"/>
+          <p:cNvSpPr txBox="1"/>
+          <p:nvPr/>
+        </p:nvSpPr>
+        <p:spPr>
+          <a:xfrm>
+            <a:off x="4600346" y="1792224"/>
+            <a:ext cx="3137306" cy="274320"/>
+          </a:xfrm>
+          <a:prstGeom prst="rect">
+            <a:avLst/>
+          </a:prstGeom>
+          <a:noFill/>
+        </p:spPr>
+        <p:txBody>
+          <a:bodyPr wrap="square" anchor="t" lIns="0" rIns="0" tIns="0" bIns="0">
+            <a:noAutofit/>
+          </a:bodyPr>
+          <a:lstStyle/>
+          <a:p>
+            <a:pPr algn="l">
+              <a:spcBef>
+                <a:spcPts val="0"/>
+              </a:spcBef>
+              <a:spcAft>
+                <a:spcPts val="200"/>
+              </a:spcAft>
+            </a:pPr>
+            <a:r>
+              <a:rPr sz="1200" b="1" i="0">
+                <a:solidFill>
+                  <a:srgbClr val="E97132"/>
+                </a:solidFill>
+                <a:latin typeface="Calibri"/>
+              </a:rPr>
+              <a:t>MOVING FEATURES</a:t>
+            </a:r>
+          </a:p>
+        </p:txBody>
+      </p:sp>
+      <p:sp>
+        <p:nvSpPr>
+          <p:cNvPr id="12" name="TextBox 11"/>
+          <p:cNvSpPr txBox="1"/>
+          <p:nvPr/>
+        </p:nvSpPr>
+        <p:spPr>
+          <a:xfrm>
+            <a:off x="4600346" y="2148840"/>
+            <a:ext cx="3045866" cy="1463040"/>
+          </a:xfrm>
+          <a:prstGeom prst="rect">
+            <a:avLst/>
+          </a:prstGeom>
+          <a:noFill/>
+        </p:spPr>
+        <p:txBody>
+          <a:bodyPr wrap="square" lIns="0" rIns="0" tIns="0" bIns="0">
+            <a:noAutofit/>
+          </a:bodyPr>
+          <a:lstStyle/>
+          <a:p>
+            <a:pPr>
+              <a:lnSpc>
+                <a:spcPct val="100000"/>
+              </a:lnSpc>
+              <a:spcAft>
+                <a:spcPts val="300"/>
+              </a:spcAft>
+            </a:pPr>
+            <a:r>
+              <a:rPr sz="1200" b="1">
+                <a:solidFill>
+                  <a:srgbClr val="E97132"/>
+                </a:solidFill>
+                <a:latin typeface="Calibri"/>
+              </a:rPr>
+              <a:t>✓ </a:t>
+            </a:r>
+            <a:r>
+              <a:rPr sz="1200">
+                <a:solidFill>
+                  <a:srgbClr val="1E2B36"/>
+                </a:solidFill>
+                <a:latin typeface="Calibri"/>
+              </a:rPr>
+              <a:t>insert (POST)</a:t>
+            </a:r>
+          </a:p>
+          <a:p>
+            <a:pPr>
+              <a:lnSpc>
+                <a:spcPct val="100000"/>
+              </a:lnSpc>
+              <a:spcAft>
+                <a:spcPts val="300"/>
+              </a:spcAft>
+            </a:pPr>
+            <a:r>
+              <a:rPr sz="1200" b="1">
+                <a:solidFill>
+                  <a:srgbClr val="E97132"/>
+                </a:solidFill>
+                <a:latin typeface="Calibri"/>
+              </a:rPr>
+              <a:t>✓ </a:t>
+            </a:r>
+            <a:r>
+              <a:rPr sz="1200">
+                <a:solidFill>
+                  <a:srgbClr val="1E2B36"/>
+                </a:solidFill>
+                <a:latin typeface="Calibri"/>
+              </a:rPr>
+              <a:t>retrieve / stream</a:t>
+            </a:r>
+          </a:p>
+          <a:p>
+            <a:pPr>
+              <a:lnSpc>
+                <a:spcPct val="100000"/>
+              </a:lnSpc>
+              <a:spcAft>
+                <a:spcPts val="300"/>
+              </a:spcAft>
+            </a:pPr>
+            <a:r>
+              <a:rPr sz="1200" b="1">
+                <a:solidFill>
+                  <a:srgbClr val="E97132"/>
+                </a:solidFill>
+                <a:latin typeface="Calibri"/>
+              </a:rPr>
+              <a:t>✓ </a:t>
+            </a:r>
+            <a:r>
+              <a:rPr sz="1200">
+                <a:solidFill>
+                  <a:srgbClr val="1E2B36"/>
+                </a:solidFill>
+                <a:latin typeface="Calibri"/>
+              </a:rPr>
+              <a:t>delete (DELETE)</a:t>
+            </a:r>
+          </a:p>
+          <a:p>
+            <a:pPr>
+              <a:lnSpc>
+                <a:spcPct val="100000"/>
+              </a:lnSpc>
+              <a:spcAft>
+                <a:spcPts val="300"/>
+              </a:spcAft>
+            </a:pPr>
+            <a:r>
+              <a:rPr sz="1200" b="1">
+                <a:solidFill>
+                  <a:srgbClr val="E97132"/>
+                </a:solidFill>
+                <a:latin typeface="Calibri"/>
+              </a:rPr>
+              <a:t>✓ </a:t>
+            </a:r>
+            <a:r>
+              <a:rPr sz="1200">
+                <a:solidFill>
+                  <a:srgbClr val="1E2B36"/>
+                </a:solidFill>
+                <a:latin typeface="Calibri"/>
+              </a:rPr>
+              <a:t>keyset paging</a:t>
+            </a:r>
+          </a:p>
+        </p:txBody>
+      </p:sp>
+      <p:sp>
+        <p:nvSpPr>
+          <p:cNvPr id="13" name="Rounded Rectangle 12"/>
+          <p:cNvSpPr/>
+          <p:nvPr/>
+        </p:nvSpPr>
+        <p:spPr>
+          <a:xfrm>
+            <a:off x="8121700" y="1645920"/>
+            <a:ext cx="3503066" cy="2057400"/>
+          </a:xfrm>
+          <a:prstGeom prst="roundRect">
+            <a:avLst>
+              <a:gd name="adj" fmla="val 4000"/>
+            </a:avLst>
+          </a:prstGeom>
+          <a:solidFill>
+            <a:srgbClr val="F1F5F8"/>
+          </a:solidFill>
+          <a:ln>
+            <a:noFill/>
+          </a:ln>
+          <a:effectLst/>
+        </p:spPr>
+        <p:style>
+          <a:lnRef idx="1">
+            <a:schemeClr val="accent1"/>
+          </a:lnRef>
+          <a:fillRef idx="3">
+            <a:schemeClr val="accent1"/>
+          </a:fillRef>
+          <a:effectRef idx="2">
+            <a:schemeClr val="accent1"/>
+          </a:effectRef>
+          <a:fontRef idx="minor">
+            <a:schemeClr val="lt1"/>
+          </a:fontRef>
+        </p:style>
+        <p:txBody>
+          <a:bodyPr rtlCol="0" anchor="ctr"/>
+          <a:lstStyle/>
+          <a:p>
+            <a:pPr algn="ctr"/>
+          </a:p>
+        </p:txBody>
+      </p:sp>
+      <p:sp>
+        <p:nvSpPr>
+          <p:cNvPr id="14" name="Rectangle 13"/>
+          <p:cNvSpPr/>
+          <p:nvPr/>
+        </p:nvSpPr>
+        <p:spPr>
+          <a:xfrm>
+            <a:off x="8121700" y="1645920"/>
+            <a:ext cx="82296" cy="2057400"/>
+          </a:xfrm>
+          <a:prstGeom prst="rect">
+            <a:avLst/>
+          </a:prstGeom>
+          <a:solidFill>
+            <a:srgbClr val="196B24"/>
+          </a:solidFill>
+          <a:ln>
+            <a:noFill/>
+          </a:ln>
+          <a:effectLst/>
+        </p:spPr>
+        <p:style>
+          <a:lnRef idx="1">
+            <a:schemeClr val="accent1"/>
+          </a:lnRef>
+          <a:fillRef idx="3">
+            <a:schemeClr val="accent1"/>
+          </a:fillRef>
+          <a:effectRef idx="2">
+            <a:schemeClr val="accent1"/>
+          </a:effectRef>
+          <a:fontRef idx="minor">
+            <a:schemeClr val="lt1"/>
+          </a:fontRef>
+        </p:style>
+        <p:txBody>
+          <a:bodyPr rtlCol="0" anchor="ctr"/>
+          <a:lstStyle/>
+          <a:p>
+            <a:pPr algn="ctr"/>
+          </a:p>
+        </p:txBody>
+      </p:sp>
+      <p:sp>
+        <p:nvSpPr>
+          <p:cNvPr id="15" name="TextBox 14"/>
+          <p:cNvSpPr txBox="1"/>
+          <p:nvPr/>
+        </p:nvSpPr>
+        <p:spPr>
+          <a:xfrm>
+            <a:off x="8377732" y="1792224"/>
+            <a:ext cx="3137306" cy="274320"/>
+          </a:xfrm>
+          <a:prstGeom prst="rect">
+            <a:avLst/>
+          </a:prstGeom>
+          <a:noFill/>
+        </p:spPr>
+        <p:txBody>
+          <a:bodyPr wrap="square" anchor="t" lIns="0" rIns="0" tIns="0" bIns="0">
+            <a:noAutofit/>
+          </a:bodyPr>
+          <a:lstStyle/>
+          <a:p>
+            <a:pPr algn="l">
+              <a:spcBef>
+                <a:spcPts val="0"/>
+              </a:spcBef>
+              <a:spcAft>
+                <a:spcPts val="200"/>
+              </a:spcAft>
+            </a:pPr>
+            <a:r>
+              <a:rPr sz="1200" b="1" i="0">
+                <a:solidFill>
+                  <a:srgbClr val="196B24"/>
+                </a:solidFill>
+                <a:latin typeface="Calibri"/>
+              </a:rPr>
+              <a:t>QUERYING</a:t>
+            </a:r>
+          </a:p>
+        </p:txBody>
+      </p:sp>
+      <p:sp>
+        <p:nvSpPr>
+          <p:cNvPr id="16" name="TextBox 15"/>
+          <p:cNvSpPr txBox="1"/>
+          <p:nvPr/>
+        </p:nvSpPr>
+        <p:spPr>
+          <a:xfrm>
+            <a:off x="8377732" y="2148840"/>
+            <a:ext cx="3045866" cy="1463040"/>
+          </a:xfrm>
+          <a:prstGeom prst="rect">
+            <a:avLst/>
+          </a:prstGeom>
+          <a:noFill/>
+        </p:spPr>
+        <p:txBody>
+          <a:bodyPr wrap="square" lIns="0" rIns="0" tIns="0" bIns="0">
+            <a:noAutofit/>
+          </a:bodyPr>
+          <a:lstStyle/>
+          <a:p>
+            <a:pPr>
+              <a:lnSpc>
+                <a:spcPct val="100000"/>
+              </a:lnSpc>
+              <a:spcAft>
+                <a:spcPts val="300"/>
+              </a:spcAft>
+            </a:pPr>
+            <a:r>
+              <a:rPr sz="1200" b="1">
+                <a:solidFill>
+                  <a:srgbClr val="196B24"/>
+                </a:solidFill>
+                <a:latin typeface="Calibri"/>
+              </a:rPr>
+              <a:t>✓ </a:t>
+            </a:r>
+            <a:r>
+              <a:rPr sz="1200">
+                <a:solidFill>
+                  <a:srgbClr val="1E2B36"/>
+                </a:solidFill>
+                <a:latin typeface="Calibri"/>
+              </a:rPr>
+              <a:t>bbox spatial filter</a:t>
+            </a:r>
+          </a:p>
+          <a:p>
+            <a:pPr>
+              <a:lnSpc>
+                <a:spcPct val="100000"/>
+              </a:lnSpc>
+              <a:spcAft>
+                <a:spcPts val="300"/>
+              </a:spcAft>
+            </a:pPr>
+            <a:r>
+              <a:rPr sz="1200" b="1">
+                <a:solidFill>
+                  <a:srgbClr val="196B24"/>
+                </a:solidFill>
+                <a:latin typeface="Calibri"/>
+              </a:rPr>
+              <a:t>✓ </a:t>
+            </a:r>
+            <a:r>
+              <a:rPr sz="1200">
+                <a:solidFill>
+                  <a:srgbClr val="1E2B36"/>
+                </a:solidFill>
+                <a:latin typeface="Calibri"/>
+              </a:rPr>
+              <a:t>datetime interval / instant</a:t>
+            </a:r>
+          </a:p>
+          <a:p>
+            <a:pPr>
+              <a:lnSpc>
+                <a:spcPct val="100000"/>
+              </a:lnSpc>
+              <a:spcAft>
+                <a:spcPts val="300"/>
+              </a:spcAft>
+            </a:pPr>
+            <a:r>
+              <a:rPr sz="1200" b="1">
+                <a:solidFill>
+                  <a:srgbClr val="196B24"/>
+                </a:solidFill>
+                <a:latin typeface="Calibri"/>
+              </a:rPr>
+              <a:t>✓ </a:t>
+            </a:r>
+            <a:r>
+              <a:rPr sz="1200">
+                <a:solidFill>
+                  <a:srgbClr val="1E2B36"/>
+                </a:solidFill>
+                <a:latin typeface="Calibri"/>
+              </a:rPr>
+              <a:t>subtrajectory clipping</a:t>
+            </a:r>
+          </a:p>
+          <a:p>
+            <a:pPr>
+              <a:lnSpc>
+                <a:spcPct val="100000"/>
+              </a:lnSpc>
+              <a:spcAft>
+                <a:spcPts val="300"/>
+              </a:spcAft>
+            </a:pPr>
+            <a:r>
+              <a:rPr sz="1200" b="1">
+                <a:solidFill>
+                  <a:srgbClr val="196B24"/>
+                </a:solidFill>
+                <a:latin typeface="Calibri"/>
+              </a:rPr>
+              <a:t>✓ </a:t>
+            </a:r>
+            <a:r>
+              <a:rPr sz="1200">
+                <a:solidFill>
+                  <a:srgbClr val="1E2B36"/>
+                </a:solidFill>
+                <a:latin typeface="Calibri"/>
+              </a:rPr>
+              <a:t>leaf selector</a:t>
+            </a:r>
+          </a:p>
+        </p:txBody>
+      </p:sp>
+      <p:sp>
+        <p:nvSpPr>
+          <p:cNvPr id="17" name="Rounded Rectangle 16"/>
+          <p:cNvSpPr/>
+          <p:nvPr/>
+        </p:nvSpPr>
+        <p:spPr>
+          <a:xfrm>
+            <a:off x="566928" y="3886200"/>
+            <a:ext cx="3503066" cy="2057400"/>
+          </a:xfrm>
+          <a:prstGeom prst="roundRect">
+            <a:avLst>
+              <a:gd name="adj" fmla="val 4000"/>
+            </a:avLst>
+          </a:prstGeom>
+          <a:solidFill>
+            <a:srgbClr val="F1F5F8"/>
+          </a:solidFill>
+          <a:ln>
+            <a:noFill/>
+          </a:ln>
+          <a:effectLst/>
+        </p:spPr>
+        <p:style>
+          <a:lnRef idx="1">
+            <a:schemeClr val="accent1"/>
+          </a:lnRef>
+          <a:fillRef idx="3">
+            <a:schemeClr val="accent1"/>
+          </a:fillRef>
+          <a:effectRef idx="2">
+            <a:schemeClr val="accent1"/>
+          </a:effectRef>
+          <a:fontRef idx="minor">
+            <a:schemeClr val="lt1"/>
+          </a:fontRef>
+        </p:style>
+        <p:txBody>
+          <a:bodyPr rtlCol="0" anchor="ctr"/>
+          <a:lstStyle/>
+          <a:p>
+            <a:pPr algn="ctr"/>
+          </a:p>
+        </p:txBody>
+      </p:sp>
+      <p:sp>
+        <p:nvSpPr>
+          <p:cNvPr id="18" name="Rectangle 17"/>
+          <p:cNvSpPr/>
+          <p:nvPr/>
+        </p:nvSpPr>
+        <p:spPr>
+          <a:xfrm>
+            <a:off x="566928" y="3886200"/>
+            <a:ext cx="82296" cy="2057400"/>
           </a:xfrm>
           <a:prstGeom prst="rect">
             <a:avLst/>
@@ -24974,19 +26638,212 @@
       </p:sp>
       <p:sp>
         <p:nvSpPr>
-          <p:cNvPr id="5" name="Rounded Rectangle 4"/>
+          <p:cNvPr id="19" name="TextBox 18"/>
+          <p:cNvSpPr txBox="1"/>
+          <p:nvPr/>
+        </p:nvSpPr>
+        <p:spPr>
+          <a:xfrm>
+            <a:off x="822960" y="4032504"/>
+            <a:ext cx="3137306" cy="274320"/>
+          </a:xfrm>
+          <a:prstGeom prst="rect">
+            <a:avLst/>
+          </a:prstGeom>
+          <a:noFill/>
+        </p:spPr>
+        <p:txBody>
+          <a:bodyPr wrap="square" anchor="t" lIns="0" rIns="0" tIns="0" bIns="0">
+            <a:noAutofit/>
+          </a:bodyPr>
+          <a:lstStyle/>
+          <a:p>
+            <a:pPr algn="l">
+              <a:spcBef>
+                <a:spcPts val="0"/>
+              </a:spcBef>
+              <a:spcAft>
+                <a:spcPts val="200"/>
+              </a:spcAft>
+            </a:pPr>
+            <a:r>
+              <a:rPr sz="1200" b="1" i="0">
+                <a:solidFill>
+                  <a:srgbClr val="A02B93"/>
+                </a:solidFill>
+                <a:latin typeface="Calibri"/>
+              </a:rPr>
+              <a:t>TEMPORAL GEOMETRY</a:t>
+            </a:r>
+          </a:p>
+        </p:txBody>
+      </p:sp>
+      <p:sp>
+        <p:nvSpPr>
+          <p:cNvPr id="20" name="TextBox 19"/>
+          <p:cNvSpPr txBox="1"/>
+          <p:nvPr/>
+        </p:nvSpPr>
+        <p:spPr>
+          <a:xfrm>
+            <a:off x="822960" y="4389120"/>
+            <a:ext cx="3045866" cy="1463040"/>
+          </a:xfrm>
+          <a:prstGeom prst="rect">
+            <a:avLst/>
+          </a:prstGeom>
+          <a:noFill/>
+        </p:spPr>
+        <p:txBody>
+          <a:bodyPr wrap="square" lIns="0" rIns="0" tIns="0" bIns="0">
+            <a:noAutofit/>
+          </a:bodyPr>
+          <a:lstStyle/>
+          <a:p>
+            <a:pPr>
+              <a:lnSpc>
+                <a:spcPct val="100000"/>
+              </a:lnSpc>
+              <a:spcAft>
+                <a:spcPts val="300"/>
+              </a:spcAft>
+            </a:pPr>
+            <a:r>
+              <a:rPr sz="1200" b="1">
+                <a:solidFill>
+                  <a:srgbClr val="A02B93"/>
+                </a:solidFill>
+                <a:latin typeface="Calibri"/>
+              </a:rPr>
+              <a:t>✓ </a:t>
+            </a:r>
+            <a:r>
+              <a:rPr sz="1200">
+                <a:solidFill>
+                  <a:srgbClr val="1E2B36"/>
+                </a:solidFill>
+                <a:latin typeface="Calibri"/>
+              </a:rPr>
+              <a:t>get sequence (GET)</a:t>
+            </a:r>
+          </a:p>
+          <a:p>
+            <a:pPr>
+              <a:lnSpc>
+                <a:spcPct val="100000"/>
+              </a:lnSpc>
+              <a:spcAft>
+                <a:spcPts val="300"/>
+              </a:spcAft>
+            </a:pPr>
+            <a:r>
+              <a:rPr sz="1200" b="1">
+                <a:solidFill>
+                  <a:srgbClr val="A02B93"/>
+                </a:solidFill>
+                <a:latin typeface="Calibri"/>
+              </a:rPr>
+              <a:t>✓ </a:t>
+            </a:r>
+            <a:r>
+              <a:rPr sz="1200">
+                <a:solidFill>
+                  <a:srgbClr val="1E2B36"/>
+                </a:solidFill>
+                <a:latin typeface="Calibri"/>
+              </a:rPr>
+              <a:t>append sub-trajectory (POST)</a:t>
+            </a:r>
+          </a:p>
+          <a:p>
+            <a:pPr>
+              <a:lnSpc>
+                <a:spcPct val="100000"/>
+              </a:lnSpc>
+              <a:spcAft>
+                <a:spcPts val="300"/>
+              </a:spcAft>
+            </a:pPr>
+            <a:r>
+              <a:rPr sz="1200" b="1">
+                <a:solidFill>
+                  <a:srgbClr val="A02B93"/>
+                </a:solidFill>
+                <a:latin typeface="Calibri"/>
+              </a:rPr>
+              <a:t>✓ </a:t>
+            </a:r>
+            <a:r>
+              <a:rPr sz="1200">
+                <a:solidFill>
+                  <a:srgbClr val="1E2B36"/>
+                </a:solidFill>
+                <a:latin typeface="Calibri"/>
+              </a:rPr>
+              <a:t>datetime / leaf clip</a:t>
+            </a:r>
+          </a:p>
+        </p:txBody>
+      </p:sp>
+      <p:sp>
+        <p:nvSpPr>
+          <p:cNvPr id="21" name="Rounded Rectangle 20"/>
           <p:cNvSpPr/>
           <p:nvPr/>
         </p:nvSpPr>
         <p:spPr>
           <a:xfrm>
-            <a:off x="566928" y="1645920"/>
-            <a:ext cx="11057839" cy="868680"/>
+            <a:off x="4344314" y="3886200"/>
+            <a:ext cx="3503066" cy="2057400"/>
           </a:xfrm>
           <a:prstGeom prst="roundRect">
             <a:avLst>
-              <a:gd name="adj" fmla="val 6000"/>
+              <a:gd name="adj" fmla="val 4000"/>
             </a:avLst>
+          </a:prstGeom>
+          <a:solidFill>
+            <a:srgbClr val="F1F5F8"/>
+          </a:solidFill>
+          <a:ln>
+            <a:noFill/>
+          </a:ln>
+          <a:effectLst/>
+        </p:spPr>
+        <p:style>
+          <a:lnRef idx="1">
+            <a:schemeClr val="accent1"/>
+          </a:lnRef>
+          <a:fillRef idx="3">
+            <a:schemeClr val="accent1"/>
+          </a:fillRef>
+          <a:effectRef idx="2">
+            <a:schemeClr val="accent1"/>
+          </a:effectRef>
+          <a:fontRef idx="minor">
+            <a:schemeClr val="lt1"/>
+          </a:fontRef>
+        </p:style>
+        <p:txBody>
+          <a:bodyPr rtlCol="0" anchor="ctr"/>
+          <a:lstStyle/>
+          <a:p>
+            <a:pPr algn="ctr"/>
+          </a:p>
+        </p:txBody>
+      </p:sp>
+      <p:sp>
+        <p:nvSpPr>
+          <p:cNvPr id="22" name="Rectangle 21"/>
+          <p:cNvSpPr/>
+          <p:nvPr/>
+        </p:nvSpPr>
+        <p:spPr>
+          <a:xfrm>
+            <a:off x="4344314" y="3886200"/>
+            <a:ext cx="82296" cy="2057400"/>
+          </a:xfrm>
+          <a:prstGeom prst="rect">
+            <a:avLst/>
           </a:prstGeom>
           <a:solidFill>
             <a:srgbClr val="156082"/>
@@ -25020,14 +26877,14 @@
       </p:sp>
       <p:sp>
         <p:nvSpPr>
-          <p:cNvPr id="6" name="TextBox 5"/>
+          <p:cNvPr id="23" name="TextBox 22"/>
           <p:cNvSpPr txBox="1"/>
           <p:nvPr/>
         </p:nvSpPr>
         <p:spPr>
           <a:xfrm>
-            <a:off x="859536" y="1755648"/>
-            <a:ext cx="10472623" cy="320040"/>
+            <a:off x="4600346" y="4032504"/>
+            <a:ext cx="3137306" cy="274320"/>
           </a:xfrm>
           <a:prstGeom prst="rect">
             <a:avLst/>
@@ -25049,27 +26906,27 @@
               </a:spcAft>
             </a:pPr>
             <a:r>
-              <a:rPr sz="1600" b="1" i="0">
-                <a:solidFill>
-                  <a:srgbClr val="FFFFFF"/>
-                </a:solidFill>
-                <a:latin typeface="Calibri"/>
-              </a:rPr>
-              <a:t>Thin OGC API – Moving Features tier</a:t>
-            </a:r>
-          </a:p>
-        </p:txBody>
-      </p:sp>
-      <p:sp>
-        <p:nvSpPr>
-          <p:cNvPr id="7" name="TextBox 6"/>
+              <a:rPr sz="1200" b="1" i="0">
+                <a:solidFill>
+                  <a:srgbClr val="156082"/>
+                </a:solidFill>
+                <a:latin typeface="Calibri"/>
+              </a:rPr>
+              <a:t>DERIVED MEASURES</a:t>
+            </a:r>
+          </a:p>
+        </p:txBody>
+      </p:sp>
+      <p:sp>
+        <p:nvSpPr>
+          <p:cNvPr id="24" name="TextBox 23"/>
           <p:cNvSpPr txBox="1"/>
           <p:nvPr/>
         </p:nvSpPr>
         <p:spPr>
           <a:xfrm>
-            <a:off x="859536" y="2139696"/>
-            <a:ext cx="10472623" cy="274320"/>
+            <a:off x="4600346" y="4389120"/>
+            <a:ext cx="3045866" cy="1463040"/>
           </a:xfrm>
           <a:prstGeom prst="rect">
             <a:avLst/>
@@ -25077,87 +26934,138 @@
           <a:noFill/>
         </p:spPr>
         <p:txBody>
-          <a:bodyPr wrap="square" anchor="t" lIns="0" rIns="0" tIns="0" bIns="0">
+          <a:bodyPr wrap="square" lIns="0" rIns="0" tIns="0" bIns="0">
             <a:noAutofit/>
           </a:bodyPr>
           <a:lstStyle/>
           <a:p>
-            <a:pPr algn="l">
-              <a:spcBef>
-                <a:spcPts val="0"/>
-              </a:spcBef>
-              <a:spcAft>
-                <a:spcPts val="200"/>
-              </a:spcAft>
-            </a:pPr>
-            <a:r>
-              <a:rPr sz="1200" b="0" i="0">
-                <a:solidFill>
-                  <a:srgbClr val="CFE2EC"/>
-                </a:solidFill>
-                <a:latin typeface="Calibri"/>
-              </a:rPr>
-              <a:t>MF-JSON / WKB wire format  ·  streaming  ·  keyset paging  ·  index pushdown  ·  no MEOS in the tier</a:t>
-            </a:r>
-          </a:p>
-        </p:txBody>
-      </p:sp>
-      <p:sp>
-        <p:nvSpPr>
-          <p:cNvPr id="8" name="TextBox 7"/>
-          <p:cNvSpPr txBox="1"/>
-          <p:nvPr/>
-        </p:nvSpPr>
-        <p:spPr>
-          <a:xfrm>
-            <a:off x="566928" y="2633472"/>
-            <a:ext cx="11057839" cy="274320"/>
-          </a:xfrm>
-          <a:prstGeom prst="rect">
-            <a:avLst/>
-          </a:prstGeom>
-          <a:noFill/>
-        </p:spPr>
-        <p:txBody>
-          <a:bodyPr wrap="square" anchor="t" lIns="0" rIns="0" tIns="0" bIns="0">
-            <a:noAutofit/>
-          </a:bodyPr>
-          <a:lstStyle/>
-          <a:p>
-            <a:pPr algn="ctr">
-              <a:spcBef>
-                <a:spcPts val="0"/>
-              </a:spcBef>
-              <a:spcAft>
-                <a:spcPts val="200"/>
-              </a:spcAft>
-            </a:pPr>
-            <a:r>
-              <a:rPr sz="1200" b="0" i="0">
-                <a:solidFill>
-                  <a:srgbClr val="5B6B78"/>
-                </a:solidFill>
-                <a:latin typeface="Calibri"/>
-              </a:rPr>
-              <a:t>▼   serves any MEOS-backed engine; the engine becomes a configuration choice</a:t>
-            </a:r>
-          </a:p>
-        </p:txBody>
-      </p:sp>
-      <p:sp>
-        <p:nvSpPr>
-          <p:cNvPr id="9" name="Rounded Rectangle 8"/>
+            <a:pPr>
+              <a:lnSpc>
+                <a:spcPct val="100000"/>
+              </a:lnSpc>
+              <a:spcAft>
+                <a:spcPts val="300"/>
+              </a:spcAft>
+            </a:pPr>
+            <a:r>
+              <a:rPr sz="1200" b="1">
+                <a:solidFill>
+                  <a:srgbClr val="156082"/>
+                </a:solidFill>
+                <a:latin typeface="Calibri"/>
+              </a:rPr>
+              <a:t>✓ </a:t>
+            </a:r>
+            <a:r>
+              <a:rPr sz="1200">
+                <a:solidFill>
+                  <a:srgbClr val="1E2B36"/>
+                </a:solidFill>
+                <a:latin typeface="Calibri"/>
+              </a:rPr>
+              <a:t>distance</a:t>
+            </a:r>
+          </a:p>
+          <a:p>
+            <a:pPr>
+              <a:lnSpc>
+                <a:spcPct val="100000"/>
+              </a:lnSpc>
+              <a:spcAft>
+                <a:spcPts val="300"/>
+              </a:spcAft>
+            </a:pPr>
+            <a:r>
+              <a:rPr sz="1200" b="1">
+                <a:solidFill>
+                  <a:srgbClr val="156082"/>
+                </a:solidFill>
+                <a:latin typeface="Calibri"/>
+              </a:rPr>
+              <a:t>✓ </a:t>
+            </a:r>
+            <a:r>
+              <a:rPr sz="1200">
+                <a:solidFill>
+                  <a:srgbClr val="1E2B36"/>
+                </a:solidFill>
+                <a:latin typeface="Calibri"/>
+              </a:rPr>
+              <a:t>velocity</a:t>
+            </a:r>
+          </a:p>
+          <a:p>
+            <a:pPr>
+              <a:lnSpc>
+                <a:spcPct val="100000"/>
+              </a:lnSpc>
+              <a:spcAft>
+                <a:spcPts val="300"/>
+              </a:spcAft>
+            </a:pPr>
+            <a:r>
+              <a:rPr sz="1200" b="1">
+                <a:solidFill>
+                  <a:srgbClr val="156082"/>
+                </a:solidFill>
+                <a:latin typeface="Calibri"/>
+              </a:rPr>
+              <a:t>✓ </a:t>
+            </a:r>
+            <a:r>
+              <a:rPr sz="1200">
+                <a:solidFill>
+                  <a:srgbClr val="1E2B36"/>
+                </a:solidFill>
+                <a:latin typeface="Calibri"/>
+              </a:rPr>
+              <a:t>acceleration → 501 (not derivable)</a:t>
+            </a:r>
+          </a:p>
+          <a:p>
+            <a:pPr>
+              <a:lnSpc>
+                <a:spcPct val="100000"/>
+              </a:lnSpc>
+              <a:spcAft>
+                <a:spcPts val="300"/>
+              </a:spcAft>
+            </a:pPr>
+            <a:r>
+              <a:rPr sz="1200" b="1">
+                <a:solidFill>
+                  <a:srgbClr val="156082"/>
+                </a:solidFill>
+                <a:latin typeface="Calibri"/>
+              </a:rPr>
+              <a:t>✓ </a:t>
+            </a:r>
+            <a:r>
+              <a:rPr sz="1200">
+                <a:solidFill>
+                  <a:srgbClr val="1E2B36"/>
+                </a:solidFill>
+                <a:latin typeface="Calibri"/>
+              </a:rPr>
+              <a:t>exact, as TReal</a:t>
+            </a:r>
+          </a:p>
+        </p:txBody>
+      </p:sp>
+      <p:sp>
+        <p:nvSpPr>
+          <p:cNvPr id="25" name="Rounded Rectangle 24"/>
           <p:cNvSpPr/>
           <p:nvPr/>
         </p:nvSpPr>
         <p:spPr>
           <a:xfrm>
-            <a:off x="566928" y="3108960"/>
-            <a:ext cx="2558719" cy="2331720"/>
+            <a:off x="8121700" y="3886200"/>
+            <a:ext cx="3503066" cy="2057400"/>
           </a:xfrm>
           <a:prstGeom prst="roundRect">
             <a:avLst>
-              <a:gd name="adj" fmla="val 5000"/>
+              <a:gd name="adj" fmla="val 4000"/>
             </a:avLst>
           </a:prstGeom>
           <a:solidFill>
@@ -25192,539 +27100,17 @@
       </p:sp>
       <p:sp>
         <p:nvSpPr>
-          <p:cNvPr id="10" name="Rounded Rectangle 9"/>
+          <p:cNvPr id="26" name="Rectangle 25"/>
           <p:cNvSpPr/>
           <p:nvPr/>
         </p:nvSpPr>
         <p:spPr>
           <a:xfrm>
-            <a:off x="566928" y="3108960"/>
-            <a:ext cx="2558719" cy="475488"/>
-          </a:xfrm>
-          <a:prstGeom prst="roundRect">
-            <a:avLst>
-              <a:gd name="adj" fmla="val 8000"/>
-            </a:avLst>
-          </a:prstGeom>
-          <a:solidFill>
-            <a:srgbClr val="156082"/>
-          </a:solidFill>
-          <a:ln>
-            <a:noFill/>
-          </a:ln>
-          <a:effectLst/>
-        </p:spPr>
-        <p:style>
-          <a:lnRef idx="1">
-            <a:schemeClr val="accent1"/>
-          </a:lnRef>
-          <a:fillRef idx="3">
-            <a:schemeClr val="accent1"/>
-          </a:fillRef>
-          <a:effectRef idx="2">
-            <a:schemeClr val="accent1"/>
-          </a:effectRef>
-          <a:fontRef idx="minor">
-            <a:schemeClr val="lt1"/>
-          </a:fontRef>
-        </p:style>
-        <p:txBody>
-          <a:bodyPr rtlCol="0" anchor="ctr"/>
-          <a:lstStyle/>
-          <a:p>
-            <a:pPr algn="ctr"/>
-          </a:p>
-        </p:txBody>
-      </p:sp>
-      <p:sp>
-        <p:nvSpPr>
-          <p:cNvPr id="11" name="TextBox 10"/>
-          <p:cNvSpPr txBox="1"/>
-          <p:nvPr/>
-        </p:nvSpPr>
-        <p:spPr>
-          <a:xfrm>
-            <a:off x="731520" y="3163824"/>
-            <a:ext cx="2284399" cy="365760"/>
+            <a:off x="8121700" y="3886200"/>
+            <a:ext cx="82296" cy="2057400"/>
           </a:xfrm>
           <a:prstGeom prst="rect">
             <a:avLst/>
-          </a:prstGeom>
-          <a:noFill/>
-        </p:spPr>
-        <p:txBody>
-          <a:bodyPr wrap="square" anchor="ctr" lIns="0" rIns="0" tIns="0" bIns="0">
-            <a:noAutofit/>
-          </a:bodyPr>
-          <a:lstStyle/>
-          <a:p>
-            <a:pPr algn="l">
-              <a:spcBef>
-                <a:spcPts val="0"/>
-              </a:spcBef>
-              <a:spcAft>
-                <a:spcPts val="200"/>
-              </a:spcAft>
-            </a:pPr>
-            <a:r>
-              <a:rPr sz="1400" b="1" i="0">
-                <a:solidFill>
-                  <a:srgbClr val="FFFFFF"/>
-                </a:solidFill>
-                <a:latin typeface="Calibri"/>
-              </a:rPr>
-              <a:t>MobilityDB</a:t>
-            </a:r>
-          </a:p>
-        </p:txBody>
-      </p:sp>
-      <p:sp>
-        <p:nvSpPr>
-          <p:cNvPr id="12" name="TextBox 11"/>
-          <p:cNvSpPr txBox="1"/>
-          <p:nvPr/>
-        </p:nvSpPr>
-        <p:spPr>
-          <a:xfrm>
-            <a:off x="731520" y="3703320"/>
-            <a:ext cx="2284399" cy="274320"/>
-          </a:xfrm>
-          <a:prstGeom prst="rect">
-            <a:avLst/>
-          </a:prstGeom>
-          <a:noFill/>
-        </p:spPr>
-        <p:txBody>
-          <a:bodyPr wrap="square" anchor="t" lIns="0" rIns="0" tIns="0" bIns="0">
-            <a:noAutofit/>
-          </a:bodyPr>
-          <a:lstStyle/>
-          <a:p>
-            <a:pPr algn="l">
-              <a:spcBef>
-                <a:spcPts val="0"/>
-              </a:spcBef>
-              <a:spcAft>
-                <a:spcPts val="200"/>
-              </a:spcAft>
-            </a:pPr>
-            <a:r>
-              <a:rPr sz="1200" b="1" i="0">
-                <a:solidFill>
-                  <a:srgbClr val="156082"/>
-                </a:solidFill>
-                <a:latin typeface="Consolas"/>
-              </a:rPr>
-              <a:t>PostgreSQL</a:t>
-            </a:r>
-          </a:p>
-        </p:txBody>
-      </p:sp>
-      <p:sp>
-        <p:nvSpPr>
-          <p:cNvPr id="13" name="TextBox 12"/>
-          <p:cNvSpPr txBox="1"/>
-          <p:nvPr/>
-        </p:nvSpPr>
-        <p:spPr>
-          <a:xfrm>
-            <a:off x="731520" y="4041648"/>
-            <a:ext cx="2229535" cy="914400"/>
-          </a:xfrm>
-          <a:prstGeom prst="rect">
-            <a:avLst/>
-          </a:prstGeom>
-          <a:noFill/>
-        </p:spPr>
-        <p:txBody>
-          <a:bodyPr wrap="square" anchor="t" lIns="0" rIns="0" tIns="0" bIns="0">
-            <a:noAutofit/>
-          </a:bodyPr>
-          <a:lstStyle/>
-          <a:p>
-            <a:pPr algn="l">
-              <a:spcBef>
-                <a:spcPts val="0"/>
-              </a:spcBef>
-              <a:spcAft>
-                <a:spcPts val="200"/>
-              </a:spcAft>
-            </a:pPr>
-            <a:r>
-              <a:rPr sz="1200" b="0" i="0">
-                <a:solidFill>
-                  <a:srgbClr val="1E2B36"/>
-                </a:solidFill>
-                <a:latin typeface="Calibri"/>
-              </a:rPr>
-              <a:t>Transactional serving over a live database.</a:t>
-            </a:r>
-          </a:p>
-        </p:txBody>
-      </p:sp>
-      <p:sp>
-        <p:nvSpPr>
-          <p:cNvPr id="14" name="TextBox 13"/>
-          <p:cNvSpPr txBox="1"/>
-          <p:nvPr/>
-        </p:nvSpPr>
-        <p:spPr>
-          <a:xfrm>
-            <a:off x="731520" y="5074920"/>
-            <a:ext cx="2284399" cy="274320"/>
-          </a:xfrm>
-          <a:prstGeom prst="rect">
-            <a:avLst/>
-          </a:prstGeom>
-          <a:noFill/>
-        </p:spPr>
-        <p:txBody>
-          <a:bodyPr wrap="square" anchor="t" lIns="0" rIns="0" tIns="0" bIns="0">
-            <a:noAutofit/>
-          </a:bodyPr>
-          <a:lstStyle/>
-          <a:p>
-            <a:pPr algn="l">
-              <a:spcBef>
-                <a:spcPts val="0"/>
-              </a:spcBef>
-              <a:spcAft>
-                <a:spcPts val="200"/>
-              </a:spcAft>
-            </a:pPr>
-            <a:r>
-              <a:rPr sz="1200" b="1" i="0">
-                <a:solidFill>
-                  <a:srgbClr val="196B24"/>
-                </a:solidFill>
-                <a:latin typeface="Calibri"/>
-              </a:rPr>
-              <a:t>Implemented today</a:t>
-            </a:r>
-          </a:p>
-        </p:txBody>
-      </p:sp>
-      <p:sp>
-        <p:nvSpPr>
-          <p:cNvPr id="15" name="Rounded Rectangle 14"/>
-          <p:cNvSpPr/>
-          <p:nvPr/>
-        </p:nvSpPr>
-        <p:spPr>
-          <a:xfrm>
-            <a:off x="3399967" y="3108960"/>
-            <a:ext cx="2558719" cy="2331720"/>
-          </a:xfrm>
-          <a:prstGeom prst="roundRect">
-            <a:avLst>
-              <a:gd name="adj" fmla="val 5000"/>
-            </a:avLst>
-          </a:prstGeom>
-          <a:solidFill>
-            <a:srgbClr val="F1F5F8"/>
-          </a:solidFill>
-          <a:ln>
-            <a:noFill/>
-          </a:ln>
-          <a:effectLst/>
-        </p:spPr>
-        <p:style>
-          <a:lnRef idx="1">
-            <a:schemeClr val="accent1"/>
-          </a:lnRef>
-          <a:fillRef idx="3">
-            <a:schemeClr val="accent1"/>
-          </a:fillRef>
-          <a:effectRef idx="2">
-            <a:schemeClr val="accent1"/>
-          </a:effectRef>
-          <a:fontRef idx="minor">
-            <a:schemeClr val="lt1"/>
-          </a:fontRef>
-        </p:style>
-        <p:txBody>
-          <a:bodyPr rtlCol="0" anchor="ctr"/>
-          <a:lstStyle/>
-          <a:p>
-            <a:pPr algn="ctr"/>
-          </a:p>
-        </p:txBody>
-      </p:sp>
-      <p:sp>
-        <p:nvSpPr>
-          <p:cNvPr id="16" name="Rounded Rectangle 15"/>
-          <p:cNvSpPr/>
-          <p:nvPr/>
-        </p:nvSpPr>
-        <p:spPr>
-          <a:xfrm>
-            <a:off x="3399967" y="3108960"/>
-            <a:ext cx="2558719" cy="475488"/>
-          </a:xfrm>
-          <a:prstGeom prst="roundRect">
-            <a:avLst>
-              <a:gd name="adj" fmla="val 8000"/>
-            </a:avLst>
-          </a:prstGeom>
-          <a:solidFill>
-            <a:srgbClr val="196B24"/>
-          </a:solidFill>
-          <a:ln>
-            <a:noFill/>
-          </a:ln>
-          <a:effectLst/>
-        </p:spPr>
-        <p:style>
-          <a:lnRef idx="1">
-            <a:schemeClr val="accent1"/>
-          </a:lnRef>
-          <a:fillRef idx="3">
-            <a:schemeClr val="accent1"/>
-          </a:fillRef>
-          <a:effectRef idx="2">
-            <a:schemeClr val="accent1"/>
-          </a:effectRef>
-          <a:fontRef idx="minor">
-            <a:schemeClr val="lt1"/>
-          </a:fontRef>
-        </p:style>
-        <p:txBody>
-          <a:bodyPr rtlCol="0" anchor="ctr"/>
-          <a:lstStyle/>
-          <a:p>
-            <a:pPr algn="ctr"/>
-          </a:p>
-        </p:txBody>
-      </p:sp>
-      <p:sp>
-        <p:nvSpPr>
-          <p:cNvPr id="17" name="TextBox 16"/>
-          <p:cNvSpPr txBox="1"/>
-          <p:nvPr/>
-        </p:nvSpPr>
-        <p:spPr>
-          <a:xfrm>
-            <a:off x="3564559" y="3163824"/>
-            <a:ext cx="2284399" cy="365760"/>
-          </a:xfrm>
-          <a:prstGeom prst="rect">
-            <a:avLst/>
-          </a:prstGeom>
-          <a:noFill/>
-        </p:spPr>
-        <p:txBody>
-          <a:bodyPr wrap="square" anchor="ctr" lIns="0" rIns="0" tIns="0" bIns="0">
-            <a:noAutofit/>
-          </a:bodyPr>
-          <a:lstStyle/>
-          <a:p>
-            <a:pPr algn="l">
-              <a:spcBef>
-                <a:spcPts val="0"/>
-              </a:spcBef>
-              <a:spcAft>
-                <a:spcPts val="200"/>
-              </a:spcAft>
-            </a:pPr>
-            <a:r>
-              <a:rPr sz="1400" b="1" i="0">
-                <a:solidFill>
-                  <a:srgbClr val="FFFFFF"/>
-                </a:solidFill>
-                <a:latin typeface="Calibri"/>
-              </a:rPr>
-              <a:t>MobilityDuck</a:t>
-            </a:r>
-          </a:p>
-        </p:txBody>
-      </p:sp>
-      <p:sp>
-        <p:nvSpPr>
-          <p:cNvPr id="18" name="TextBox 17"/>
-          <p:cNvSpPr txBox="1"/>
-          <p:nvPr/>
-        </p:nvSpPr>
-        <p:spPr>
-          <a:xfrm>
-            <a:off x="3564559" y="3703320"/>
-            <a:ext cx="2284399" cy="274320"/>
-          </a:xfrm>
-          <a:prstGeom prst="rect">
-            <a:avLst/>
-          </a:prstGeom>
-          <a:noFill/>
-        </p:spPr>
-        <p:txBody>
-          <a:bodyPr wrap="square" anchor="t" lIns="0" rIns="0" tIns="0" bIns="0">
-            <a:noAutofit/>
-          </a:bodyPr>
-          <a:lstStyle/>
-          <a:p>
-            <a:pPr algn="l">
-              <a:spcBef>
-                <a:spcPts val="0"/>
-              </a:spcBef>
-              <a:spcAft>
-                <a:spcPts val="200"/>
-              </a:spcAft>
-            </a:pPr>
-            <a:r>
-              <a:rPr sz="1200" b="1" i="0">
-                <a:solidFill>
-                  <a:srgbClr val="196B24"/>
-                </a:solidFill>
-                <a:latin typeface="Consolas"/>
-              </a:rPr>
-              <a:t>DuckDB</a:t>
-            </a:r>
-          </a:p>
-        </p:txBody>
-      </p:sp>
-      <p:sp>
-        <p:nvSpPr>
-          <p:cNvPr id="19" name="TextBox 18"/>
-          <p:cNvSpPr txBox="1"/>
-          <p:nvPr/>
-        </p:nvSpPr>
-        <p:spPr>
-          <a:xfrm>
-            <a:off x="3564559" y="4041648"/>
-            <a:ext cx="2229535" cy="914400"/>
-          </a:xfrm>
-          <a:prstGeom prst="rect">
-            <a:avLst/>
-          </a:prstGeom>
-          <a:noFill/>
-        </p:spPr>
-        <p:txBody>
-          <a:bodyPr wrap="square" anchor="t" lIns="0" rIns="0" tIns="0" bIns="0">
-            <a:noAutofit/>
-          </a:bodyPr>
-          <a:lstStyle/>
-          <a:p>
-            <a:pPr algn="l">
-              <a:spcBef>
-                <a:spcPts val="0"/>
-              </a:spcBef>
-              <a:spcAft>
-                <a:spcPts val="200"/>
-              </a:spcAft>
-            </a:pPr>
-            <a:r>
-              <a:rPr sz="1200" b="0" i="0">
-                <a:solidFill>
-                  <a:srgbClr val="1E2B36"/>
-                </a:solidFill>
-                <a:latin typeface="Calibri"/>
-              </a:rPr>
-              <a:t>Embedded, Parquet-native lakehouse queries.</a:t>
-            </a:r>
-          </a:p>
-        </p:txBody>
-      </p:sp>
-      <p:sp>
-        <p:nvSpPr>
-          <p:cNvPr id="20" name="TextBox 19"/>
-          <p:cNvSpPr txBox="1"/>
-          <p:nvPr/>
-        </p:nvSpPr>
-        <p:spPr>
-          <a:xfrm>
-            <a:off x="3564559" y="5074920"/>
-            <a:ext cx="2284399" cy="274320"/>
-          </a:xfrm>
-          <a:prstGeom prst="rect">
-            <a:avLst/>
-          </a:prstGeom>
-          <a:noFill/>
-        </p:spPr>
-        <p:txBody>
-          <a:bodyPr wrap="square" anchor="t" lIns="0" rIns="0" tIns="0" bIns="0">
-            <a:noAutofit/>
-          </a:bodyPr>
-          <a:lstStyle/>
-          <a:p>
-            <a:pPr algn="l">
-              <a:spcBef>
-                <a:spcPts val="0"/>
-              </a:spcBef>
-              <a:spcAft>
-                <a:spcPts val="200"/>
-              </a:spcAft>
-            </a:pPr>
-            <a:r>
-              <a:rPr sz="1200" b="1" i="0">
-                <a:solidFill>
-                  <a:srgbClr val="5B6B78"/>
-                </a:solidFill>
-                <a:latin typeface="Calibri"/>
-              </a:rPr>
-              <a:t>Direction</a:t>
-            </a:r>
-          </a:p>
-        </p:txBody>
-      </p:sp>
-      <p:sp>
-        <p:nvSpPr>
-          <p:cNvPr id="21" name="Rounded Rectangle 20"/>
-          <p:cNvSpPr/>
-          <p:nvPr/>
-        </p:nvSpPr>
-        <p:spPr>
-          <a:xfrm>
-            <a:off x="6233007" y="3108960"/>
-            <a:ext cx="2558719" cy="2331720"/>
-          </a:xfrm>
-          <a:prstGeom prst="roundRect">
-            <a:avLst>
-              <a:gd name="adj" fmla="val 5000"/>
-            </a:avLst>
-          </a:prstGeom>
-          <a:solidFill>
-            <a:srgbClr val="F1F5F8"/>
-          </a:solidFill>
-          <a:ln>
-            <a:noFill/>
-          </a:ln>
-          <a:effectLst/>
-        </p:spPr>
-        <p:style>
-          <a:lnRef idx="1">
-            <a:schemeClr val="accent1"/>
-          </a:lnRef>
-          <a:fillRef idx="3">
-            <a:schemeClr val="accent1"/>
-          </a:fillRef>
-          <a:effectRef idx="2">
-            <a:schemeClr val="accent1"/>
-          </a:effectRef>
-          <a:fontRef idx="minor">
-            <a:schemeClr val="lt1"/>
-          </a:fontRef>
-        </p:style>
-        <p:txBody>
-          <a:bodyPr rtlCol="0" anchor="ctr"/>
-          <a:lstStyle/>
-          <a:p>
-            <a:pPr algn="ctr"/>
-          </a:p>
-        </p:txBody>
-      </p:sp>
-      <p:sp>
-        <p:nvSpPr>
-          <p:cNvPr id="22" name="Rounded Rectangle 21"/>
-          <p:cNvSpPr/>
-          <p:nvPr/>
-        </p:nvSpPr>
-        <p:spPr>
-          <a:xfrm>
-            <a:off x="6233007" y="3108960"/>
-            <a:ext cx="2558719" cy="475488"/>
-          </a:xfrm>
-          <a:prstGeom prst="roundRect">
-            <a:avLst>
-              <a:gd name="adj" fmla="val 8000"/>
-            </a:avLst>
           </a:prstGeom>
           <a:solidFill>
             <a:srgbClr val="E97132"/>
@@ -25758,56 +27144,14 @@
       </p:sp>
       <p:sp>
         <p:nvSpPr>
-          <p:cNvPr id="23" name="TextBox 22"/>
+          <p:cNvPr id="27" name="TextBox 26"/>
           <p:cNvSpPr txBox="1"/>
           <p:nvPr/>
         </p:nvSpPr>
         <p:spPr>
           <a:xfrm>
-            <a:off x="6397599" y="3163824"/>
-            <a:ext cx="2284399" cy="365760"/>
-          </a:xfrm>
-          <a:prstGeom prst="rect">
-            <a:avLst/>
-          </a:prstGeom>
-          <a:noFill/>
-        </p:spPr>
-        <p:txBody>
-          <a:bodyPr wrap="square" anchor="ctr" lIns="0" rIns="0" tIns="0" bIns="0">
-            <a:noAutofit/>
-          </a:bodyPr>
-          <a:lstStyle/>
-          <a:p>
-            <a:pPr algn="l">
-              <a:spcBef>
-                <a:spcPts val="0"/>
-              </a:spcBef>
-              <a:spcAft>
-                <a:spcPts val="200"/>
-              </a:spcAft>
-            </a:pPr>
-            <a:r>
-              <a:rPr sz="1400" b="1" i="0">
-                <a:solidFill>
-                  <a:srgbClr val="FFFFFF"/>
-                </a:solidFill>
-                <a:latin typeface="Calibri"/>
-              </a:rPr>
-              <a:t>MobilitySpark</a:t>
-            </a:r>
-          </a:p>
-        </p:txBody>
-      </p:sp>
-      <p:sp>
-        <p:nvSpPr>
-          <p:cNvPr id="24" name="TextBox 23"/>
-          <p:cNvSpPr txBox="1"/>
-          <p:nvPr/>
-        </p:nvSpPr>
-        <p:spPr>
-          <a:xfrm>
-            <a:off x="6397599" y="3703320"/>
-            <a:ext cx="2284399" cy="274320"/>
+            <a:off x="8377732" y="4032504"/>
+            <a:ext cx="3137306" cy="274320"/>
           </a:xfrm>
           <a:prstGeom prst="rect">
             <a:avLst/>
@@ -25833,23 +27177,23 @@
                 <a:solidFill>
                   <a:srgbClr val="E97132"/>
                 </a:solidFill>
-                <a:latin typeface="Consolas"/>
-              </a:rPr>
-              <a:t>Apache Spark</a:t>
-            </a:r>
-          </a:p>
-        </p:txBody>
-      </p:sp>
-      <p:sp>
-        <p:nvSpPr>
-          <p:cNvPr id="25" name="TextBox 24"/>
+                <a:latin typeface="Calibri"/>
+              </a:rPr>
+              <a:t>CONFORMANCE &amp; SCALE</a:t>
+            </a:r>
+          </a:p>
+        </p:txBody>
+      </p:sp>
+      <p:sp>
+        <p:nvSpPr>
+          <p:cNvPr id="28" name="TextBox 27"/>
           <p:cNvSpPr txBox="1"/>
           <p:nvPr/>
         </p:nvSpPr>
         <p:spPr>
           <a:xfrm>
-            <a:off x="6397599" y="4041648"/>
-            <a:ext cx="2229535" cy="914400"/>
+            <a:off x="8377732" y="4389120"/>
+            <a:ext cx="3045866" cy="1463040"/>
           </a:xfrm>
           <a:prstGeom prst="rect">
             <a:avLst/>
@@ -25857,378 +27201,127 @@
           <a:noFill/>
         </p:spPr>
         <p:txBody>
-          <a:bodyPr wrap="square" anchor="t" lIns="0" rIns="0" tIns="0" bIns="0">
+          <a:bodyPr wrap="square" lIns="0" rIns="0" tIns="0" bIns="0">
             <a:noAutofit/>
           </a:bodyPr>
           <a:lstStyle/>
           <a:p>
-            <a:pPr algn="l">
-              <a:spcBef>
-                <a:spcPts val="0"/>
-              </a:spcBef>
-              <a:spcAft>
-                <a:spcPts val="200"/>
-              </a:spcAft>
-            </a:pPr>
-            <a:r>
-              <a:rPr sz="1200" b="0" i="0">
+            <a:pPr>
+              <a:lnSpc>
+                <a:spcPct val="100000"/>
+              </a:lnSpc>
+              <a:spcAft>
+                <a:spcPts val="300"/>
+              </a:spcAft>
+            </a:pPr>
+            <a:r>
+              <a:rPr sz="1200" b="1">
+                <a:solidFill>
+                  <a:srgbClr val="E97132"/>
+                </a:solidFill>
+                <a:latin typeface="Calibri"/>
+              </a:rPr>
+              <a:t>✓ </a:t>
+            </a:r>
+            <a:r>
+              <a:rPr sz="1200">
                 <a:solidFill>
                   <a:srgbClr val="1E2B36"/>
                 </a:solidFill>
                 <a:latin typeface="Calibri"/>
               </a:rPr>
-              <a:t>Distributed batch over very large histories.</a:t>
-            </a:r>
-          </a:p>
-        </p:txBody>
-      </p:sp>
-      <p:sp>
-        <p:nvSpPr>
-          <p:cNvPr id="26" name="TextBox 25"/>
-          <p:cNvSpPr txBox="1"/>
-          <p:nvPr/>
-        </p:nvSpPr>
-        <p:spPr>
-          <a:xfrm>
-            <a:off x="6397599" y="5074920"/>
-            <a:ext cx="2284399" cy="274320"/>
-          </a:xfrm>
-          <a:prstGeom prst="rect">
-            <a:avLst/>
-          </a:prstGeom>
-          <a:noFill/>
-        </p:spPr>
-        <p:txBody>
-          <a:bodyPr wrap="square" anchor="t" lIns="0" rIns="0" tIns="0" bIns="0">
-            <a:noAutofit/>
-          </a:bodyPr>
-          <a:lstStyle/>
-          <a:p>
-            <a:pPr algn="l">
-              <a:spcBef>
-                <a:spcPts val="0"/>
-              </a:spcBef>
-              <a:spcAft>
-                <a:spcPts val="200"/>
-              </a:spcAft>
-            </a:pPr>
-            <a:r>
-              <a:rPr sz="1200" b="1" i="0">
-                <a:solidFill>
-                  <a:srgbClr val="5B6B78"/>
-                </a:solidFill>
-                <a:latin typeface="Calibri"/>
-              </a:rPr>
-              <a:t>Direction</a:t>
-            </a:r>
-          </a:p>
-        </p:txBody>
-      </p:sp>
-      <p:sp>
-        <p:nvSpPr>
-          <p:cNvPr id="27" name="Rounded Rectangle 26"/>
-          <p:cNvSpPr/>
-          <p:nvPr/>
-        </p:nvSpPr>
-        <p:spPr>
-          <a:xfrm>
-            <a:off x="9066047" y="3108960"/>
-            <a:ext cx="2558719" cy="2331720"/>
-          </a:xfrm>
-          <a:prstGeom prst="roundRect">
-            <a:avLst>
-              <a:gd name="adj" fmla="val 5000"/>
-            </a:avLst>
-          </a:prstGeom>
-          <a:solidFill>
-            <a:srgbClr val="F1F5F8"/>
-          </a:solidFill>
-          <a:ln>
-            <a:noFill/>
-          </a:ln>
-          <a:effectLst/>
-        </p:spPr>
-        <p:style>
-          <a:lnRef idx="1">
-            <a:schemeClr val="accent1"/>
-          </a:lnRef>
-          <a:fillRef idx="3">
-            <a:schemeClr val="accent1"/>
-          </a:fillRef>
-          <a:effectRef idx="2">
-            <a:schemeClr val="accent1"/>
-          </a:effectRef>
-          <a:fontRef idx="minor">
-            <a:schemeClr val="lt1"/>
-          </a:fontRef>
-        </p:style>
-        <p:txBody>
-          <a:bodyPr rtlCol="0" anchor="ctr"/>
-          <a:lstStyle/>
-          <a:p>
-            <a:pPr algn="ctr"/>
-          </a:p>
-        </p:txBody>
-      </p:sp>
-      <p:sp>
-        <p:nvSpPr>
-          <p:cNvPr id="28" name="Rounded Rectangle 27"/>
-          <p:cNvSpPr/>
-          <p:nvPr/>
-        </p:nvSpPr>
-        <p:spPr>
-          <a:xfrm>
-            <a:off x="9066047" y="3108960"/>
-            <a:ext cx="2558719" cy="475488"/>
-          </a:xfrm>
-          <a:prstGeom prst="roundRect">
-            <a:avLst>
-              <a:gd name="adj" fmla="val 8000"/>
-            </a:avLst>
-          </a:prstGeom>
-          <a:solidFill>
-            <a:srgbClr val="A02B93"/>
-          </a:solidFill>
-          <a:ln>
-            <a:noFill/>
-          </a:ln>
-          <a:effectLst/>
-        </p:spPr>
-        <p:style>
-          <a:lnRef idx="1">
-            <a:schemeClr val="accent1"/>
-          </a:lnRef>
-          <a:fillRef idx="3">
-            <a:schemeClr val="accent1"/>
-          </a:fillRef>
-          <a:effectRef idx="2">
-            <a:schemeClr val="accent1"/>
-          </a:effectRef>
-          <a:fontRef idx="minor">
-            <a:schemeClr val="lt1"/>
-          </a:fontRef>
-        </p:style>
-        <p:txBody>
-          <a:bodyPr rtlCol="0" anchor="ctr"/>
-          <a:lstStyle/>
-          <a:p>
-            <a:pPr algn="ctr"/>
-          </a:p>
-        </p:txBody>
-      </p:sp>
-      <p:sp>
-        <p:nvSpPr>
-          <p:cNvPr id="29" name="TextBox 28"/>
-          <p:cNvSpPr txBox="1"/>
-          <p:nvPr/>
-        </p:nvSpPr>
-        <p:spPr>
-          <a:xfrm>
-            <a:off x="9230639" y="3163824"/>
-            <a:ext cx="2284399" cy="365760"/>
-          </a:xfrm>
-          <a:prstGeom prst="rect">
-            <a:avLst/>
-          </a:prstGeom>
-          <a:noFill/>
-        </p:spPr>
-        <p:txBody>
-          <a:bodyPr wrap="square" anchor="ctr" lIns="0" rIns="0" tIns="0" bIns="0">
-            <a:noAutofit/>
-          </a:bodyPr>
-          <a:lstStyle/>
-          <a:p>
-            <a:pPr algn="l">
-              <a:spcBef>
-                <a:spcPts val="0"/>
-              </a:spcBef>
-              <a:spcAft>
-                <a:spcPts val="200"/>
-              </a:spcAft>
-            </a:pPr>
-            <a:r>
-              <a:rPr sz="1400" b="1" i="0">
-                <a:solidFill>
-                  <a:srgbClr val="FFFFFF"/>
-                </a:solidFill>
-                <a:latin typeface="Calibri"/>
-              </a:rPr>
-              <a:t>MobilityFlink</a:t>
-            </a:r>
-          </a:p>
-        </p:txBody>
-      </p:sp>
-      <p:sp>
-        <p:nvSpPr>
-          <p:cNvPr id="30" name="TextBox 29"/>
-          <p:cNvSpPr txBox="1"/>
-          <p:nvPr/>
-        </p:nvSpPr>
-        <p:spPr>
-          <a:xfrm>
-            <a:off x="9230639" y="3703320"/>
-            <a:ext cx="2284399" cy="274320"/>
-          </a:xfrm>
-          <a:prstGeom prst="rect">
-            <a:avLst/>
-          </a:prstGeom>
-          <a:noFill/>
-        </p:spPr>
-        <p:txBody>
-          <a:bodyPr wrap="square" anchor="t" lIns="0" rIns="0" tIns="0" bIns="0">
-            <a:noAutofit/>
-          </a:bodyPr>
-          <a:lstStyle/>
-          <a:p>
-            <a:pPr algn="l">
-              <a:spcBef>
-                <a:spcPts val="0"/>
-              </a:spcBef>
-              <a:spcAft>
-                <a:spcPts val="200"/>
-              </a:spcAft>
-            </a:pPr>
-            <a:r>
-              <a:rPr sz="1200" b="1" i="0">
-                <a:solidFill>
-                  <a:srgbClr val="A02B93"/>
-                </a:solidFill>
-                <a:latin typeface="Consolas"/>
-              </a:rPr>
-              <a:t>Apache Flink</a:t>
-            </a:r>
-          </a:p>
-        </p:txBody>
-      </p:sp>
-      <p:sp>
-        <p:nvSpPr>
-          <p:cNvPr id="31" name="TextBox 30"/>
-          <p:cNvSpPr txBox="1"/>
-          <p:nvPr/>
-        </p:nvSpPr>
-        <p:spPr>
-          <a:xfrm>
-            <a:off x="9230639" y="4041648"/>
-            <a:ext cx="2229535" cy="914400"/>
-          </a:xfrm>
-          <a:prstGeom prst="rect">
-            <a:avLst/>
-          </a:prstGeom>
-          <a:noFill/>
-        </p:spPr>
-        <p:txBody>
-          <a:bodyPr wrap="square" anchor="t" lIns="0" rIns="0" tIns="0" bIns="0">
-            <a:noAutofit/>
-          </a:bodyPr>
-          <a:lstStyle/>
-          <a:p>
-            <a:pPr algn="l">
-              <a:spcBef>
-                <a:spcPts val="0"/>
-              </a:spcBef>
-              <a:spcAft>
-                <a:spcPts val="200"/>
-              </a:spcAft>
-            </a:pPr>
-            <a:r>
-              <a:rPr sz="1200" b="0" i="0">
+              <a:t>5 conformance classes</a:t>
+            </a:r>
+          </a:p>
+          <a:p>
+            <a:pPr>
+              <a:lnSpc>
+                <a:spcPct val="100000"/>
+              </a:lnSpc>
+              <a:spcAft>
+                <a:spcPts val="300"/>
+              </a:spcAft>
+            </a:pPr>
+            <a:r>
+              <a:rPr sz="1200" b="1">
+                <a:solidFill>
+                  <a:srgbClr val="E97132"/>
+                </a:solidFill>
+                <a:latin typeface="Calibri"/>
+              </a:rPr>
+              <a:t>✓ </a:t>
+            </a:r>
+            <a:r>
+              <a:rPr sz="1200">
                 <a:solidFill>
                   <a:srgbClr val="1E2B36"/>
                 </a:solidFill>
                 <a:latin typeface="Calibri"/>
               </a:rPr>
-              <a:t>Streaming, real-time moving features.</a:t>
-            </a:r>
-          </a:p>
-        </p:txBody>
-      </p:sp>
-      <p:sp>
-        <p:nvSpPr>
-          <p:cNvPr id="32" name="TextBox 31"/>
-          <p:cNvSpPr txBox="1"/>
-          <p:nvPr/>
-        </p:nvSpPr>
-        <p:spPr>
-          <a:xfrm>
-            <a:off x="9230639" y="5074920"/>
-            <a:ext cx="2284399" cy="274320"/>
-          </a:xfrm>
-          <a:prstGeom prst="rect">
-            <a:avLst/>
-          </a:prstGeom>
-          <a:noFill/>
-        </p:spPr>
-        <p:txBody>
-          <a:bodyPr wrap="square" anchor="t" lIns="0" rIns="0" tIns="0" bIns="0">
-            <a:noAutofit/>
-          </a:bodyPr>
-          <a:lstStyle/>
-          <a:p>
-            <a:pPr algn="l">
-              <a:spcBef>
-                <a:spcPts val="0"/>
-              </a:spcBef>
-              <a:spcAft>
-                <a:spcPts val="200"/>
-              </a:spcAft>
-            </a:pPr>
-            <a:r>
-              <a:rPr sz="1200" b="1" i="0">
-                <a:solidFill>
-                  <a:srgbClr val="5B6B78"/>
-                </a:solidFill>
-                <a:latin typeface="Calibri"/>
-              </a:rPr>
-              <a:t>Direction</a:t>
-            </a:r>
-          </a:p>
-        </p:txBody>
-      </p:sp>
-      <p:sp>
-        <p:nvSpPr>
-          <p:cNvPr id="33" name="TextBox 32"/>
-          <p:cNvSpPr txBox="1"/>
-          <p:nvPr/>
-        </p:nvSpPr>
-        <p:spPr>
-          <a:xfrm>
-            <a:off x="566928" y="5669280"/>
-            <a:ext cx="11057839" cy="640080"/>
-          </a:xfrm>
-          <a:prstGeom prst="rect">
-            <a:avLst/>
-          </a:prstGeom>
-          <a:noFill/>
-        </p:spPr>
-        <p:txBody>
-          <a:bodyPr wrap="square" anchor="t" lIns="0" rIns="0" tIns="0" bIns="0">
-            <a:noAutofit/>
-          </a:bodyPr>
-          <a:lstStyle/>
-          <a:p>
-            <a:pPr algn="ctr">
-              <a:spcBef>
-                <a:spcPts val="0"/>
-              </a:spcBef>
-              <a:spcAft>
-                <a:spcPts val="200"/>
-              </a:spcAft>
-            </a:pPr>
-            <a:r>
-              <a:rPr sz="1200" b="0" i="1">
-                <a:solidFill>
-                  <a:srgbClr val="5B6B78"/>
-                </a:solidFill>
-                <a:latin typeface="Calibri"/>
-              </a:rPr>
-              <a:t>MEOS types and the MF-JSON / WKB wire format are shared across the ecosystem, so the same tier fronts a transactional database today and the lakehouse and streaming engines as they mature.</a:t>
-            </a:r>
-          </a:p>
-        </p:txBody>
-      </p:sp>
-      <p:sp>
-        <p:nvSpPr>
-          <p:cNvPr id="34" name="Rectangle 33"/>
+              <a:t>OpenAPI at /api</a:t>
+            </a:r>
+          </a:p>
+          <a:p>
+            <a:pPr>
+              <a:lnSpc>
+                <a:spcPct val="100000"/>
+              </a:lnSpc>
+              <a:spcAft>
+                <a:spcPts val="300"/>
+              </a:spcAft>
+            </a:pPr>
+            <a:r>
+              <a:rPr sz="1200" b="1">
+                <a:solidFill>
+                  <a:srgbClr val="E97132"/>
+                </a:solidFill>
+                <a:latin typeface="Calibri"/>
+              </a:rPr>
+              <a:t>✓ </a:t>
+            </a:r>
+            <a:r>
+              <a:rPr sz="1200">
+                <a:solidFill>
+                  <a:srgbClr val="1E2B36"/>
+                </a:solidFill>
+                <a:latin typeface="Calibri"/>
+              </a:rPr>
+              <a:t>streaming + keyset</a:t>
+            </a:r>
+          </a:p>
+          <a:p>
+            <a:pPr>
+              <a:lnSpc>
+                <a:spcPct val="100000"/>
+              </a:lnSpc>
+              <a:spcAft>
+                <a:spcPts val="300"/>
+              </a:spcAft>
+            </a:pPr>
+            <a:r>
+              <a:rPr sz="1200" b="1">
+                <a:solidFill>
+                  <a:srgbClr val="E97132"/>
+                </a:solidFill>
+                <a:latin typeface="Calibri"/>
+              </a:rPr>
+              <a:t>✓ </a:t>
+            </a:r>
+            <a:r>
+              <a:rPr sz="1200">
+                <a:solidFill>
+                  <a:srgbClr val="1E2B36"/>
+                </a:solidFill>
+                <a:latin typeface="Calibri"/>
+              </a:rPr>
+              <a:t>index-using filters</a:t>
+            </a:r>
+          </a:p>
+        </p:txBody>
+      </p:sp>
+      <p:sp>
+        <p:nvSpPr>
+          <p:cNvPr id="29" name="Rectangle 28"/>
           <p:cNvSpPr/>
           <p:nvPr/>
         </p:nvSpPr>
@@ -26272,7 +27365,7 @@
       </p:sp>
       <p:sp>
         <p:nvSpPr>
-          <p:cNvPr id="35" name="TextBox 34"/>
+          <p:cNvPr id="30" name="TextBox 29"/>
           <p:cNvSpPr txBox="1"/>
           <p:nvPr/>
         </p:nvSpPr>
@@ -26314,7 +27407,7 @@
       </p:sp>
       <p:sp>
         <p:nvSpPr>
-          <p:cNvPr id="36" name="TextBox 35"/>
+          <p:cNvPr id="31" name="TextBox 30"/>
           <p:cNvSpPr txBox="1"/>
           <p:nvPr/>
         </p:nvSpPr>
@@ -26363,6 +27456,228 @@
 </file>
 
 <file path=ppt/slides/slide25.xml><?xml version="1.0" encoding="utf-8"?>
+<p:sld xmlns:a="http://schemas.openxmlformats.org/drawingml/2006/main" xmlns:p="http://schemas.openxmlformats.org/presentationml/2006/main" xmlns:r="http://schemas.openxmlformats.org/officeDocument/2006/relationships">
+  <p:cSld>
+    <p:bg>
+      <p:bgPr>
+        <a:solidFill>
+          <a:srgbClr val="0E2841"/>
+        </a:solidFill>
+        <a:effectLst/>
+      </p:bgPr>
+    </p:bg>
+    <p:spTree>
+      <p:nvGrpSpPr>
+        <p:cNvPr id="1" name=""/>
+        <p:cNvGrpSpPr/>
+        <p:nvPr/>
+      </p:nvGrpSpPr>
+      <p:grpSpPr/>
+      <p:sp>
+        <p:nvSpPr>
+          <p:cNvPr id="2" name="Rectangle 1"/>
+          <p:cNvSpPr/>
+          <p:nvPr/>
+        </p:nvSpPr>
+        <p:spPr>
+          <a:xfrm>
+            <a:off x="0" y="0"/>
+            <a:ext cx="12191695" cy="146304"/>
+          </a:xfrm>
+          <a:prstGeom prst="rect">
+            <a:avLst/>
+          </a:prstGeom>
+          <a:solidFill>
+            <a:srgbClr val="156082"/>
+          </a:solidFill>
+          <a:ln>
+            <a:noFill/>
+          </a:ln>
+          <a:effectLst/>
+        </p:spPr>
+        <p:style>
+          <a:lnRef idx="1">
+            <a:schemeClr val="accent1"/>
+          </a:lnRef>
+          <a:fillRef idx="3">
+            <a:schemeClr val="accent1"/>
+          </a:fillRef>
+          <a:effectRef idx="2">
+            <a:schemeClr val="accent1"/>
+          </a:effectRef>
+          <a:fontRef idx="minor">
+            <a:schemeClr val="lt1"/>
+          </a:fontRef>
+        </p:style>
+        <p:txBody>
+          <a:bodyPr rtlCol="0" anchor="ctr"/>
+          <a:lstStyle/>
+          <a:p>
+            <a:pPr algn="ctr"/>
+          </a:p>
+        </p:txBody>
+      </p:sp>
+      <p:sp>
+        <p:nvSpPr>
+          <p:cNvPr id="3" name="Rectangle 2"/>
+          <p:cNvSpPr/>
+          <p:nvPr/>
+        </p:nvSpPr>
+        <p:spPr>
+          <a:xfrm>
+            <a:off x="0" y="6711696"/>
+            <a:ext cx="12191695" cy="146304"/>
+          </a:xfrm>
+          <a:prstGeom prst="rect">
+            <a:avLst/>
+          </a:prstGeom>
+          <a:solidFill>
+            <a:srgbClr val="E97132"/>
+          </a:solidFill>
+          <a:ln>
+            <a:noFill/>
+          </a:ln>
+          <a:effectLst/>
+        </p:spPr>
+        <p:style>
+          <a:lnRef idx="1">
+            <a:schemeClr val="accent1"/>
+          </a:lnRef>
+          <a:fillRef idx="3">
+            <a:schemeClr val="accent1"/>
+          </a:fillRef>
+          <a:effectRef idx="2">
+            <a:schemeClr val="accent1"/>
+          </a:effectRef>
+          <a:fontRef idx="minor">
+            <a:schemeClr val="lt1"/>
+          </a:fontRef>
+        </p:style>
+        <p:txBody>
+          <a:bodyPr rtlCol="0" anchor="ctr"/>
+          <a:lstStyle/>
+          <a:p>
+            <a:pPr algn="ctr"/>
+          </a:p>
+        </p:txBody>
+      </p:sp>
+      <p:sp>
+        <p:nvSpPr>
+          <p:cNvPr id="4" name="TextBox 3"/>
+          <p:cNvSpPr txBox="1"/>
+          <p:nvPr/>
+        </p:nvSpPr>
+        <p:spPr>
+          <a:xfrm>
+            <a:off x="566928" y="2468880"/>
+            <a:ext cx="10058400" cy="914400"/>
+          </a:xfrm>
+          <a:prstGeom prst="rect">
+            <a:avLst/>
+          </a:prstGeom>
+          <a:noFill/>
+        </p:spPr>
+        <p:txBody>
+          <a:bodyPr wrap="square" anchor="t" lIns="0" rIns="0" tIns="0" bIns="0">
+            <a:noAutofit/>
+          </a:bodyPr>
+          <a:lstStyle/>
+          <a:p>
+            <a:pPr algn="l">
+              <a:spcBef>
+                <a:spcPts val="0"/>
+              </a:spcBef>
+              <a:spcAft>
+                <a:spcPts val="200"/>
+              </a:spcAft>
+            </a:pPr>
+            <a:r>
+              <a:rPr sz="4400" b="1" i="0">
+                <a:solidFill>
+                  <a:srgbClr val="FFFFFF"/>
+                </a:solidFill>
+                <a:latin typeface="Calibri Light"/>
+              </a:rPr>
+              <a:t>Thanks for Listening</a:t>
+            </a:r>
+          </a:p>
+        </p:txBody>
+      </p:sp>
+      <p:sp>
+        <p:nvSpPr>
+          <p:cNvPr id="5" name="TextBox 4"/>
+          <p:cNvSpPr txBox="1"/>
+          <p:nvPr/>
+        </p:nvSpPr>
+        <p:spPr>
+          <a:xfrm>
+            <a:off x="566928" y="3566160"/>
+            <a:ext cx="10058400" cy="548640"/>
+          </a:xfrm>
+          <a:prstGeom prst="rect">
+            <a:avLst/>
+          </a:prstGeom>
+          <a:noFill/>
+        </p:spPr>
+        <p:txBody>
+          <a:bodyPr wrap="square" anchor="t" lIns="0" rIns="0" tIns="0" bIns="0">
+            <a:noAutofit/>
+          </a:bodyPr>
+          <a:lstStyle/>
+          <a:p>
+            <a:pPr algn="l">
+              <a:spcBef>
+                <a:spcPts val="0"/>
+              </a:spcBef>
+              <a:spcAft>
+                <a:spcPts val="200"/>
+              </a:spcAft>
+            </a:pPr>
+            <a:r>
+              <a:rPr sz="2400" b="1" i="0">
+                <a:solidFill>
+                  <a:srgbClr val="E97132"/>
+                </a:solidFill>
+                <a:latin typeface="Calibri"/>
+              </a:rPr>
+              <a:t>Questions?</a:t>
+            </a:r>
+          </a:p>
+        </p:txBody>
+      </p:sp>
+      <p:pic>
+        <p:nvPicPr>
+          <p:cNvPr id="6" name="Picture 5" descr="mobilitydb-logo.png"/>
+          <p:cNvPicPr>
+            <a:picLocks noChangeAspect="1"/>
+          </p:cNvPicPr>
+          <p:nvPr/>
+        </p:nvPicPr>
+        <p:blipFill>
+          <a:blip r:embed="rId2"/>
+          <a:stretch>
+            <a:fillRect/>
+          </a:stretch>
+        </p:blipFill>
+        <p:spPr>
+          <a:xfrm>
+            <a:off x="10070970" y="4297680"/>
+            <a:ext cx="1633349" cy="1737360"/>
+          </a:xfrm>
+          <a:prstGeom prst="rect">
+            <a:avLst/>
+          </a:prstGeom>
+        </p:spPr>
+      </p:pic>
+    </p:spTree>
+  </p:cSld>
+  <p:clrMapOvr>
+    <a:masterClrMapping/>
+  </p:clrMapOvr>
+</p:sld>
+</file>
+
+<file path=ppt/slides/slide26.xml><?xml version="1.0" encoding="utf-8"?>
 <p:sld xmlns:a="http://schemas.openxmlformats.org/drawingml/2006/main" xmlns:p="http://schemas.openxmlformats.org/presentationml/2006/main" xmlns:r="http://schemas.openxmlformats.org/officeDocument/2006/relationships">
   <p:cSld>
     <p:bg>
@@ -26417,7 +27732,7 @@
                 </a:solidFill>
                 <a:latin typeface="Calibri"/>
               </a:rPr>
-              <a:t>RECAP</a:t>
+              <a:t>REFERENCES</a:t>
             </a:r>
           </a:p>
         </p:txBody>
@@ -26459,7 +27774,7 @@
                 </a:solidFill>
                 <a:latin typeface="Calibri Light"/>
               </a:rPr>
-              <a:t>The Standard Surface, Recapped</a:t>
+              <a:t>Find Out More</a:t>
             </a:r>
           </a:p>
         </p:txBody>
@@ -26510,60 +27825,14 @@
       </p:sp>
       <p:sp>
         <p:nvSpPr>
-          <p:cNvPr id="5" name="Rounded Rectangle 4"/>
+          <p:cNvPr id="5" name="Rectangle 4"/>
           <p:cNvSpPr/>
           <p:nvPr/>
         </p:nvSpPr>
         <p:spPr>
           <a:xfrm>
-            <a:off x="566928" y="1645920"/>
-            <a:ext cx="3503066" cy="2057400"/>
-          </a:xfrm>
-          <a:prstGeom prst="roundRect">
-            <a:avLst>
-              <a:gd name="adj" fmla="val 4000"/>
-            </a:avLst>
-          </a:prstGeom>
-          <a:solidFill>
-            <a:srgbClr val="F1F5F8"/>
-          </a:solidFill>
-          <a:ln>
-            <a:noFill/>
-          </a:ln>
-          <a:effectLst/>
-        </p:spPr>
-        <p:style>
-          <a:lnRef idx="1">
-            <a:schemeClr val="accent1"/>
-          </a:lnRef>
-          <a:fillRef idx="3">
-            <a:schemeClr val="accent1"/>
-          </a:fillRef>
-          <a:effectRef idx="2">
-            <a:schemeClr val="accent1"/>
-          </a:effectRef>
-          <a:fontRef idx="minor">
-            <a:schemeClr val="lt1"/>
-          </a:fontRef>
-        </p:style>
-        <p:txBody>
-          <a:bodyPr rtlCol="0" anchor="ctr"/>
-          <a:lstStyle/>
-          <a:p>
-            <a:pPr algn="ctr"/>
-          </a:p>
-        </p:txBody>
-      </p:sp>
-      <p:sp>
-        <p:nvSpPr>
-          <p:cNvPr id="6" name="Rectangle 5"/>
-          <p:cNvSpPr/>
-          <p:nvPr/>
-        </p:nvSpPr>
-        <p:spPr>
-          <a:xfrm>
-            <a:off x="566928" y="1645920"/>
-            <a:ext cx="82296" cy="2057400"/>
+            <a:off x="566928" y="1993392"/>
+            <a:ext cx="164592" cy="164592"/>
           </a:xfrm>
           <a:prstGeom prst="rect">
             <a:avLst/>
@@ -26600,14 +27869,14 @@
       </p:sp>
       <p:sp>
         <p:nvSpPr>
-          <p:cNvPr id="7" name="TextBox 6"/>
+          <p:cNvPr id="6" name="TextBox 5"/>
           <p:cNvSpPr txBox="1"/>
           <p:nvPr/>
         </p:nvSpPr>
         <p:spPr>
           <a:xfrm>
-            <a:off x="822960" y="1792224"/>
-            <a:ext cx="3137306" cy="274320"/>
+            <a:off x="932688" y="1920240"/>
+            <a:ext cx="8686800" cy="320040"/>
           </a:xfrm>
           <a:prstGeom prst="rect">
             <a:avLst/>
@@ -26629,27 +27898,27 @@
               </a:spcAft>
             </a:pPr>
             <a:r>
-              <a:rPr sz="1200" b="1" i="0">
-                <a:solidFill>
-                  <a:srgbClr val="156082"/>
-                </a:solidFill>
-                <a:latin typeface="Calibri"/>
-              </a:rPr>
-              <a:t>COLLECTIONS</a:t>
-            </a:r>
-          </a:p>
-        </p:txBody>
-      </p:sp>
-      <p:sp>
-        <p:nvSpPr>
-          <p:cNvPr id="8" name="TextBox 7"/>
+              <a:rPr sz="1400" b="1" i="0">
+                <a:solidFill>
+                  <a:srgbClr val="0E2841"/>
+                </a:solidFill>
+                <a:latin typeface="Calibri"/>
+              </a:rPr>
+              <a:t>OGC API – Moving Features – Part 1: Core</a:t>
+            </a:r>
+          </a:p>
+        </p:txBody>
+      </p:sp>
+      <p:sp>
+        <p:nvSpPr>
+          <p:cNvPr id="7" name="TextBox 6"/>
           <p:cNvSpPr txBox="1"/>
           <p:nvPr/>
         </p:nvSpPr>
         <p:spPr>
           <a:xfrm>
-            <a:off x="822960" y="2148840"/>
-            <a:ext cx="3045866" cy="1463040"/>
+            <a:off x="932688" y="2231136"/>
+            <a:ext cx="10515600" cy="292608"/>
           </a:xfrm>
           <a:prstGeom prst="rect">
             <a:avLst/>
@@ -26657,925 +27926,35 @@
           <a:noFill/>
         </p:spPr>
         <p:txBody>
-          <a:bodyPr wrap="square" lIns="0" rIns="0" tIns="0" bIns="0">
+          <a:bodyPr wrap="none" lIns="0" rIns="0" tIns="0" bIns="0">
             <a:noAutofit/>
           </a:bodyPr>
           <a:lstStyle/>
           <a:p>
-            <a:pPr>
-              <a:lnSpc>
-                <a:spcPct val="100000"/>
-              </a:lnSpc>
-              <a:spcAft>
-                <a:spcPts val="300"/>
-              </a:spcAft>
-            </a:pPr>
-            <a:r>
-              <a:rPr sz="1200" b="1">
+            <a:pPr algn="l"/>
+            <a:r>
+              <a:rPr sz="1200" u="none">
                 <a:solidFill>
                   <a:srgbClr val="156082"/>
                 </a:solidFill>
-                <a:latin typeface="Calibri"/>
-              </a:rPr>
-              <a:t>✓ </a:t>
-            </a:r>
-            <a:r>
-              <a:rPr sz="1200">
-                <a:solidFill>
-                  <a:srgbClr val="1E2B36"/>
-                </a:solidFill>
-                <a:latin typeface="Calibri"/>
-              </a:rPr>
-              <a:t>list (GET)</a:t>
-            </a:r>
-          </a:p>
-          <a:p>
-            <a:pPr>
-              <a:lnSpc>
-                <a:spcPct val="100000"/>
-              </a:lnSpc>
-              <a:spcAft>
-                <a:spcPts val="300"/>
-              </a:spcAft>
-            </a:pPr>
-            <a:r>
-              <a:rPr sz="1200" b="1">
-                <a:solidFill>
-                  <a:srgbClr val="156082"/>
-                </a:solidFill>
-                <a:latin typeface="Calibri"/>
-              </a:rPr>
-              <a:t>✓ </a:t>
-            </a:r>
-            <a:r>
-              <a:rPr sz="1200">
-                <a:solidFill>
-                  <a:srgbClr val="1E2B36"/>
-                </a:solidFill>
-                <a:latin typeface="Calibri"/>
-              </a:rPr>
-              <a:t>retrieve (GET)</a:t>
-            </a:r>
-          </a:p>
-          <a:p>
-            <a:pPr>
-              <a:lnSpc>
-                <a:spcPct val="100000"/>
-              </a:lnSpc>
-              <a:spcAft>
-                <a:spcPts val="300"/>
-              </a:spcAft>
-            </a:pPr>
-            <a:r>
-              <a:rPr sz="1200" b="1">
-                <a:solidFill>
-                  <a:srgbClr val="156082"/>
-                </a:solidFill>
-                <a:latin typeface="Calibri"/>
-              </a:rPr>
-              <a:t>✓ </a:t>
-            </a:r>
-            <a:r>
-              <a:rPr sz="1200">
-                <a:solidFill>
-                  <a:srgbClr val="1E2B36"/>
-                </a:solidFill>
-                <a:latin typeface="Calibri"/>
-              </a:rPr>
-              <a:t>registry-backed</a:t>
-            </a:r>
-          </a:p>
-        </p:txBody>
-      </p:sp>
-      <p:sp>
-        <p:nvSpPr>
-          <p:cNvPr id="9" name="Rounded Rectangle 8"/>
+                <a:latin typeface="Consolas"/>
+                <a:hlinkClick r:id="rId2"/>
+              </a:rPr>
+              <a:t>https://docs.ogc.org/is/22-003r3/22-003r3.html</a:t>
+            </a:r>
+          </a:p>
+        </p:txBody>
+      </p:sp>
+      <p:sp>
+        <p:nvSpPr>
+          <p:cNvPr id="8" name="Rectangle 7"/>
           <p:cNvSpPr/>
           <p:nvPr/>
         </p:nvSpPr>
         <p:spPr>
           <a:xfrm>
-            <a:off x="4344314" y="1645920"/>
-            <a:ext cx="3503066" cy="2057400"/>
-          </a:xfrm>
-          <a:prstGeom prst="roundRect">
-            <a:avLst>
-              <a:gd name="adj" fmla="val 4000"/>
-            </a:avLst>
-          </a:prstGeom>
-          <a:solidFill>
-            <a:srgbClr val="F1F5F8"/>
-          </a:solidFill>
-          <a:ln>
-            <a:noFill/>
-          </a:ln>
-          <a:effectLst/>
-        </p:spPr>
-        <p:style>
-          <a:lnRef idx="1">
-            <a:schemeClr val="accent1"/>
-          </a:lnRef>
-          <a:fillRef idx="3">
-            <a:schemeClr val="accent1"/>
-          </a:fillRef>
-          <a:effectRef idx="2">
-            <a:schemeClr val="accent1"/>
-          </a:effectRef>
-          <a:fontRef idx="minor">
-            <a:schemeClr val="lt1"/>
-          </a:fontRef>
-        </p:style>
-        <p:txBody>
-          <a:bodyPr rtlCol="0" anchor="ctr"/>
-          <a:lstStyle/>
-          <a:p>
-            <a:pPr algn="ctr"/>
-          </a:p>
-        </p:txBody>
-      </p:sp>
-      <p:sp>
-        <p:nvSpPr>
-          <p:cNvPr id="10" name="Rectangle 9"/>
-          <p:cNvSpPr/>
-          <p:nvPr/>
-        </p:nvSpPr>
-        <p:spPr>
-          <a:xfrm>
-            <a:off x="4344314" y="1645920"/>
-            <a:ext cx="82296" cy="2057400"/>
-          </a:xfrm>
-          <a:prstGeom prst="rect">
-            <a:avLst/>
-          </a:prstGeom>
-          <a:solidFill>
-            <a:srgbClr val="E97132"/>
-          </a:solidFill>
-          <a:ln>
-            <a:noFill/>
-          </a:ln>
-          <a:effectLst/>
-        </p:spPr>
-        <p:style>
-          <a:lnRef idx="1">
-            <a:schemeClr val="accent1"/>
-          </a:lnRef>
-          <a:fillRef idx="3">
-            <a:schemeClr val="accent1"/>
-          </a:fillRef>
-          <a:effectRef idx="2">
-            <a:schemeClr val="accent1"/>
-          </a:effectRef>
-          <a:fontRef idx="minor">
-            <a:schemeClr val="lt1"/>
-          </a:fontRef>
-        </p:style>
-        <p:txBody>
-          <a:bodyPr rtlCol="0" anchor="ctr"/>
-          <a:lstStyle/>
-          <a:p>
-            <a:pPr algn="ctr"/>
-          </a:p>
-        </p:txBody>
-      </p:sp>
-      <p:sp>
-        <p:nvSpPr>
-          <p:cNvPr id="11" name="TextBox 10"/>
-          <p:cNvSpPr txBox="1"/>
-          <p:nvPr/>
-        </p:nvSpPr>
-        <p:spPr>
-          <a:xfrm>
-            <a:off x="4600346" y="1792224"/>
-            <a:ext cx="3137306" cy="274320"/>
-          </a:xfrm>
-          <a:prstGeom prst="rect">
-            <a:avLst/>
-          </a:prstGeom>
-          <a:noFill/>
-        </p:spPr>
-        <p:txBody>
-          <a:bodyPr wrap="square" anchor="t" lIns="0" rIns="0" tIns="0" bIns="0">
-            <a:noAutofit/>
-          </a:bodyPr>
-          <a:lstStyle/>
-          <a:p>
-            <a:pPr algn="l">
-              <a:spcBef>
-                <a:spcPts val="0"/>
-              </a:spcBef>
-              <a:spcAft>
-                <a:spcPts val="200"/>
-              </a:spcAft>
-            </a:pPr>
-            <a:r>
-              <a:rPr sz="1200" b="1" i="0">
-                <a:solidFill>
-                  <a:srgbClr val="E97132"/>
-                </a:solidFill>
-                <a:latin typeface="Calibri"/>
-              </a:rPr>
-              <a:t>MOVING FEATURES</a:t>
-            </a:r>
-          </a:p>
-        </p:txBody>
-      </p:sp>
-      <p:sp>
-        <p:nvSpPr>
-          <p:cNvPr id="12" name="TextBox 11"/>
-          <p:cNvSpPr txBox="1"/>
-          <p:nvPr/>
-        </p:nvSpPr>
-        <p:spPr>
-          <a:xfrm>
-            <a:off x="4600346" y="2148840"/>
-            <a:ext cx="3045866" cy="1463040"/>
-          </a:xfrm>
-          <a:prstGeom prst="rect">
-            <a:avLst/>
-          </a:prstGeom>
-          <a:noFill/>
-        </p:spPr>
-        <p:txBody>
-          <a:bodyPr wrap="square" lIns="0" rIns="0" tIns="0" bIns="0">
-            <a:noAutofit/>
-          </a:bodyPr>
-          <a:lstStyle/>
-          <a:p>
-            <a:pPr>
-              <a:lnSpc>
-                <a:spcPct val="100000"/>
-              </a:lnSpc>
-              <a:spcAft>
-                <a:spcPts val="300"/>
-              </a:spcAft>
-            </a:pPr>
-            <a:r>
-              <a:rPr sz="1200" b="1">
-                <a:solidFill>
-                  <a:srgbClr val="E97132"/>
-                </a:solidFill>
-                <a:latin typeface="Calibri"/>
-              </a:rPr>
-              <a:t>✓ </a:t>
-            </a:r>
-            <a:r>
-              <a:rPr sz="1200">
-                <a:solidFill>
-                  <a:srgbClr val="1E2B36"/>
-                </a:solidFill>
-                <a:latin typeface="Calibri"/>
-              </a:rPr>
-              <a:t>insert (POST)</a:t>
-            </a:r>
-          </a:p>
-          <a:p>
-            <a:pPr>
-              <a:lnSpc>
-                <a:spcPct val="100000"/>
-              </a:lnSpc>
-              <a:spcAft>
-                <a:spcPts val="300"/>
-              </a:spcAft>
-            </a:pPr>
-            <a:r>
-              <a:rPr sz="1200" b="1">
-                <a:solidFill>
-                  <a:srgbClr val="E97132"/>
-                </a:solidFill>
-                <a:latin typeface="Calibri"/>
-              </a:rPr>
-              <a:t>✓ </a:t>
-            </a:r>
-            <a:r>
-              <a:rPr sz="1200">
-                <a:solidFill>
-                  <a:srgbClr val="1E2B36"/>
-                </a:solidFill>
-                <a:latin typeface="Calibri"/>
-              </a:rPr>
-              <a:t>retrieve / stream</a:t>
-            </a:r>
-          </a:p>
-          <a:p>
-            <a:pPr>
-              <a:lnSpc>
-                <a:spcPct val="100000"/>
-              </a:lnSpc>
-              <a:spcAft>
-                <a:spcPts val="300"/>
-              </a:spcAft>
-            </a:pPr>
-            <a:r>
-              <a:rPr sz="1200" b="1">
-                <a:solidFill>
-                  <a:srgbClr val="E97132"/>
-                </a:solidFill>
-                <a:latin typeface="Calibri"/>
-              </a:rPr>
-              <a:t>✓ </a:t>
-            </a:r>
-            <a:r>
-              <a:rPr sz="1200">
-                <a:solidFill>
-                  <a:srgbClr val="1E2B36"/>
-                </a:solidFill>
-                <a:latin typeface="Calibri"/>
-              </a:rPr>
-              <a:t>delete (DELETE)</a:t>
-            </a:r>
-          </a:p>
-          <a:p>
-            <a:pPr>
-              <a:lnSpc>
-                <a:spcPct val="100000"/>
-              </a:lnSpc>
-              <a:spcAft>
-                <a:spcPts val="300"/>
-              </a:spcAft>
-            </a:pPr>
-            <a:r>
-              <a:rPr sz="1200" b="1">
-                <a:solidFill>
-                  <a:srgbClr val="E97132"/>
-                </a:solidFill>
-                <a:latin typeface="Calibri"/>
-              </a:rPr>
-              <a:t>✓ </a:t>
-            </a:r>
-            <a:r>
-              <a:rPr sz="1200">
-                <a:solidFill>
-                  <a:srgbClr val="1E2B36"/>
-                </a:solidFill>
-                <a:latin typeface="Calibri"/>
-              </a:rPr>
-              <a:t>keyset paging</a:t>
-            </a:r>
-          </a:p>
-        </p:txBody>
-      </p:sp>
-      <p:sp>
-        <p:nvSpPr>
-          <p:cNvPr id="13" name="Rounded Rectangle 12"/>
-          <p:cNvSpPr/>
-          <p:nvPr/>
-        </p:nvSpPr>
-        <p:spPr>
-          <a:xfrm>
-            <a:off x="8121700" y="1645920"/>
-            <a:ext cx="3503066" cy="2057400"/>
-          </a:xfrm>
-          <a:prstGeom prst="roundRect">
-            <a:avLst>
-              <a:gd name="adj" fmla="val 4000"/>
-            </a:avLst>
-          </a:prstGeom>
-          <a:solidFill>
-            <a:srgbClr val="F1F5F8"/>
-          </a:solidFill>
-          <a:ln>
-            <a:noFill/>
-          </a:ln>
-          <a:effectLst/>
-        </p:spPr>
-        <p:style>
-          <a:lnRef idx="1">
-            <a:schemeClr val="accent1"/>
-          </a:lnRef>
-          <a:fillRef idx="3">
-            <a:schemeClr val="accent1"/>
-          </a:fillRef>
-          <a:effectRef idx="2">
-            <a:schemeClr val="accent1"/>
-          </a:effectRef>
-          <a:fontRef idx="minor">
-            <a:schemeClr val="lt1"/>
-          </a:fontRef>
-        </p:style>
-        <p:txBody>
-          <a:bodyPr rtlCol="0" anchor="ctr"/>
-          <a:lstStyle/>
-          <a:p>
-            <a:pPr algn="ctr"/>
-          </a:p>
-        </p:txBody>
-      </p:sp>
-      <p:sp>
-        <p:nvSpPr>
-          <p:cNvPr id="14" name="Rectangle 13"/>
-          <p:cNvSpPr/>
-          <p:nvPr/>
-        </p:nvSpPr>
-        <p:spPr>
-          <a:xfrm>
-            <a:off x="8121700" y="1645920"/>
-            <a:ext cx="82296" cy="2057400"/>
-          </a:xfrm>
-          <a:prstGeom prst="rect">
-            <a:avLst/>
-          </a:prstGeom>
-          <a:solidFill>
-            <a:srgbClr val="196B24"/>
-          </a:solidFill>
-          <a:ln>
-            <a:noFill/>
-          </a:ln>
-          <a:effectLst/>
-        </p:spPr>
-        <p:style>
-          <a:lnRef idx="1">
-            <a:schemeClr val="accent1"/>
-          </a:lnRef>
-          <a:fillRef idx="3">
-            <a:schemeClr val="accent1"/>
-          </a:fillRef>
-          <a:effectRef idx="2">
-            <a:schemeClr val="accent1"/>
-          </a:effectRef>
-          <a:fontRef idx="minor">
-            <a:schemeClr val="lt1"/>
-          </a:fontRef>
-        </p:style>
-        <p:txBody>
-          <a:bodyPr rtlCol="0" anchor="ctr"/>
-          <a:lstStyle/>
-          <a:p>
-            <a:pPr algn="ctr"/>
-          </a:p>
-        </p:txBody>
-      </p:sp>
-      <p:sp>
-        <p:nvSpPr>
-          <p:cNvPr id="15" name="TextBox 14"/>
-          <p:cNvSpPr txBox="1"/>
-          <p:nvPr/>
-        </p:nvSpPr>
-        <p:spPr>
-          <a:xfrm>
-            <a:off x="8377732" y="1792224"/>
-            <a:ext cx="3137306" cy="274320"/>
-          </a:xfrm>
-          <a:prstGeom prst="rect">
-            <a:avLst/>
-          </a:prstGeom>
-          <a:noFill/>
-        </p:spPr>
-        <p:txBody>
-          <a:bodyPr wrap="square" anchor="t" lIns="0" rIns="0" tIns="0" bIns="0">
-            <a:noAutofit/>
-          </a:bodyPr>
-          <a:lstStyle/>
-          <a:p>
-            <a:pPr algn="l">
-              <a:spcBef>
-                <a:spcPts val="0"/>
-              </a:spcBef>
-              <a:spcAft>
-                <a:spcPts val="200"/>
-              </a:spcAft>
-            </a:pPr>
-            <a:r>
-              <a:rPr sz="1200" b="1" i="0">
-                <a:solidFill>
-                  <a:srgbClr val="196B24"/>
-                </a:solidFill>
-                <a:latin typeface="Calibri"/>
-              </a:rPr>
-              <a:t>QUERYING</a:t>
-            </a:r>
-          </a:p>
-        </p:txBody>
-      </p:sp>
-      <p:sp>
-        <p:nvSpPr>
-          <p:cNvPr id="16" name="TextBox 15"/>
-          <p:cNvSpPr txBox="1"/>
-          <p:nvPr/>
-        </p:nvSpPr>
-        <p:spPr>
-          <a:xfrm>
-            <a:off x="8377732" y="2148840"/>
-            <a:ext cx="3045866" cy="1463040"/>
-          </a:xfrm>
-          <a:prstGeom prst="rect">
-            <a:avLst/>
-          </a:prstGeom>
-          <a:noFill/>
-        </p:spPr>
-        <p:txBody>
-          <a:bodyPr wrap="square" lIns="0" rIns="0" tIns="0" bIns="0">
-            <a:noAutofit/>
-          </a:bodyPr>
-          <a:lstStyle/>
-          <a:p>
-            <a:pPr>
-              <a:lnSpc>
-                <a:spcPct val="100000"/>
-              </a:lnSpc>
-              <a:spcAft>
-                <a:spcPts val="300"/>
-              </a:spcAft>
-            </a:pPr>
-            <a:r>
-              <a:rPr sz="1200" b="1">
-                <a:solidFill>
-                  <a:srgbClr val="196B24"/>
-                </a:solidFill>
-                <a:latin typeface="Calibri"/>
-              </a:rPr>
-              <a:t>✓ </a:t>
-            </a:r>
-            <a:r>
-              <a:rPr sz="1200">
-                <a:solidFill>
-                  <a:srgbClr val="1E2B36"/>
-                </a:solidFill>
-                <a:latin typeface="Calibri"/>
-              </a:rPr>
-              <a:t>bbox spatial filter</a:t>
-            </a:r>
-          </a:p>
-          <a:p>
-            <a:pPr>
-              <a:lnSpc>
-                <a:spcPct val="100000"/>
-              </a:lnSpc>
-              <a:spcAft>
-                <a:spcPts val="300"/>
-              </a:spcAft>
-            </a:pPr>
-            <a:r>
-              <a:rPr sz="1200" b="1">
-                <a:solidFill>
-                  <a:srgbClr val="196B24"/>
-                </a:solidFill>
-                <a:latin typeface="Calibri"/>
-              </a:rPr>
-              <a:t>✓ </a:t>
-            </a:r>
-            <a:r>
-              <a:rPr sz="1200">
-                <a:solidFill>
-                  <a:srgbClr val="1E2B36"/>
-                </a:solidFill>
-                <a:latin typeface="Calibri"/>
-              </a:rPr>
-              <a:t>datetime interval / instant</a:t>
-            </a:r>
-          </a:p>
-          <a:p>
-            <a:pPr>
-              <a:lnSpc>
-                <a:spcPct val="100000"/>
-              </a:lnSpc>
-              <a:spcAft>
-                <a:spcPts val="300"/>
-              </a:spcAft>
-            </a:pPr>
-            <a:r>
-              <a:rPr sz="1200" b="1">
-                <a:solidFill>
-                  <a:srgbClr val="196B24"/>
-                </a:solidFill>
-                <a:latin typeface="Calibri"/>
-              </a:rPr>
-              <a:t>✓ </a:t>
-            </a:r>
-            <a:r>
-              <a:rPr sz="1200">
-                <a:solidFill>
-                  <a:srgbClr val="1E2B36"/>
-                </a:solidFill>
-                <a:latin typeface="Calibri"/>
-              </a:rPr>
-              <a:t>subtrajectory clipping</a:t>
-            </a:r>
-          </a:p>
-          <a:p>
-            <a:pPr>
-              <a:lnSpc>
-                <a:spcPct val="100000"/>
-              </a:lnSpc>
-              <a:spcAft>
-                <a:spcPts val="300"/>
-              </a:spcAft>
-            </a:pPr>
-            <a:r>
-              <a:rPr sz="1200" b="1">
-                <a:solidFill>
-                  <a:srgbClr val="196B24"/>
-                </a:solidFill>
-                <a:latin typeface="Calibri"/>
-              </a:rPr>
-              <a:t>✓ </a:t>
-            </a:r>
-            <a:r>
-              <a:rPr sz="1200">
-                <a:solidFill>
-                  <a:srgbClr val="1E2B36"/>
-                </a:solidFill>
-                <a:latin typeface="Calibri"/>
-              </a:rPr>
-              <a:t>leaf selector</a:t>
-            </a:r>
-          </a:p>
-        </p:txBody>
-      </p:sp>
-      <p:sp>
-        <p:nvSpPr>
-          <p:cNvPr id="17" name="Rounded Rectangle 16"/>
-          <p:cNvSpPr/>
-          <p:nvPr/>
-        </p:nvSpPr>
-        <p:spPr>
-          <a:xfrm>
-            <a:off x="566928" y="3886200"/>
-            <a:ext cx="3503066" cy="2057400"/>
-          </a:xfrm>
-          <a:prstGeom prst="roundRect">
-            <a:avLst>
-              <a:gd name="adj" fmla="val 4000"/>
-            </a:avLst>
-          </a:prstGeom>
-          <a:solidFill>
-            <a:srgbClr val="F1F5F8"/>
-          </a:solidFill>
-          <a:ln>
-            <a:noFill/>
-          </a:ln>
-          <a:effectLst/>
-        </p:spPr>
-        <p:style>
-          <a:lnRef idx="1">
-            <a:schemeClr val="accent1"/>
-          </a:lnRef>
-          <a:fillRef idx="3">
-            <a:schemeClr val="accent1"/>
-          </a:fillRef>
-          <a:effectRef idx="2">
-            <a:schemeClr val="accent1"/>
-          </a:effectRef>
-          <a:fontRef idx="minor">
-            <a:schemeClr val="lt1"/>
-          </a:fontRef>
-        </p:style>
-        <p:txBody>
-          <a:bodyPr rtlCol="0" anchor="ctr"/>
-          <a:lstStyle/>
-          <a:p>
-            <a:pPr algn="ctr"/>
-          </a:p>
-        </p:txBody>
-      </p:sp>
-      <p:sp>
-        <p:nvSpPr>
-          <p:cNvPr id="18" name="Rectangle 17"/>
-          <p:cNvSpPr/>
-          <p:nvPr/>
-        </p:nvSpPr>
-        <p:spPr>
-          <a:xfrm>
-            <a:off x="566928" y="3886200"/>
-            <a:ext cx="82296" cy="2057400"/>
-          </a:xfrm>
-          <a:prstGeom prst="rect">
-            <a:avLst/>
-          </a:prstGeom>
-          <a:solidFill>
-            <a:srgbClr val="A02B93"/>
-          </a:solidFill>
-          <a:ln>
-            <a:noFill/>
-          </a:ln>
-          <a:effectLst/>
-        </p:spPr>
-        <p:style>
-          <a:lnRef idx="1">
-            <a:schemeClr val="accent1"/>
-          </a:lnRef>
-          <a:fillRef idx="3">
-            <a:schemeClr val="accent1"/>
-          </a:fillRef>
-          <a:effectRef idx="2">
-            <a:schemeClr val="accent1"/>
-          </a:effectRef>
-          <a:fontRef idx="minor">
-            <a:schemeClr val="lt1"/>
-          </a:fontRef>
-        </p:style>
-        <p:txBody>
-          <a:bodyPr rtlCol="0" anchor="ctr"/>
-          <a:lstStyle/>
-          <a:p>
-            <a:pPr algn="ctr"/>
-          </a:p>
-        </p:txBody>
-      </p:sp>
-      <p:sp>
-        <p:nvSpPr>
-          <p:cNvPr id="19" name="TextBox 18"/>
-          <p:cNvSpPr txBox="1"/>
-          <p:nvPr/>
-        </p:nvSpPr>
-        <p:spPr>
-          <a:xfrm>
-            <a:off x="822960" y="4032504"/>
-            <a:ext cx="3137306" cy="274320"/>
-          </a:xfrm>
-          <a:prstGeom prst="rect">
-            <a:avLst/>
-          </a:prstGeom>
-          <a:noFill/>
-        </p:spPr>
-        <p:txBody>
-          <a:bodyPr wrap="square" anchor="t" lIns="0" rIns="0" tIns="0" bIns="0">
-            <a:noAutofit/>
-          </a:bodyPr>
-          <a:lstStyle/>
-          <a:p>
-            <a:pPr algn="l">
-              <a:spcBef>
-                <a:spcPts val="0"/>
-              </a:spcBef>
-              <a:spcAft>
-                <a:spcPts val="200"/>
-              </a:spcAft>
-            </a:pPr>
-            <a:r>
-              <a:rPr sz="1200" b="1" i="0">
-                <a:solidFill>
-                  <a:srgbClr val="A02B93"/>
-                </a:solidFill>
-                <a:latin typeface="Calibri"/>
-              </a:rPr>
-              <a:t>TEMPORAL GEOMETRY</a:t>
-            </a:r>
-          </a:p>
-        </p:txBody>
-      </p:sp>
-      <p:sp>
-        <p:nvSpPr>
-          <p:cNvPr id="20" name="TextBox 19"/>
-          <p:cNvSpPr txBox="1"/>
-          <p:nvPr/>
-        </p:nvSpPr>
-        <p:spPr>
-          <a:xfrm>
-            <a:off x="822960" y="4389120"/>
-            <a:ext cx="3045866" cy="1463040"/>
-          </a:xfrm>
-          <a:prstGeom prst="rect">
-            <a:avLst/>
-          </a:prstGeom>
-          <a:noFill/>
-        </p:spPr>
-        <p:txBody>
-          <a:bodyPr wrap="square" lIns="0" rIns="0" tIns="0" bIns="0">
-            <a:noAutofit/>
-          </a:bodyPr>
-          <a:lstStyle/>
-          <a:p>
-            <a:pPr>
-              <a:lnSpc>
-                <a:spcPct val="100000"/>
-              </a:lnSpc>
-              <a:spcAft>
-                <a:spcPts val="300"/>
-              </a:spcAft>
-            </a:pPr>
-            <a:r>
-              <a:rPr sz="1200" b="1">
-                <a:solidFill>
-                  <a:srgbClr val="A02B93"/>
-                </a:solidFill>
-                <a:latin typeface="Calibri"/>
-              </a:rPr>
-              <a:t>✓ </a:t>
-            </a:r>
-            <a:r>
-              <a:rPr sz="1200">
-                <a:solidFill>
-                  <a:srgbClr val="1E2B36"/>
-                </a:solidFill>
-                <a:latin typeface="Calibri"/>
-              </a:rPr>
-              <a:t>get sequence (GET)</a:t>
-            </a:r>
-          </a:p>
-          <a:p>
-            <a:pPr>
-              <a:lnSpc>
-                <a:spcPct val="100000"/>
-              </a:lnSpc>
-              <a:spcAft>
-                <a:spcPts val="300"/>
-              </a:spcAft>
-            </a:pPr>
-            <a:r>
-              <a:rPr sz="1200" b="1">
-                <a:solidFill>
-                  <a:srgbClr val="A02B93"/>
-                </a:solidFill>
-                <a:latin typeface="Calibri"/>
-              </a:rPr>
-              <a:t>✓ </a:t>
-            </a:r>
-            <a:r>
-              <a:rPr sz="1200">
-                <a:solidFill>
-                  <a:srgbClr val="1E2B36"/>
-                </a:solidFill>
-                <a:latin typeface="Calibri"/>
-              </a:rPr>
-              <a:t>append sub-trajectory (POST)</a:t>
-            </a:r>
-          </a:p>
-          <a:p>
-            <a:pPr>
-              <a:lnSpc>
-                <a:spcPct val="100000"/>
-              </a:lnSpc>
-              <a:spcAft>
-                <a:spcPts val="300"/>
-              </a:spcAft>
-            </a:pPr>
-            <a:r>
-              <a:rPr sz="1200" b="1">
-                <a:solidFill>
-                  <a:srgbClr val="A02B93"/>
-                </a:solidFill>
-                <a:latin typeface="Calibri"/>
-              </a:rPr>
-              <a:t>✓ </a:t>
-            </a:r>
-            <a:r>
-              <a:rPr sz="1200">
-                <a:solidFill>
-                  <a:srgbClr val="1E2B36"/>
-                </a:solidFill>
-                <a:latin typeface="Calibri"/>
-              </a:rPr>
-              <a:t>datetime / leaf clip</a:t>
-            </a:r>
-          </a:p>
-        </p:txBody>
-      </p:sp>
-      <p:sp>
-        <p:nvSpPr>
-          <p:cNvPr id="21" name="Rounded Rectangle 20"/>
-          <p:cNvSpPr/>
-          <p:nvPr/>
-        </p:nvSpPr>
-        <p:spPr>
-          <a:xfrm>
-            <a:off x="4344314" y="3886200"/>
-            <a:ext cx="3503066" cy="2057400"/>
-          </a:xfrm>
-          <a:prstGeom prst="roundRect">
-            <a:avLst>
-              <a:gd name="adj" fmla="val 4000"/>
-            </a:avLst>
-          </a:prstGeom>
-          <a:solidFill>
-            <a:srgbClr val="F1F5F8"/>
-          </a:solidFill>
-          <a:ln>
-            <a:noFill/>
-          </a:ln>
-          <a:effectLst/>
-        </p:spPr>
-        <p:style>
-          <a:lnRef idx="1">
-            <a:schemeClr val="accent1"/>
-          </a:lnRef>
-          <a:fillRef idx="3">
-            <a:schemeClr val="accent1"/>
-          </a:fillRef>
-          <a:effectRef idx="2">
-            <a:schemeClr val="accent1"/>
-          </a:effectRef>
-          <a:fontRef idx="minor">
-            <a:schemeClr val="lt1"/>
-          </a:fontRef>
-        </p:style>
-        <p:txBody>
-          <a:bodyPr rtlCol="0" anchor="ctr"/>
-          <a:lstStyle/>
-          <a:p>
-            <a:pPr algn="ctr"/>
-          </a:p>
-        </p:txBody>
-      </p:sp>
-      <p:sp>
-        <p:nvSpPr>
-          <p:cNvPr id="22" name="Rectangle 21"/>
-          <p:cNvSpPr/>
-          <p:nvPr/>
-        </p:nvSpPr>
-        <p:spPr>
-          <a:xfrm>
-            <a:off x="4344314" y="3886200"/>
-            <a:ext cx="82296" cy="2057400"/>
+            <a:off x="566928" y="2834640"/>
+            <a:ext cx="164592" cy="164592"/>
           </a:xfrm>
           <a:prstGeom prst="rect">
             <a:avLst/>
@@ -27612,14 +27991,14 @@
       </p:sp>
       <p:sp>
         <p:nvSpPr>
-          <p:cNvPr id="23" name="TextBox 22"/>
+          <p:cNvPr id="9" name="TextBox 8"/>
           <p:cNvSpPr txBox="1"/>
           <p:nvPr/>
         </p:nvSpPr>
         <p:spPr>
           <a:xfrm>
-            <a:off x="4600346" y="4032504"/>
-            <a:ext cx="3137306" cy="274320"/>
+            <a:off x="932688" y="2761488"/>
+            <a:ext cx="8686800" cy="320040"/>
           </a:xfrm>
           <a:prstGeom prst="rect">
             <a:avLst/>
@@ -27641,27 +28020,27 @@
               </a:spcAft>
             </a:pPr>
             <a:r>
-              <a:rPr sz="1200" b="1" i="0">
-                <a:solidFill>
-                  <a:srgbClr val="156082"/>
-                </a:solidFill>
-                <a:latin typeface="Calibri"/>
-              </a:rPr>
-              <a:t>DERIVED MEASURES</a:t>
-            </a:r>
-          </a:p>
-        </p:txBody>
-      </p:sp>
-      <p:sp>
-        <p:nvSpPr>
-          <p:cNvPr id="24" name="TextBox 23"/>
+              <a:rPr sz="1400" b="1" i="0">
+                <a:solidFill>
+                  <a:srgbClr val="0E2841"/>
+                </a:solidFill>
+                <a:latin typeface="Calibri"/>
+              </a:rPr>
+              <a:t>MobilityDB</a:t>
+            </a:r>
+          </a:p>
+        </p:txBody>
+      </p:sp>
+      <p:sp>
+        <p:nvSpPr>
+          <p:cNvPr id="10" name="TextBox 9"/>
           <p:cNvSpPr txBox="1"/>
           <p:nvPr/>
         </p:nvSpPr>
         <p:spPr>
           <a:xfrm>
-            <a:off x="4600346" y="4389120"/>
-            <a:ext cx="3045866" cy="1463040"/>
+            <a:off x="932688" y="3072384"/>
+            <a:ext cx="10515600" cy="292608"/>
           </a:xfrm>
           <a:prstGeom prst="rect">
             <a:avLst/>
@@ -27669,142 +28048,60 @@
           <a:noFill/>
         </p:spPr>
         <p:txBody>
-          <a:bodyPr wrap="square" lIns="0" rIns="0" tIns="0" bIns="0">
+          <a:bodyPr wrap="none" lIns="0" rIns="0" tIns="0" bIns="0">
             <a:noAutofit/>
           </a:bodyPr>
           <a:lstStyle/>
           <a:p>
-            <a:pPr>
-              <a:lnSpc>
-                <a:spcPct val="100000"/>
-              </a:lnSpc>
-              <a:spcAft>
-                <a:spcPts val="300"/>
-              </a:spcAft>
-            </a:pPr>
-            <a:r>
-              <a:rPr sz="1200" b="1">
+            <a:pPr algn="l"/>
+            <a:r>
+              <a:rPr sz="1200" u="none">
                 <a:solidFill>
                   <a:srgbClr val="156082"/>
                 </a:solidFill>
-                <a:latin typeface="Calibri"/>
-              </a:rPr>
-              <a:t>✓ </a:t>
-            </a:r>
-            <a:r>
-              <a:rPr sz="1200">
-                <a:solidFill>
-                  <a:srgbClr val="1E2B36"/>
-                </a:solidFill>
-                <a:latin typeface="Calibri"/>
-              </a:rPr>
-              <a:t>distance</a:t>
-            </a:r>
-          </a:p>
-          <a:p>
-            <a:pPr>
-              <a:lnSpc>
-                <a:spcPct val="100000"/>
-              </a:lnSpc>
-              <a:spcAft>
-                <a:spcPts val="300"/>
-              </a:spcAft>
-            </a:pPr>
-            <a:r>
-              <a:rPr sz="1200" b="1">
+                <a:latin typeface="Consolas"/>
+                <a:hlinkClick r:id="rId3"/>
+              </a:rPr>
+              <a:t>https://github.com/MobilityDB/MobilityDB</a:t>
+            </a:r>
+            <a:r>
+              <a:rPr sz="1200">
+                <a:solidFill>
+                  <a:srgbClr val="5B6B78"/>
+                </a:solidFill>
+                <a:latin typeface="Consolas"/>
+              </a:rPr>
+              <a:t>    ·    </a:t>
+            </a:r>
+            <a:r>
+              <a:rPr sz="1200" u="none">
                 <a:solidFill>
                   <a:srgbClr val="156082"/>
                 </a:solidFill>
-                <a:latin typeface="Calibri"/>
-              </a:rPr>
-              <a:t>✓ </a:t>
-            </a:r>
-            <a:r>
-              <a:rPr sz="1200">
-                <a:solidFill>
-                  <a:srgbClr val="1E2B36"/>
-                </a:solidFill>
-                <a:latin typeface="Calibri"/>
-              </a:rPr>
-              <a:t>velocity</a:t>
-            </a:r>
-          </a:p>
-          <a:p>
-            <a:pPr>
-              <a:lnSpc>
-                <a:spcPct val="100000"/>
-              </a:lnSpc>
-              <a:spcAft>
-                <a:spcPts val="300"/>
-              </a:spcAft>
-            </a:pPr>
-            <a:r>
-              <a:rPr sz="1200" b="1">
-                <a:solidFill>
-                  <a:srgbClr val="156082"/>
-                </a:solidFill>
-                <a:latin typeface="Calibri"/>
-              </a:rPr>
-              <a:t>✓ </a:t>
-            </a:r>
-            <a:r>
-              <a:rPr sz="1200">
-                <a:solidFill>
-                  <a:srgbClr val="1E2B36"/>
-                </a:solidFill>
-                <a:latin typeface="Calibri"/>
-              </a:rPr>
-              <a:t>acceleration → 501 (not derivable)</a:t>
-            </a:r>
-          </a:p>
-          <a:p>
-            <a:pPr>
-              <a:lnSpc>
-                <a:spcPct val="100000"/>
-              </a:lnSpc>
-              <a:spcAft>
-                <a:spcPts val="300"/>
-              </a:spcAft>
-            </a:pPr>
-            <a:r>
-              <a:rPr sz="1200" b="1">
-                <a:solidFill>
-                  <a:srgbClr val="156082"/>
-                </a:solidFill>
-                <a:latin typeface="Calibri"/>
-              </a:rPr>
-              <a:t>✓ </a:t>
-            </a:r>
-            <a:r>
-              <a:rPr sz="1200">
-                <a:solidFill>
-                  <a:srgbClr val="1E2B36"/>
-                </a:solidFill>
-                <a:latin typeface="Calibri"/>
-              </a:rPr>
-              <a:t>exact, as TReal</a:t>
-            </a:r>
-          </a:p>
-        </p:txBody>
-      </p:sp>
-      <p:sp>
-        <p:nvSpPr>
-          <p:cNvPr id="25" name="Rounded Rectangle 24"/>
+                <a:latin typeface="Consolas"/>
+                <a:hlinkClick r:id="rId4"/>
+              </a:rPr>
+              <a:t>https://mobilitydb.com</a:t>
+            </a:r>
+          </a:p>
+        </p:txBody>
+      </p:sp>
+      <p:sp>
+        <p:nvSpPr>
+          <p:cNvPr id="11" name="Rectangle 10"/>
           <p:cNvSpPr/>
           <p:nvPr/>
         </p:nvSpPr>
         <p:spPr>
           <a:xfrm>
-            <a:off x="8121700" y="3886200"/>
-            <a:ext cx="3503066" cy="2057400"/>
-          </a:xfrm>
-          <a:prstGeom prst="roundRect">
-            <a:avLst>
-              <a:gd name="adj" fmla="val 4000"/>
-            </a:avLst>
+            <a:off x="566928" y="3675887"/>
+            <a:ext cx="164592" cy="164592"/>
+          </a:xfrm>
+          <a:prstGeom prst="rect">
+            <a:avLst/>
           </a:prstGeom>
           <a:solidFill>
-            <a:srgbClr val="F1F5F8"/>
+            <a:srgbClr val="156082"/>
           </a:solidFill>
           <a:ln>
             <a:noFill/>
@@ -27835,20 +28132,98 @@
       </p:sp>
       <p:sp>
         <p:nvSpPr>
-          <p:cNvPr id="26" name="Rectangle 25"/>
-          <p:cNvSpPr/>
-          <p:nvPr/>
-        </p:nvSpPr>
-        <p:spPr>
-          <a:xfrm>
-            <a:off x="8121700" y="3886200"/>
-            <a:ext cx="82296" cy="2057400"/>
+          <p:cNvPr id="12" name="TextBox 11"/>
+          <p:cNvSpPr txBox="1"/>
+          <p:nvPr/>
+        </p:nvSpPr>
+        <p:spPr>
+          <a:xfrm>
+            <a:off x="932688" y="3602736"/>
+            <a:ext cx="8686800" cy="320040"/>
           </a:xfrm>
           <a:prstGeom prst="rect">
             <a:avLst/>
           </a:prstGeom>
+          <a:noFill/>
+        </p:spPr>
+        <p:txBody>
+          <a:bodyPr wrap="square" anchor="t" lIns="0" rIns="0" tIns="0" bIns="0">
+            <a:noAutofit/>
+          </a:bodyPr>
+          <a:lstStyle/>
+          <a:p>
+            <a:pPr algn="l">
+              <a:spcBef>
+                <a:spcPts val="0"/>
+              </a:spcBef>
+              <a:spcAft>
+                <a:spcPts val="200"/>
+              </a:spcAft>
+            </a:pPr>
+            <a:r>
+              <a:rPr sz="1400" b="1" i="0">
+                <a:solidFill>
+                  <a:srgbClr val="0E2841"/>
+                </a:solidFill>
+                <a:latin typeface="Calibri"/>
+              </a:rPr>
+              <a:t>MEOS / ecosystem overview</a:t>
+            </a:r>
+          </a:p>
+        </p:txBody>
+      </p:sp>
+      <p:sp>
+        <p:nvSpPr>
+          <p:cNvPr id="13" name="TextBox 12"/>
+          <p:cNvSpPr txBox="1"/>
+          <p:nvPr/>
+        </p:nvSpPr>
+        <p:spPr>
+          <a:xfrm>
+            <a:off x="932688" y="3913632"/>
+            <a:ext cx="10515600" cy="292608"/>
+          </a:xfrm>
+          <a:prstGeom prst="rect">
+            <a:avLst/>
+          </a:prstGeom>
+          <a:noFill/>
+        </p:spPr>
+        <p:txBody>
+          <a:bodyPr wrap="none" lIns="0" rIns="0" tIns="0" bIns="0">
+            <a:noAutofit/>
+          </a:bodyPr>
+          <a:lstStyle/>
+          <a:p>
+            <a:pPr algn="l"/>
+            <a:r>
+              <a:rPr sz="1200" u="none">
+                <a:solidFill>
+                  <a:srgbClr val="156082"/>
+                </a:solidFill>
+                <a:latin typeface="Consolas"/>
+                <a:hlinkClick r:id="rId5"/>
+              </a:rPr>
+              <a:t>https://libmeos.org</a:t>
+            </a:r>
+          </a:p>
+        </p:txBody>
+      </p:sp>
+      <p:sp>
+        <p:nvSpPr>
+          <p:cNvPr id="14" name="Rectangle 13"/>
+          <p:cNvSpPr/>
+          <p:nvPr/>
+        </p:nvSpPr>
+        <p:spPr>
+          <a:xfrm>
+            <a:off x="566928" y="4517136"/>
+            <a:ext cx="164592" cy="164592"/>
+          </a:xfrm>
+          <a:prstGeom prst="rect">
+            <a:avLst/>
+          </a:prstGeom>
           <a:solidFill>
-            <a:srgbClr val="E97132"/>
+            <a:srgbClr val="156082"/>
           </a:solidFill>
           <a:ln>
             <a:noFill/>
@@ -27879,14 +28254,14 @@
       </p:sp>
       <p:sp>
         <p:nvSpPr>
-          <p:cNvPr id="27" name="TextBox 26"/>
+          <p:cNvPr id="15" name="TextBox 14"/>
           <p:cNvSpPr txBox="1"/>
           <p:nvPr/>
         </p:nvSpPr>
         <p:spPr>
           <a:xfrm>
-            <a:off x="8377732" y="4032504"/>
-            <a:ext cx="3137306" cy="274320"/>
+            <a:off x="932688" y="4443984"/>
+            <a:ext cx="8686800" cy="320040"/>
           </a:xfrm>
           <a:prstGeom prst="rect">
             <a:avLst/>
@@ -27908,27 +28283,27 @@
               </a:spcAft>
             </a:pPr>
             <a:r>
-              <a:rPr sz="1200" b="1" i="0">
-                <a:solidFill>
-                  <a:srgbClr val="E97132"/>
-                </a:solidFill>
-                <a:latin typeface="Calibri"/>
-              </a:rPr>
-              <a:t>CONFORMANCE &amp; SCALE</a:t>
-            </a:r>
-          </a:p>
-        </p:txBody>
-      </p:sp>
-      <p:sp>
-        <p:nvSpPr>
-          <p:cNvPr id="28" name="TextBox 27"/>
+              <a:rPr sz="1400" b="1" i="0">
+                <a:solidFill>
+                  <a:srgbClr val="0E2841"/>
+                </a:solidFill>
+                <a:latin typeface="Calibri"/>
+              </a:rPr>
+              <a:t>AIS data — Danish Maritime Authority</a:t>
+            </a:r>
+          </a:p>
+        </p:txBody>
+      </p:sp>
+      <p:sp>
+        <p:nvSpPr>
+          <p:cNvPr id="16" name="TextBox 15"/>
           <p:cNvSpPr txBox="1"/>
           <p:nvPr/>
         </p:nvSpPr>
         <p:spPr>
           <a:xfrm>
-            <a:off x="8377732" y="4389120"/>
-            <a:ext cx="3045866" cy="1463040"/>
+            <a:off x="932688" y="4754880"/>
+            <a:ext cx="10515600" cy="292608"/>
           </a:xfrm>
           <a:prstGeom prst="rect">
             <a:avLst/>
@@ -27936,127 +28311,28 @@
           <a:noFill/>
         </p:spPr>
         <p:txBody>
-          <a:bodyPr wrap="square" lIns="0" rIns="0" tIns="0" bIns="0">
+          <a:bodyPr wrap="none" lIns="0" rIns="0" tIns="0" bIns="0">
             <a:noAutofit/>
           </a:bodyPr>
           <a:lstStyle/>
           <a:p>
-            <a:pPr>
-              <a:lnSpc>
-                <a:spcPct val="100000"/>
-              </a:lnSpc>
-              <a:spcAft>
-                <a:spcPts val="300"/>
-              </a:spcAft>
-            </a:pPr>
-            <a:r>
-              <a:rPr sz="1200" b="1">
-                <a:solidFill>
-                  <a:srgbClr val="E97132"/>
-                </a:solidFill>
-                <a:latin typeface="Calibri"/>
-              </a:rPr>
-              <a:t>✓ </a:t>
-            </a:r>
-            <a:r>
-              <a:rPr sz="1200">
-                <a:solidFill>
-                  <a:srgbClr val="1E2B36"/>
-                </a:solidFill>
-                <a:latin typeface="Calibri"/>
-              </a:rPr>
-              <a:t>5 conformance classes</a:t>
-            </a:r>
-          </a:p>
-          <a:p>
-            <a:pPr>
-              <a:lnSpc>
-                <a:spcPct val="100000"/>
-              </a:lnSpc>
-              <a:spcAft>
-                <a:spcPts val="300"/>
-              </a:spcAft>
-            </a:pPr>
-            <a:r>
-              <a:rPr sz="1200" b="1">
-                <a:solidFill>
-                  <a:srgbClr val="E97132"/>
-                </a:solidFill>
-                <a:latin typeface="Calibri"/>
-              </a:rPr>
-              <a:t>✓ </a:t>
-            </a:r>
-            <a:r>
-              <a:rPr sz="1200">
-                <a:solidFill>
-                  <a:srgbClr val="1E2B36"/>
-                </a:solidFill>
-                <a:latin typeface="Calibri"/>
-              </a:rPr>
-              <a:t>OpenAPI at /api</a:t>
-            </a:r>
-          </a:p>
-          <a:p>
-            <a:pPr>
-              <a:lnSpc>
-                <a:spcPct val="100000"/>
-              </a:lnSpc>
-              <a:spcAft>
-                <a:spcPts val="300"/>
-              </a:spcAft>
-            </a:pPr>
-            <a:r>
-              <a:rPr sz="1200" b="1">
-                <a:solidFill>
-                  <a:srgbClr val="E97132"/>
-                </a:solidFill>
-                <a:latin typeface="Calibri"/>
-              </a:rPr>
-              <a:t>✓ </a:t>
-            </a:r>
-            <a:r>
-              <a:rPr sz="1200">
-                <a:solidFill>
-                  <a:srgbClr val="1E2B36"/>
-                </a:solidFill>
-                <a:latin typeface="Calibri"/>
-              </a:rPr>
-              <a:t>streaming + keyset</a:t>
-            </a:r>
-          </a:p>
-          <a:p>
-            <a:pPr>
-              <a:lnSpc>
-                <a:spcPct val="100000"/>
-              </a:lnSpc>
-              <a:spcAft>
-                <a:spcPts val="300"/>
-              </a:spcAft>
-            </a:pPr>
-            <a:r>
-              <a:rPr sz="1200" b="1">
-                <a:solidFill>
-                  <a:srgbClr val="E97132"/>
-                </a:solidFill>
-                <a:latin typeface="Calibri"/>
-              </a:rPr>
-              <a:t>✓ </a:t>
-            </a:r>
-            <a:r>
-              <a:rPr sz="1200">
-                <a:solidFill>
-                  <a:srgbClr val="1E2B36"/>
-                </a:solidFill>
-                <a:latin typeface="Calibri"/>
-              </a:rPr>
-              <a:t>index-using filters</a:t>
-            </a:r>
-          </a:p>
-        </p:txBody>
-      </p:sp>
-      <p:sp>
-        <p:nvSpPr>
-          <p:cNvPr id="29" name="Rectangle 28"/>
+            <a:pPr algn="l"/>
+            <a:r>
+              <a:rPr sz="1200" u="none">
+                <a:solidFill>
+                  <a:srgbClr val="156082"/>
+                </a:solidFill>
+                <a:latin typeface="Consolas"/>
+                <a:hlinkClick r:id="rId6"/>
+              </a:rPr>
+              <a:t>http://aisdata.ais.dk</a:t>
+            </a:r>
+          </a:p>
+        </p:txBody>
+      </p:sp>
+      <p:sp>
+        <p:nvSpPr>
+          <p:cNvPr id="17" name="Rectangle 16"/>
           <p:cNvSpPr/>
           <p:nvPr/>
         </p:nvSpPr>
@@ -28100,7 +28376,7 @@
       </p:sp>
       <p:sp>
         <p:nvSpPr>
-          <p:cNvPr id="30" name="TextBox 29"/>
+          <p:cNvPr id="18" name="TextBox 17"/>
           <p:cNvSpPr txBox="1"/>
           <p:nvPr/>
         </p:nvSpPr>
@@ -28142,7 +28418,7 @@
       </p:sp>
       <p:sp>
         <p:nvSpPr>
-          <p:cNvPr id="31" name="TextBox 30"/>
+          <p:cNvPr id="19" name="TextBox 18"/>
           <p:cNvSpPr txBox="1"/>
           <p:nvPr/>
         </p:nvSpPr>
@@ -28178,1017 +28454,6 @@
                 <a:latin typeface="Calibri"/>
               </a:rPr>
               <a:t>22</a:t>
-            </a:r>
-          </a:p>
-        </p:txBody>
-      </p:sp>
-    </p:spTree>
-  </p:cSld>
-  <p:clrMapOvr>
-    <a:masterClrMapping/>
-  </p:clrMapOvr>
-</p:sld>
-</file>
-
-<file path=ppt/slides/slide26.xml><?xml version="1.0" encoding="utf-8"?>
-<p:sld xmlns:a="http://schemas.openxmlformats.org/drawingml/2006/main" xmlns:p="http://schemas.openxmlformats.org/presentationml/2006/main" xmlns:r="http://schemas.openxmlformats.org/officeDocument/2006/relationships">
-  <p:cSld>
-    <p:bg>
-      <p:bgPr>
-        <a:solidFill>
-          <a:srgbClr val="0E2841"/>
-        </a:solidFill>
-        <a:effectLst/>
-      </p:bgPr>
-    </p:bg>
-    <p:spTree>
-      <p:nvGrpSpPr>
-        <p:cNvPr id="1" name=""/>
-        <p:cNvGrpSpPr/>
-        <p:nvPr/>
-      </p:nvGrpSpPr>
-      <p:grpSpPr/>
-      <p:sp>
-        <p:nvSpPr>
-          <p:cNvPr id="2" name="Rectangle 1"/>
-          <p:cNvSpPr/>
-          <p:nvPr/>
-        </p:nvSpPr>
-        <p:spPr>
-          <a:xfrm>
-            <a:off x="0" y="0"/>
-            <a:ext cx="12191695" cy="146304"/>
-          </a:xfrm>
-          <a:prstGeom prst="rect">
-            <a:avLst/>
-          </a:prstGeom>
-          <a:solidFill>
-            <a:srgbClr val="156082"/>
-          </a:solidFill>
-          <a:ln>
-            <a:noFill/>
-          </a:ln>
-          <a:effectLst/>
-        </p:spPr>
-        <p:style>
-          <a:lnRef idx="1">
-            <a:schemeClr val="accent1"/>
-          </a:lnRef>
-          <a:fillRef idx="3">
-            <a:schemeClr val="accent1"/>
-          </a:fillRef>
-          <a:effectRef idx="2">
-            <a:schemeClr val="accent1"/>
-          </a:effectRef>
-          <a:fontRef idx="minor">
-            <a:schemeClr val="lt1"/>
-          </a:fontRef>
-        </p:style>
-        <p:txBody>
-          <a:bodyPr rtlCol="0" anchor="ctr"/>
-          <a:lstStyle/>
-          <a:p>
-            <a:pPr algn="ctr"/>
-          </a:p>
-        </p:txBody>
-      </p:sp>
-      <p:sp>
-        <p:nvSpPr>
-          <p:cNvPr id="3" name="Rectangle 2"/>
-          <p:cNvSpPr/>
-          <p:nvPr/>
-        </p:nvSpPr>
-        <p:spPr>
-          <a:xfrm>
-            <a:off x="0" y="6711696"/>
-            <a:ext cx="12191695" cy="146304"/>
-          </a:xfrm>
-          <a:prstGeom prst="rect">
-            <a:avLst/>
-          </a:prstGeom>
-          <a:solidFill>
-            <a:srgbClr val="E97132"/>
-          </a:solidFill>
-          <a:ln>
-            <a:noFill/>
-          </a:ln>
-          <a:effectLst/>
-        </p:spPr>
-        <p:style>
-          <a:lnRef idx="1">
-            <a:schemeClr val="accent1"/>
-          </a:lnRef>
-          <a:fillRef idx="3">
-            <a:schemeClr val="accent1"/>
-          </a:fillRef>
-          <a:effectRef idx="2">
-            <a:schemeClr val="accent1"/>
-          </a:effectRef>
-          <a:fontRef idx="minor">
-            <a:schemeClr val="lt1"/>
-          </a:fontRef>
-        </p:style>
-        <p:txBody>
-          <a:bodyPr rtlCol="0" anchor="ctr"/>
-          <a:lstStyle/>
-          <a:p>
-            <a:pPr algn="ctr"/>
-          </a:p>
-        </p:txBody>
-      </p:sp>
-      <p:sp>
-        <p:nvSpPr>
-          <p:cNvPr id="4" name="TextBox 3"/>
-          <p:cNvSpPr txBox="1"/>
-          <p:nvPr/>
-        </p:nvSpPr>
-        <p:spPr>
-          <a:xfrm>
-            <a:off x="566928" y="2468880"/>
-            <a:ext cx="10058400" cy="914400"/>
-          </a:xfrm>
-          <a:prstGeom prst="rect">
-            <a:avLst/>
-          </a:prstGeom>
-          <a:noFill/>
-        </p:spPr>
-        <p:txBody>
-          <a:bodyPr wrap="square" anchor="t" lIns="0" rIns="0" tIns="0" bIns="0">
-            <a:noAutofit/>
-          </a:bodyPr>
-          <a:lstStyle/>
-          <a:p>
-            <a:pPr algn="l">
-              <a:spcBef>
-                <a:spcPts val="0"/>
-              </a:spcBef>
-              <a:spcAft>
-                <a:spcPts val="200"/>
-              </a:spcAft>
-            </a:pPr>
-            <a:r>
-              <a:rPr sz="4400" b="1" i="0">
-                <a:solidFill>
-                  <a:srgbClr val="FFFFFF"/>
-                </a:solidFill>
-                <a:latin typeface="Calibri Light"/>
-              </a:rPr>
-              <a:t>Thanks for Listening</a:t>
-            </a:r>
-          </a:p>
-        </p:txBody>
-      </p:sp>
-      <p:sp>
-        <p:nvSpPr>
-          <p:cNvPr id="5" name="TextBox 4"/>
-          <p:cNvSpPr txBox="1"/>
-          <p:nvPr/>
-        </p:nvSpPr>
-        <p:spPr>
-          <a:xfrm>
-            <a:off x="566928" y="3566160"/>
-            <a:ext cx="10058400" cy="548640"/>
-          </a:xfrm>
-          <a:prstGeom prst="rect">
-            <a:avLst/>
-          </a:prstGeom>
-          <a:noFill/>
-        </p:spPr>
-        <p:txBody>
-          <a:bodyPr wrap="square" anchor="t" lIns="0" rIns="0" tIns="0" bIns="0">
-            <a:noAutofit/>
-          </a:bodyPr>
-          <a:lstStyle/>
-          <a:p>
-            <a:pPr algn="l">
-              <a:spcBef>
-                <a:spcPts val="0"/>
-              </a:spcBef>
-              <a:spcAft>
-                <a:spcPts val="200"/>
-              </a:spcAft>
-            </a:pPr>
-            <a:r>
-              <a:rPr sz="2400" b="1" i="0">
-                <a:solidFill>
-                  <a:srgbClr val="E97132"/>
-                </a:solidFill>
-                <a:latin typeface="Calibri"/>
-              </a:rPr>
-              <a:t>Questions?</a:t>
-            </a:r>
-          </a:p>
-        </p:txBody>
-      </p:sp>
-      <p:pic>
-        <p:nvPicPr>
-          <p:cNvPr id="6" name="Picture 5" descr="mobilitydb-logo.png"/>
-          <p:cNvPicPr>
-            <a:picLocks noChangeAspect="1"/>
-          </p:cNvPicPr>
-          <p:nvPr/>
-        </p:nvPicPr>
-        <p:blipFill>
-          <a:blip r:embed="rId2"/>
-          <a:stretch>
-            <a:fillRect/>
-          </a:stretch>
-        </p:blipFill>
-        <p:spPr>
-          <a:xfrm>
-            <a:off x="10070970" y="4297680"/>
-            <a:ext cx="1633349" cy="1737360"/>
-          </a:xfrm>
-          <a:prstGeom prst="rect">
-            <a:avLst/>
-          </a:prstGeom>
-        </p:spPr>
-      </p:pic>
-    </p:spTree>
-  </p:cSld>
-  <p:clrMapOvr>
-    <a:masterClrMapping/>
-  </p:clrMapOvr>
-</p:sld>
-</file>
-
-<file path=ppt/slides/slide27.xml><?xml version="1.0" encoding="utf-8"?>
-<p:sld xmlns:a="http://schemas.openxmlformats.org/drawingml/2006/main" xmlns:p="http://schemas.openxmlformats.org/presentationml/2006/main" xmlns:r="http://schemas.openxmlformats.org/officeDocument/2006/relationships">
-  <p:cSld>
-    <p:bg>
-      <p:bgPr>
-        <a:solidFill>
-          <a:srgbClr val="FFFFFF"/>
-        </a:solidFill>
-        <a:effectLst/>
-      </p:bgPr>
-    </p:bg>
-    <p:spTree>
-      <p:nvGrpSpPr>
-        <p:cNvPr id="1" name=""/>
-        <p:cNvGrpSpPr/>
-        <p:nvPr/>
-      </p:nvGrpSpPr>
-      <p:grpSpPr/>
-      <p:sp>
-        <p:nvSpPr>
-          <p:cNvPr id="2" name="TextBox 1"/>
-          <p:cNvSpPr txBox="1"/>
-          <p:nvPr/>
-        </p:nvSpPr>
-        <p:spPr>
-          <a:xfrm>
-            <a:off x="566928" y="365760"/>
-            <a:ext cx="11057839" cy="274320"/>
-          </a:xfrm>
-          <a:prstGeom prst="rect">
-            <a:avLst/>
-          </a:prstGeom>
-          <a:noFill/>
-        </p:spPr>
-        <p:txBody>
-          <a:bodyPr wrap="square" anchor="t" lIns="0" rIns="0" tIns="0" bIns="0">
-            <a:noAutofit/>
-          </a:bodyPr>
-          <a:lstStyle/>
-          <a:p>
-            <a:pPr algn="l">
-              <a:spcBef>
-                <a:spcPts val="0"/>
-              </a:spcBef>
-              <a:spcAft>
-                <a:spcPts val="200"/>
-              </a:spcAft>
-            </a:pPr>
-            <a:r>
-              <a:rPr sz="1200" b="1" i="0">
-                <a:solidFill>
-                  <a:srgbClr val="156082"/>
-                </a:solidFill>
-                <a:latin typeface="Calibri"/>
-              </a:rPr>
-              <a:t>REFERENCES</a:t>
-            </a:r>
-          </a:p>
-        </p:txBody>
-      </p:sp>
-      <p:sp>
-        <p:nvSpPr>
-          <p:cNvPr id="3" name="TextBox 2"/>
-          <p:cNvSpPr txBox="1"/>
-          <p:nvPr/>
-        </p:nvSpPr>
-        <p:spPr>
-          <a:xfrm>
-            <a:off x="566928" y="603504"/>
-            <a:ext cx="11057839" cy="777240"/>
-          </a:xfrm>
-          <a:prstGeom prst="rect">
-            <a:avLst/>
-          </a:prstGeom>
-          <a:noFill/>
-        </p:spPr>
-        <p:txBody>
-          <a:bodyPr wrap="square" anchor="t" lIns="0" rIns="0" tIns="0" bIns="0">
-            <a:noAutofit/>
-          </a:bodyPr>
-          <a:lstStyle/>
-          <a:p>
-            <a:pPr algn="l">
-              <a:spcBef>
-                <a:spcPts val="0"/>
-              </a:spcBef>
-              <a:spcAft>
-                <a:spcPts val="200"/>
-              </a:spcAft>
-            </a:pPr>
-            <a:r>
-              <a:rPr sz="3200" b="1" i="0">
-                <a:solidFill>
-                  <a:srgbClr val="0E2841"/>
-                </a:solidFill>
-                <a:latin typeface="Calibri Light"/>
-              </a:rPr>
-              <a:t>Find Out More</a:t>
-            </a:r>
-          </a:p>
-        </p:txBody>
-      </p:sp>
-      <p:sp>
-        <p:nvSpPr>
-          <p:cNvPr id="4" name="Rectangle 3"/>
-          <p:cNvSpPr/>
-          <p:nvPr/>
-        </p:nvSpPr>
-        <p:spPr>
-          <a:xfrm>
-            <a:off x="566928" y="1389888"/>
-            <a:ext cx="1554480" cy="45720"/>
-          </a:xfrm>
-          <a:prstGeom prst="rect">
-            <a:avLst/>
-          </a:prstGeom>
-          <a:solidFill>
-            <a:srgbClr val="156082"/>
-          </a:solidFill>
-          <a:ln>
-            <a:noFill/>
-          </a:ln>
-          <a:effectLst/>
-        </p:spPr>
-        <p:style>
-          <a:lnRef idx="1">
-            <a:schemeClr val="accent1"/>
-          </a:lnRef>
-          <a:fillRef idx="3">
-            <a:schemeClr val="accent1"/>
-          </a:fillRef>
-          <a:effectRef idx="2">
-            <a:schemeClr val="accent1"/>
-          </a:effectRef>
-          <a:fontRef idx="minor">
-            <a:schemeClr val="lt1"/>
-          </a:fontRef>
-        </p:style>
-        <p:txBody>
-          <a:bodyPr rtlCol="0" anchor="ctr"/>
-          <a:lstStyle/>
-          <a:p>
-            <a:pPr algn="ctr"/>
-          </a:p>
-        </p:txBody>
-      </p:sp>
-      <p:sp>
-        <p:nvSpPr>
-          <p:cNvPr id="5" name="Rectangle 4"/>
-          <p:cNvSpPr/>
-          <p:nvPr/>
-        </p:nvSpPr>
-        <p:spPr>
-          <a:xfrm>
-            <a:off x="566928" y="1993392"/>
-            <a:ext cx="164592" cy="164592"/>
-          </a:xfrm>
-          <a:prstGeom prst="rect">
-            <a:avLst/>
-          </a:prstGeom>
-          <a:solidFill>
-            <a:srgbClr val="156082"/>
-          </a:solidFill>
-          <a:ln>
-            <a:noFill/>
-          </a:ln>
-          <a:effectLst/>
-        </p:spPr>
-        <p:style>
-          <a:lnRef idx="1">
-            <a:schemeClr val="accent1"/>
-          </a:lnRef>
-          <a:fillRef idx="3">
-            <a:schemeClr val="accent1"/>
-          </a:fillRef>
-          <a:effectRef idx="2">
-            <a:schemeClr val="accent1"/>
-          </a:effectRef>
-          <a:fontRef idx="minor">
-            <a:schemeClr val="lt1"/>
-          </a:fontRef>
-        </p:style>
-        <p:txBody>
-          <a:bodyPr rtlCol="0" anchor="ctr"/>
-          <a:lstStyle/>
-          <a:p>
-            <a:pPr algn="ctr"/>
-          </a:p>
-        </p:txBody>
-      </p:sp>
-      <p:sp>
-        <p:nvSpPr>
-          <p:cNvPr id="6" name="TextBox 5"/>
-          <p:cNvSpPr txBox="1"/>
-          <p:nvPr/>
-        </p:nvSpPr>
-        <p:spPr>
-          <a:xfrm>
-            <a:off x="932688" y="1920240"/>
-            <a:ext cx="8686800" cy="320040"/>
-          </a:xfrm>
-          <a:prstGeom prst="rect">
-            <a:avLst/>
-          </a:prstGeom>
-          <a:noFill/>
-        </p:spPr>
-        <p:txBody>
-          <a:bodyPr wrap="square" anchor="t" lIns="0" rIns="0" tIns="0" bIns="0">
-            <a:noAutofit/>
-          </a:bodyPr>
-          <a:lstStyle/>
-          <a:p>
-            <a:pPr algn="l">
-              <a:spcBef>
-                <a:spcPts val="0"/>
-              </a:spcBef>
-              <a:spcAft>
-                <a:spcPts val="200"/>
-              </a:spcAft>
-            </a:pPr>
-            <a:r>
-              <a:rPr sz="1400" b="1" i="0">
-                <a:solidFill>
-                  <a:srgbClr val="0E2841"/>
-                </a:solidFill>
-                <a:latin typeface="Calibri"/>
-              </a:rPr>
-              <a:t>OGC API – Moving Features – Part 1: Core</a:t>
-            </a:r>
-          </a:p>
-        </p:txBody>
-      </p:sp>
-      <p:sp>
-        <p:nvSpPr>
-          <p:cNvPr id="7" name="TextBox 6"/>
-          <p:cNvSpPr txBox="1"/>
-          <p:nvPr/>
-        </p:nvSpPr>
-        <p:spPr>
-          <a:xfrm>
-            <a:off x="932688" y="2231136"/>
-            <a:ext cx="10515600" cy="292608"/>
-          </a:xfrm>
-          <a:prstGeom prst="rect">
-            <a:avLst/>
-          </a:prstGeom>
-          <a:noFill/>
-        </p:spPr>
-        <p:txBody>
-          <a:bodyPr wrap="none" lIns="0" rIns="0" tIns="0" bIns="0">
-            <a:noAutofit/>
-          </a:bodyPr>
-          <a:lstStyle/>
-          <a:p>
-            <a:pPr algn="l"/>
-            <a:r>
-              <a:rPr sz="1200" u="none">
-                <a:solidFill>
-                  <a:srgbClr val="156082"/>
-                </a:solidFill>
-                <a:latin typeface="Consolas"/>
-                <a:hlinkClick r:id="rId2"/>
-              </a:rPr>
-              <a:t>https://docs.ogc.org/is/22-003r3/22-003r3.html</a:t>
-            </a:r>
-          </a:p>
-        </p:txBody>
-      </p:sp>
-      <p:sp>
-        <p:nvSpPr>
-          <p:cNvPr id="8" name="Rectangle 7"/>
-          <p:cNvSpPr/>
-          <p:nvPr/>
-        </p:nvSpPr>
-        <p:spPr>
-          <a:xfrm>
-            <a:off x="566928" y="2834640"/>
-            <a:ext cx="164592" cy="164592"/>
-          </a:xfrm>
-          <a:prstGeom prst="rect">
-            <a:avLst/>
-          </a:prstGeom>
-          <a:solidFill>
-            <a:srgbClr val="156082"/>
-          </a:solidFill>
-          <a:ln>
-            <a:noFill/>
-          </a:ln>
-          <a:effectLst/>
-        </p:spPr>
-        <p:style>
-          <a:lnRef idx="1">
-            <a:schemeClr val="accent1"/>
-          </a:lnRef>
-          <a:fillRef idx="3">
-            <a:schemeClr val="accent1"/>
-          </a:fillRef>
-          <a:effectRef idx="2">
-            <a:schemeClr val="accent1"/>
-          </a:effectRef>
-          <a:fontRef idx="minor">
-            <a:schemeClr val="lt1"/>
-          </a:fontRef>
-        </p:style>
-        <p:txBody>
-          <a:bodyPr rtlCol="0" anchor="ctr"/>
-          <a:lstStyle/>
-          <a:p>
-            <a:pPr algn="ctr"/>
-          </a:p>
-        </p:txBody>
-      </p:sp>
-      <p:sp>
-        <p:nvSpPr>
-          <p:cNvPr id="9" name="TextBox 8"/>
-          <p:cNvSpPr txBox="1"/>
-          <p:nvPr/>
-        </p:nvSpPr>
-        <p:spPr>
-          <a:xfrm>
-            <a:off x="932688" y="2761488"/>
-            <a:ext cx="8686800" cy="320040"/>
-          </a:xfrm>
-          <a:prstGeom prst="rect">
-            <a:avLst/>
-          </a:prstGeom>
-          <a:noFill/>
-        </p:spPr>
-        <p:txBody>
-          <a:bodyPr wrap="square" anchor="t" lIns="0" rIns="0" tIns="0" bIns="0">
-            <a:noAutofit/>
-          </a:bodyPr>
-          <a:lstStyle/>
-          <a:p>
-            <a:pPr algn="l">
-              <a:spcBef>
-                <a:spcPts val="0"/>
-              </a:spcBef>
-              <a:spcAft>
-                <a:spcPts val="200"/>
-              </a:spcAft>
-            </a:pPr>
-            <a:r>
-              <a:rPr sz="1400" b="1" i="0">
-                <a:solidFill>
-                  <a:srgbClr val="0E2841"/>
-                </a:solidFill>
-                <a:latin typeface="Calibri"/>
-              </a:rPr>
-              <a:t>MobilityDB</a:t>
-            </a:r>
-          </a:p>
-        </p:txBody>
-      </p:sp>
-      <p:sp>
-        <p:nvSpPr>
-          <p:cNvPr id="10" name="TextBox 9"/>
-          <p:cNvSpPr txBox="1"/>
-          <p:nvPr/>
-        </p:nvSpPr>
-        <p:spPr>
-          <a:xfrm>
-            <a:off x="932688" y="3072384"/>
-            <a:ext cx="10515600" cy="292608"/>
-          </a:xfrm>
-          <a:prstGeom prst="rect">
-            <a:avLst/>
-          </a:prstGeom>
-          <a:noFill/>
-        </p:spPr>
-        <p:txBody>
-          <a:bodyPr wrap="none" lIns="0" rIns="0" tIns="0" bIns="0">
-            <a:noAutofit/>
-          </a:bodyPr>
-          <a:lstStyle/>
-          <a:p>
-            <a:pPr algn="l"/>
-            <a:r>
-              <a:rPr sz="1200" u="none">
-                <a:solidFill>
-                  <a:srgbClr val="156082"/>
-                </a:solidFill>
-                <a:latin typeface="Consolas"/>
-                <a:hlinkClick r:id="rId3"/>
-              </a:rPr>
-              <a:t>https://github.com/MobilityDB/MobilityDB</a:t>
-            </a:r>
-            <a:r>
-              <a:rPr sz="1200">
-                <a:solidFill>
-                  <a:srgbClr val="5B6B78"/>
-                </a:solidFill>
-                <a:latin typeface="Consolas"/>
-              </a:rPr>
-              <a:t>    ·    </a:t>
-            </a:r>
-            <a:r>
-              <a:rPr sz="1200" u="none">
-                <a:solidFill>
-                  <a:srgbClr val="156082"/>
-                </a:solidFill>
-                <a:latin typeface="Consolas"/>
-                <a:hlinkClick r:id="rId4"/>
-              </a:rPr>
-              <a:t>https://mobilitydb.com</a:t>
-            </a:r>
-          </a:p>
-        </p:txBody>
-      </p:sp>
-      <p:sp>
-        <p:nvSpPr>
-          <p:cNvPr id="11" name="Rectangle 10"/>
-          <p:cNvSpPr/>
-          <p:nvPr/>
-        </p:nvSpPr>
-        <p:spPr>
-          <a:xfrm>
-            <a:off x="566928" y="3675887"/>
-            <a:ext cx="164592" cy="164592"/>
-          </a:xfrm>
-          <a:prstGeom prst="rect">
-            <a:avLst/>
-          </a:prstGeom>
-          <a:solidFill>
-            <a:srgbClr val="156082"/>
-          </a:solidFill>
-          <a:ln>
-            <a:noFill/>
-          </a:ln>
-          <a:effectLst/>
-        </p:spPr>
-        <p:style>
-          <a:lnRef idx="1">
-            <a:schemeClr val="accent1"/>
-          </a:lnRef>
-          <a:fillRef idx="3">
-            <a:schemeClr val="accent1"/>
-          </a:fillRef>
-          <a:effectRef idx="2">
-            <a:schemeClr val="accent1"/>
-          </a:effectRef>
-          <a:fontRef idx="minor">
-            <a:schemeClr val="lt1"/>
-          </a:fontRef>
-        </p:style>
-        <p:txBody>
-          <a:bodyPr rtlCol="0" anchor="ctr"/>
-          <a:lstStyle/>
-          <a:p>
-            <a:pPr algn="ctr"/>
-          </a:p>
-        </p:txBody>
-      </p:sp>
-      <p:sp>
-        <p:nvSpPr>
-          <p:cNvPr id="12" name="TextBox 11"/>
-          <p:cNvSpPr txBox="1"/>
-          <p:nvPr/>
-        </p:nvSpPr>
-        <p:spPr>
-          <a:xfrm>
-            <a:off x="932688" y="3602736"/>
-            <a:ext cx="8686800" cy="320040"/>
-          </a:xfrm>
-          <a:prstGeom prst="rect">
-            <a:avLst/>
-          </a:prstGeom>
-          <a:noFill/>
-        </p:spPr>
-        <p:txBody>
-          <a:bodyPr wrap="square" anchor="t" lIns="0" rIns="0" tIns="0" bIns="0">
-            <a:noAutofit/>
-          </a:bodyPr>
-          <a:lstStyle/>
-          <a:p>
-            <a:pPr algn="l">
-              <a:spcBef>
-                <a:spcPts val="0"/>
-              </a:spcBef>
-              <a:spcAft>
-                <a:spcPts val="200"/>
-              </a:spcAft>
-            </a:pPr>
-            <a:r>
-              <a:rPr sz="1400" b="1" i="0">
-                <a:solidFill>
-                  <a:srgbClr val="0E2841"/>
-                </a:solidFill>
-                <a:latin typeface="Calibri"/>
-              </a:rPr>
-              <a:t>MEOS / ecosystem overview</a:t>
-            </a:r>
-          </a:p>
-        </p:txBody>
-      </p:sp>
-      <p:sp>
-        <p:nvSpPr>
-          <p:cNvPr id="13" name="TextBox 12"/>
-          <p:cNvSpPr txBox="1"/>
-          <p:nvPr/>
-        </p:nvSpPr>
-        <p:spPr>
-          <a:xfrm>
-            <a:off x="932688" y="3913632"/>
-            <a:ext cx="10515600" cy="292608"/>
-          </a:xfrm>
-          <a:prstGeom prst="rect">
-            <a:avLst/>
-          </a:prstGeom>
-          <a:noFill/>
-        </p:spPr>
-        <p:txBody>
-          <a:bodyPr wrap="none" lIns="0" rIns="0" tIns="0" bIns="0">
-            <a:noAutofit/>
-          </a:bodyPr>
-          <a:lstStyle/>
-          <a:p>
-            <a:pPr algn="l"/>
-            <a:r>
-              <a:rPr sz="1200" u="none">
-                <a:solidFill>
-                  <a:srgbClr val="156082"/>
-                </a:solidFill>
-                <a:latin typeface="Consolas"/>
-                <a:hlinkClick r:id="rId5"/>
-              </a:rPr>
-              <a:t>https://libmeos.org</a:t>
-            </a:r>
-          </a:p>
-        </p:txBody>
-      </p:sp>
-      <p:sp>
-        <p:nvSpPr>
-          <p:cNvPr id="14" name="Rectangle 13"/>
-          <p:cNvSpPr/>
-          <p:nvPr/>
-        </p:nvSpPr>
-        <p:spPr>
-          <a:xfrm>
-            <a:off x="566928" y="4517136"/>
-            <a:ext cx="164592" cy="164592"/>
-          </a:xfrm>
-          <a:prstGeom prst="rect">
-            <a:avLst/>
-          </a:prstGeom>
-          <a:solidFill>
-            <a:srgbClr val="156082"/>
-          </a:solidFill>
-          <a:ln>
-            <a:noFill/>
-          </a:ln>
-          <a:effectLst/>
-        </p:spPr>
-        <p:style>
-          <a:lnRef idx="1">
-            <a:schemeClr val="accent1"/>
-          </a:lnRef>
-          <a:fillRef idx="3">
-            <a:schemeClr val="accent1"/>
-          </a:fillRef>
-          <a:effectRef idx="2">
-            <a:schemeClr val="accent1"/>
-          </a:effectRef>
-          <a:fontRef idx="minor">
-            <a:schemeClr val="lt1"/>
-          </a:fontRef>
-        </p:style>
-        <p:txBody>
-          <a:bodyPr rtlCol="0" anchor="ctr"/>
-          <a:lstStyle/>
-          <a:p>
-            <a:pPr algn="ctr"/>
-          </a:p>
-        </p:txBody>
-      </p:sp>
-      <p:sp>
-        <p:nvSpPr>
-          <p:cNvPr id="15" name="TextBox 14"/>
-          <p:cNvSpPr txBox="1"/>
-          <p:nvPr/>
-        </p:nvSpPr>
-        <p:spPr>
-          <a:xfrm>
-            <a:off x="932688" y="4443984"/>
-            <a:ext cx="8686800" cy="320040"/>
-          </a:xfrm>
-          <a:prstGeom prst="rect">
-            <a:avLst/>
-          </a:prstGeom>
-          <a:noFill/>
-        </p:spPr>
-        <p:txBody>
-          <a:bodyPr wrap="square" anchor="t" lIns="0" rIns="0" tIns="0" bIns="0">
-            <a:noAutofit/>
-          </a:bodyPr>
-          <a:lstStyle/>
-          <a:p>
-            <a:pPr algn="l">
-              <a:spcBef>
-                <a:spcPts val="0"/>
-              </a:spcBef>
-              <a:spcAft>
-                <a:spcPts val="200"/>
-              </a:spcAft>
-            </a:pPr>
-            <a:r>
-              <a:rPr sz="1400" b="1" i="0">
-                <a:solidFill>
-                  <a:srgbClr val="0E2841"/>
-                </a:solidFill>
-                <a:latin typeface="Calibri"/>
-              </a:rPr>
-              <a:t>AIS data — Danish Maritime Authority</a:t>
-            </a:r>
-          </a:p>
-        </p:txBody>
-      </p:sp>
-      <p:sp>
-        <p:nvSpPr>
-          <p:cNvPr id="16" name="TextBox 15"/>
-          <p:cNvSpPr txBox="1"/>
-          <p:nvPr/>
-        </p:nvSpPr>
-        <p:spPr>
-          <a:xfrm>
-            <a:off x="932688" y="4754880"/>
-            <a:ext cx="10515600" cy="292608"/>
-          </a:xfrm>
-          <a:prstGeom prst="rect">
-            <a:avLst/>
-          </a:prstGeom>
-          <a:noFill/>
-        </p:spPr>
-        <p:txBody>
-          <a:bodyPr wrap="none" lIns="0" rIns="0" tIns="0" bIns="0">
-            <a:noAutofit/>
-          </a:bodyPr>
-          <a:lstStyle/>
-          <a:p>
-            <a:pPr algn="l"/>
-            <a:r>
-              <a:rPr sz="1200" u="none">
-                <a:solidFill>
-                  <a:srgbClr val="156082"/>
-                </a:solidFill>
-                <a:latin typeface="Consolas"/>
-                <a:hlinkClick r:id="rId6"/>
-              </a:rPr>
-              <a:t>http://aisdata.ais.dk</a:t>
-            </a:r>
-          </a:p>
-        </p:txBody>
-      </p:sp>
-      <p:sp>
-        <p:nvSpPr>
-          <p:cNvPr id="17" name="Rectangle 16"/>
-          <p:cNvSpPr/>
-          <p:nvPr/>
-        </p:nvSpPr>
-        <p:spPr>
-          <a:xfrm>
-            <a:off x="566928" y="6455664"/>
-            <a:ext cx="11057839" cy="10972"/>
-          </a:xfrm>
-          <a:prstGeom prst="rect">
-            <a:avLst/>
-          </a:prstGeom>
-          <a:solidFill>
-            <a:srgbClr val="D3DEE6"/>
-          </a:solidFill>
-          <a:ln>
-            <a:noFill/>
-          </a:ln>
-          <a:effectLst/>
-        </p:spPr>
-        <p:style>
-          <a:lnRef idx="1">
-            <a:schemeClr val="accent1"/>
-          </a:lnRef>
-          <a:fillRef idx="3">
-            <a:schemeClr val="accent1"/>
-          </a:fillRef>
-          <a:effectRef idx="2">
-            <a:schemeClr val="accent1"/>
-          </a:effectRef>
-          <a:fontRef idx="minor">
-            <a:schemeClr val="lt1"/>
-          </a:fontRef>
-        </p:style>
-        <p:txBody>
-          <a:bodyPr rtlCol="0" anchor="ctr"/>
-          <a:lstStyle/>
-          <a:p>
-            <a:pPr algn="ctr"/>
-          </a:p>
-        </p:txBody>
-      </p:sp>
-      <p:sp>
-        <p:nvSpPr>
-          <p:cNvPr id="18" name="TextBox 17"/>
-          <p:cNvSpPr txBox="1"/>
-          <p:nvPr/>
-        </p:nvSpPr>
-        <p:spPr>
-          <a:xfrm>
-            <a:off x="566928" y="6510528"/>
-            <a:ext cx="7315200" cy="274320"/>
-          </a:xfrm>
-          <a:prstGeom prst="rect">
-            <a:avLst/>
-          </a:prstGeom>
-          <a:noFill/>
-        </p:spPr>
-        <p:txBody>
-          <a:bodyPr wrap="square" anchor="t" lIns="0" rIns="0" tIns="0" bIns="0">
-            <a:noAutofit/>
-          </a:bodyPr>
-          <a:lstStyle/>
-          <a:p>
-            <a:pPr algn="l">
-              <a:spcBef>
-                <a:spcPts val="0"/>
-              </a:spcBef>
-              <a:spcAft>
-                <a:spcPts val="200"/>
-              </a:spcAft>
-            </a:pPr>
-            <a:r>
-              <a:rPr sz="1200" b="0" i="0">
-                <a:solidFill>
-                  <a:srgbClr val="5B6B78"/>
-                </a:solidFill>
-                <a:latin typeface="Calibri"/>
-              </a:rPr>
-              <a:t>MobilityAPI  ·  OGC API – Moving Features</a:t>
-            </a:r>
-          </a:p>
-        </p:txBody>
-      </p:sp>
-      <p:sp>
-        <p:nvSpPr>
-          <p:cNvPr id="19" name="TextBox 18"/>
-          <p:cNvSpPr txBox="1"/>
-          <p:nvPr/>
-        </p:nvSpPr>
-        <p:spPr>
-          <a:xfrm>
-            <a:off x="10911535" y="6510528"/>
-            <a:ext cx="731520" cy="274320"/>
-          </a:xfrm>
-          <a:prstGeom prst="rect">
-            <a:avLst/>
-          </a:prstGeom>
-          <a:noFill/>
-        </p:spPr>
-        <p:txBody>
-          <a:bodyPr wrap="square" anchor="t" lIns="0" rIns="0" tIns="0" bIns="0">
-            <a:noAutofit/>
-          </a:bodyPr>
-          <a:lstStyle/>
-          <a:p>
-            <a:pPr algn="r">
-              <a:spcBef>
-                <a:spcPts val="0"/>
-              </a:spcBef>
-              <a:spcAft>
-                <a:spcPts val="200"/>
-              </a:spcAft>
-            </a:pPr>
-            <a:r>
-              <a:rPr sz="1200" b="0" i="0">
-                <a:solidFill>
-                  <a:srgbClr val="5B6B78"/>
-                </a:solidFill>
-                <a:latin typeface="Calibri"/>
-              </a:rPr>
-              <a:t>23</a:t>
             </a:r>
           </a:p>
         </p:txBody>
@@ -29805,8 +29070,8 @@
         </p:nvSpPr>
         <p:spPr>
           <a:xfrm>
-            <a:off x="566928" y="4617720"/>
-            <a:ext cx="11057839" cy="1234440"/>
+            <a:off x="566928" y="4572000"/>
+            <a:ext cx="11057839" cy="1554480"/>
           </a:xfrm>
           <a:prstGeom prst="roundRect">
             <a:avLst>
@@ -29851,7 +29116,7 @@
         </p:nvSpPr>
         <p:spPr>
           <a:xfrm>
-            <a:off x="841247" y="4754880"/>
+            <a:off x="841247" y="4700016"/>
             <a:ext cx="5486400" cy="274320"/>
           </a:xfrm>
           <a:prstGeom prst="rect">
@@ -29893,8 +29158,8 @@
         </p:nvSpPr>
         <p:spPr>
           <a:xfrm>
-            <a:off x="841247" y="5029200"/>
-            <a:ext cx="10509199" cy="731520"/>
+            <a:off x="841247" y="4992624"/>
+            <a:ext cx="10509199" cy="1051560"/>
           </a:xfrm>
           <a:prstGeom prst="rect">
             <a:avLst/>
@@ -29902,27 +29167,132 @@
           <a:noFill/>
         </p:spPr>
         <p:txBody>
-          <a:bodyPr wrap="square" anchor="t" lIns="0" rIns="0" tIns="0" bIns="0">
+          <a:bodyPr wrap="square" lIns="0" rIns="0" tIns="0" bIns="0">
             <a:noAutofit/>
           </a:bodyPr>
           <a:lstStyle/>
           <a:p>
-            <a:pPr algn="l">
-              <a:spcBef>
-                <a:spcPts val="0"/>
-              </a:spcBef>
-              <a:spcAft>
-                <a:spcPts val="200"/>
-              </a:spcAft>
-            </a:pPr>
-            <a:r>
-              <a:rPr sz="1200" b="0" i="0">
+            <a:pPr>
+              <a:lnSpc>
+                <a:spcPct val="106000"/>
+              </a:lnSpc>
+              <a:spcBef>
+                <a:spcPts val="0"/>
+              </a:spcBef>
+              <a:spcAft>
+                <a:spcPts val="400"/>
+              </a:spcAft>
+            </a:pPr>
+            <a:r>
+              <a:rPr sz="1200" b="1">
+                <a:solidFill>
+                  <a:srgbClr val="156082"/>
+                </a:solidFill>
+                <a:latin typeface="Calibri"/>
+              </a:rPr>
+              <a:t>▸  </a:t>
+            </a:r>
+            <a:r>
+              <a:rPr sz="1200">
                 <a:solidFill>
                   <a:srgbClr val="1E2B36"/>
                 </a:solidFill>
                 <a:latin typeface="Calibri"/>
               </a:rPr>
-              <a:t>The trajectory is never materialised, parsed or transformed in the tier. It travels as MF-JSON text on the way out and as a MovingFeaturesJSON payload on the way in; MobilityDB does the parsing, the geometry algebra and the temporal computations. The result is a single static binary with no cgo dependency.</a:t>
+              <a:t>The trajectory is never materialised or parsed in the tier</a:t>
+            </a:r>
+          </a:p>
+          <a:p>
+            <a:pPr>
+              <a:lnSpc>
+                <a:spcPct val="106000"/>
+              </a:lnSpc>
+              <a:spcBef>
+                <a:spcPts val="0"/>
+              </a:spcBef>
+              <a:spcAft>
+                <a:spcPts val="400"/>
+              </a:spcAft>
+            </a:pPr>
+            <a:r>
+              <a:rPr sz="1200" b="1">
+                <a:solidFill>
+                  <a:srgbClr val="156082"/>
+                </a:solidFill>
+                <a:latin typeface="Calibri"/>
+              </a:rPr>
+              <a:t>▸  </a:t>
+            </a:r>
+            <a:r>
+              <a:rPr sz="1200">
+                <a:solidFill>
+                  <a:srgbClr val="1E2B36"/>
+                </a:solidFill>
+                <a:latin typeface="Calibri"/>
+              </a:rPr>
+              <a:t>It travels as MF-JSON text on the way out, MovingFeaturesJSON on the way in</a:t>
+            </a:r>
+          </a:p>
+          <a:p>
+            <a:pPr>
+              <a:lnSpc>
+                <a:spcPct val="106000"/>
+              </a:lnSpc>
+              <a:spcBef>
+                <a:spcPts val="0"/>
+              </a:spcBef>
+              <a:spcAft>
+                <a:spcPts val="400"/>
+              </a:spcAft>
+            </a:pPr>
+            <a:r>
+              <a:rPr sz="1200" b="1">
+                <a:solidFill>
+                  <a:srgbClr val="156082"/>
+                </a:solidFill>
+                <a:latin typeface="Calibri"/>
+              </a:rPr>
+              <a:t>▸  </a:t>
+            </a:r>
+            <a:r>
+              <a:rPr sz="1200">
+                <a:solidFill>
+                  <a:srgbClr val="1E2B36"/>
+                </a:solidFill>
+                <a:latin typeface="Calibri"/>
+              </a:rPr>
+              <a:t>MobilityDB does the parsing, the geometry algebra and the temporal computations</a:t>
+            </a:r>
+          </a:p>
+          <a:p>
+            <a:pPr>
+              <a:lnSpc>
+                <a:spcPct val="106000"/>
+              </a:lnSpc>
+              <a:spcBef>
+                <a:spcPts val="0"/>
+              </a:spcBef>
+              <a:spcAft>
+                <a:spcPts val="400"/>
+              </a:spcAft>
+            </a:pPr>
+            <a:r>
+              <a:rPr sz="1200" b="1">
+                <a:solidFill>
+                  <a:srgbClr val="156082"/>
+                </a:solidFill>
+                <a:latin typeface="Calibri"/>
+              </a:rPr>
+              <a:t>▸  </a:t>
+            </a:r>
+            <a:r>
+              <a:rPr sz="1200">
+                <a:solidFill>
+                  <a:srgbClr val="1E2B36"/>
+                </a:solidFill>
+                <a:latin typeface="Calibri"/>
+              </a:rPr>
+              <a:t>A single static binary, no cgo dependency</a:t>
             </a:r>
           </a:p>
         </p:txBody>
@@ -33110,14 +32480,56 @@
       </p:sp>
       <p:sp>
         <p:nvSpPr>
-          <p:cNvPr id="5" name="Rounded Rectangle 4"/>
+          <p:cNvPr id="5" name="TextBox 4"/>
+          <p:cNvSpPr txBox="1"/>
+          <p:nvPr/>
+        </p:nvSpPr>
+        <p:spPr>
+          <a:xfrm>
+            <a:off x="566928" y="1444752"/>
+            <a:ext cx="4206240" cy="274320"/>
+          </a:xfrm>
+          <a:prstGeom prst="rect">
+            <a:avLst/>
+          </a:prstGeom>
+          <a:noFill/>
+        </p:spPr>
+        <p:txBody>
+          <a:bodyPr wrap="square" anchor="t" lIns="0" rIns="0" tIns="0" bIns="0">
+            <a:noAutofit/>
+          </a:bodyPr>
+          <a:lstStyle/>
+          <a:p>
+            <a:pPr algn="l">
+              <a:spcBef>
+                <a:spcPts val="0"/>
+              </a:spcBef>
+              <a:spcAft>
+                <a:spcPts val="200"/>
+              </a:spcAft>
+            </a:pPr>
+            <a:r>
+              <a:rPr sz="1200" b="1" i="0">
+                <a:solidFill>
+                  <a:srgbClr val="156082"/>
+                </a:solidFill>
+                <a:latin typeface="Calibri"/>
+              </a:rPr>
+              <a:t>STORED COLUMNS</a:t>
+            </a:r>
+          </a:p>
+        </p:txBody>
+      </p:sp>
+      <p:sp>
+        <p:nvSpPr>
+          <p:cNvPr id="6" name="Rounded Rectangle 5"/>
           <p:cNvSpPr/>
           <p:nvPr/>
         </p:nvSpPr>
         <p:spPr>
           <a:xfrm>
-            <a:off x="566928" y="1691640"/>
-            <a:ext cx="4297680" cy="1901952"/>
+            <a:off x="566928" y="1737360"/>
+            <a:ext cx="4206240" cy="1901952"/>
           </a:xfrm>
           <a:prstGeom prst="roundRect">
             <a:avLst>
@@ -33158,14 +32570,14 @@
       </p:sp>
       <p:sp>
         <p:nvSpPr>
-          <p:cNvPr id="6" name="Rounded Rectangle 5"/>
+          <p:cNvPr id="7" name="Rounded Rectangle 6"/>
           <p:cNvSpPr/>
           <p:nvPr/>
         </p:nvSpPr>
         <p:spPr>
           <a:xfrm>
-            <a:off x="566928" y="1691640"/>
-            <a:ext cx="4297680" cy="402336"/>
+            <a:off x="566928" y="1737360"/>
+            <a:ext cx="4206240" cy="402336"/>
           </a:xfrm>
           <a:prstGeom prst="roundRect">
             <a:avLst>
@@ -33204,14 +32616,14 @@
       </p:sp>
       <p:sp>
         <p:nvSpPr>
-          <p:cNvPr id="7" name="TextBox 6"/>
+          <p:cNvPr id="8" name="TextBox 7"/>
           <p:cNvSpPr txBox="1"/>
           <p:nvPr/>
         </p:nvSpPr>
         <p:spPr>
           <a:xfrm>
-            <a:off x="731520" y="1709928"/>
-            <a:ext cx="4023360" cy="402336"/>
+            <a:off x="731520" y="1755648"/>
+            <a:ext cx="3931920" cy="402336"/>
           </a:xfrm>
           <a:prstGeom prst="rect">
             <a:avLst/>
@@ -33246,14 +32658,14 @@
       </p:sp>
       <p:sp>
         <p:nvSpPr>
-          <p:cNvPr id="8" name="TextBox 7"/>
+          <p:cNvPr id="9" name="TextBox 8"/>
           <p:cNvSpPr txBox="1"/>
           <p:nvPr/>
         </p:nvSpPr>
         <p:spPr>
           <a:xfrm>
-            <a:off x="731520" y="2148840"/>
-            <a:ext cx="4005072" cy="1463040"/>
+            <a:off x="731520" y="2194560"/>
+            <a:ext cx="3913631" cy="1463040"/>
           </a:xfrm>
           <a:prstGeom prst="rect">
             <a:avLst/>
@@ -33433,14 +32845,14 @@
       </p:sp>
       <p:sp>
         <p:nvSpPr>
-          <p:cNvPr id="9" name="Rounded Rectangle 8"/>
+          <p:cNvPr id="10" name="Rounded Rectangle 9"/>
           <p:cNvSpPr/>
           <p:nvPr/>
         </p:nvSpPr>
         <p:spPr>
           <a:xfrm>
-            <a:off x="566928" y="3959352"/>
-            <a:ext cx="4297680" cy="1627631"/>
+            <a:off x="566928" y="3950208"/>
+            <a:ext cx="4206240" cy="1627631"/>
           </a:xfrm>
           <a:prstGeom prst="roundRect">
             <a:avLst>
@@ -33481,14 +32893,14 @@
       </p:sp>
       <p:sp>
         <p:nvSpPr>
-          <p:cNvPr id="10" name="Rounded Rectangle 9"/>
+          <p:cNvPr id="11" name="Rounded Rectangle 10"/>
           <p:cNvSpPr/>
           <p:nvPr/>
         </p:nvSpPr>
         <p:spPr>
           <a:xfrm>
-            <a:off x="566928" y="3959352"/>
-            <a:ext cx="4297680" cy="402336"/>
+            <a:off x="566928" y="3950208"/>
+            <a:ext cx="4206240" cy="402336"/>
           </a:xfrm>
           <a:prstGeom prst="roundRect">
             <a:avLst>
@@ -33527,14 +32939,14 @@
       </p:sp>
       <p:sp>
         <p:nvSpPr>
-          <p:cNvPr id="11" name="TextBox 10"/>
+          <p:cNvPr id="12" name="TextBox 11"/>
           <p:cNvSpPr txBox="1"/>
           <p:nvPr/>
         </p:nvSpPr>
         <p:spPr>
           <a:xfrm>
-            <a:off x="731520" y="3977639"/>
-            <a:ext cx="4023360" cy="402336"/>
+            <a:off x="731520" y="3968496"/>
+            <a:ext cx="3931920" cy="402336"/>
           </a:xfrm>
           <a:prstGeom prst="rect">
             <a:avLst/>
@@ -33569,14 +32981,14 @@
       </p:sp>
       <p:sp>
         <p:nvSpPr>
-          <p:cNvPr id="12" name="TextBox 11"/>
+          <p:cNvPr id="13" name="TextBox 12"/>
           <p:cNvSpPr txBox="1"/>
           <p:nvPr/>
         </p:nvSpPr>
         <p:spPr>
           <a:xfrm>
-            <a:off x="731520" y="4416552"/>
-            <a:ext cx="4005072" cy="1188720"/>
+            <a:off x="731520" y="4407408"/>
+            <a:ext cx="3913631" cy="1188720"/>
           </a:xfrm>
           <a:prstGeom prst="rect">
             <a:avLst/>
@@ -33725,14 +33137,14 @@
       </p:sp>
       <p:sp>
         <p:nvSpPr>
-          <p:cNvPr id="13" name="TextBox 12"/>
+          <p:cNvPr id="14" name="TextBox 13"/>
           <p:cNvSpPr txBox="1"/>
           <p:nvPr/>
         </p:nvSpPr>
         <p:spPr>
           <a:xfrm>
-            <a:off x="566928" y="5660136"/>
-            <a:ext cx="4297680" cy="274320"/>
+            <a:off x="566928" y="5641848"/>
+            <a:ext cx="4206240" cy="274320"/>
           </a:xfrm>
           <a:prstGeom prst="rect">
             <a:avLst/>
@@ -33767,14 +33179,98 @@
       </p:sp>
       <p:sp>
         <p:nvSpPr>
-          <p:cNvPr id="14" name="TextBox 13"/>
+          <p:cNvPr id="15" name="TextBox 14"/>
           <p:cNvSpPr txBox="1"/>
           <p:nvPr/>
         </p:nvSpPr>
         <p:spPr>
           <a:xfrm>
-            <a:off x="5532120" y="1783080"/>
-            <a:ext cx="6092647" cy="4023360"/>
+            <a:off x="5138928" y="1444752"/>
+            <a:ext cx="6485839" cy="274320"/>
+          </a:xfrm>
+          <a:prstGeom prst="rect">
+            <a:avLst/>
+          </a:prstGeom>
+          <a:noFill/>
+        </p:spPr>
+        <p:txBody>
+          <a:bodyPr wrap="square" anchor="t" lIns="0" rIns="0" tIns="0" bIns="0">
+            <a:noAutofit/>
+          </a:bodyPr>
+          <a:lstStyle/>
+          <a:p>
+            <a:pPr algn="l">
+              <a:spcBef>
+                <a:spcPts val="0"/>
+              </a:spcBef>
+              <a:spcAft>
+                <a:spcPts val="200"/>
+              </a:spcAft>
+            </a:pPr>
+            <a:r>
+              <a:rPr sz="1200" b="1" i="0">
+                <a:solidFill>
+                  <a:srgbClr val="0E2841"/>
+                </a:solidFill>
+                <a:latin typeface="Calibri"/>
+              </a:rPr>
+              <a:t>STANDARD FIELDS SERVED</a:t>
+            </a:r>
+          </a:p>
+        </p:txBody>
+      </p:sp>
+      <p:sp>
+        <p:nvSpPr>
+          <p:cNvPr id="16" name="TextBox 15"/>
+          <p:cNvSpPr txBox="1"/>
+          <p:nvPr/>
+        </p:nvSpPr>
+        <p:spPr>
+          <a:xfrm>
+            <a:off x="5138928" y="1773936"/>
+            <a:ext cx="6485839" cy="274320"/>
+          </a:xfrm>
+          <a:prstGeom prst="rect">
+            <a:avLst/>
+          </a:prstGeom>
+          <a:noFill/>
+        </p:spPr>
+        <p:txBody>
+          <a:bodyPr wrap="square" anchor="t" lIns="0" rIns="0" tIns="0" bIns="0">
+            <a:noAutofit/>
+          </a:bodyPr>
+          <a:lstStyle/>
+          <a:p>
+            <a:pPr algn="l">
+              <a:spcBef>
+                <a:spcPts val="0"/>
+              </a:spcBef>
+              <a:spcAft>
+                <a:spcPts val="200"/>
+              </a:spcAft>
+            </a:pPr>
+            <a:r>
+              <a:rPr sz="1400" b="1" i="0">
+                <a:solidFill>
+                  <a:srgbClr val="156082"/>
+                </a:solidFill>
+                <a:latin typeface="Calibri"/>
+              </a:rPr>
+              <a:t>Collection</a:t>
+            </a:r>
+          </a:p>
+        </p:txBody>
+      </p:sp>
+      <p:sp>
+        <p:nvSpPr>
+          <p:cNvPr id="17" name="TextBox 16"/>
+          <p:cNvSpPr txBox="1"/>
+          <p:nvPr/>
+        </p:nvSpPr>
+        <p:spPr>
+          <a:xfrm>
+            <a:off x="5138928" y="2084831"/>
+            <a:ext cx="6485839" cy="1097280"/>
           </a:xfrm>
           <a:prstGeom prst="rect">
             <a:avLst/>
@@ -33795,35 +33291,35 @@
                 <a:spcPts val="0"/>
               </a:spcBef>
               <a:spcAft>
-                <a:spcPts val="1300"/>
-              </a:spcAft>
-            </a:pPr>
-            <a:r>
-              <a:rPr sz="1400" b="1">
-                <a:solidFill>
-                  <a:srgbClr val="E97132"/>
+                <a:spcPts val="500"/>
+              </a:spcAft>
+            </a:pPr>
+            <a:r>
+              <a:rPr sz="1200" b="1">
+                <a:solidFill>
+                  <a:srgbClr val="156082"/>
                 </a:solidFill>
                 <a:latin typeface="Calibri"/>
               </a:rPr>
               <a:t>▸  </a:t>
             </a:r>
             <a:r>
-              <a:rPr sz="1400" b="1">
+              <a:rPr sz="1200" b="1">
                 <a:solidFill>
                   <a:srgbClr val="0E2841"/>
                 </a:solidFill>
                 <a:latin typeface="Calibri"/>
               </a:rPr>
-              <a:t>collections:  </a:t>
-            </a:r>
-            <a:r>
-              <a:rPr sz="1400">
+              <a:t>Stored:  </a:t>
+            </a:r>
+            <a:r>
+              <a:rPr sz="1200">
                 <a:solidFill>
                   <a:srgbClr val="1E2B36"/>
                 </a:solidFill>
                 <a:latin typeface="Calibri"/>
               </a:rPr>
-              <a:t>a small registry that maps each collection id to its feature table and CRS</a:t>
+              <a:t>id, title, description, itemType, crs</a:t>
             </a:r>
           </a:p>
           <a:p>
@@ -33835,35 +33331,35 @@
                 <a:spcPts val="0"/>
               </a:spcBef>
               <a:spcAft>
-                <a:spcPts val="1300"/>
-              </a:spcAft>
-            </a:pPr>
-            <a:r>
-              <a:rPr sz="1400" b="1">
-                <a:solidFill>
-                  <a:srgbClr val="E97132"/>
+                <a:spcPts val="500"/>
+              </a:spcAft>
+            </a:pPr>
+            <a:r>
+              <a:rPr sz="1200" b="1">
+                <a:solidFill>
+                  <a:srgbClr val="156082"/>
                 </a:solidFill>
                 <a:latin typeface="Calibri"/>
               </a:rPr>
               <a:t>▸  </a:t>
             </a:r>
             <a:r>
-              <a:rPr sz="1400" b="1">
+              <a:rPr sz="1200" b="1">
                 <a:solidFill>
                   <a:srgbClr val="0E2841"/>
                 </a:solidFill>
                 <a:latin typeface="Calibri"/>
               </a:rPr>
-              <a:t>feature table:  </a:t>
-            </a:r>
-            <a:r>
-              <a:rPr sz="1400">
+              <a:t>Derived:  </a:t>
+            </a:r>
+            <a:r>
+              <a:rPr sz="1200">
                 <a:solidFill>
                   <a:srgbClr val="1E2B36"/>
                 </a:solidFill>
                 <a:latin typeface="Calibri"/>
               </a:rPr>
-              <a:t>one row per moving feature; the trajectory is a single MobilityDB tgeompoint column</a:t>
+              <a:t>extent (spatial bbox and time interval)</a:t>
             </a:r>
           </a:p>
           <a:p>
@@ -33875,37 +33371,102 @@
                 <a:spcPts val="0"/>
               </a:spcBef>
               <a:spcAft>
-                <a:spcPts val="1300"/>
-              </a:spcAft>
-            </a:pPr>
-            <a:r>
-              <a:rPr sz="1400" b="1">
+                <a:spcPts val="500"/>
+              </a:spcAft>
+            </a:pPr>
+            <a:r>
+              <a:rPr sz="1200" b="1">
+                <a:solidFill>
+                  <a:srgbClr val="156082"/>
+                </a:solidFill>
+                <a:latin typeface="Calibri"/>
+              </a:rPr>
+              <a:t>▸  </a:t>
+            </a:r>
+            <a:r>
+              <a:rPr sz="1200" b="1">
+                <a:solidFill>
+                  <a:srgbClr val="0E2841"/>
+                </a:solidFill>
+                <a:latin typeface="Calibri"/>
+              </a:rPr>
+              <a:t>Generated:  </a:t>
+            </a:r>
+            <a:r>
+              <a:rPr sz="1200">
+                <a:solidFill>
+                  <a:srgbClr val="1E2B36"/>
+                </a:solidFill>
+                <a:latin typeface="Calibri"/>
+              </a:rPr>
+              <a:t>links</a:t>
+            </a:r>
+          </a:p>
+        </p:txBody>
+      </p:sp>
+      <p:sp>
+        <p:nvSpPr>
+          <p:cNvPr id="18" name="TextBox 17"/>
+          <p:cNvSpPr txBox="1"/>
+          <p:nvPr/>
+        </p:nvSpPr>
+        <p:spPr>
+          <a:xfrm>
+            <a:off x="5138928" y="3255264"/>
+            <a:ext cx="6485839" cy="274320"/>
+          </a:xfrm>
+          <a:prstGeom prst="rect">
+            <a:avLst/>
+          </a:prstGeom>
+          <a:noFill/>
+        </p:spPr>
+        <p:txBody>
+          <a:bodyPr wrap="square" anchor="t" lIns="0" rIns="0" tIns="0" bIns="0">
+            <a:noAutofit/>
+          </a:bodyPr>
+          <a:lstStyle/>
+          <a:p>
+            <a:pPr algn="l">
+              <a:spcBef>
+                <a:spcPts val="0"/>
+              </a:spcBef>
+              <a:spcAft>
+                <a:spcPts val="200"/>
+              </a:spcAft>
+            </a:pPr>
+            <a:r>
+              <a:rPr sz="1400" b="1" i="0">
                 <a:solidFill>
                   <a:srgbClr val="E97132"/>
                 </a:solidFill>
                 <a:latin typeface="Calibri"/>
               </a:rPr>
-              <a:t>▸  </a:t>
-            </a:r>
-            <a:r>
-              <a:rPr sz="1400" b="1">
-                <a:solidFill>
-                  <a:srgbClr val="0E2841"/>
-                </a:solidFill>
-                <a:latin typeface="Calibri"/>
-              </a:rPr>
-              <a:t>GiST index:  </a:t>
-            </a:r>
-            <a:r>
-              <a:rPr sz="1400">
-                <a:solidFill>
-                  <a:srgbClr val="1E2B36"/>
-                </a:solidFill>
-                <a:latin typeface="Calibri"/>
-              </a:rPr>
-              <a:t>gist (trip) backs the bbox and datetime filters with one spatio-temporal index</a:t>
-            </a:r>
-          </a:p>
+              <a:t>MovingFeature</a:t>
+            </a:r>
+          </a:p>
+        </p:txBody>
+      </p:sp>
+      <p:sp>
+        <p:nvSpPr>
+          <p:cNvPr id="19" name="TextBox 18"/>
+          <p:cNvSpPr txBox="1"/>
+          <p:nvPr/>
+        </p:nvSpPr>
+        <p:spPr>
+          <a:xfrm>
+            <a:off x="5138928" y="3566160"/>
+            <a:ext cx="6485839" cy="1828800"/>
+          </a:xfrm>
+          <a:prstGeom prst="rect">
+            <a:avLst/>
+          </a:prstGeom>
+          <a:noFill/>
+        </p:spPr>
+        <p:txBody>
+          <a:bodyPr wrap="square" lIns="0" rIns="0" tIns="0" bIns="0">
+            <a:noAutofit/>
+          </a:bodyPr>
+          <a:lstStyle/>
           <a:p>
             <a:pPr>
               <a:lnSpc>
@@ -33915,11 +33476,11 @@
                 <a:spcPts val="0"/>
               </a:spcBef>
               <a:spcAft>
-                <a:spcPts val="1300"/>
-              </a:spcAft>
-            </a:pPr>
-            <a:r>
-              <a:rPr sz="1400" b="1">
+                <a:spcPts val="500"/>
+              </a:spcAft>
+            </a:pPr>
+            <a:r>
+              <a:rPr sz="1200" b="1">
                 <a:solidFill>
                   <a:srgbClr val="E97132"/>
                 </a:solidFill>
@@ -33928,36 +33489,196 @@
               <a:t>▸  </a:t>
             </a:r>
             <a:r>
-              <a:rPr sz="1400" b="1">
+              <a:rPr sz="1200" b="1">
                 <a:solidFill>
                   <a:srgbClr val="0E2841"/>
                 </a:solidFill>
                 <a:latin typeface="Calibri"/>
               </a:rPr>
-              <a:t>Derived properties:  </a:t>
-            </a:r>
-            <a:r>
-              <a:rPr sz="1400">
+              <a:t>Stored:  </a:t>
+            </a:r>
+            <a:r>
+              <a:rPr sz="1200">
                 <a:solidFill>
                   <a:srgbClr val="1E2B36"/>
                 </a:solidFill>
                 <a:latin typeface="Calibri"/>
               </a:rPr>
-              <a:t>speed, distance and heading are computed from trip on demand, not stored</a:t>
-            </a:r>
-          </a:p>
-        </p:txBody>
-      </p:sp>
-      <p:sp>
-        <p:nvSpPr>
-          <p:cNvPr id="15" name="TextBox 14"/>
+              <a:t>id, properties (mmsi, name)</a:t>
+            </a:r>
+          </a:p>
+          <a:p>
+            <a:pPr>
+              <a:lnSpc>
+                <a:spcPct val="106000"/>
+              </a:lnSpc>
+              <a:spcBef>
+                <a:spcPts val="0"/>
+              </a:spcBef>
+              <a:spcAft>
+                <a:spcPts val="500"/>
+              </a:spcAft>
+            </a:pPr>
+            <a:r>
+              <a:rPr sz="1200" b="1">
+                <a:solidFill>
+                  <a:srgbClr val="E97132"/>
+                </a:solidFill>
+                <a:latin typeface="Calibri"/>
+              </a:rPr>
+              <a:t>▸  </a:t>
+            </a:r>
+            <a:r>
+              <a:rPr sz="1200" b="1">
+                <a:solidFill>
+                  <a:srgbClr val="0E2841"/>
+                </a:solidFill>
+                <a:latin typeface="Calibri"/>
+              </a:rPr>
+              <a:t>Derived from trip:  </a:t>
+            </a:r>
+            <a:r>
+              <a:rPr sz="1200">
+                <a:solidFill>
+                  <a:srgbClr val="1E2B36"/>
+                </a:solidFill>
+                <a:latin typeface="Calibri"/>
+              </a:rPr>
+              <a:t>temporalGeometry, bbox, time, geometry</a:t>
+            </a:r>
+          </a:p>
+          <a:p>
+            <a:pPr>
+              <a:lnSpc>
+                <a:spcPct val="106000"/>
+              </a:lnSpc>
+              <a:spcBef>
+                <a:spcPts val="0"/>
+              </a:spcBef>
+              <a:spcAft>
+                <a:spcPts val="500"/>
+              </a:spcAft>
+            </a:pPr>
+            <a:r>
+              <a:rPr sz="1200" b="1">
+                <a:solidFill>
+                  <a:srgbClr val="E97132"/>
+                </a:solidFill>
+                <a:latin typeface="Calibri"/>
+              </a:rPr>
+              <a:t>▸  </a:t>
+            </a:r>
+            <a:r>
+              <a:rPr sz="1200" b="1">
+                <a:solidFill>
+                  <a:srgbClr val="0E2841"/>
+                </a:solidFill>
+                <a:latin typeface="Calibri"/>
+              </a:rPr>
+              <a:t>From the registry:  </a:t>
+            </a:r>
+            <a:r>
+              <a:rPr sz="1200">
+                <a:solidFill>
+                  <a:srgbClr val="1E2B36"/>
+                </a:solidFill>
+                <a:latin typeface="Calibri"/>
+              </a:rPr>
+              <a:t>crs</a:t>
+            </a:r>
+          </a:p>
+          <a:p>
+            <a:pPr>
+              <a:lnSpc>
+                <a:spcPct val="106000"/>
+              </a:lnSpc>
+              <a:spcBef>
+                <a:spcPts val="0"/>
+              </a:spcBef>
+              <a:spcAft>
+                <a:spcPts val="500"/>
+              </a:spcAft>
+            </a:pPr>
+            <a:r>
+              <a:rPr sz="1200" b="1">
+                <a:solidFill>
+                  <a:srgbClr val="E97132"/>
+                </a:solidFill>
+                <a:latin typeface="Calibri"/>
+              </a:rPr>
+              <a:t>▸  </a:t>
+            </a:r>
+            <a:r>
+              <a:rPr sz="1200" b="1">
+                <a:solidFill>
+                  <a:srgbClr val="0E2841"/>
+                </a:solidFill>
+                <a:latin typeface="Calibri"/>
+              </a:rPr>
+              <a:t>Constant:  </a:t>
+            </a:r>
+            <a:r>
+              <a:rPr sz="1200">
+                <a:solidFill>
+                  <a:srgbClr val="1E2B36"/>
+                </a:solidFill>
+                <a:latin typeface="Calibri"/>
+              </a:rPr>
+              <a:t>trs</a:t>
+            </a:r>
+          </a:p>
+          <a:p>
+            <a:pPr>
+              <a:lnSpc>
+                <a:spcPct val="106000"/>
+              </a:lnSpc>
+              <a:spcBef>
+                <a:spcPts val="0"/>
+              </a:spcBef>
+              <a:spcAft>
+                <a:spcPts val="500"/>
+              </a:spcAft>
+            </a:pPr>
+            <a:r>
+              <a:rPr sz="1200" b="1">
+                <a:solidFill>
+                  <a:srgbClr val="E97132"/>
+                </a:solidFill>
+                <a:latin typeface="Calibri"/>
+              </a:rPr>
+              <a:t>▸  </a:t>
+            </a:r>
+            <a:r>
+              <a:rPr sz="1200" b="1">
+                <a:solidFill>
+                  <a:srgbClr val="0E2841"/>
+                </a:solidFill>
+                <a:latin typeface="Calibri"/>
+              </a:rPr>
+              <a:t>Generated:  </a:t>
+            </a:r>
+            <a:r>
+              <a:rPr sz="1200">
+                <a:solidFill>
+                  <a:srgbClr val="1E2B36"/>
+                </a:solidFill>
+                <a:latin typeface="Calibri"/>
+              </a:rPr>
+              <a:t>links</a:t>
+            </a:r>
+          </a:p>
+        </p:txBody>
+      </p:sp>
+      <p:sp>
+        <p:nvSpPr>
+          <p:cNvPr id="20" name="TextBox 19"/>
           <p:cNvSpPr txBox="1"/>
           <p:nvPr/>
         </p:nvSpPr>
         <p:spPr>
           <a:xfrm>
-            <a:off x="566928" y="6126480"/>
-            <a:ext cx="6400800" cy="274320"/>
+            <a:off x="5138928" y="5669280"/>
+            <a:ext cx="6485839" cy="457200"/>
           </a:xfrm>
           <a:prstGeom prst="rect">
             <a:avLst/>
@@ -33985,14 +33706,14 @@
                 </a:solidFill>
                 <a:latin typeface="Calibri"/>
               </a:rPr>
-              <a:t>trip is a native MobilityDB type; the bounding box and time span come from its inline STBOX at O(1) cost.</a:t>
-            </a:r>
-          </a:p>
-        </p:txBody>
-      </p:sp>
-      <p:sp>
-        <p:nvSpPr>
-          <p:cNvPr id="16" name="Rectangle 15"/>
+              <a:t>Derived fields come O(1) from the tgeompoint and its inline STBOX; links are generated per request.</a:t>
+            </a:r>
+          </a:p>
+        </p:txBody>
+      </p:sp>
+      <p:sp>
+        <p:nvSpPr>
+          <p:cNvPr id="21" name="Rectangle 20"/>
           <p:cNvSpPr/>
           <p:nvPr/>
         </p:nvSpPr>
@@ -34036,7 +33757,7 @@
       </p:sp>
       <p:sp>
         <p:nvSpPr>
-          <p:cNvPr id="17" name="TextBox 16"/>
+          <p:cNvPr id="22" name="TextBox 21"/>
           <p:cNvSpPr txBox="1"/>
           <p:nvPr/>
         </p:nvSpPr>
@@ -34078,7 +33799,7 @@
       </p:sp>
       <p:sp>
         <p:nvSpPr>
-          <p:cNvPr id="18" name="TextBox 17"/>
+          <p:cNvPr id="23" name="TextBox 22"/>
           <p:cNvSpPr txBox="1"/>
           <p:nvPr/>
         </p:nvSpPr>

--- a/MobilityAPIV5.pptx
+++ b/MobilityAPIV5.pptx
@@ -8213,7 +8213,7 @@
         <p:spPr>
           <a:xfrm>
             <a:off x="6281928" y="2194560"/>
-            <a:ext cx="5342839" cy="2103120"/>
+            <a:ext cx="5342839" cy="2743200"/>
           </a:xfrm>
           <a:prstGeom prst="roundRect">
             <a:avLst>
@@ -8259,7 +8259,7 @@
         <p:spPr>
           <a:xfrm>
             <a:off x="6409944" y="2286000"/>
-            <a:ext cx="5086807" cy="1920239"/>
+            <a:ext cx="5086807" cy="2560320"/>
           </a:xfrm>
           <a:prstGeom prst="rect">
             <a:avLst/>
@@ -8348,6 +8348,42 @@
                 </a:solidFill>
                 <a:latin typeface="Consolas"/>
               </a:rPr>
+              <a:t>, </a:t>
+            </a:r>
+            <a:r>
+              <a:rPr sz="1200">
+                <a:solidFill>
+                  <a:srgbClr val="6FC3E0"/>
+                </a:solidFill>
+                <a:latin typeface="Consolas"/>
+              </a:rPr>
+              <a:t>"title"</a:t>
+            </a:r>
+            <a:r>
+              <a:rPr sz="1200">
+                <a:solidFill>
+                  <a:srgbClr val="C2D0DA"/>
+                </a:solidFill>
+                <a:latin typeface="Consolas"/>
+              </a:rPr>
+              <a:t>: </a:t>
+            </a:r>
+            <a:r>
+              <a:rPr sz="1200">
+                <a:solidFill>
+                  <a:srgbClr val="E6A36A"/>
+                </a:solidFill>
+                <a:latin typeface="Consolas"/>
+              </a:rPr>
+              <a:t>"ships"</a:t>
+            </a:r>
+            <a:r>
+              <a:rPr sz="1200">
+                <a:solidFill>
+                  <a:srgbClr val="C2D0DA"/>
+                </a:solidFill>
+                <a:latin typeface="Consolas"/>
+              </a:rPr>
               <a:t>,</a:t>
             </a:r>
           </a:p>
@@ -8379,7 +8415,7 @@
                 </a:solidFill>
                 <a:latin typeface="Consolas"/>
               </a:rPr>
-              <a:t>"title"</a:t>
+              <a:t>"itemType"</a:t>
             </a:r>
             <a:r>
               <a:rPr sz="1200">
@@ -8397,7 +8433,7 @@
                 </a:solidFill>
                 <a:latin typeface="Consolas"/>
               </a:rPr>
-              <a:t>"ships"</a:t>
+              <a:t>"movingfeature"</a:t>
             </a:r>
             <a:r>
               <a:rPr sz="1200">
@@ -8437,7 +8473,7 @@
                 </a:solidFill>
                 <a:latin typeface="Consolas"/>
               </a:rPr>
-              <a:t>"itemType"</a:t>
+              <a:t>"description"</a:t>
             </a:r>
             <a:r>
               <a:rPr sz="1200">
@@ -8455,7 +8491,7 @@
                 </a:solidFill>
                 <a:latin typeface="Consolas"/>
               </a:rPr>
-              <a:t>"movingfeature"</a:t>
+              <a:t>"Danish AIS vessel trajectories"</a:t>
             </a:r>
             <a:r>
               <a:rPr sz="1200">
@@ -8495,16 +8531,34 @@
                 </a:solidFill>
                 <a:latin typeface="Consolas"/>
               </a:rPr>
-              <a:t>"description"</a:t>
-            </a:r>
-            <a:r>
-              <a:rPr sz="1200">
-                <a:solidFill>
-                  <a:srgbClr val="C2D0DA"/>
-                </a:solidFill>
-                <a:latin typeface="Consolas"/>
-              </a:rPr>
-              <a:t>: "Danish AIS vessel</a:t>
+              <a:t>"crs"</a:t>
+            </a:r>
+            <a:r>
+              <a:rPr sz="1200">
+                <a:solidFill>
+                  <a:srgbClr val="C2D0DA"/>
+                </a:solidFill>
+                <a:latin typeface="Consolas"/>
+              </a:rPr>
+              <a:t>: [</a:t>
+            </a:r>
+            <a:r>
+              <a:rPr sz="1200">
+                <a:solidFill>
+                  <a:srgbClr val="E6A36A"/>
+                </a:solidFill>
+                <a:latin typeface="Consolas"/>
+              </a:rPr>
+              <a:t>".../def/crs/EPSG/0/25832"</a:t>
+            </a:r>
+            <a:r>
+              <a:rPr sz="1200">
+                <a:solidFill>
+                  <a:srgbClr val="C2D0DA"/>
+                </a:solidFill>
+                <a:latin typeface="Consolas"/>
+              </a:rPr>
+              <a:t>],</a:t>
             </a:r>
           </a:p>
           <a:p>
@@ -8526,7 +8580,25 @@
                 </a:solidFill>
                 <a:latin typeface="Consolas"/>
               </a:rPr>
-              <a:t>                  trajectories</a:t>
+              <a:t>  </a:t>
+            </a:r>
+            <a:r>
+              <a:rPr sz="1200">
+                <a:solidFill>
+                  <a:srgbClr val="6FC3E0"/>
+                </a:solidFill>
+                <a:latin typeface="Consolas"/>
+              </a:rPr>
+              <a:t>"extent"</a:t>
+            </a:r>
+            <a:r>
+              <a:rPr sz="1200">
+                <a:solidFill>
+                  <a:srgbClr val="C2D0DA"/>
+                </a:solidFill>
+                <a:latin typeface="Consolas"/>
+              </a:rPr>
+              <a:t>: {</a:t>
             </a:r>
           </a:p>
           <a:p>
@@ -8548,7 +8620,79 @@
                 </a:solidFill>
                 <a:latin typeface="Consolas"/>
               </a:rPr>
-              <a:t>                  (MobilityDB tgeompoint)"</a:t>
+              <a:t>    </a:t>
+            </a:r>
+            <a:r>
+              <a:rPr sz="1200">
+                <a:solidFill>
+                  <a:srgbClr val="6FC3E0"/>
+                </a:solidFill>
+                <a:latin typeface="Consolas"/>
+              </a:rPr>
+              <a:t>"spatial"</a:t>
+            </a:r>
+            <a:r>
+              <a:rPr sz="1200">
+                <a:solidFill>
+                  <a:srgbClr val="C2D0DA"/>
+                </a:solidFill>
+                <a:latin typeface="Consolas"/>
+              </a:rPr>
+              <a:t>:  { </a:t>
+            </a:r>
+            <a:r>
+              <a:rPr sz="1200">
+                <a:solidFill>
+                  <a:srgbClr val="6FC3E0"/>
+                </a:solidFill>
+                <a:latin typeface="Consolas"/>
+              </a:rPr>
+              <a:t>"bbox"</a:t>
+            </a:r>
+            <a:r>
+              <a:rPr sz="1200">
+                <a:solidFill>
+                  <a:srgbClr val="C2D0DA"/>
+                </a:solidFill>
+                <a:latin typeface="Consolas"/>
+              </a:rPr>
+              <a:t>: [[</a:t>
+            </a:r>
+            <a:r>
+              <a:rPr sz="1200">
+                <a:solidFill>
+                  <a:srgbClr val="C9E08A"/>
+                </a:solidFill>
+                <a:latin typeface="Consolas"/>
+              </a:rPr>
+              <a:t>152625</a:t>
+            </a:r>
+            <a:r>
+              <a:rPr sz="1200">
+                <a:solidFill>
+                  <a:srgbClr val="C2D0DA"/>
+                </a:solidFill>
+                <a:latin typeface="Consolas"/>
+              </a:rPr>
+              <a:t>, </a:t>
+            </a:r>
+            <a:r>
+              <a:rPr sz="1200">
+                <a:solidFill>
+                  <a:srgbClr val="C9E08A"/>
+                </a:solidFill>
+                <a:latin typeface="Consolas"/>
+              </a:rPr>
+              <a:t>5942006</a:t>
+            </a:r>
+            <a:r>
+              <a:rPr sz="1200">
+                <a:solidFill>
+                  <a:srgbClr val="C2D0DA"/>
+                </a:solidFill>
+                <a:latin typeface="Consolas"/>
+              </a:rPr>
+              <a:t>,</a:t>
             </a:r>
           </a:p>
           <a:p>
@@ -8570,6 +8714,372 @@
                 </a:solidFill>
                 <a:latin typeface="Consolas"/>
               </a:rPr>
+              <a:t>                            </a:t>
+            </a:r>
+            <a:r>
+              <a:rPr sz="1200">
+                <a:solidFill>
+                  <a:srgbClr val="C9E08A"/>
+                </a:solidFill>
+                <a:latin typeface="Consolas"/>
+              </a:rPr>
+              <a:t>1020003</a:t>
+            </a:r>
+            <a:r>
+              <a:rPr sz="1200">
+                <a:solidFill>
+                  <a:srgbClr val="C2D0DA"/>
+                </a:solidFill>
+                <a:latin typeface="Consolas"/>
+              </a:rPr>
+              <a:t>, </a:t>
+            </a:r>
+            <a:r>
+              <a:rPr sz="1200">
+                <a:solidFill>
+                  <a:srgbClr val="C9E08A"/>
+                </a:solidFill>
+                <a:latin typeface="Consolas"/>
+              </a:rPr>
+              <a:t>6545239</a:t>
+            </a:r>
+            <a:r>
+              <a:rPr sz="1200">
+                <a:solidFill>
+                  <a:srgbClr val="C2D0DA"/>
+                </a:solidFill>
+                <a:latin typeface="Consolas"/>
+              </a:rPr>
+              <a:t>]] },</a:t>
+            </a:r>
+          </a:p>
+          <a:p>
+            <a:pPr>
+              <a:lnSpc>
+                <a:spcPct val="102000"/>
+              </a:lnSpc>
+              <a:spcBef>
+                <a:spcPts val="0"/>
+              </a:spcBef>
+              <a:spcAft>
+                <a:spcPts val="0"/>
+              </a:spcAft>
+            </a:pPr>
+            <a:r>
+              <a:rPr sz="1200">
+                <a:solidFill>
+                  <a:srgbClr val="C2D0DA"/>
+                </a:solidFill>
+                <a:latin typeface="Consolas"/>
+              </a:rPr>
+              <a:t>    </a:t>
+            </a:r>
+            <a:r>
+              <a:rPr sz="1200">
+                <a:solidFill>
+                  <a:srgbClr val="6FC3E0"/>
+                </a:solidFill>
+                <a:latin typeface="Consolas"/>
+              </a:rPr>
+              <a:t>"temporal"</a:t>
+            </a:r>
+            <a:r>
+              <a:rPr sz="1200">
+                <a:solidFill>
+                  <a:srgbClr val="C2D0DA"/>
+                </a:solidFill>
+                <a:latin typeface="Consolas"/>
+              </a:rPr>
+              <a:t>: { </a:t>
+            </a:r>
+            <a:r>
+              <a:rPr sz="1200">
+                <a:solidFill>
+                  <a:srgbClr val="6FC3E0"/>
+                </a:solidFill>
+                <a:latin typeface="Consolas"/>
+              </a:rPr>
+              <a:t>"interval"</a:t>
+            </a:r>
+            <a:r>
+              <a:rPr sz="1200">
+                <a:solidFill>
+                  <a:srgbClr val="C2D0DA"/>
+                </a:solidFill>
+                <a:latin typeface="Consolas"/>
+              </a:rPr>
+              <a:t>: [[</a:t>
+            </a:r>
+            <a:r>
+              <a:rPr sz="1200">
+                <a:solidFill>
+                  <a:srgbClr val="E6A36A"/>
+                </a:solidFill>
+                <a:latin typeface="Consolas"/>
+              </a:rPr>
+              <a:t>"2026-02-26 ..."</a:t>
+            </a:r>
+            <a:r>
+              <a:rPr sz="1200">
+                <a:solidFill>
+                  <a:srgbClr val="C2D0DA"/>
+                </a:solidFill>
+                <a:latin typeface="Consolas"/>
+              </a:rPr>
+              <a:t>,</a:t>
+            </a:r>
+          </a:p>
+          <a:p>
+            <a:pPr>
+              <a:lnSpc>
+                <a:spcPct val="102000"/>
+              </a:lnSpc>
+              <a:spcBef>
+                <a:spcPts val="0"/>
+              </a:spcBef>
+              <a:spcAft>
+                <a:spcPts val="0"/>
+              </a:spcAft>
+            </a:pPr>
+            <a:r>
+              <a:rPr sz="1200">
+                <a:solidFill>
+                  <a:srgbClr val="C2D0DA"/>
+                </a:solidFill>
+                <a:latin typeface="Consolas"/>
+              </a:rPr>
+              <a:t>                                </a:t>
+            </a:r>
+            <a:r>
+              <a:rPr sz="1200">
+                <a:solidFill>
+                  <a:srgbClr val="E6A36A"/>
+                </a:solidFill>
+                <a:latin typeface="Consolas"/>
+              </a:rPr>
+              <a:t>"2026-02-27 ..."</a:t>
+            </a:r>
+            <a:r>
+              <a:rPr sz="1200">
+                <a:solidFill>
+                  <a:srgbClr val="C2D0DA"/>
+                </a:solidFill>
+                <a:latin typeface="Consolas"/>
+              </a:rPr>
+              <a:t>]] } },</a:t>
+            </a:r>
+          </a:p>
+          <a:p>
+            <a:pPr>
+              <a:lnSpc>
+                <a:spcPct val="102000"/>
+              </a:lnSpc>
+              <a:spcBef>
+                <a:spcPts val="0"/>
+              </a:spcBef>
+              <a:spcAft>
+                <a:spcPts val="0"/>
+              </a:spcAft>
+            </a:pPr>
+            <a:r>
+              <a:rPr sz="1200">
+                <a:solidFill>
+                  <a:srgbClr val="C2D0DA"/>
+                </a:solidFill>
+                <a:latin typeface="Consolas"/>
+              </a:rPr>
+              <a:t>  </a:t>
+            </a:r>
+            <a:r>
+              <a:rPr sz="1200">
+                <a:solidFill>
+                  <a:srgbClr val="6FC3E0"/>
+                </a:solidFill>
+                <a:latin typeface="Consolas"/>
+              </a:rPr>
+              <a:t>"links"</a:t>
+            </a:r>
+            <a:r>
+              <a:rPr sz="1200">
+                <a:solidFill>
+                  <a:srgbClr val="C2D0DA"/>
+                </a:solidFill>
+                <a:latin typeface="Consolas"/>
+              </a:rPr>
+              <a:t>: [ { </a:t>
+            </a:r>
+            <a:r>
+              <a:rPr sz="1200">
+                <a:solidFill>
+                  <a:srgbClr val="6FC3E0"/>
+                </a:solidFill>
+                <a:latin typeface="Consolas"/>
+              </a:rPr>
+              <a:t>"rel"</a:t>
+            </a:r>
+            <a:r>
+              <a:rPr sz="1200">
+                <a:solidFill>
+                  <a:srgbClr val="C2D0DA"/>
+                </a:solidFill>
+                <a:latin typeface="Consolas"/>
+              </a:rPr>
+              <a:t>: </a:t>
+            </a:r>
+            <a:r>
+              <a:rPr sz="1200">
+                <a:solidFill>
+                  <a:srgbClr val="E6A36A"/>
+                </a:solidFill>
+                <a:latin typeface="Consolas"/>
+              </a:rPr>
+              <a:t>"self"</a:t>
+            </a:r>
+            <a:r>
+              <a:rPr sz="1200">
+                <a:solidFill>
+                  <a:srgbClr val="C2D0DA"/>
+                </a:solidFill>
+                <a:latin typeface="Consolas"/>
+              </a:rPr>
+              <a:t> },</a:t>
+            </a:r>
+          </a:p>
+          <a:p>
+            <a:pPr>
+              <a:lnSpc>
+                <a:spcPct val="102000"/>
+              </a:lnSpc>
+              <a:spcBef>
+                <a:spcPts val="0"/>
+              </a:spcBef>
+              <a:spcAft>
+                <a:spcPts val="0"/>
+              </a:spcAft>
+            </a:pPr>
+            <a:r>
+              <a:rPr sz="1200">
+                <a:solidFill>
+                  <a:srgbClr val="C2D0DA"/>
+                </a:solidFill>
+                <a:latin typeface="Consolas"/>
+              </a:rPr>
+              <a:t>             { </a:t>
+            </a:r>
+            <a:r>
+              <a:rPr sz="1200">
+                <a:solidFill>
+                  <a:srgbClr val="6FC3E0"/>
+                </a:solidFill>
+                <a:latin typeface="Consolas"/>
+              </a:rPr>
+              <a:t>"rel"</a:t>
+            </a:r>
+            <a:r>
+              <a:rPr sz="1200">
+                <a:solidFill>
+                  <a:srgbClr val="C2D0DA"/>
+                </a:solidFill>
+                <a:latin typeface="Consolas"/>
+              </a:rPr>
+              <a:t>: </a:t>
+            </a:r>
+            <a:r>
+              <a:rPr sz="1200">
+                <a:solidFill>
+                  <a:srgbClr val="E6A36A"/>
+                </a:solidFill>
+                <a:latin typeface="Consolas"/>
+              </a:rPr>
+              <a:t>"items"</a:t>
+            </a:r>
+            <a:r>
+              <a:rPr sz="1200">
+                <a:solidFill>
+                  <a:srgbClr val="C2D0DA"/>
+                </a:solidFill>
+                <a:latin typeface="Consolas"/>
+              </a:rPr>
+              <a:t> },</a:t>
+            </a:r>
+          </a:p>
+          <a:p>
+            <a:pPr>
+              <a:lnSpc>
+                <a:spcPct val="102000"/>
+              </a:lnSpc>
+              <a:spcBef>
+                <a:spcPts val="0"/>
+              </a:spcBef>
+              <a:spcAft>
+                <a:spcPts val="0"/>
+              </a:spcAft>
+            </a:pPr>
+            <a:r>
+              <a:rPr sz="1200">
+                <a:solidFill>
+                  <a:srgbClr val="C2D0DA"/>
+                </a:solidFill>
+                <a:latin typeface="Consolas"/>
+              </a:rPr>
+              <a:t>             { </a:t>
+            </a:r>
+            <a:r>
+              <a:rPr sz="1200">
+                <a:solidFill>
+                  <a:srgbClr val="6FC3E0"/>
+                </a:solidFill>
+                <a:latin typeface="Consolas"/>
+              </a:rPr>
+              <a:t>"rel"</a:t>
+            </a:r>
+            <a:r>
+              <a:rPr sz="1200">
+                <a:solidFill>
+                  <a:srgbClr val="C2D0DA"/>
+                </a:solidFill>
+                <a:latin typeface="Consolas"/>
+              </a:rPr>
+              <a:t>: </a:t>
+            </a:r>
+            <a:r>
+              <a:rPr sz="1200">
+                <a:solidFill>
+                  <a:srgbClr val="E6A36A"/>
+                </a:solidFill>
+                <a:latin typeface="Consolas"/>
+              </a:rPr>
+              <a:t>"enclosure"</a:t>
+            </a:r>
+            <a:r>
+              <a:rPr sz="1200">
+                <a:solidFill>
+                  <a:srgbClr val="C2D0DA"/>
+                </a:solidFill>
+                <a:latin typeface="Consolas"/>
+              </a:rPr>
+              <a:t> } ]</a:t>
+            </a:r>
+          </a:p>
+          <a:p>
+            <a:pPr>
+              <a:lnSpc>
+                <a:spcPct val="102000"/>
+              </a:lnSpc>
+              <a:spcBef>
+                <a:spcPts val="0"/>
+              </a:spcBef>
+              <a:spcAft>
+                <a:spcPts val="0"/>
+              </a:spcAft>
+            </a:pPr>
+            <a:r>
+              <a:rPr sz="1200">
+                <a:solidFill>
+                  <a:srgbClr val="C2D0DA"/>
+                </a:solidFill>
+                <a:latin typeface="Consolas"/>
+              </a:rPr>
               <a:t>}</a:t>
             </a:r>
           </a:p>
@@ -8583,8 +9093,8 @@
         </p:nvSpPr>
         <p:spPr>
           <a:xfrm>
-            <a:off x="6281928" y="4526280"/>
-            <a:ext cx="5342839" cy="1463040"/>
+            <a:off x="6281928" y="5029200"/>
+            <a:ext cx="5342839" cy="1097280"/>
           </a:xfrm>
           <a:prstGeom prst="rect">
             <a:avLst/>
@@ -8624,7 +9134,7 @@
                 </a:solidFill>
                 <a:latin typeface="Calibri"/>
               </a:rPr>
-              <a:t>itemType is movingfeature, per OGC API – Moving Features</a:t>
+              <a:t>extent is the spatial bbox and time interval of the collection</a:t>
             </a:r>
           </a:p>
           <a:p>
@@ -8655,7 +9165,7 @@
                 </a:solidFill>
                 <a:latin typeface="Calibri"/>
               </a:rPr>
-              <a:t>Links are relative; the client follows them without hard-coding paths</a:t>
+              <a:t>crs and links round out the standard collection resource</a:t>
             </a:r>
           </a:p>
         </p:txBody>
@@ -9491,7 +10001,61 @@
                 </a:solidFill>
                 <a:latin typeface="Consolas"/>
               </a:rPr>
-              <a:t>"temporalGeometry"</a:t>
+              <a:t>"crs"</a:t>
+            </a:r>
+            <a:r>
+              <a:rPr sz="1200">
+                <a:solidFill>
+                  <a:srgbClr val="C2D0DA"/>
+                </a:solidFill>
+                <a:latin typeface="Consolas"/>
+              </a:rPr>
+              <a:t>: { </a:t>
+            </a:r>
+            <a:r>
+              <a:rPr sz="1200">
+                <a:solidFill>
+                  <a:srgbClr val="6FC3E0"/>
+                </a:solidFill>
+                <a:latin typeface="Consolas"/>
+              </a:rPr>
+              <a:t>"type"</a:t>
+            </a:r>
+            <a:r>
+              <a:rPr sz="1200">
+                <a:solidFill>
+                  <a:srgbClr val="C2D0DA"/>
+                </a:solidFill>
+                <a:latin typeface="Consolas"/>
+              </a:rPr>
+              <a:t>: </a:t>
+            </a:r>
+            <a:r>
+              <a:rPr sz="1200">
+                <a:solidFill>
+                  <a:srgbClr val="E6A36A"/>
+                </a:solidFill>
+                <a:latin typeface="Consolas"/>
+              </a:rPr>
+              <a:t>"Name"</a:t>
+            </a:r>
+            <a:r>
+              <a:rPr sz="1200">
+                <a:solidFill>
+                  <a:srgbClr val="C2D0DA"/>
+                </a:solidFill>
+                <a:latin typeface="Consolas"/>
+              </a:rPr>
+              <a:t>, </a:t>
+            </a:r>
+            <a:r>
+              <a:rPr sz="1200">
+                <a:solidFill>
+                  <a:srgbClr val="6FC3E0"/>
+                </a:solidFill>
+                <a:latin typeface="Consolas"/>
+              </a:rPr>
+              <a:t>"properties"</a:t>
             </a:r>
             <a:r>
               <a:rPr sz="1200">
@@ -9531,7 +10095,7 @@
                 </a:solidFill>
                 <a:latin typeface="Consolas"/>
               </a:rPr>
-              <a:t>"type"</a:t>
+              <a:t>"name"</a:t>
             </a:r>
             <a:r>
               <a:rPr sz="1200">
@@ -9549,16 +10113,16 @@
                 </a:solidFill>
                 <a:latin typeface="Consolas"/>
               </a:rPr>
-              <a:t>"MovingPoint"</a:t>
-            </a:r>
-            <a:r>
-              <a:rPr sz="1200">
-                <a:solidFill>
-                  <a:srgbClr val="C2D0DA"/>
-                </a:solidFill>
-                <a:latin typeface="Consolas"/>
-              </a:rPr>
-              <a:t>,</a:t>
+              <a:t>"urn:ogc:def:crs:EPSG::25832"</a:t>
+            </a:r>
+            <a:r>
+              <a:rPr sz="1200">
+                <a:solidFill>
+                  <a:srgbClr val="C2D0DA"/>
+                </a:solidFill>
+                <a:latin typeface="Consolas"/>
+              </a:rPr>
+              <a:t> } },</a:t>
             </a:r>
           </a:p>
           <a:p>
@@ -9580,7 +10144,7 @@
                 </a:solidFill>
                 <a:latin typeface="Consolas"/>
               </a:rPr>
-              <a:t>        </a:t>
+              <a:t>      </a:t>
             </a:r>
             <a:r>
               <a:rPr sz="1200">
@@ -9589,52 +10153,88 @@
                 </a:solidFill>
                 <a:latin typeface="Consolas"/>
               </a:rPr>
-              <a:t>"crs"</a:t>
-            </a:r>
-            <a:r>
-              <a:rPr sz="1200">
-                <a:solidFill>
-                  <a:srgbClr val="C2D0DA"/>
-                </a:solidFill>
-                <a:latin typeface="Consolas"/>
-              </a:rPr>
-              <a:t>: { </a:t>
-            </a:r>
-            <a:r>
-              <a:rPr sz="1200">
-                <a:solidFill>
-                  <a:srgbClr val="6FC3E0"/>
-                </a:solidFill>
-                <a:latin typeface="Consolas"/>
-              </a:rPr>
-              <a:t>"type"</a:t>
-            </a:r>
-            <a:r>
-              <a:rPr sz="1200">
-                <a:solidFill>
-                  <a:srgbClr val="C2D0DA"/>
-                </a:solidFill>
-                <a:latin typeface="Consolas"/>
-              </a:rPr>
-              <a:t>: </a:t>
-            </a:r>
-            <a:r>
-              <a:rPr sz="1200">
-                <a:solidFill>
-                  <a:srgbClr val="E6A36A"/>
-                </a:solidFill>
-                <a:latin typeface="Consolas"/>
-              </a:rPr>
-              <a:t>"Name"</a:t>
-            </a:r>
-            <a:r>
-              <a:rPr sz="1200">
-                <a:solidFill>
-                  <a:srgbClr val="C2D0DA"/>
-                </a:solidFill>
-                <a:latin typeface="Consolas"/>
-              </a:rPr>
-              <a:t>,</a:t>
+              <a:t>"bbox"</a:t>
+            </a:r>
+            <a:r>
+              <a:rPr sz="1200">
+                <a:solidFill>
+                  <a:srgbClr val="C2D0DA"/>
+                </a:solidFill>
+                <a:latin typeface="Consolas"/>
+              </a:rPr>
+              <a:t>: [</a:t>
+            </a:r>
+            <a:r>
+              <a:rPr sz="1200">
+                <a:solidFill>
+                  <a:srgbClr val="C9E08A"/>
+                </a:solidFill>
+                <a:latin typeface="Consolas"/>
+              </a:rPr>
+              <a:t>550889</a:t>
+            </a:r>
+            <a:r>
+              <a:rPr sz="1200">
+                <a:solidFill>
+                  <a:srgbClr val="C2D0DA"/>
+                </a:solidFill>
+                <a:latin typeface="Consolas"/>
+              </a:rPr>
+              <a:t>, </a:t>
+            </a:r>
+            <a:r>
+              <a:rPr sz="1200">
+                <a:solidFill>
+                  <a:srgbClr val="C9E08A"/>
+                </a:solidFill>
+                <a:latin typeface="Consolas"/>
+              </a:rPr>
+              <a:t>6328752</a:t>
+            </a:r>
+            <a:r>
+              <a:rPr sz="1200">
+                <a:solidFill>
+                  <a:srgbClr val="C2D0DA"/>
+                </a:solidFill>
+                <a:latin typeface="Consolas"/>
+              </a:rPr>
+              <a:t>, </a:t>
+            </a:r>
+            <a:r>
+              <a:rPr sz="1200">
+                <a:solidFill>
+                  <a:srgbClr val="C9E08A"/>
+                </a:solidFill>
+                <a:latin typeface="Consolas"/>
+              </a:rPr>
+              <a:t>616716</a:t>
+            </a:r>
+            <a:r>
+              <a:rPr sz="1200">
+                <a:solidFill>
+                  <a:srgbClr val="C2D0DA"/>
+                </a:solidFill>
+                <a:latin typeface="Consolas"/>
+              </a:rPr>
+              <a:t>, </a:t>
+            </a:r>
+            <a:r>
+              <a:rPr sz="1200">
+                <a:solidFill>
+                  <a:srgbClr val="C9E08A"/>
+                </a:solidFill>
+                <a:latin typeface="Consolas"/>
+              </a:rPr>
+              <a:t>6346258</a:t>
+            </a:r>
+            <a:r>
+              <a:rPr sz="1200">
+                <a:solidFill>
+                  <a:srgbClr val="C2D0DA"/>
+                </a:solidFill>
+                <a:latin typeface="Consolas"/>
+              </a:rPr>
+              <a:t>],</a:t>
             </a:r>
           </a:p>
           <a:p>
@@ -9656,7 +10256,7 @@
                 </a:solidFill>
                 <a:latin typeface="Consolas"/>
               </a:rPr>
-              <a:t>                 </a:t>
+              <a:t>      </a:t>
             </a:r>
             <a:r>
               <a:rPr sz="1200">
@@ -9665,34 +10265,16 @@
                 </a:solidFill>
                 <a:latin typeface="Consolas"/>
               </a:rPr>
-              <a:t>"properties"</a:t>
-            </a:r>
-            <a:r>
-              <a:rPr sz="1200">
-                <a:solidFill>
-                  <a:srgbClr val="C2D0DA"/>
-                </a:solidFill>
-                <a:latin typeface="Consolas"/>
-              </a:rPr>
-              <a:t>: { </a:t>
-            </a:r>
-            <a:r>
-              <a:rPr sz="1200">
-                <a:solidFill>
-                  <a:srgbClr val="6FC3E0"/>
-                </a:solidFill>
-                <a:latin typeface="Consolas"/>
-              </a:rPr>
-              <a:t>"name"</a:t>
-            </a:r>
-            <a:r>
-              <a:rPr sz="1200">
-                <a:solidFill>
-                  <a:srgbClr val="C2D0DA"/>
-                </a:solidFill>
-                <a:latin typeface="Consolas"/>
-              </a:rPr>
-              <a:t>: </a:t>
+              <a:t>"time"</a:t>
+            </a:r>
+            <a:r>
+              <a:rPr sz="1200">
+                <a:solidFill>
+                  <a:srgbClr val="C2D0DA"/>
+                </a:solidFill>
+                <a:latin typeface="Consolas"/>
+              </a:rPr>
+              <a:t>: [</a:t>
             </a:r>
             <a:r>
               <a:rPr sz="1200">
@@ -9701,16 +10283,34 @@
                 </a:solidFill>
                 <a:latin typeface="Consolas"/>
               </a:rPr>
-              <a:t>"urn:ogc:def:crs:EPSG::25832"</a:t>
-            </a:r>
-            <a:r>
-              <a:rPr sz="1200">
-                <a:solidFill>
-                  <a:srgbClr val="C2D0DA"/>
-                </a:solidFill>
-                <a:latin typeface="Consolas"/>
-              </a:rPr>
-              <a:t> } },</a:t>
+              <a:t>"2026-02-26 13:28:08+01"</a:t>
+            </a:r>
+            <a:r>
+              <a:rPr sz="1200">
+                <a:solidFill>
+                  <a:srgbClr val="C2D0DA"/>
+                </a:solidFill>
+                <a:latin typeface="Consolas"/>
+              </a:rPr>
+              <a:t>, </a:t>
+            </a:r>
+            <a:r>
+              <a:rPr sz="1200">
+                <a:solidFill>
+                  <a:srgbClr val="E6A36A"/>
+                </a:solidFill>
+                <a:latin typeface="Consolas"/>
+              </a:rPr>
+              <a:t>"2026-02-26 14:41:04+01"</a:t>
+            </a:r>
+            <a:r>
+              <a:rPr sz="1200">
+                <a:solidFill>
+                  <a:srgbClr val="C2D0DA"/>
+                </a:solidFill>
+                <a:latin typeface="Consolas"/>
+              </a:rPr>
+              <a:t>],</a:t>
             </a:r>
           </a:p>
           <a:p>
@@ -9732,7 +10332,7 @@
                 </a:solidFill>
                 <a:latin typeface="Consolas"/>
               </a:rPr>
-              <a:t>        </a:t>
+              <a:t>      </a:t>
             </a:r>
             <a:r>
               <a:rPr sz="1200">
@@ -9741,16 +10341,16 @@
                 </a:solidFill>
                 <a:latin typeface="Consolas"/>
               </a:rPr>
-              <a:t>"sequences"</a:t>
-            </a:r>
-            <a:r>
-              <a:rPr sz="1200">
-                <a:solidFill>
-                  <a:srgbClr val="C2D0DA"/>
-                </a:solidFill>
-                <a:latin typeface="Consolas"/>
-              </a:rPr>
-              <a:t>: [ { </a:t>
+              <a:t>"temporalGeometry"</a:t>
+            </a:r>
+            <a:r>
+              <a:rPr sz="1200">
+                <a:solidFill>
+                  <a:srgbClr val="C2D0DA"/>
+                </a:solidFill>
+                <a:latin typeface="Consolas"/>
+              </a:rPr>
+              <a:t>: { </a:t>
             </a:r>
             <a:r>
               <a:rPr sz="1200">
@@ -9759,16 +10359,16 @@
                 </a:solidFill>
                 <a:latin typeface="Consolas"/>
               </a:rPr>
-              <a:t>"datetimes"</a:t>
-            </a:r>
-            <a:r>
-              <a:rPr sz="1200">
-                <a:solidFill>
-                  <a:srgbClr val="C2D0DA"/>
-                </a:solidFill>
-                <a:latin typeface="Consolas"/>
-              </a:rPr>
-              <a:t>: [</a:t>
+              <a:t>"type"</a:t>
+            </a:r>
+            <a:r>
+              <a:rPr sz="1200">
+                <a:solidFill>
+                  <a:srgbClr val="C2D0DA"/>
+                </a:solidFill>
+                <a:latin typeface="Consolas"/>
+              </a:rPr>
+              <a:t>: </a:t>
             </a:r>
             <a:r>
               <a:rPr sz="1200">
@@ -9777,16 +10377,16 @@
                 </a:solidFill>
                 <a:latin typeface="Consolas"/>
               </a:rPr>
-              <a:t>"2026-02-26T13:28:08+01"</a:t>
-            </a:r>
-            <a:r>
-              <a:rPr sz="1200">
-                <a:solidFill>
-                  <a:srgbClr val="C2D0DA"/>
-                </a:solidFill>
-                <a:latin typeface="Consolas"/>
-              </a:rPr>
-              <a:t>, ...],</a:t>
+              <a:t>"MovingPoint"</a:t>
+            </a:r>
+            <a:r>
+              <a:rPr sz="1200">
+                <a:solidFill>
+                  <a:srgbClr val="C2D0DA"/>
+                </a:solidFill>
+                <a:latin typeface="Consolas"/>
+              </a:rPr>
+              <a:t>,</a:t>
             </a:r>
           </a:p>
           <a:p>
@@ -9808,7 +10408,7 @@
                 </a:solidFill>
                 <a:latin typeface="Consolas"/>
               </a:rPr>
-              <a:t>                         </a:t>
+              <a:t>        </a:t>
             </a:r>
             <a:r>
               <a:rPr sz="1200">
@@ -9817,6 +10417,42 @@
                 </a:solidFill>
                 <a:latin typeface="Consolas"/>
               </a:rPr>
+              <a:t>"sequences"</a:t>
+            </a:r>
+            <a:r>
+              <a:rPr sz="1200">
+                <a:solidFill>
+                  <a:srgbClr val="C2D0DA"/>
+                </a:solidFill>
+                <a:latin typeface="Consolas"/>
+              </a:rPr>
+              <a:t>: [ { </a:t>
+            </a:r>
+            <a:r>
+              <a:rPr sz="1200">
+                <a:solidFill>
+                  <a:srgbClr val="6FC3E0"/>
+                </a:solidFill>
+                <a:latin typeface="Consolas"/>
+              </a:rPr>
+              <a:t>"datetimes"</a:t>
+            </a:r>
+            <a:r>
+              <a:rPr sz="1200">
+                <a:solidFill>
+                  <a:srgbClr val="C2D0DA"/>
+                </a:solidFill>
+                <a:latin typeface="Consolas"/>
+              </a:rPr>
+              <a:t>: [...], </a:t>
+            </a:r>
+            <a:r>
+              <a:rPr sz="1200">
+                <a:solidFill>
+                  <a:srgbClr val="6FC3E0"/>
+                </a:solidFill>
+                <a:latin typeface="Consolas"/>
+              </a:rPr>
               <a:t>"coordinates"</a:t>
             </a:r>
             <a:r>
@@ -9826,43 +10462,7 @@
                 </a:solidFill>
                 <a:latin typeface="Consolas"/>
               </a:rPr>
-              <a:t>: [[</a:t>
-            </a:r>
-            <a:r>
-              <a:rPr sz="1200">
-                <a:solidFill>
-                  <a:srgbClr val="C9E08A"/>
-                </a:solidFill>
-                <a:latin typeface="Consolas"/>
-              </a:rPr>
-              <a:t>721000.4</a:t>
-            </a:r>
-            <a:r>
-              <a:rPr sz="1200">
-                <a:solidFill>
-                  <a:srgbClr val="C2D0DA"/>
-                </a:solidFill>
-                <a:latin typeface="Consolas"/>
-              </a:rPr>
-              <a:t>, </a:t>
-            </a:r>
-            <a:r>
-              <a:rPr sz="1200">
-                <a:solidFill>
-                  <a:srgbClr val="C9E08A"/>
-                </a:solidFill>
-                <a:latin typeface="Consolas"/>
-              </a:rPr>
-              <a:t>6178001.2</a:t>
-            </a:r>
-            <a:r>
-              <a:rPr sz="1200">
-                <a:solidFill>
-                  <a:srgbClr val="C2D0DA"/>
-                </a:solidFill>
-                <a:latin typeface="Consolas"/>
-              </a:rPr>
-              <a:t>], ...] } ],</a:t>
+              <a:t>: [...] } ],</a:t>
             </a:r>
           </a:p>
           <a:p>
@@ -9920,7 +10520,119 @@
                 </a:solidFill>
                 <a:latin typeface="Consolas"/>
               </a:rPr>
-              <a:t> } },</a:t>
+              <a:t> },</a:t>
+            </a:r>
+          </a:p>
+          <a:p>
+            <a:pPr>
+              <a:lnSpc>
+                <a:spcPct val="102000"/>
+              </a:lnSpc>
+              <a:spcBef>
+                <a:spcPts val="0"/>
+              </a:spcBef>
+              <a:spcAft>
+                <a:spcPts val="0"/>
+              </a:spcAft>
+            </a:pPr>
+            <a:r>
+              <a:rPr sz="1200">
+                <a:solidFill>
+                  <a:srgbClr val="C2D0DA"/>
+                </a:solidFill>
+                <a:latin typeface="Consolas"/>
+              </a:rPr>
+              <a:t>      </a:t>
+            </a:r>
+            <a:r>
+              <a:rPr sz="1200">
+                <a:solidFill>
+                  <a:srgbClr val="6FC3E0"/>
+                </a:solidFill>
+                <a:latin typeface="Consolas"/>
+              </a:rPr>
+              <a:t>"links"</a:t>
+            </a:r>
+            <a:r>
+              <a:rPr sz="1200">
+                <a:solidFill>
+                  <a:srgbClr val="C2D0DA"/>
+                </a:solidFill>
+                <a:latin typeface="Consolas"/>
+              </a:rPr>
+              <a:t>: [ { </a:t>
+            </a:r>
+            <a:r>
+              <a:rPr sz="1200">
+                <a:solidFill>
+                  <a:srgbClr val="6FC3E0"/>
+                </a:solidFill>
+                <a:latin typeface="Consolas"/>
+              </a:rPr>
+              <a:t>"rel"</a:t>
+            </a:r>
+            <a:r>
+              <a:rPr sz="1200">
+                <a:solidFill>
+                  <a:srgbClr val="C2D0DA"/>
+                </a:solidFill>
+                <a:latin typeface="Consolas"/>
+              </a:rPr>
+              <a:t>: </a:t>
+            </a:r>
+            <a:r>
+              <a:rPr sz="1200">
+                <a:solidFill>
+                  <a:srgbClr val="E6A36A"/>
+                </a:solidFill>
+                <a:latin typeface="Consolas"/>
+              </a:rPr>
+              <a:t>"self"</a:t>
+            </a:r>
+            <a:r>
+              <a:rPr sz="1200">
+                <a:solidFill>
+                  <a:srgbClr val="C2D0DA"/>
+                </a:solidFill>
+                <a:latin typeface="Consolas"/>
+              </a:rPr>
+              <a:t>, </a:t>
+            </a:r>
+            <a:r>
+              <a:rPr sz="1200">
+                <a:solidFill>
+                  <a:srgbClr val="6FC3E0"/>
+                </a:solidFill>
+                <a:latin typeface="Consolas"/>
+              </a:rPr>
+              <a:t>"href"</a:t>
+            </a:r>
+            <a:r>
+              <a:rPr sz="1200">
+                <a:solidFill>
+                  <a:srgbClr val="C2D0DA"/>
+                </a:solidFill>
+                <a:latin typeface="Consolas"/>
+              </a:rPr>
+              <a:t>: </a:t>
+            </a:r>
+            <a:r>
+              <a:rPr sz="1200">
+                <a:solidFill>
+                  <a:srgbClr val="E6A36A"/>
+                </a:solidFill>
+                <a:latin typeface="Consolas"/>
+              </a:rPr>
+              <a:t>".../items/1"</a:t>
+            </a:r>
+            <a:r>
+              <a:rPr sz="1200">
+                <a:solidFill>
+                  <a:srgbClr val="C2D0DA"/>
+                </a:solidFill>
+                <a:latin typeface="Consolas"/>
+              </a:rPr>
+              <a:t> } ] },</a:t>
             </a:r>
           </a:p>
           <a:p>
@@ -10826,7 +11538,7 @@
         <p:spPr>
           <a:xfrm>
             <a:off x="566928" y="1874519"/>
-            <a:ext cx="6035040" cy="4206240"/>
+            <a:ext cx="6629400" cy="4480560"/>
           </a:xfrm>
           <a:prstGeom prst="roundRect">
             <a:avLst>
@@ -10872,7 +11584,7 @@
         <p:spPr>
           <a:xfrm>
             <a:off x="694944" y="1965960"/>
-            <a:ext cx="5779007" cy="4023359"/>
+            <a:ext cx="6373368" cy="4297680"/>
           </a:xfrm>
           <a:prstGeom prst="rect">
             <a:avLst/>
@@ -10992,6 +11704,42 @@
                 </a:solidFill>
                 <a:latin typeface="Consolas"/>
               </a:rPr>
+              <a:t>, </a:t>
+            </a:r>
+            <a:r>
+              <a:rPr sz="1200">
+                <a:solidFill>
+                  <a:srgbClr val="6FC3E0"/>
+                </a:solidFill>
+                <a:latin typeface="Consolas"/>
+              </a:rPr>
+              <a:t>"type"</a:t>
+            </a:r>
+            <a:r>
+              <a:rPr sz="1200">
+                <a:solidFill>
+                  <a:srgbClr val="C2D0DA"/>
+                </a:solidFill>
+                <a:latin typeface="Consolas"/>
+              </a:rPr>
+              <a:t>: </a:t>
+            </a:r>
+            <a:r>
+              <a:rPr sz="1200">
+                <a:solidFill>
+                  <a:srgbClr val="E6A36A"/>
+                </a:solidFill>
+                <a:latin typeface="Consolas"/>
+              </a:rPr>
+              <a:t>"Feature"</a:t>
+            </a:r>
+            <a:r>
+              <a:rPr sz="1200">
+                <a:solidFill>
+                  <a:srgbClr val="C2D0DA"/>
+                </a:solidFill>
+                <a:latin typeface="Consolas"/>
+              </a:rPr>
               <a:t>,</a:t>
             </a:r>
           </a:p>
@@ -11023,7 +11771,25 @@
                 </a:solidFill>
                 <a:latin typeface="Consolas"/>
               </a:rPr>
-              <a:t>"type"</a:t>
+              <a:t>"properties"</a:t>
+            </a:r>
+            <a:r>
+              <a:rPr sz="1200">
+                <a:solidFill>
+                  <a:srgbClr val="C2D0DA"/>
+                </a:solidFill>
+                <a:latin typeface="Consolas"/>
+              </a:rPr>
+              <a:t>: { </a:t>
+            </a:r>
+            <a:r>
+              <a:rPr sz="1200">
+                <a:solidFill>
+                  <a:srgbClr val="6FC3E0"/>
+                </a:solidFill>
+                <a:latin typeface="Consolas"/>
+              </a:rPr>
+              <a:t>"mmsi"</a:t>
             </a:r>
             <a:r>
               <a:rPr sz="1200">
@@ -11037,20 +11803,56 @@
             <a:r>
               <a:rPr sz="1200">
                 <a:solidFill>
+                  <a:srgbClr val="C9E08A"/>
+                </a:solidFill>
+                <a:latin typeface="Consolas"/>
+              </a:rPr>
+              <a:t>111219510</a:t>
+            </a:r>
+            <a:r>
+              <a:rPr sz="1200">
+                <a:solidFill>
+                  <a:srgbClr val="C2D0DA"/>
+                </a:solidFill>
+                <a:latin typeface="Consolas"/>
+              </a:rPr>
+              <a:t>, </a:t>
+            </a:r>
+            <a:r>
+              <a:rPr sz="1200">
+                <a:solidFill>
+                  <a:srgbClr val="6FC3E0"/>
+                </a:solidFill>
+                <a:latin typeface="Consolas"/>
+              </a:rPr>
+              <a:t>"name"</a:t>
+            </a:r>
+            <a:r>
+              <a:rPr sz="1200">
+                <a:solidFill>
+                  <a:srgbClr val="C2D0DA"/>
+                </a:solidFill>
+                <a:latin typeface="Consolas"/>
+              </a:rPr>
+              <a:t>: </a:t>
+            </a:r>
+            <a:r>
+              <a:rPr sz="1200">
+                <a:solidFill>
                   <a:srgbClr val="E6A36A"/>
                 </a:solidFill>
                 <a:latin typeface="Consolas"/>
               </a:rPr>
-              <a:t>"Feature"</a:t>
-            </a:r>
-            <a:r>
-              <a:rPr sz="1200">
-                <a:solidFill>
-                  <a:srgbClr val="C2D0DA"/>
-                </a:solidFill>
-                <a:latin typeface="Consolas"/>
-              </a:rPr>
-              <a:t>,</a:t>
+              <a:t>"vessel 111219510"</a:t>
+            </a:r>
+            <a:r>
+              <a:rPr sz="1200">
+                <a:solidFill>
+                  <a:srgbClr val="C2D0DA"/>
+                </a:solidFill>
+                <a:latin typeface="Consolas"/>
+              </a:rPr>
+              <a:t> },</a:t>
             </a:r>
           </a:p>
           <a:p>
@@ -11081,6 +11883,60 @@
                 </a:solidFill>
                 <a:latin typeface="Consolas"/>
               </a:rPr>
+              <a:t>"crs"</a:t>
+            </a:r>
+            <a:r>
+              <a:rPr sz="1200">
+                <a:solidFill>
+                  <a:srgbClr val="C2D0DA"/>
+                </a:solidFill>
+                <a:latin typeface="Consolas"/>
+              </a:rPr>
+              <a:t>: { </a:t>
+            </a:r>
+            <a:r>
+              <a:rPr sz="1200">
+                <a:solidFill>
+                  <a:srgbClr val="6FC3E0"/>
+                </a:solidFill>
+                <a:latin typeface="Consolas"/>
+              </a:rPr>
+              <a:t>"type"</a:t>
+            </a:r>
+            <a:r>
+              <a:rPr sz="1200">
+                <a:solidFill>
+                  <a:srgbClr val="C2D0DA"/>
+                </a:solidFill>
+                <a:latin typeface="Consolas"/>
+              </a:rPr>
+              <a:t>: </a:t>
+            </a:r>
+            <a:r>
+              <a:rPr sz="1200">
+                <a:solidFill>
+                  <a:srgbClr val="E6A36A"/>
+                </a:solidFill>
+                <a:latin typeface="Consolas"/>
+              </a:rPr>
+              <a:t>"Name"</a:t>
+            </a:r>
+            <a:r>
+              <a:rPr sz="1200">
+                <a:solidFill>
+                  <a:srgbClr val="C2D0DA"/>
+                </a:solidFill>
+                <a:latin typeface="Consolas"/>
+              </a:rPr>
+              <a:t>, </a:t>
+            </a:r>
+            <a:r>
+              <a:rPr sz="1200">
+                <a:solidFill>
+                  <a:srgbClr val="6FC3E0"/>
+                </a:solidFill>
+                <a:latin typeface="Consolas"/>
+              </a:rPr>
               <a:t>"properties"</a:t>
             </a:r>
             <a:r>
@@ -11121,7 +11977,7 @@
                 </a:solidFill>
                 <a:latin typeface="Consolas"/>
               </a:rPr>
-              <a:t>"mmsi"</a:t>
+              <a:t>"name"</a:t>
             </a:r>
             <a:r>
               <a:rPr sz="1200">
@@ -11135,20 +11991,20 @@
             <a:r>
               <a:rPr sz="1200">
                 <a:solidFill>
-                  <a:srgbClr val="C9E08A"/>
-                </a:solidFill>
-                <a:latin typeface="Consolas"/>
-              </a:rPr>
-              <a:t>111219510</a:t>
-            </a:r>
-            <a:r>
-              <a:rPr sz="1200">
-                <a:solidFill>
-                  <a:srgbClr val="C2D0DA"/>
-                </a:solidFill>
-                <a:latin typeface="Consolas"/>
-              </a:rPr>
-              <a:t>,</a:t>
+                  <a:srgbClr val="E6A36A"/>
+                </a:solidFill>
+                <a:latin typeface="Consolas"/>
+              </a:rPr>
+              <a:t>"urn:ogc:def:crs:EPSG::25832"</a:t>
+            </a:r>
+            <a:r>
+              <a:rPr sz="1200">
+                <a:solidFill>
+                  <a:srgbClr val="C2D0DA"/>
+                </a:solidFill>
+                <a:latin typeface="Consolas"/>
+              </a:rPr>
+              <a:t> } },</a:t>
             </a:r>
           </a:p>
           <a:p>
@@ -11170,7 +12026,7 @@
                 </a:solidFill>
                 <a:latin typeface="Consolas"/>
               </a:rPr>
-              <a:t>    </a:t>
+              <a:t>  </a:t>
             </a:r>
             <a:r>
               <a:rPr sz="1200">
@@ -11179,7 +12035,25 @@
                 </a:solidFill>
                 <a:latin typeface="Consolas"/>
               </a:rPr>
-              <a:t>"name"</a:t>
+              <a:t>"trs"</a:t>
+            </a:r>
+            <a:r>
+              <a:rPr sz="1200">
+                <a:solidFill>
+                  <a:srgbClr val="C2D0DA"/>
+                </a:solidFill>
+                <a:latin typeface="Consolas"/>
+              </a:rPr>
+              <a:t>: { </a:t>
+            </a:r>
+            <a:r>
+              <a:rPr sz="1200">
+                <a:solidFill>
+                  <a:srgbClr val="6FC3E0"/>
+                </a:solidFill>
+                <a:latin typeface="Consolas"/>
+              </a:rPr>
+              <a:t>"type"</a:t>
             </a:r>
             <a:r>
               <a:rPr sz="1200">
@@ -11197,7 +12071,16 @@
                 </a:solidFill>
                 <a:latin typeface="Consolas"/>
               </a:rPr>
-              <a:t>"vessel 111219510"</a:t>
+              <a:t>"Link"</a:t>
+            </a:r>
+            <a:r>
+              <a:rPr sz="1200">
+                <a:solidFill>
+                  <a:srgbClr val="C2D0DA"/>
+                </a:solidFill>
+                <a:latin typeface="Consolas"/>
+              </a:rPr>
+              <a:t>,</a:t>
             </a:r>
           </a:p>
           <a:p>
@@ -11219,7 +12102,61 @@
                 </a:solidFill>
                 <a:latin typeface="Consolas"/>
               </a:rPr>
-              <a:t>  },</a:t>
+              <a:t>           </a:t>
+            </a:r>
+            <a:r>
+              <a:rPr sz="1200">
+                <a:solidFill>
+                  <a:srgbClr val="6FC3E0"/>
+                </a:solidFill>
+                <a:latin typeface="Consolas"/>
+              </a:rPr>
+              <a:t>"properties"</a:t>
+            </a:r>
+            <a:r>
+              <a:rPr sz="1200">
+                <a:solidFill>
+                  <a:srgbClr val="C2D0DA"/>
+                </a:solidFill>
+                <a:latin typeface="Consolas"/>
+              </a:rPr>
+              <a:t>: { </a:t>
+            </a:r>
+            <a:r>
+              <a:rPr sz="1200">
+                <a:solidFill>
+                  <a:srgbClr val="6FC3E0"/>
+                </a:solidFill>
+                <a:latin typeface="Consolas"/>
+              </a:rPr>
+              <a:t>"type"</a:t>
+            </a:r>
+            <a:r>
+              <a:rPr sz="1200">
+                <a:solidFill>
+                  <a:srgbClr val="C2D0DA"/>
+                </a:solidFill>
+                <a:latin typeface="Consolas"/>
+              </a:rPr>
+              <a:t>: </a:t>
+            </a:r>
+            <a:r>
+              <a:rPr sz="1200">
+                <a:solidFill>
+                  <a:srgbClr val="E6A36A"/>
+                </a:solidFill>
+                <a:latin typeface="Consolas"/>
+              </a:rPr>
+              <a:t>"ogcdef"</a:t>
+            </a:r>
+            <a:r>
+              <a:rPr sz="1200">
+                <a:solidFill>
+                  <a:srgbClr val="C2D0DA"/>
+                </a:solidFill>
+                <a:latin typeface="Consolas"/>
+              </a:rPr>
+              <a:t>,</a:t>
             </a:r>
           </a:p>
           <a:p>
@@ -11241,7 +12178,7 @@
                 </a:solidFill>
                 <a:latin typeface="Consolas"/>
               </a:rPr>
-              <a:t>  </a:t>
+              <a:t>             </a:t>
             </a:r>
             <a:r>
               <a:rPr sz="1200">
@@ -11250,16 +12187,34 @@
                 </a:solidFill>
                 <a:latin typeface="Consolas"/>
               </a:rPr>
-              <a:t>"temporalGeometry"</a:t>
-            </a:r>
-            <a:r>
-              <a:rPr sz="1200">
-                <a:solidFill>
-                  <a:srgbClr val="C2D0DA"/>
-                </a:solidFill>
-                <a:latin typeface="Consolas"/>
-              </a:rPr>
-              <a:t>: {</a:t>
+              <a:t>"href"</a:t>
+            </a:r>
+            <a:r>
+              <a:rPr sz="1200">
+                <a:solidFill>
+                  <a:srgbClr val="C2D0DA"/>
+                </a:solidFill>
+                <a:latin typeface="Consolas"/>
+              </a:rPr>
+              <a:t>: </a:t>
+            </a:r>
+            <a:r>
+              <a:rPr sz="1200">
+                <a:solidFill>
+                  <a:srgbClr val="E6A36A"/>
+                </a:solidFill>
+                <a:latin typeface="Consolas"/>
+              </a:rPr>
+              <a:t>".../uom/ISO-8601/0/Gregorian"</a:t>
+            </a:r>
+            <a:r>
+              <a:rPr sz="1200">
+                <a:solidFill>
+                  <a:srgbClr val="C2D0DA"/>
+                </a:solidFill>
+                <a:latin typeface="Consolas"/>
+              </a:rPr>
+              <a:t> } },</a:t>
             </a:r>
           </a:p>
           <a:p>
@@ -11281,7 +12236,7 @@
                 </a:solidFill>
                 <a:latin typeface="Consolas"/>
               </a:rPr>
-              <a:t>    </a:t>
+              <a:t>  </a:t>
             </a:r>
             <a:r>
               <a:rPr sz="1200">
@@ -11290,34 +12245,88 @@
                 </a:solidFill>
                 <a:latin typeface="Consolas"/>
               </a:rPr>
-              <a:t>"type"</a:t>
-            </a:r>
-            <a:r>
-              <a:rPr sz="1200">
-                <a:solidFill>
-                  <a:srgbClr val="C2D0DA"/>
-                </a:solidFill>
-                <a:latin typeface="Consolas"/>
-              </a:rPr>
-              <a:t>: </a:t>
-            </a:r>
-            <a:r>
-              <a:rPr sz="1200">
-                <a:solidFill>
-                  <a:srgbClr val="E6A36A"/>
-                </a:solidFill>
-                <a:latin typeface="Consolas"/>
-              </a:rPr>
-              <a:t>"MovingPoint"</a:t>
-            </a:r>
-            <a:r>
-              <a:rPr sz="1200">
-                <a:solidFill>
-                  <a:srgbClr val="C2D0DA"/>
-                </a:solidFill>
-                <a:latin typeface="Consolas"/>
-              </a:rPr>
-              <a:t>,</a:t>
+              <a:t>"bbox"</a:t>
+            </a:r>
+            <a:r>
+              <a:rPr sz="1200">
+                <a:solidFill>
+                  <a:srgbClr val="C2D0DA"/>
+                </a:solidFill>
+                <a:latin typeface="Consolas"/>
+              </a:rPr>
+              <a:t>: [</a:t>
+            </a:r>
+            <a:r>
+              <a:rPr sz="1200">
+                <a:solidFill>
+                  <a:srgbClr val="C9E08A"/>
+                </a:solidFill>
+                <a:latin typeface="Consolas"/>
+              </a:rPr>
+              <a:t>550889</a:t>
+            </a:r>
+            <a:r>
+              <a:rPr sz="1200">
+                <a:solidFill>
+                  <a:srgbClr val="C2D0DA"/>
+                </a:solidFill>
+                <a:latin typeface="Consolas"/>
+              </a:rPr>
+              <a:t>, </a:t>
+            </a:r>
+            <a:r>
+              <a:rPr sz="1200">
+                <a:solidFill>
+                  <a:srgbClr val="C9E08A"/>
+                </a:solidFill>
+                <a:latin typeface="Consolas"/>
+              </a:rPr>
+              <a:t>6328752</a:t>
+            </a:r>
+            <a:r>
+              <a:rPr sz="1200">
+                <a:solidFill>
+                  <a:srgbClr val="C2D0DA"/>
+                </a:solidFill>
+                <a:latin typeface="Consolas"/>
+              </a:rPr>
+              <a:t>, </a:t>
+            </a:r>
+            <a:r>
+              <a:rPr sz="1200">
+                <a:solidFill>
+                  <a:srgbClr val="C9E08A"/>
+                </a:solidFill>
+                <a:latin typeface="Consolas"/>
+              </a:rPr>
+              <a:t>616716</a:t>
+            </a:r>
+            <a:r>
+              <a:rPr sz="1200">
+                <a:solidFill>
+                  <a:srgbClr val="C2D0DA"/>
+                </a:solidFill>
+                <a:latin typeface="Consolas"/>
+              </a:rPr>
+              <a:t>, </a:t>
+            </a:r>
+            <a:r>
+              <a:rPr sz="1200">
+                <a:solidFill>
+                  <a:srgbClr val="C9E08A"/>
+                </a:solidFill>
+                <a:latin typeface="Consolas"/>
+              </a:rPr>
+              <a:t>6346258</a:t>
+            </a:r>
+            <a:r>
+              <a:rPr sz="1200">
+                <a:solidFill>
+                  <a:srgbClr val="C2D0DA"/>
+                </a:solidFill>
+                <a:latin typeface="Consolas"/>
+              </a:rPr>
+              <a:t>],</a:t>
             </a:r>
           </a:p>
           <a:p>
@@ -11339,7 +12348,7 @@
                 </a:solidFill>
                 <a:latin typeface="Consolas"/>
               </a:rPr>
-              <a:t>    </a:t>
+              <a:t>  </a:t>
             </a:r>
             <a:r>
               <a:rPr sz="1200">
@@ -11348,34 +12357,16 @@
                 </a:solidFill>
                 <a:latin typeface="Consolas"/>
               </a:rPr>
-              <a:t>"crs"</a:t>
-            </a:r>
-            <a:r>
-              <a:rPr sz="1200">
-                <a:solidFill>
-                  <a:srgbClr val="C2D0DA"/>
-                </a:solidFill>
-                <a:latin typeface="Consolas"/>
-              </a:rPr>
-              <a:t>: { </a:t>
-            </a:r>
-            <a:r>
-              <a:rPr sz="1200">
-                <a:solidFill>
-                  <a:srgbClr val="6FC3E0"/>
-                </a:solidFill>
-                <a:latin typeface="Consolas"/>
-              </a:rPr>
-              <a:t>"type"</a:t>
-            </a:r>
-            <a:r>
-              <a:rPr sz="1200">
-                <a:solidFill>
-                  <a:srgbClr val="C2D0DA"/>
-                </a:solidFill>
-                <a:latin typeface="Consolas"/>
-              </a:rPr>
-              <a:t>: </a:t>
+              <a:t>"time"</a:t>
+            </a:r>
+            <a:r>
+              <a:rPr sz="1200">
+                <a:solidFill>
+                  <a:srgbClr val="C2D0DA"/>
+                </a:solidFill>
+                <a:latin typeface="Consolas"/>
+              </a:rPr>
+              <a:t>: [</a:t>
             </a:r>
             <a:r>
               <a:rPr sz="1200">
@@ -11384,7 +12375,7 @@
                 </a:solidFill>
                 <a:latin typeface="Consolas"/>
               </a:rPr>
-              <a:t>"Name"</a:t>
+              <a:t>"2026-02-26 13:28:08+01"</a:t>
             </a:r>
             <a:r>
               <a:rPr sz="1200">
@@ -11398,20 +12389,20 @@
             <a:r>
               <a:rPr sz="1200">
                 <a:solidFill>
-                  <a:srgbClr val="6FC3E0"/>
-                </a:solidFill>
-                <a:latin typeface="Consolas"/>
-              </a:rPr>
-              <a:t>"properties"</a:t>
-            </a:r>
-            <a:r>
-              <a:rPr sz="1200">
-                <a:solidFill>
-                  <a:srgbClr val="C2D0DA"/>
-                </a:solidFill>
-                <a:latin typeface="Consolas"/>
-              </a:rPr>
-              <a:t>: {</a:t>
+                  <a:srgbClr val="E6A36A"/>
+                </a:solidFill>
+                <a:latin typeface="Consolas"/>
+              </a:rPr>
+              <a:t>"2026-02-26 14:41:04+01"</a:t>
+            </a:r>
+            <a:r>
+              <a:rPr sz="1200">
+                <a:solidFill>
+                  <a:srgbClr val="C2D0DA"/>
+                </a:solidFill>
+                <a:latin typeface="Consolas"/>
+              </a:rPr>
+              <a:t>],</a:t>
             </a:r>
           </a:p>
           <a:p>
@@ -11433,7 +12424,7 @@
                 </a:solidFill>
                 <a:latin typeface="Consolas"/>
               </a:rPr>
-              <a:t>      </a:t>
+              <a:t>  </a:t>
             </a:r>
             <a:r>
               <a:rPr sz="1200">
@@ -11442,7 +12433,25 @@
                 </a:solidFill>
                 <a:latin typeface="Consolas"/>
               </a:rPr>
-              <a:t>"name"</a:t>
+              <a:t>"geometry"</a:t>
+            </a:r>
+            <a:r>
+              <a:rPr sz="1200">
+                <a:solidFill>
+                  <a:srgbClr val="C2D0DA"/>
+                </a:solidFill>
+                <a:latin typeface="Consolas"/>
+              </a:rPr>
+              <a:t>: { </a:t>
+            </a:r>
+            <a:r>
+              <a:rPr sz="1200">
+                <a:solidFill>
+                  <a:srgbClr val="6FC3E0"/>
+                </a:solidFill>
+                <a:latin typeface="Consolas"/>
+              </a:rPr>
+              <a:t>"type"</a:t>
             </a:r>
             <a:r>
               <a:rPr sz="1200">
@@ -11460,16 +12469,34 @@
                 </a:solidFill>
                 <a:latin typeface="Consolas"/>
               </a:rPr>
-              <a:t>"urn:ogc:def:crs:EPSG::25832"</a:t>
-            </a:r>
-            <a:r>
-              <a:rPr sz="1200">
-                <a:solidFill>
-                  <a:srgbClr val="C2D0DA"/>
-                </a:solidFill>
-                <a:latin typeface="Consolas"/>
-              </a:rPr>
-              <a:t> } },</a:t>
+              <a:t>"MultiLineString"</a:t>
+            </a:r>
+            <a:r>
+              <a:rPr sz="1200">
+                <a:solidFill>
+                  <a:srgbClr val="C2D0DA"/>
+                </a:solidFill>
+                <a:latin typeface="Consolas"/>
+              </a:rPr>
+              <a:t>, </a:t>
+            </a:r>
+            <a:r>
+              <a:rPr sz="1200">
+                <a:solidFill>
+                  <a:srgbClr val="6FC3E0"/>
+                </a:solidFill>
+                <a:latin typeface="Consolas"/>
+              </a:rPr>
+              <a:t>"coordinates"</a:t>
+            </a:r>
+            <a:r>
+              <a:rPr sz="1200">
+                <a:solidFill>
+                  <a:srgbClr val="C2D0DA"/>
+                </a:solidFill>
+                <a:latin typeface="Consolas"/>
+              </a:rPr>
+              <a:t>: [...] },</a:t>
             </a:r>
           </a:p>
           <a:p>
@@ -11491,7 +12518,7 @@
                 </a:solidFill>
                 <a:latin typeface="Consolas"/>
               </a:rPr>
-              <a:t>    </a:t>
+              <a:t>  </a:t>
             </a:r>
             <a:r>
               <a:rPr sz="1200">
@@ -11500,16 +12527,16 @@
                 </a:solidFill>
                 <a:latin typeface="Consolas"/>
               </a:rPr>
-              <a:t>"sequences"</a:t>
-            </a:r>
-            <a:r>
-              <a:rPr sz="1200">
-                <a:solidFill>
-                  <a:srgbClr val="C2D0DA"/>
-                </a:solidFill>
-                <a:latin typeface="Consolas"/>
-              </a:rPr>
-              <a:t>: [</a:t>
+              <a:t>"temporalGeometry"</a:t>
+            </a:r>
+            <a:r>
+              <a:rPr sz="1200">
+                <a:solidFill>
+                  <a:srgbClr val="C2D0DA"/>
+                </a:solidFill>
+                <a:latin typeface="Consolas"/>
+              </a:rPr>
+              <a:t>: {</a:t>
             </a:r>
           </a:p>
           <a:p>
@@ -11531,7 +12558,7 @@
                 </a:solidFill>
                 <a:latin typeface="Consolas"/>
               </a:rPr>
-              <a:t>      { </a:t>
+              <a:t>    </a:t>
             </a:r>
             <a:r>
               <a:rPr sz="1200">
@@ -11540,16 +12567,16 @@
                 </a:solidFill>
                 <a:latin typeface="Consolas"/>
               </a:rPr>
-              <a:t>"datetimes"</a:t>
-            </a:r>
-            <a:r>
-              <a:rPr sz="1200">
-                <a:solidFill>
-                  <a:srgbClr val="C2D0DA"/>
-                </a:solidFill>
-                <a:latin typeface="Consolas"/>
-              </a:rPr>
-              <a:t>: [</a:t>
+              <a:t>"type"</a:t>
+            </a:r>
+            <a:r>
+              <a:rPr sz="1200">
+                <a:solidFill>
+                  <a:srgbClr val="C2D0DA"/>
+                </a:solidFill>
+                <a:latin typeface="Consolas"/>
+              </a:rPr>
+              <a:t>: </a:t>
             </a:r>
             <a:r>
               <a:rPr sz="1200">
@@ -11558,16 +12585,16 @@
                 </a:solidFill>
                 <a:latin typeface="Consolas"/>
               </a:rPr>
-              <a:t>"2026-02-26T13:28:08+01"</a:t>
-            </a:r>
-            <a:r>
-              <a:rPr sz="1200">
-                <a:solidFill>
-                  <a:srgbClr val="C2D0DA"/>
-                </a:solidFill>
-                <a:latin typeface="Consolas"/>
-              </a:rPr>
-              <a:t>, ...],</a:t>
+              <a:t>"MovingPoint"</a:t>
+            </a:r>
+            <a:r>
+              <a:rPr sz="1200">
+                <a:solidFill>
+                  <a:srgbClr val="C2D0DA"/>
+                </a:solidFill>
+                <a:latin typeface="Consolas"/>
+              </a:rPr>
+              <a:t>,</a:t>
             </a:r>
           </a:p>
           <a:p>
@@ -11589,7 +12616,7 @@
                 </a:solidFill>
                 <a:latin typeface="Consolas"/>
               </a:rPr>
-              <a:t>        </a:t>
+              <a:t>    </a:t>
             </a:r>
             <a:r>
               <a:rPr sz="1200">
@@ -11598,6 +12625,42 @@
                 </a:solidFill>
                 <a:latin typeface="Consolas"/>
               </a:rPr>
+              <a:t>"sequences"</a:t>
+            </a:r>
+            <a:r>
+              <a:rPr sz="1200">
+                <a:solidFill>
+                  <a:srgbClr val="C2D0DA"/>
+                </a:solidFill>
+                <a:latin typeface="Consolas"/>
+              </a:rPr>
+              <a:t>: [ { </a:t>
+            </a:r>
+            <a:r>
+              <a:rPr sz="1200">
+                <a:solidFill>
+                  <a:srgbClr val="6FC3E0"/>
+                </a:solidFill>
+                <a:latin typeface="Consolas"/>
+              </a:rPr>
+              <a:t>"datetimes"</a:t>
+            </a:r>
+            <a:r>
+              <a:rPr sz="1200">
+                <a:solidFill>
+                  <a:srgbClr val="C2D0DA"/>
+                </a:solidFill>
+                <a:latin typeface="Consolas"/>
+              </a:rPr>
+              <a:t>: [...], </a:t>
+            </a:r>
+            <a:r>
+              <a:rPr sz="1200">
+                <a:solidFill>
+                  <a:srgbClr val="6FC3E0"/>
+                </a:solidFill>
+                <a:latin typeface="Consolas"/>
+              </a:rPr>
               <a:t>"coordinates"</a:t>
             </a:r>
             <a:r>
@@ -11607,43 +12670,7 @@
                 </a:solidFill>
                 <a:latin typeface="Consolas"/>
               </a:rPr>
-              <a:t>: [[</a:t>
-            </a:r>
-            <a:r>
-              <a:rPr sz="1200">
-                <a:solidFill>
-                  <a:srgbClr val="C9E08A"/>
-                </a:solidFill>
-                <a:latin typeface="Consolas"/>
-              </a:rPr>
-              <a:t>721000.4</a:t>
-            </a:r>
-            <a:r>
-              <a:rPr sz="1200">
-                <a:solidFill>
-                  <a:srgbClr val="C2D0DA"/>
-                </a:solidFill>
-                <a:latin typeface="Consolas"/>
-              </a:rPr>
-              <a:t>, </a:t>
-            </a:r>
-            <a:r>
-              <a:rPr sz="1200">
-                <a:solidFill>
-                  <a:srgbClr val="C9E08A"/>
-                </a:solidFill>
-                <a:latin typeface="Consolas"/>
-              </a:rPr>
-              <a:t>6178001.2</a:t>
-            </a:r>
-            <a:r>
-              <a:rPr sz="1200">
-                <a:solidFill>
-                  <a:srgbClr val="C2D0DA"/>
-                </a:solidFill>
-                <a:latin typeface="Consolas"/>
-              </a:rPr>
-              <a:t>], ...] } ],</a:t>
+              <a:t>: [...] } ],</a:t>
             </a:r>
           </a:p>
           <a:p>
@@ -11694,6 +12721,15 @@
               </a:rPr>
               <a:t>"Linear"</a:t>
             </a:r>
+            <a:r>
+              <a:rPr sz="1200">
+                <a:solidFill>
+                  <a:srgbClr val="C2D0DA"/>
+                </a:solidFill>
+                <a:latin typeface="Consolas"/>
+              </a:rPr>
+              <a:t> },</a:t>
+            </a:r>
           </a:p>
           <a:p>
             <a:pPr>
@@ -11714,7 +12750,61 @@
                 </a:solidFill>
                 <a:latin typeface="Consolas"/>
               </a:rPr>
-              <a:t>  }</a:t>
+              <a:t>  </a:t>
+            </a:r>
+            <a:r>
+              <a:rPr sz="1200">
+                <a:solidFill>
+                  <a:srgbClr val="6FC3E0"/>
+                </a:solidFill>
+                <a:latin typeface="Consolas"/>
+              </a:rPr>
+              <a:t>"links"</a:t>
+            </a:r>
+            <a:r>
+              <a:rPr sz="1200">
+                <a:solidFill>
+                  <a:srgbClr val="C2D0DA"/>
+                </a:solidFill>
+                <a:latin typeface="Consolas"/>
+              </a:rPr>
+              <a:t>: [ { </a:t>
+            </a:r>
+            <a:r>
+              <a:rPr sz="1200">
+                <a:solidFill>
+                  <a:srgbClr val="6FC3E0"/>
+                </a:solidFill>
+                <a:latin typeface="Consolas"/>
+              </a:rPr>
+              <a:t>"rel"</a:t>
+            </a:r>
+            <a:r>
+              <a:rPr sz="1200">
+                <a:solidFill>
+                  <a:srgbClr val="C2D0DA"/>
+                </a:solidFill>
+                <a:latin typeface="Consolas"/>
+              </a:rPr>
+              <a:t>: </a:t>
+            </a:r>
+            <a:r>
+              <a:rPr sz="1200">
+                <a:solidFill>
+                  <a:srgbClr val="E6A36A"/>
+                </a:solidFill>
+                <a:latin typeface="Consolas"/>
+              </a:rPr>
+              <a:t>"self"</a:t>
+            </a:r>
+            <a:r>
+              <a:rPr sz="1200">
+                <a:solidFill>
+                  <a:srgbClr val="C2D0DA"/>
+                </a:solidFill>
+                <a:latin typeface="Consolas"/>
+              </a:rPr>
+              <a:t>,</a:t>
             </a:r>
           </a:p>
           <a:p>
@@ -11736,6 +12826,64 @@
                 </a:solidFill>
                 <a:latin typeface="Consolas"/>
               </a:rPr>
+              <a:t>               </a:t>
+            </a:r>
+            <a:r>
+              <a:rPr sz="1200">
+                <a:solidFill>
+                  <a:srgbClr val="6FC3E0"/>
+                </a:solidFill>
+                <a:latin typeface="Consolas"/>
+              </a:rPr>
+              <a:t>"href"</a:t>
+            </a:r>
+            <a:r>
+              <a:rPr sz="1200">
+                <a:solidFill>
+                  <a:srgbClr val="C2D0DA"/>
+                </a:solidFill>
+                <a:latin typeface="Consolas"/>
+              </a:rPr>
+              <a:t>: </a:t>
+            </a:r>
+            <a:r>
+              <a:rPr sz="1200">
+                <a:solidFill>
+                  <a:srgbClr val="E6A36A"/>
+                </a:solidFill>
+                <a:latin typeface="Consolas"/>
+              </a:rPr>
+              <a:t>"/collections/ships/items/1"</a:t>
+            </a:r>
+            <a:r>
+              <a:rPr sz="1200">
+                <a:solidFill>
+                  <a:srgbClr val="C2D0DA"/>
+                </a:solidFill>
+                <a:latin typeface="Consolas"/>
+              </a:rPr>
+              <a:t> } ]</a:t>
+            </a:r>
+          </a:p>
+          <a:p>
+            <a:pPr>
+              <a:lnSpc>
+                <a:spcPct val="102000"/>
+              </a:lnSpc>
+              <a:spcBef>
+                <a:spcPts val="0"/>
+              </a:spcBef>
+              <a:spcAft>
+                <a:spcPts val="0"/>
+              </a:spcAft>
+            </a:pPr>
+            <a:r>
+              <a:rPr sz="1200">
+                <a:solidFill>
+                  <a:srgbClr val="C2D0DA"/>
+                </a:solidFill>
+                <a:latin typeface="Consolas"/>
+              </a:rPr>
               <a:t>}</a:t>
             </a:r>
           </a:p>
@@ -11749,8 +12897,8 @@
         </p:nvSpPr>
         <p:spPr>
           <a:xfrm>
-            <a:off x="6830568" y="1828800"/>
-            <a:ext cx="4794199" cy="4206240"/>
+            <a:off x="7424927" y="1828800"/>
+            <a:ext cx="4199839" cy="4206240"/>
           </a:xfrm>
           <a:prstGeom prst="rect">
             <a:avLst/>
@@ -11771,7 +12919,7 @@
                 <a:spcPts val="0"/>
               </a:spcBef>
               <a:spcAft>
-                <a:spcPts val="1300"/>
+                <a:spcPts val="1200"/>
               </a:spcAft>
             </a:pPr>
             <a:r>
@@ -11811,7 +12959,7 @@
                 <a:spcPts val="0"/>
               </a:spcBef>
               <a:spcAft>
-                <a:spcPts val="1300"/>
+                <a:spcPts val="1200"/>
               </a:spcAft>
             </a:pPr>
             <a:r>
@@ -11851,7 +12999,7 @@
                 <a:spcPts val="0"/>
               </a:spcBef>
               <a:spcAft>
-                <a:spcPts val="1300"/>
+                <a:spcPts val="1200"/>
               </a:spcAft>
             </a:pPr>
             <a:r>
@@ -11891,7 +13039,7 @@
                 <a:spcPts val="0"/>
               </a:spcBef>
               <a:spcAft>
-                <a:spcPts val="1300"/>
+                <a:spcPts val="1200"/>
               </a:spcAft>
             </a:pPr>
             <a:r>
@@ -19087,13 +20235,13 @@
           </a:xfrm>
           <a:prstGeom prst="roundRect">
             <a:avLst>
-              <a:gd name="adj" fmla="val 16000"/>
+              <a:gd name="adj" fmla="val 12000"/>
             </a:avLst>
           </a:prstGeom>
           <a:solidFill>
             <a:srgbClr val="FFFFFF"/>
           </a:solidFill>
-          <a:ln w="16510">
+          <a:ln w="19050">
             <a:solidFill>
               <a:srgbClr val="0E2841"/>
             </a:solidFill>
@@ -19177,13 +20325,13 @@
           </a:xfrm>
           <a:prstGeom prst="roundRect">
             <a:avLst>
-              <a:gd name="adj" fmla="val 16000"/>
+              <a:gd name="adj" fmla="val 12000"/>
             </a:avLst>
           </a:prstGeom>
           <a:solidFill>
             <a:srgbClr val="FFFFFF"/>
           </a:solidFill>
-          <a:ln w="16510">
+          <a:ln w="19050">
             <a:solidFill>
               <a:srgbClr val="0E2841"/>
             </a:solidFill>
@@ -19267,13 +20415,13 @@
           </a:xfrm>
           <a:prstGeom prst="roundRect">
             <a:avLst>
-              <a:gd name="adj" fmla="val 16000"/>
+              <a:gd name="adj" fmla="val 12000"/>
             </a:avLst>
           </a:prstGeom>
           <a:solidFill>
             <a:srgbClr val="FFFFFF"/>
           </a:solidFill>
-          <a:ln w="16510">
+          <a:ln w="19050">
             <a:solidFill>
               <a:srgbClr val="0E2841"/>
             </a:solidFill>
@@ -19441,13 +20589,13 @@
           </a:xfrm>
           <a:prstGeom prst="roundRect">
             <a:avLst>
-              <a:gd name="adj" fmla="val 10000"/>
+              <a:gd name="adj" fmla="val 12000"/>
             </a:avLst>
           </a:prstGeom>
           <a:solidFill>
             <a:srgbClr val="FFFFFF"/>
           </a:solidFill>
-          <a:ln w="21590">
+          <a:ln w="19050">
             <a:solidFill>
               <a:srgbClr val="156082"/>
             </a:solidFill>
@@ -19657,13 +20805,13 @@
           </a:xfrm>
           <a:prstGeom prst="roundRect">
             <a:avLst>
-              <a:gd name="adj" fmla="val 10000"/>
+              <a:gd name="adj" fmla="val 12000"/>
             </a:avLst>
           </a:prstGeom>
           <a:solidFill>
             <a:srgbClr val="FFFFFF"/>
           </a:solidFill>
-          <a:ln w="21590">
+          <a:ln w="19050">
             <a:solidFill>
               <a:srgbClr val="0E2841"/>
             </a:solidFill>

--- a/MobilityAPIV5.pptx
+++ b/MobilityAPIV5.pptx
@@ -20158,20 +20158,6 @@
           </a:ln>
           <a:effectLst/>
         </p:spPr>
-        <p:style>
-          <a:lnRef idx="1">
-            <a:schemeClr val="accent1"/>
-          </a:lnRef>
-          <a:fillRef idx="3">
-            <a:schemeClr val="accent1"/>
-          </a:fillRef>
-          <a:effectRef idx="2">
-            <a:schemeClr val="accent1"/>
-          </a:effectRef>
-          <a:fontRef idx="minor">
-            <a:schemeClr val="lt1"/>
-          </a:fontRef>
-        </p:style>
         <p:txBody>
           <a:bodyPr rtlCol="0" anchor="ctr"/>
           <a:lstStyle/>
@@ -20248,20 +20234,6 @@
           </a:ln>
           <a:effectLst/>
         </p:spPr>
-        <p:style>
-          <a:lnRef idx="1">
-            <a:schemeClr val="accent1"/>
-          </a:lnRef>
-          <a:fillRef idx="3">
-            <a:schemeClr val="accent1"/>
-          </a:fillRef>
-          <a:effectRef idx="2">
-            <a:schemeClr val="accent1"/>
-          </a:effectRef>
-          <a:fontRef idx="minor">
-            <a:schemeClr val="lt1"/>
-          </a:fontRef>
-        </p:style>
         <p:txBody>
           <a:bodyPr rtlCol="0" anchor="ctr"/>
           <a:lstStyle/>
@@ -20338,20 +20310,6 @@
           </a:ln>
           <a:effectLst/>
         </p:spPr>
-        <p:style>
-          <a:lnRef idx="1">
-            <a:schemeClr val="accent1"/>
-          </a:lnRef>
-          <a:fillRef idx="3">
-            <a:schemeClr val="accent1"/>
-          </a:fillRef>
-          <a:effectRef idx="2">
-            <a:schemeClr val="accent1"/>
-          </a:effectRef>
-          <a:fontRef idx="minor">
-            <a:schemeClr val="lt1"/>
-          </a:fontRef>
-        </p:style>
         <p:txBody>
           <a:bodyPr rtlCol="0" anchor="ctr"/>
           <a:lstStyle/>
@@ -20428,20 +20386,6 @@
           </a:ln>
           <a:effectLst/>
         </p:spPr>
-        <p:style>
-          <a:lnRef idx="1">
-            <a:schemeClr val="accent1"/>
-          </a:lnRef>
-          <a:fillRef idx="3">
-            <a:schemeClr val="accent1"/>
-          </a:fillRef>
-          <a:effectRef idx="2">
-            <a:schemeClr val="accent1"/>
-          </a:effectRef>
-          <a:fontRef idx="minor">
-            <a:schemeClr val="lt1"/>
-          </a:fontRef>
-        </p:style>
         <p:txBody>
           <a:bodyPr rtlCol="0" anchor="ctr"/>
           <a:lstStyle/>
@@ -20586,222 +20530,6 @@
           <a:xfrm>
             <a:off x="7909560" y="3108960"/>
             <a:ext cx="3429000" cy="603504"/>
-          </a:xfrm>
-          <a:prstGeom prst="roundRect">
-            <a:avLst>
-              <a:gd name="adj" fmla="val 12000"/>
-            </a:avLst>
-          </a:prstGeom>
-          <a:solidFill>
-            <a:srgbClr val="FFFFFF"/>
-          </a:solidFill>
-          <a:ln w="19050">
-            <a:solidFill>
-              <a:srgbClr val="156082"/>
-            </a:solidFill>
-          </a:ln>
-          <a:effectLst/>
-        </p:spPr>
-        <p:style>
-          <a:lnRef idx="1">
-            <a:schemeClr val="accent1"/>
-          </a:lnRef>
-          <a:fillRef idx="3">
-            <a:schemeClr val="accent1"/>
-          </a:fillRef>
-          <a:effectRef idx="2">
-            <a:schemeClr val="accent1"/>
-          </a:effectRef>
-          <a:fontRef idx="minor">
-            <a:schemeClr val="lt1"/>
-          </a:fontRef>
-        </p:style>
-        <p:txBody>
-          <a:bodyPr rtlCol="0" anchor="ctr"/>
-          <a:lstStyle/>
-          <a:p>
-            <a:pPr algn="ctr"/>
-          </a:p>
-        </p:txBody>
-      </p:sp>
-      <p:sp>
-        <p:nvSpPr>
-          <p:cNvPr id="17" name="TextBox 16"/>
-          <p:cNvSpPr txBox="1"/>
-          <p:nvPr/>
-        </p:nvSpPr>
-        <p:spPr>
-          <a:xfrm>
-            <a:off x="8092440" y="3191256"/>
-            <a:ext cx="3063240" cy="274320"/>
-          </a:xfrm>
-          <a:prstGeom prst="rect">
-            <a:avLst/>
-          </a:prstGeom>
-          <a:noFill/>
-        </p:spPr>
-        <p:txBody>
-          <a:bodyPr wrap="square" anchor="t" lIns="0" rIns="0" tIns="0" bIns="0">
-            <a:noAutofit/>
-          </a:bodyPr>
-          <a:lstStyle/>
-          <a:p>
-            <a:pPr algn="l">
-              <a:spcBef>
-                <a:spcPts val="0"/>
-              </a:spcBef>
-              <a:spcAft>
-                <a:spcPts val="200"/>
-              </a:spcAft>
-            </a:pPr>
-            <a:r>
-              <a:rPr sz="1400" b="1" i="0">
-                <a:solidFill>
-                  <a:srgbClr val="156082"/>
-                </a:solidFill>
-                <a:latin typeface="Calibri"/>
-              </a:rPr>
-              <a:t>MobilityAPI (Go)</a:t>
-            </a:r>
-          </a:p>
-        </p:txBody>
-      </p:sp>
-      <p:sp>
-        <p:nvSpPr>
-          <p:cNvPr id="18" name="TextBox 17"/>
-          <p:cNvSpPr txBox="1"/>
-          <p:nvPr/>
-        </p:nvSpPr>
-        <p:spPr>
-          <a:xfrm>
-            <a:off x="8092440" y="3456432"/>
-            <a:ext cx="3063240" cy="228600"/>
-          </a:xfrm>
-          <a:prstGeom prst="rect">
-            <a:avLst/>
-          </a:prstGeom>
-          <a:noFill/>
-        </p:spPr>
-        <p:txBody>
-          <a:bodyPr wrap="square" anchor="t" lIns="0" rIns="0" tIns="0" bIns="0">
-            <a:noAutofit/>
-          </a:bodyPr>
-          <a:lstStyle/>
-          <a:p>
-            <a:pPr algn="l">
-              <a:spcBef>
-                <a:spcPts val="0"/>
-              </a:spcBef>
-              <a:spcAft>
-                <a:spcPts val="200"/>
-              </a:spcAft>
-            </a:pPr>
-            <a:r>
-              <a:rPr sz="1200" b="0" i="0">
-                <a:solidFill>
-                  <a:srgbClr val="5B6B78"/>
-                </a:solidFill>
-                <a:latin typeface="Consolas"/>
-              </a:rPr>
-              <a:t>net/http + pgxpool</a:t>
-            </a:r>
-          </a:p>
-        </p:txBody>
-      </p:sp>
-      <p:sp>
-        <p:nvSpPr>
-          <p:cNvPr id="19" name="TextBox 18"/>
-          <p:cNvSpPr txBox="1"/>
-          <p:nvPr/>
-        </p:nvSpPr>
-        <p:spPr>
-          <a:xfrm>
-            <a:off x="7909560" y="3749040"/>
-            <a:ext cx="3429000" cy="219456"/>
-          </a:xfrm>
-          <a:prstGeom prst="rect">
-            <a:avLst/>
-          </a:prstGeom>
-          <a:noFill/>
-        </p:spPr>
-        <p:txBody>
-          <a:bodyPr wrap="square" anchor="t" lIns="0" rIns="0" tIns="0" bIns="0">
-            <a:noAutofit/>
-          </a:bodyPr>
-          <a:lstStyle/>
-          <a:p>
-            <a:pPr algn="ctr">
-              <a:spcBef>
-                <a:spcPts val="0"/>
-              </a:spcBef>
-              <a:spcAft>
-                <a:spcPts val="200"/>
-              </a:spcAft>
-            </a:pPr>
-            <a:r>
-              <a:rPr sz="1200" b="1" i="0">
-                <a:solidFill>
-                  <a:srgbClr val="E97132"/>
-                </a:solidFill>
-                <a:latin typeface="Calibri"/>
-              </a:rPr>
-              <a:t>▼  SQL</a:t>
-            </a:r>
-          </a:p>
-        </p:txBody>
-      </p:sp>
-      <p:sp>
-        <p:nvSpPr>
-          <p:cNvPr id="20" name="TextBox 19"/>
-          <p:cNvSpPr txBox="1"/>
-          <p:nvPr/>
-        </p:nvSpPr>
-        <p:spPr>
-          <a:xfrm>
-            <a:off x="7909560" y="3959352"/>
-            <a:ext cx="3429000" cy="201168"/>
-          </a:xfrm>
-          <a:prstGeom prst="rect">
-            <a:avLst/>
-          </a:prstGeom>
-          <a:noFill/>
-        </p:spPr>
-        <p:txBody>
-          <a:bodyPr wrap="square" anchor="t" lIns="0" rIns="0" tIns="0" bIns="0">
-            <a:noAutofit/>
-          </a:bodyPr>
-          <a:lstStyle/>
-          <a:p>
-            <a:pPr algn="ctr">
-              <a:spcBef>
-                <a:spcPts val="0"/>
-              </a:spcBef>
-              <a:spcAft>
-                <a:spcPts val="200"/>
-              </a:spcAft>
-            </a:pPr>
-            <a:r>
-              <a:rPr sz="1200" b="0" i="0">
-                <a:solidFill>
-                  <a:srgbClr val="5B6B78"/>
-                </a:solidFill>
-                <a:latin typeface="Consolas"/>
-              </a:rPr>
-              <a:t>PostgreSQL wire · pgx</a:t>
-            </a:r>
-          </a:p>
-        </p:txBody>
-      </p:sp>
-      <p:sp>
-        <p:nvSpPr>
-          <p:cNvPr id="21" name="Rounded Rectangle 20"/>
-          <p:cNvSpPr/>
-          <p:nvPr/>
-        </p:nvSpPr>
-        <p:spPr>
-          <a:xfrm>
-            <a:off x="7909560" y="4242816"/>
-            <a:ext cx="3429000" cy="621792"/>
           </a:xfrm>
           <a:prstGeom prst="roundRect">
             <a:avLst>
@@ -20818,20 +20546,208 @@
           </a:ln>
           <a:effectLst/>
         </p:spPr>
-        <p:style>
-          <a:lnRef idx="1">
-            <a:schemeClr val="accent1"/>
-          </a:lnRef>
-          <a:fillRef idx="3">
-            <a:schemeClr val="accent1"/>
-          </a:fillRef>
-          <a:effectRef idx="2">
-            <a:schemeClr val="accent1"/>
-          </a:effectRef>
-          <a:fontRef idx="minor">
-            <a:schemeClr val="lt1"/>
-          </a:fontRef>
-        </p:style>
+        <p:txBody>
+          <a:bodyPr rtlCol="0" anchor="ctr"/>
+          <a:lstStyle/>
+          <a:p>
+            <a:pPr algn="ctr"/>
+          </a:p>
+        </p:txBody>
+      </p:sp>
+      <p:sp>
+        <p:nvSpPr>
+          <p:cNvPr id="17" name="TextBox 16"/>
+          <p:cNvSpPr txBox="1"/>
+          <p:nvPr/>
+        </p:nvSpPr>
+        <p:spPr>
+          <a:xfrm>
+            <a:off x="8092440" y="3191256"/>
+            <a:ext cx="3063240" cy="274320"/>
+          </a:xfrm>
+          <a:prstGeom prst="rect">
+            <a:avLst/>
+          </a:prstGeom>
+          <a:noFill/>
+        </p:spPr>
+        <p:txBody>
+          <a:bodyPr wrap="square" anchor="t" lIns="0" rIns="0" tIns="0" bIns="0">
+            <a:noAutofit/>
+          </a:bodyPr>
+          <a:lstStyle/>
+          <a:p>
+            <a:pPr algn="l">
+              <a:spcBef>
+                <a:spcPts val="0"/>
+              </a:spcBef>
+              <a:spcAft>
+                <a:spcPts val="200"/>
+              </a:spcAft>
+            </a:pPr>
+            <a:r>
+              <a:rPr sz="1400" b="1" i="0">
+                <a:solidFill>
+                  <a:srgbClr val="156082"/>
+                </a:solidFill>
+                <a:latin typeface="Calibri"/>
+              </a:rPr>
+              <a:t>MobilityAPI (Go)</a:t>
+            </a:r>
+          </a:p>
+        </p:txBody>
+      </p:sp>
+      <p:sp>
+        <p:nvSpPr>
+          <p:cNvPr id="18" name="TextBox 17"/>
+          <p:cNvSpPr txBox="1"/>
+          <p:nvPr/>
+        </p:nvSpPr>
+        <p:spPr>
+          <a:xfrm>
+            <a:off x="8092440" y="3456432"/>
+            <a:ext cx="3063240" cy="228600"/>
+          </a:xfrm>
+          <a:prstGeom prst="rect">
+            <a:avLst/>
+          </a:prstGeom>
+          <a:noFill/>
+        </p:spPr>
+        <p:txBody>
+          <a:bodyPr wrap="square" anchor="t" lIns="0" rIns="0" tIns="0" bIns="0">
+            <a:noAutofit/>
+          </a:bodyPr>
+          <a:lstStyle/>
+          <a:p>
+            <a:pPr algn="l">
+              <a:spcBef>
+                <a:spcPts val="0"/>
+              </a:spcBef>
+              <a:spcAft>
+                <a:spcPts val="200"/>
+              </a:spcAft>
+            </a:pPr>
+            <a:r>
+              <a:rPr sz="1200" b="0" i="0">
+                <a:solidFill>
+                  <a:srgbClr val="5B6B78"/>
+                </a:solidFill>
+                <a:latin typeface="Consolas"/>
+              </a:rPr>
+              <a:t>net/http + pgxpool</a:t>
+            </a:r>
+          </a:p>
+        </p:txBody>
+      </p:sp>
+      <p:sp>
+        <p:nvSpPr>
+          <p:cNvPr id="19" name="TextBox 18"/>
+          <p:cNvSpPr txBox="1"/>
+          <p:nvPr/>
+        </p:nvSpPr>
+        <p:spPr>
+          <a:xfrm>
+            <a:off x="7909560" y="3749040"/>
+            <a:ext cx="3429000" cy="219456"/>
+          </a:xfrm>
+          <a:prstGeom prst="rect">
+            <a:avLst/>
+          </a:prstGeom>
+          <a:noFill/>
+        </p:spPr>
+        <p:txBody>
+          <a:bodyPr wrap="square" anchor="t" lIns="0" rIns="0" tIns="0" bIns="0">
+            <a:noAutofit/>
+          </a:bodyPr>
+          <a:lstStyle/>
+          <a:p>
+            <a:pPr algn="ctr">
+              <a:spcBef>
+                <a:spcPts val="0"/>
+              </a:spcBef>
+              <a:spcAft>
+                <a:spcPts val="200"/>
+              </a:spcAft>
+            </a:pPr>
+            <a:r>
+              <a:rPr sz="1200" b="1" i="0">
+                <a:solidFill>
+                  <a:srgbClr val="E97132"/>
+                </a:solidFill>
+                <a:latin typeface="Calibri"/>
+              </a:rPr>
+              <a:t>▼  SQL</a:t>
+            </a:r>
+          </a:p>
+        </p:txBody>
+      </p:sp>
+      <p:sp>
+        <p:nvSpPr>
+          <p:cNvPr id="20" name="TextBox 19"/>
+          <p:cNvSpPr txBox="1"/>
+          <p:nvPr/>
+        </p:nvSpPr>
+        <p:spPr>
+          <a:xfrm>
+            <a:off x="7909560" y="3959352"/>
+            <a:ext cx="3429000" cy="201168"/>
+          </a:xfrm>
+          <a:prstGeom prst="rect">
+            <a:avLst/>
+          </a:prstGeom>
+          <a:noFill/>
+        </p:spPr>
+        <p:txBody>
+          <a:bodyPr wrap="square" anchor="t" lIns="0" rIns="0" tIns="0" bIns="0">
+            <a:noAutofit/>
+          </a:bodyPr>
+          <a:lstStyle/>
+          <a:p>
+            <a:pPr algn="ctr">
+              <a:spcBef>
+                <a:spcPts val="0"/>
+              </a:spcBef>
+              <a:spcAft>
+                <a:spcPts val="200"/>
+              </a:spcAft>
+            </a:pPr>
+            <a:r>
+              <a:rPr sz="1200" b="0" i="0">
+                <a:solidFill>
+                  <a:srgbClr val="5B6B78"/>
+                </a:solidFill>
+                <a:latin typeface="Consolas"/>
+              </a:rPr>
+              <a:t>PostgreSQL wire · pgx</a:t>
+            </a:r>
+          </a:p>
+        </p:txBody>
+      </p:sp>
+      <p:sp>
+        <p:nvSpPr>
+          <p:cNvPr id="21" name="Rounded Rectangle 20"/>
+          <p:cNvSpPr/>
+          <p:nvPr/>
+        </p:nvSpPr>
+        <p:spPr>
+          <a:xfrm>
+            <a:off x="7909560" y="4242816"/>
+            <a:ext cx="3429000" cy="621792"/>
+          </a:xfrm>
+          <a:prstGeom prst="roundRect">
+            <a:avLst>
+              <a:gd name="adj" fmla="val 12000"/>
+            </a:avLst>
+          </a:prstGeom>
+          <a:solidFill>
+            <a:srgbClr val="FFFFFF"/>
+          </a:solidFill>
+          <a:ln w="19050">
+            <a:solidFill>
+              <a:srgbClr val="0E2841"/>
+            </a:solidFill>
+          </a:ln>
+          <a:effectLst/>
+        </p:spPr>
         <p:txBody>
           <a:bodyPr rtlCol="0" anchor="ctr"/>
           <a:lstStyle/>

--- a/MobilityAPIV5.pptx
+++ b/MobilityAPIV5.pptx
@@ -20143,7 +20143,7 @@
         <p:spPr>
           <a:xfrm>
             <a:off x="7589520" y="1627632"/>
-            <a:ext cx="4069080" cy="4224528"/>
+            <a:ext cx="4069080" cy="3566160"/>
           </a:xfrm>
           <a:prstGeom prst="roundRect">
             <a:avLst>

--- a/MobilityAPIV5.pptx
+++ b/MobilityAPIV5.pptx
@@ -30180,8 +30180,8 @@
         </p:nvSpPr>
         <p:spPr>
           <a:xfrm>
-            <a:off x="841247" y="4700016"/>
-            <a:ext cx="5486400" cy="274320"/>
+            <a:off x="841247" y="4681728"/>
+            <a:ext cx="5486400" cy="320040"/>
           </a:xfrm>
           <a:prstGeom prst="rect">
             <a:avLst/>
@@ -30203,13 +30203,13 @@
               </a:spcAft>
             </a:pPr>
             <a:r>
-              <a:rPr sz="1200" b="1" i="0">
+              <a:rPr sz="1400" b="1" i="0">
                 <a:solidFill>
                   <a:srgbClr val="156082"/>
                 </a:solidFill>
                 <a:latin typeface="Calibri"/>
               </a:rPr>
-              <a:t>NO MEOS IN THE TIER</a:t>
+              <a:t>No MEOS in the tier</a:t>
             </a:r>
           </a:p>
         </p:txBody>
@@ -32037,49 +32037,7 @@
       </p:sp>
       <p:sp>
         <p:nvSpPr>
-          <p:cNvPr id="11" name="TextBox 10"/>
-          <p:cNvSpPr txBox="1"/>
-          <p:nvPr/>
-        </p:nvSpPr>
-        <p:spPr>
-          <a:xfrm>
-            <a:off x="566928" y="5577840"/>
-            <a:ext cx="11057839" cy="365760"/>
-          </a:xfrm>
-          <a:prstGeom prst="rect">
-            <a:avLst/>
-          </a:prstGeom>
-          <a:noFill/>
-        </p:spPr>
-        <p:txBody>
-          <a:bodyPr wrap="square" anchor="t" lIns="0" rIns="0" tIns="0" bIns="0">
-            <a:noAutofit/>
-          </a:bodyPr>
-          <a:lstStyle/>
-          <a:p>
-            <a:pPr algn="ctr">
-              <a:spcBef>
-                <a:spcPts val="0"/>
-              </a:spcBef>
-              <a:spcAft>
-                <a:spcPts val="200"/>
-              </a:spcAft>
-            </a:pPr>
-            <a:r>
-              <a:rPr sz="1200" b="0" i="1">
-                <a:solidFill>
-                  <a:srgbClr val="5B6B78"/>
-                </a:solidFill>
-                <a:latin typeface="Calibri"/>
-              </a:rPr>
-              <a:t>Identical trajectory. The REST client never writes SQL or opens a database connection.</a:t>
-            </a:r>
-          </a:p>
-        </p:txBody>
-      </p:sp>
-      <p:sp>
-        <p:nvSpPr>
-          <p:cNvPr id="12" name="Rectangle 11"/>
+          <p:cNvPr id="11" name="Rectangle 10"/>
           <p:cNvSpPr/>
           <p:nvPr/>
         </p:nvSpPr>
@@ -32123,7 +32081,7 @@
       </p:sp>
       <p:sp>
         <p:nvSpPr>
-          <p:cNvPr id="13" name="TextBox 12"/>
+          <p:cNvPr id="12" name="TextBox 11"/>
           <p:cNvSpPr txBox="1"/>
           <p:nvPr/>
         </p:nvSpPr>
@@ -32165,7 +32123,7 @@
       </p:sp>
       <p:sp>
         <p:nvSpPr>
-          <p:cNvPr id="14" name="TextBox 13"/>
+          <p:cNvPr id="13" name="TextBox 12"/>
           <p:cNvSpPr txBox="1"/>
           <p:nvPr/>
         </p:nvSpPr>

--- a/MobilityAPIV5.pptx
+++ b/MobilityAPIV5.pptx
@@ -5529,7 +5529,7 @@
         </p:nvSpPr>
         <p:spPr>
           <a:xfrm>
-            <a:off x="566928" y="2007107"/>
+            <a:off x="566928" y="1961388"/>
             <a:ext cx="640080" cy="292608"/>
           </a:xfrm>
           <a:prstGeom prst="roundRect">
@@ -5584,7 +5584,7 @@
         </p:nvSpPr>
         <p:spPr>
           <a:xfrm>
-            <a:off x="1353312" y="2002536"/>
+            <a:off x="1353312" y="1956816"/>
             <a:ext cx="10253167" cy="292608"/>
           </a:xfrm>
           <a:prstGeom prst="rect">
@@ -5626,7 +5626,7 @@
         </p:nvSpPr>
         <p:spPr>
           <a:xfrm>
-            <a:off x="566928" y="2418588"/>
+            <a:off x="566928" y="2327148"/>
             <a:ext cx="640080" cy="292608"/>
           </a:xfrm>
           <a:prstGeom prst="roundRect">
@@ -5681,7 +5681,7 @@
         </p:nvSpPr>
         <p:spPr>
           <a:xfrm>
-            <a:off x="1280160" y="2418588"/>
+            <a:off x="1280160" y="2327148"/>
             <a:ext cx="713232" cy="292608"/>
           </a:xfrm>
           <a:prstGeom prst="roundRect">
@@ -5736,7 +5736,7 @@
         </p:nvSpPr>
         <p:spPr>
           <a:xfrm>
-            <a:off x="2139696" y="2414016"/>
+            <a:off x="2139696" y="2322576"/>
             <a:ext cx="9466783" cy="292608"/>
           </a:xfrm>
           <a:prstGeom prst="rect">
@@ -5778,7 +5778,7 @@
         </p:nvSpPr>
         <p:spPr>
           <a:xfrm>
-            <a:off x="566928" y="2830068"/>
+            <a:off x="566928" y="2692908"/>
             <a:ext cx="640080" cy="292608"/>
           </a:xfrm>
           <a:prstGeom prst="roundRect">
@@ -5833,7 +5833,7 @@
         </p:nvSpPr>
         <p:spPr>
           <a:xfrm>
-            <a:off x="1280160" y="2830068"/>
+            <a:off x="1280160" y="2692908"/>
             <a:ext cx="932688" cy="292608"/>
           </a:xfrm>
           <a:prstGeom prst="roundRect">
@@ -5888,7 +5888,7 @@
         </p:nvSpPr>
         <p:spPr>
           <a:xfrm>
-            <a:off x="2359152" y="2825496"/>
+            <a:off x="2359152" y="2688336"/>
             <a:ext cx="9247327" cy="292608"/>
           </a:xfrm>
           <a:prstGeom prst="rect">
@@ -5930,7 +5930,7 @@
         </p:nvSpPr>
         <p:spPr>
           <a:xfrm>
-            <a:off x="566928" y="3241548"/>
+            <a:off x="566928" y="3058668"/>
             <a:ext cx="640080" cy="292608"/>
           </a:xfrm>
           <a:prstGeom prst="roundRect">
@@ -5985,7 +5985,7 @@
         </p:nvSpPr>
         <p:spPr>
           <a:xfrm>
-            <a:off x="1280160" y="3241548"/>
+            <a:off x="1280160" y="3058668"/>
             <a:ext cx="713232" cy="292608"/>
           </a:xfrm>
           <a:prstGeom prst="roundRect">
@@ -6040,7 +6040,7 @@
         </p:nvSpPr>
         <p:spPr>
           <a:xfrm>
-            <a:off x="2139696" y="3236976"/>
+            <a:off x="2139696" y="3054096"/>
             <a:ext cx="9466783" cy="292608"/>
           </a:xfrm>
           <a:prstGeom prst="rect">
@@ -6082,7 +6082,7 @@
         </p:nvSpPr>
         <p:spPr>
           <a:xfrm>
-            <a:off x="566928" y="3653028"/>
+            <a:off x="566928" y="3424427"/>
             <a:ext cx="640080" cy="292608"/>
           </a:xfrm>
           <a:prstGeom prst="roundRect">
@@ -6137,7 +6137,7 @@
         </p:nvSpPr>
         <p:spPr>
           <a:xfrm>
-            <a:off x="1353312" y="3648456"/>
+            <a:off x="1353312" y="3419856"/>
             <a:ext cx="10253167" cy="292608"/>
           </a:xfrm>
           <a:prstGeom prst="rect">
@@ -6179,7 +6179,7 @@
         </p:nvSpPr>
         <p:spPr>
           <a:xfrm>
-            <a:off x="566928" y="4064508"/>
+            <a:off x="566928" y="3790187"/>
             <a:ext cx="640080" cy="292608"/>
           </a:xfrm>
           <a:prstGeom prst="roundRect">
@@ -6234,7 +6234,7 @@
         </p:nvSpPr>
         <p:spPr>
           <a:xfrm>
-            <a:off x="1353312" y="4059936"/>
+            <a:off x="1353312" y="3785615"/>
             <a:ext cx="10253167" cy="292608"/>
           </a:xfrm>
           <a:prstGeom prst="rect">
@@ -6276,7 +6276,7 @@
         </p:nvSpPr>
         <p:spPr>
           <a:xfrm>
-            <a:off x="566928" y="4475988"/>
+            <a:off x="566928" y="4155948"/>
             <a:ext cx="640080" cy="292608"/>
           </a:xfrm>
           <a:prstGeom prst="roundRect">
@@ -6331,7 +6331,7 @@
         </p:nvSpPr>
         <p:spPr>
           <a:xfrm>
-            <a:off x="1353312" y="4471416"/>
+            <a:off x="1353312" y="4151376"/>
             <a:ext cx="10253167" cy="292608"/>
           </a:xfrm>
           <a:prstGeom prst="rect">
@@ -6373,7 +6373,7 @@
         </p:nvSpPr>
         <p:spPr>
           <a:xfrm>
-            <a:off x="566928" y="4887468"/>
+            <a:off x="566928" y="4521708"/>
             <a:ext cx="640080" cy="292608"/>
           </a:xfrm>
           <a:prstGeom prst="roundRect">
@@ -6428,7 +6428,7 @@
         </p:nvSpPr>
         <p:spPr>
           <a:xfrm>
-            <a:off x="1353312" y="4882896"/>
+            <a:off x="1353312" y="4517136"/>
             <a:ext cx="10253167" cy="292608"/>
           </a:xfrm>
           <a:prstGeom prst="rect">
@@ -6470,7 +6470,7 @@
         </p:nvSpPr>
         <p:spPr>
           <a:xfrm>
-            <a:off x="566928" y="5298948"/>
+            <a:off x="566928" y="4887468"/>
             <a:ext cx="640080" cy="292608"/>
           </a:xfrm>
           <a:prstGeom prst="roundRect">
@@ -6525,7 +6525,7 @@
         </p:nvSpPr>
         <p:spPr>
           <a:xfrm>
-            <a:off x="1353312" y="5294376"/>
+            <a:off x="1353312" y="4882896"/>
             <a:ext cx="10253167" cy="292608"/>
           </a:xfrm>
           <a:prstGeom prst="rect">
@@ -6561,14 +6561,46 @@
       </p:sp>
       <p:sp>
         <p:nvSpPr>
-          <p:cNvPr id="29" name="TextBox 28"/>
+          <p:cNvPr id="29" name="Rounded Rectangle 28"/>
+          <p:cNvSpPr/>
+          <p:nvPr/>
+        </p:nvSpPr>
+        <p:spPr>
+          <a:xfrm>
+            <a:off x="566928" y="5358384"/>
+            <a:ext cx="11057839" cy="969264"/>
+          </a:xfrm>
+          <a:prstGeom prst="roundRect">
+            <a:avLst>
+              <a:gd name="adj" fmla="val 4000"/>
+            </a:avLst>
+          </a:prstGeom>
+          <a:solidFill>
+            <a:srgbClr val="F1F5F8"/>
+          </a:solidFill>
+          <a:ln>
+            <a:noFill/>
+          </a:ln>
+          <a:effectLst/>
+        </p:spPr>
+        <p:txBody>
+          <a:bodyPr rtlCol="0" anchor="ctr"/>
+          <a:lstStyle/>
+          <a:p>
+            <a:pPr algn="ctr"/>
+          </a:p>
+        </p:txBody>
+      </p:sp>
+      <p:sp>
+        <p:nvSpPr>
+          <p:cNvPr id="30" name="TextBox 29"/>
           <p:cNvSpPr txBox="1"/>
           <p:nvPr/>
         </p:nvSpPr>
         <p:spPr>
           <a:xfrm>
-            <a:off x="566928" y="5833872"/>
-            <a:ext cx="11057839" cy="640080"/>
+            <a:off x="822960" y="5449824"/>
+            <a:ext cx="10545775" cy="274320"/>
           </a:xfrm>
           <a:prstGeom prst="rect">
             <a:avLst/>
@@ -6590,20 +6622,105 @@
               </a:spcAft>
             </a:pPr>
             <a:r>
-              <a:rPr sz="1200" b="0" i="1">
-                <a:solidFill>
-                  <a:srgbClr val="5B6B78"/>
-                </a:solidFill>
-                <a:latin typeface="Calibri"/>
-              </a:rPr>
-              <a:t>Every path above is OGC API – Moving Features – Part 1: Core. acceleration is offered at the same path but returns 501 (not derivable for this motion model). Items query parameters: bbox, datetime, subtrajectory, leaf, limit, page cursor.</a:t>
-            </a:r>
-          </a:p>
-        </p:txBody>
-      </p:sp>
-      <p:sp>
-        <p:nvSpPr>
-          <p:cNvPr id="30" name="Rectangle 29"/>
+              <a:rPr sz="1200" b="1" i="0">
+                <a:solidFill>
+                  <a:srgbClr val="156082"/>
+                </a:solidFill>
+                <a:latin typeface="Calibri"/>
+              </a:rPr>
+              <a:t>Notes</a:t>
+            </a:r>
+          </a:p>
+        </p:txBody>
+      </p:sp>
+      <p:sp>
+        <p:nvSpPr>
+          <p:cNvPr id="31" name="TextBox 30"/>
+          <p:cNvSpPr txBox="1"/>
+          <p:nvPr/>
+        </p:nvSpPr>
+        <p:spPr>
+          <a:xfrm>
+            <a:off x="822960" y="5742432"/>
+            <a:ext cx="10545775" cy="530352"/>
+          </a:xfrm>
+          <a:prstGeom prst="rect">
+            <a:avLst/>
+          </a:prstGeom>
+          <a:noFill/>
+        </p:spPr>
+        <p:txBody>
+          <a:bodyPr wrap="square" lIns="0" rIns="0" tIns="0" bIns="0">
+            <a:noAutofit/>
+          </a:bodyPr>
+          <a:lstStyle/>
+          <a:p>
+            <a:pPr>
+              <a:lnSpc>
+                <a:spcPct val="106000"/>
+              </a:lnSpc>
+              <a:spcBef>
+                <a:spcPts val="0"/>
+              </a:spcBef>
+              <a:spcAft>
+                <a:spcPts val="300"/>
+              </a:spcAft>
+            </a:pPr>
+            <a:r>
+              <a:rPr sz="1200" b="1">
+                <a:solidFill>
+                  <a:srgbClr val="156082"/>
+                </a:solidFill>
+                <a:latin typeface="Calibri"/>
+              </a:rPr>
+              <a:t>▸  </a:t>
+            </a:r>
+            <a:r>
+              <a:rPr sz="1200">
+                <a:solidFill>
+                  <a:srgbClr val="1E2B36"/>
+                </a:solidFill>
+                <a:latin typeface="Calibri"/>
+              </a:rPr>
+              <a:t>Every path above is OGC API – Moving Features – Part 1: Core; acceleration returns 501 (not derivable)</a:t>
+            </a:r>
+          </a:p>
+          <a:p>
+            <a:pPr>
+              <a:lnSpc>
+                <a:spcPct val="106000"/>
+              </a:lnSpc>
+              <a:spcBef>
+                <a:spcPts val="0"/>
+              </a:spcBef>
+              <a:spcAft>
+                <a:spcPts val="300"/>
+              </a:spcAft>
+            </a:pPr>
+            <a:r>
+              <a:rPr sz="1200" b="1">
+                <a:solidFill>
+                  <a:srgbClr val="156082"/>
+                </a:solidFill>
+                <a:latin typeface="Calibri"/>
+              </a:rPr>
+              <a:t>▸  </a:t>
+            </a:r>
+            <a:r>
+              <a:rPr sz="1200">
+                <a:solidFill>
+                  <a:srgbClr val="1E2B36"/>
+                </a:solidFill>
+                <a:latin typeface="Calibri"/>
+              </a:rPr>
+              <a:t>Items query parameters: bbox, datetime, subtrajectory, leaf, limit, page cursor</a:t>
+            </a:r>
+          </a:p>
+        </p:txBody>
+      </p:sp>
+      <p:sp>
+        <p:nvSpPr>
+          <p:cNvPr id="32" name="Rectangle 31"/>
           <p:cNvSpPr/>
           <p:nvPr/>
         </p:nvSpPr>
@@ -6647,7 +6764,7 @@
       </p:sp>
       <p:sp>
         <p:nvSpPr>
-          <p:cNvPr id="31" name="TextBox 30"/>
+          <p:cNvPr id="33" name="TextBox 32"/>
           <p:cNvSpPr txBox="1"/>
           <p:nvPr/>
         </p:nvSpPr>
@@ -6689,7 +6806,7 @@
       </p:sp>
       <p:sp>
         <p:nvSpPr>
-          <p:cNvPr id="32" name="TextBox 31"/>
+          <p:cNvPr id="34" name="TextBox 33"/>
           <p:cNvSpPr txBox="1"/>
           <p:nvPr/>
         </p:nvSpPr>
@@ -16546,7 +16663,7 @@
         </p:nvSpPr>
         <p:spPr>
           <a:xfrm>
-            <a:off x="6281928" y="1801368"/>
+            <a:off x="6281928" y="1783080"/>
             <a:ext cx="932688" cy="292608"/>
           </a:xfrm>
           <a:prstGeom prst="roundRect">
@@ -16601,8 +16718,8 @@
         </p:nvSpPr>
         <p:spPr>
           <a:xfrm>
-            <a:off x="7306056" y="1783080"/>
-            <a:ext cx="4318711" cy="274320"/>
+            <a:off x="7324344" y="1773936"/>
+            <a:ext cx="4300423" cy="274320"/>
           </a:xfrm>
           <a:prstGeom prst="rect">
             <a:avLst/>
@@ -16643,7 +16760,7 @@
         </p:nvSpPr>
         <p:spPr>
           <a:xfrm>
-            <a:off x="6281928" y="2075688"/>
+            <a:off x="6281928" y="2130552"/>
             <a:ext cx="5342839" cy="274320"/>
           </a:xfrm>
           <a:prstGeom prst="rect">
@@ -18079,14 +18196,46 @@
       </p:sp>
       <p:sp>
         <p:nvSpPr>
-          <p:cNvPr id="11" name="TextBox 10"/>
+          <p:cNvPr id="11" name="Rounded Rectangle 10"/>
+          <p:cNvSpPr/>
+          <p:nvPr/>
+        </p:nvSpPr>
+        <p:spPr>
+          <a:xfrm>
+            <a:off x="6281928" y="4160520"/>
+            <a:ext cx="5342839" cy="969264"/>
+          </a:xfrm>
+          <a:prstGeom prst="roundRect">
+            <a:avLst>
+              <a:gd name="adj" fmla="val 4000"/>
+            </a:avLst>
+          </a:prstGeom>
+          <a:solidFill>
+            <a:srgbClr val="F1F5F8"/>
+          </a:solidFill>
+          <a:ln>
+            <a:noFill/>
+          </a:ln>
+          <a:effectLst/>
+        </p:spPr>
+        <p:txBody>
+          <a:bodyPr rtlCol="0" anchor="ctr"/>
+          <a:lstStyle/>
+          <a:p>
+            <a:pPr algn="ctr"/>
+          </a:p>
+        </p:txBody>
+      </p:sp>
+      <p:sp>
+        <p:nvSpPr>
+          <p:cNvPr id="12" name="TextBox 11"/>
           <p:cNvSpPr txBox="1"/>
           <p:nvPr/>
         </p:nvSpPr>
         <p:spPr>
           <a:xfrm>
-            <a:off x="6281928" y="4206240"/>
-            <a:ext cx="5342839" cy="914400"/>
+            <a:off x="6537960" y="4251959"/>
+            <a:ext cx="4830775" cy="274320"/>
           </a:xfrm>
           <a:prstGeom prst="rect">
             <a:avLst/>
@@ -18108,20 +18257,105 @@
               </a:spcAft>
             </a:pPr>
             <a:r>
-              <a:rPr sz="1200" b="0" i="1">
-                <a:solidFill>
-                  <a:srgbClr val="5B6B78"/>
-                </a:solidFill>
-                <a:latin typeface="Calibri"/>
-              </a:rPr>
-              <a:t>The temporal geometry is the trajectory itself, returned as MovingFeaturesJSON straight from asMFJSON.</a:t>
-            </a:r>
-          </a:p>
-        </p:txBody>
-      </p:sp>
-      <p:sp>
-        <p:nvSpPr>
-          <p:cNvPr id="12" name="Rectangle 11"/>
+              <a:rPr sz="1200" b="1" i="0">
+                <a:solidFill>
+                  <a:srgbClr val="156082"/>
+                </a:solidFill>
+                <a:latin typeface="Calibri"/>
+              </a:rPr>
+              <a:t>Temporal geometry</a:t>
+            </a:r>
+          </a:p>
+        </p:txBody>
+      </p:sp>
+      <p:sp>
+        <p:nvSpPr>
+          <p:cNvPr id="13" name="TextBox 12"/>
+          <p:cNvSpPr txBox="1"/>
+          <p:nvPr/>
+        </p:nvSpPr>
+        <p:spPr>
+          <a:xfrm>
+            <a:off x="6537960" y="4544568"/>
+            <a:ext cx="4830775" cy="530352"/>
+          </a:xfrm>
+          <a:prstGeom prst="rect">
+            <a:avLst/>
+          </a:prstGeom>
+          <a:noFill/>
+        </p:spPr>
+        <p:txBody>
+          <a:bodyPr wrap="square" lIns="0" rIns="0" tIns="0" bIns="0">
+            <a:noAutofit/>
+          </a:bodyPr>
+          <a:lstStyle/>
+          <a:p>
+            <a:pPr>
+              <a:lnSpc>
+                <a:spcPct val="106000"/>
+              </a:lnSpc>
+              <a:spcBef>
+                <a:spcPts val="0"/>
+              </a:spcBef>
+              <a:spcAft>
+                <a:spcPts val="300"/>
+              </a:spcAft>
+            </a:pPr>
+            <a:r>
+              <a:rPr sz="1200" b="1">
+                <a:solidFill>
+                  <a:srgbClr val="156082"/>
+                </a:solidFill>
+                <a:latin typeface="Calibri"/>
+              </a:rPr>
+              <a:t>▸  </a:t>
+            </a:r>
+            <a:r>
+              <a:rPr sz="1200">
+                <a:solidFill>
+                  <a:srgbClr val="1E2B36"/>
+                </a:solidFill>
+                <a:latin typeface="Calibri"/>
+              </a:rPr>
+              <a:t>The temporal geometry is the trajectory itself</a:t>
+            </a:r>
+          </a:p>
+          <a:p>
+            <a:pPr>
+              <a:lnSpc>
+                <a:spcPct val="106000"/>
+              </a:lnSpc>
+              <a:spcBef>
+                <a:spcPts val="0"/>
+              </a:spcBef>
+              <a:spcAft>
+                <a:spcPts val="300"/>
+              </a:spcAft>
+            </a:pPr>
+            <a:r>
+              <a:rPr sz="1200" b="1">
+                <a:solidFill>
+                  <a:srgbClr val="156082"/>
+                </a:solidFill>
+                <a:latin typeface="Calibri"/>
+              </a:rPr>
+              <a:t>▸  </a:t>
+            </a:r>
+            <a:r>
+              <a:rPr sz="1200">
+                <a:solidFill>
+                  <a:srgbClr val="1E2B36"/>
+                </a:solidFill>
+                <a:latin typeface="Calibri"/>
+              </a:rPr>
+              <a:t>Returned as MovingFeaturesJSON by asMFJSON</a:t>
+            </a:r>
+          </a:p>
+        </p:txBody>
+      </p:sp>
+      <p:sp>
+        <p:nvSpPr>
+          <p:cNvPr id="14" name="Rectangle 13"/>
           <p:cNvSpPr/>
           <p:nvPr/>
         </p:nvSpPr>
@@ -18165,7 +18399,7 @@
       </p:sp>
       <p:sp>
         <p:nvSpPr>
-          <p:cNvPr id="13" name="TextBox 12"/>
+          <p:cNvPr id="15" name="TextBox 14"/>
           <p:cNvSpPr txBox="1"/>
           <p:nvPr/>
         </p:nvSpPr>
@@ -18207,7 +18441,7 @@
       </p:sp>
       <p:sp>
         <p:nvSpPr>
-          <p:cNvPr id="14" name="TextBox 13"/>
+          <p:cNvPr id="16" name="TextBox 15"/>
           <p:cNvSpPr txBox="1"/>
           <p:nvPr/>
         </p:nvSpPr>
@@ -24804,7 +25038,7 @@
         </p:nvSpPr>
         <p:spPr>
           <a:xfrm>
-            <a:off x="4453128" y="4361688"/>
+            <a:off x="4453128" y="4389120"/>
             <a:ext cx="7171639" cy="274320"/>
           </a:xfrm>
           <a:prstGeom prst="rect">
@@ -24943,7 +25177,7 @@
         </p:nvSpPr>
         <p:spPr>
           <a:xfrm>
-            <a:off x="4453128" y="5056632"/>
+            <a:off x="4453128" y="5084064"/>
             <a:ext cx="7171639" cy="274320"/>
           </a:xfrm>
           <a:prstGeom prst="rect">
@@ -34693,14 +34927,46 @@
       </p:sp>
       <p:sp>
         <p:nvSpPr>
-          <p:cNvPr id="20" name="TextBox 19"/>
+          <p:cNvPr id="20" name="Rounded Rectangle 19"/>
+          <p:cNvSpPr/>
+          <p:nvPr/>
+        </p:nvSpPr>
+        <p:spPr>
+          <a:xfrm>
+            <a:off x="5138928" y="5376672"/>
+            <a:ext cx="6485839" cy="969264"/>
+          </a:xfrm>
+          <a:prstGeom prst="roundRect">
+            <a:avLst>
+              <a:gd name="adj" fmla="val 4000"/>
+            </a:avLst>
+          </a:prstGeom>
+          <a:solidFill>
+            <a:srgbClr val="F1F5F8"/>
+          </a:solidFill>
+          <a:ln>
+            <a:noFill/>
+          </a:ln>
+          <a:effectLst/>
+        </p:spPr>
+        <p:txBody>
+          <a:bodyPr rtlCol="0" anchor="ctr"/>
+          <a:lstStyle/>
+          <a:p>
+            <a:pPr algn="ctr"/>
+          </a:p>
+        </p:txBody>
+      </p:sp>
+      <p:sp>
+        <p:nvSpPr>
+          <p:cNvPr id="21" name="TextBox 20"/>
           <p:cNvSpPr txBox="1"/>
           <p:nvPr/>
         </p:nvSpPr>
         <p:spPr>
           <a:xfrm>
-            <a:off x="5138928" y="5669280"/>
-            <a:ext cx="6485839" cy="457200"/>
+            <a:off x="5394960" y="5468112"/>
+            <a:ext cx="5973775" cy="274320"/>
           </a:xfrm>
           <a:prstGeom prst="rect">
             <a:avLst/>
@@ -34722,20 +34988,105 @@
               </a:spcAft>
             </a:pPr>
             <a:r>
-              <a:rPr sz="1200" b="0" i="1">
-                <a:solidFill>
-                  <a:srgbClr val="5B6B78"/>
-                </a:solidFill>
-                <a:latin typeface="Calibri"/>
-              </a:rPr>
-              <a:t>Derived fields come O(1) from the tgeompoint and its inline STBOX; links are generated per request.</a:t>
-            </a:r>
-          </a:p>
-        </p:txBody>
-      </p:sp>
-      <p:sp>
-        <p:nvSpPr>
-          <p:cNvPr id="21" name="Rectangle 20"/>
+              <a:rPr sz="1200" b="1" i="0">
+                <a:solidFill>
+                  <a:srgbClr val="156082"/>
+                </a:solidFill>
+                <a:latin typeface="Calibri"/>
+              </a:rPr>
+              <a:t>How fields are provided</a:t>
+            </a:r>
+          </a:p>
+        </p:txBody>
+      </p:sp>
+      <p:sp>
+        <p:nvSpPr>
+          <p:cNvPr id="22" name="TextBox 21"/>
+          <p:cNvSpPr txBox="1"/>
+          <p:nvPr/>
+        </p:nvSpPr>
+        <p:spPr>
+          <a:xfrm>
+            <a:off x="5394960" y="5760720"/>
+            <a:ext cx="5973775" cy="530352"/>
+          </a:xfrm>
+          <a:prstGeom prst="rect">
+            <a:avLst/>
+          </a:prstGeom>
+          <a:noFill/>
+        </p:spPr>
+        <p:txBody>
+          <a:bodyPr wrap="square" lIns="0" rIns="0" tIns="0" bIns="0">
+            <a:noAutofit/>
+          </a:bodyPr>
+          <a:lstStyle/>
+          <a:p>
+            <a:pPr>
+              <a:lnSpc>
+                <a:spcPct val="106000"/>
+              </a:lnSpc>
+              <a:spcBef>
+                <a:spcPts val="0"/>
+              </a:spcBef>
+              <a:spcAft>
+                <a:spcPts val="300"/>
+              </a:spcAft>
+            </a:pPr>
+            <a:r>
+              <a:rPr sz="1200" b="1">
+                <a:solidFill>
+                  <a:srgbClr val="156082"/>
+                </a:solidFill>
+                <a:latin typeface="Calibri"/>
+              </a:rPr>
+              <a:t>▸  </a:t>
+            </a:r>
+            <a:r>
+              <a:rPr sz="1200">
+                <a:solidFill>
+                  <a:srgbClr val="1E2B36"/>
+                </a:solidFill>
+                <a:latin typeface="Calibri"/>
+              </a:rPr>
+              <a:t>Derived fields come O(1) from the tgeompoint and its inline STBOX</a:t>
+            </a:r>
+          </a:p>
+          <a:p>
+            <a:pPr>
+              <a:lnSpc>
+                <a:spcPct val="106000"/>
+              </a:lnSpc>
+              <a:spcBef>
+                <a:spcPts val="0"/>
+              </a:spcBef>
+              <a:spcAft>
+                <a:spcPts val="300"/>
+              </a:spcAft>
+            </a:pPr>
+            <a:r>
+              <a:rPr sz="1200" b="1">
+                <a:solidFill>
+                  <a:srgbClr val="156082"/>
+                </a:solidFill>
+                <a:latin typeface="Calibri"/>
+              </a:rPr>
+              <a:t>▸  </a:t>
+            </a:r>
+            <a:r>
+              <a:rPr sz="1200">
+                <a:solidFill>
+                  <a:srgbClr val="1E2B36"/>
+                </a:solidFill>
+                <a:latin typeface="Calibri"/>
+              </a:rPr>
+              <a:t>Links are generated per request</a:t>
+            </a:r>
+          </a:p>
+        </p:txBody>
+      </p:sp>
+      <p:sp>
+        <p:nvSpPr>
+          <p:cNvPr id="23" name="Rectangle 22"/>
           <p:cNvSpPr/>
           <p:nvPr/>
         </p:nvSpPr>
@@ -34779,7 +35130,7 @@
       </p:sp>
       <p:sp>
         <p:nvSpPr>
-          <p:cNvPr id="22" name="TextBox 21"/>
+          <p:cNvPr id="24" name="TextBox 23"/>
           <p:cNvSpPr txBox="1"/>
           <p:nvPr/>
         </p:nvSpPr>
@@ -34821,7 +35172,7 @@
       </p:sp>
       <p:sp>
         <p:nvSpPr>
-          <p:cNvPr id="23" name="TextBox 22"/>
+          <p:cNvPr id="25" name="TextBox 24"/>
           <p:cNvSpPr txBox="1"/>
           <p:nvPr/>
         </p:nvSpPr>
